--- a/Presentation/FutureMe_Project_Presentation.pptx
+++ b/Presentation/FutureMe_Project_Presentation.pptx
@@ -4,24 +4,27 @@
   <p:sldMasterIdLst>
     <p:sldMasterId id="2147483648" r:id="rId1"/>
   </p:sldMasterIdLst>
+  <p:notesMasterIdLst>
+    <p:notesMasterId r:id="rId17"/>
+  </p:notesMasterIdLst>
   <p:sldIdLst>
-    <p:sldId id="256" r:id="rId7"/>
-    <p:sldId id="257" r:id="rId8"/>
-    <p:sldId id="258" r:id="rId9"/>
-    <p:sldId id="259" r:id="rId10"/>
-    <p:sldId id="260" r:id="rId11"/>
-    <p:sldId id="261" r:id="rId12"/>
-    <p:sldId id="262" r:id="rId13"/>
-    <p:sldId id="263" r:id="rId14"/>
-    <p:sldId id="264" r:id="rId15"/>
-    <p:sldId id="265" r:id="rId16"/>
-    <p:sldId id="266" r:id="rId17"/>
-    <p:sldId id="267" r:id="rId18"/>
-    <p:sldId id="268" r:id="rId19"/>
-    <p:sldId id="269" r:id="rId20"/>
-    <p:sldId id="270" r:id="rId21"/>
+    <p:sldId id="256" r:id="rId2"/>
+    <p:sldId id="257" r:id="rId3"/>
+    <p:sldId id="258" r:id="rId4"/>
+    <p:sldId id="259" r:id="rId5"/>
+    <p:sldId id="260" r:id="rId6"/>
+    <p:sldId id="261" r:id="rId7"/>
+    <p:sldId id="262" r:id="rId8"/>
+    <p:sldId id="263" r:id="rId9"/>
+    <p:sldId id="264" r:id="rId10"/>
+    <p:sldId id="265" r:id="rId11"/>
+    <p:sldId id="266" r:id="rId12"/>
+    <p:sldId id="267" r:id="rId13"/>
+    <p:sldId id="268" r:id="rId14"/>
+    <p:sldId id="269" r:id="rId15"/>
+    <p:sldId id="270" r:id="rId16"/>
   </p:sldIdLst>
-  <p:sldSz cx="12191695" cy="6858000" type="screen4x3"/>
+  <p:sldSz cx="12192000" cy="6858000"/>
   <p:notesSz cx="6858000" cy="9144000"/>
   <p:defaultTextStyle>
     <a:defPPr>
@@ -118,7 +121,457 @@
       </a:defRPr>
     </a:lvl9pPr>
   </p:defaultTextStyle>
+  <p:extLst>
+    <p:ext uri="{EFAFB233-063F-42B5-8137-9DF3F51BA10A}">
+      <p15:sldGuideLst xmlns:p15="http://schemas.microsoft.com/office/powerpoint/2012/main">
+        <p15:guide id="1" orient="horz" pos="2160">
+          <p15:clr>
+            <a:srgbClr val="A4A3A4"/>
+          </p15:clr>
+        </p15:guide>
+        <p15:guide id="2" pos="2880">
+          <p15:clr>
+            <a:srgbClr val="A4A3A4"/>
+          </p15:clr>
+        </p15:guide>
+      </p15:sldGuideLst>
+    </p:ext>
+  </p:extLst>
 </p:presentation>
+</file>
+
+<file path=ppt/notesMasters/notesMaster1.xml><?xml version="1.0" encoding="utf-8"?>
+<p:notesMaster xmlns:a="http://schemas.openxmlformats.org/drawingml/2006/main" xmlns:r="http://schemas.openxmlformats.org/officeDocument/2006/relationships" xmlns:p="http://schemas.openxmlformats.org/presentationml/2006/main">
+  <p:cSld>
+    <p:bg>
+      <p:bgRef idx="1001">
+        <a:schemeClr val="bg1"/>
+      </p:bgRef>
+    </p:bg>
+    <p:spTree>
+      <p:nvGrpSpPr>
+        <p:cNvPr id="1" name=""/>
+        <p:cNvGrpSpPr/>
+        <p:nvPr/>
+      </p:nvGrpSpPr>
+      <p:grpSpPr>
+        <a:xfrm>
+          <a:off x="0" y="0"/>
+          <a:ext cx="0" cy="0"/>
+          <a:chOff x="0" y="0"/>
+          <a:chExt cx="0" cy="0"/>
+        </a:xfrm>
+      </p:grpSpPr>
+      <p:sp>
+        <p:nvSpPr>
+          <p:cNvPr id="2" name="Header Placeholder 1"/>
+          <p:cNvSpPr>
+            <a:spLocks noGrp="1"/>
+          </p:cNvSpPr>
+          <p:nvPr>
+            <p:ph type="hdr" sz="quarter"/>
+          </p:nvPr>
+        </p:nvSpPr>
+        <p:spPr>
+          <a:xfrm>
+            <a:off x="0" y="0"/>
+            <a:ext cx="2971800" cy="458788"/>
+          </a:xfrm>
+          <a:prstGeom prst="rect">
+            <a:avLst/>
+          </a:prstGeom>
+        </p:spPr>
+        <p:txBody>
+          <a:bodyPr vert="horz" lIns="91440" tIns="45720" rIns="91440" bIns="45720" rtlCol="0"/>
+          <a:lstStyle>
+            <a:lvl1pPr algn="l">
+              <a:defRPr sz="1200"/>
+            </a:lvl1pPr>
+          </a:lstStyle>
+          <a:p>
+            <a:endParaRPr lang="en-TH"/>
+          </a:p>
+        </p:txBody>
+      </p:sp>
+      <p:sp>
+        <p:nvSpPr>
+          <p:cNvPr id="3" name="Date Placeholder 2"/>
+          <p:cNvSpPr>
+            <a:spLocks noGrp="1"/>
+          </p:cNvSpPr>
+          <p:nvPr>
+            <p:ph type="dt" idx="1"/>
+          </p:nvPr>
+        </p:nvSpPr>
+        <p:spPr>
+          <a:xfrm>
+            <a:off x="3884613" y="0"/>
+            <a:ext cx="2971800" cy="458788"/>
+          </a:xfrm>
+          <a:prstGeom prst="rect">
+            <a:avLst/>
+          </a:prstGeom>
+        </p:spPr>
+        <p:txBody>
+          <a:bodyPr vert="horz" lIns="91440" tIns="45720" rIns="91440" bIns="45720" rtlCol="0"/>
+          <a:lstStyle>
+            <a:lvl1pPr algn="r">
+              <a:defRPr sz="1200"/>
+            </a:lvl1pPr>
+          </a:lstStyle>
+          <a:p>
+            <a:fld id="{BA0E8ACB-E15E-D14D-B880-F3DD54E49195}" type="datetimeFigureOut">
+              <a:rPr lang="en-TH" smtClean="0"/>
+              <a:t>31/7/2026 R</a:t>
+            </a:fld>
+            <a:endParaRPr lang="en-TH"/>
+          </a:p>
+        </p:txBody>
+      </p:sp>
+      <p:sp>
+        <p:nvSpPr>
+          <p:cNvPr id="4" name="Slide Image Placeholder 3"/>
+          <p:cNvSpPr>
+            <a:spLocks noGrp="1" noRot="1" noChangeAspect="1"/>
+          </p:cNvSpPr>
+          <p:nvPr>
+            <p:ph type="sldImg" idx="2"/>
+          </p:nvPr>
+        </p:nvSpPr>
+        <p:spPr>
+          <a:xfrm>
+            <a:off x="685800" y="1143000"/>
+            <a:ext cx="5486400" cy="3086100"/>
+          </a:xfrm>
+          <a:prstGeom prst="rect">
+            <a:avLst/>
+          </a:prstGeom>
+          <a:noFill/>
+          <a:ln w="12700">
+            <a:solidFill>
+              <a:prstClr val="black"/>
+            </a:solidFill>
+          </a:ln>
+        </p:spPr>
+        <p:txBody>
+          <a:bodyPr vert="horz" lIns="91440" tIns="45720" rIns="91440" bIns="45720" rtlCol="0" anchor="ctr"/>
+          <a:lstStyle/>
+          <a:p>
+            <a:endParaRPr lang="en-TH"/>
+          </a:p>
+        </p:txBody>
+      </p:sp>
+      <p:sp>
+        <p:nvSpPr>
+          <p:cNvPr id="5" name="Notes Placeholder 4"/>
+          <p:cNvSpPr>
+            <a:spLocks noGrp="1"/>
+          </p:cNvSpPr>
+          <p:nvPr>
+            <p:ph type="body" sz="quarter" idx="3"/>
+          </p:nvPr>
+        </p:nvSpPr>
+        <p:spPr>
+          <a:xfrm>
+            <a:off x="685800" y="4400550"/>
+            <a:ext cx="5486400" cy="3600450"/>
+          </a:xfrm>
+          <a:prstGeom prst="rect">
+            <a:avLst/>
+          </a:prstGeom>
+        </p:spPr>
+        <p:txBody>
+          <a:bodyPr vert="horz" lIns="91440" tIns="45720" rIns="91440" bIns="45720" rtlCol="0"/>
+          <a:lstStyle/>
+          <a:p>
+            <a:pPr lvl="0"/>
+            <a:r>
+              <a:rPr lang="en-US"/>
+              <a:t>Click to edit Master text styles</a:t>
+            </a:r>
+          </a:p>
+          <a:p>
+            <a:pPr lvl="1"/>
+            <a:r>
+              <a:rPr lang="en-US"/>
+              <a:t>Second level</a:t>
+            </a:r>
+          </a:p>
+          <a:p>
+            <a:pPr lvl="2"/>
+            <a:r>
+              <a:rPr lang="en-US"/>
+              <a:t>Third level</a:t>
+            </a:r>
+          </a:p>
+          <a:p>
+            <a:pPr lvl="3"/>
+            <a:r>
+              <a:rPr lang="en-US"/>
+              <a:t>Fourth level</a:t>
+            </a:r>
+          </a:p>
+          <a:p>
+            <a:pPr lvl="4"/>
+            <a:r>
+              <a:rPr lang="en-US"/>
+              <a:t>Fifth level</a:t>
+            </a:r>
+            <a:endParaRPr lang="en-TH"/>
+          </a:p>
+        </p:txBody>
+      </p:sp>
+      <p:sp>
+        <p:nvSpPr>
+          <p:cNvPr id="6" name="Footer Placeholder 5"/>
+          <p:cNvSpPr>
+            <a:spLocks noGrp="1"/>
+          </p:cNvSpPr>
+          <p:nvPr>
+            <p:ph type="ftr" sz="quarter" idx="4"/>
+          </p:nvPr>
+        </p:nvSpPr>
+        <p:spPr>
+          <a:xfrm>
+            <a:off x="0" y="8685213"/>
+            <a:ext cx="2971800" cy="458787"/>
+          </a:xfrm>
+          <a:prstGeom prst="rect">
+            <a:avLst/>
+          </a:prstGeom>
+        </p:spPr>
+        <p:txBody>
+          <a:bodyPr vert="horz" lIns="91440" tIns="45720" rIns="91440" bIns="45720" rtlCol="0" anchor="b"/>
+          <a:lstStyle>
+            <a:lvl1pPr algn="l">
+              <a:defRPr sz="1200"/>
+            </a:lvl1pPr>
+          </a:lstStyle>
+          <a:p>
+            <a:endParaRPr lang="en-TH"/>
+          </a:p>
+        </p:txBody>
+      </p:sp>
+      <p:sp>
+        <p:nvSpPr>
+          <p:cNvPr id="7" name="Slide Number Placeholder 6"/>
+          <p:cNvSpPr>
+            <a:spLocks noGrp="1"/>
+          </p:cNvSpPr>
+          <p:nvPr>
+            <p:ph type="sldNum" sz="quarter" idx="5"/>
+          </p:nvPr>
+        </p:nvSpPr>
+        <p:spPr>
+          <a:xfrm>
+            <a:off x="3884613" y="8685213"/>
+            <a:ext cx="2971800" cy="458787"/>
+          </a:xfrm>
+          <a:prstGeom prst="rect">
+            <a:avLst/>
+          </a:prstGeom>
+        </p:spPr>
+        <p:txBody>
+          <a:bodyPr vert="horz" lIns="91440" tIns="45720" rIns="91440" bIns="45720" rtlCol="0" anchor="b"/>
+          <a:lstStyle>
+            <a:lvl1pPr algn="r">
+              <a:defRPr sz="1200"/>
+            </a:lvl1pPr>
+          </a:lstStyle>
+          <a:p>
+            <a:fld id="{AA64EDD8-97F7-F743-8D90-743F9A54AECB}" type="slidenum">
+              <a:rPr lang="en-TH" smtClean="0"/>
+              <a:t>‹#›</a:t>
+            </a:fld>
+            <a:endParaRPr lang="en-TH"/>
+          </a:p>
+        </p:txBody>
+      </p:sp>
+    </p:spTree>
+    <p:extLst>
+      <p:ext uri="{BB962C8B-B14F-4D97-AF65-F5344CB8AC3E}">
+        <p14:creationId xmlns:p14="http://schemas.microsoft.com/office/powerpoint/2010/main" val="3311609724"/>
+      </p:ext>
+    </p:extLst>
+  </p:cSld>
+  <p:clrMap bg1="lt1" tx1="dk1" bg2="lt2" tx2="dk2" accent1="accent1" accent2="accent2" accent3="accent3" accent4="accent4" accent5="accent5" accent6="accent6" hlink="hlink" folHlink="folHlink"/>
+  <p:notesStyle>
+    <a:lvl1pPr marL="0" algn="l" defTabSz="914400" rtl="0" eaLnBrk="1" latinLnBrk="0" hangingPunct="1">
+      <a:defRPr sz="1200" kern="1200">
+        <a:solidFill>
+          <a:schemeClr val="tx1"/>
+        </a:solidFill>
+        <a:latin typeface="+mn-lt"/>
+        <a:ea typeface="+mn-ea"/>
+        <a:cs typeface="+mn-cs"/>
+      </a:defRPr>
+    </a:lvl1pPr>
+    <a:lvl2pPr marL="457200" algn="l" defTabSz="914400" rtl="0" eaLnBrk="1" latinLnBrk="0" hangingPunct="1">
+      <a:defRPr sz="1200" kern="1200">
+        <a:solidFill>
+          <a:schemeClr val="tx1"/>
+        </a:solidFill>
+        <a:latin typeface="+mn-lt"/>
+        <a:ea typeface="+mn-ea"/>
+        <a:cs typeface="+mn-cs"/>
+      </a:defRPr>
+    </a:lvl2pPr>
+    <a:lvl3pPr marL="914400" algn="l" defTabSz="914400" rtl="0" eaLnBrk="1" latinLnBrk="0" hangingPunct="1">
+      <a:defRPr sz="1200" kern="1200">
+        <a:solidFill>
+          <a:schemeClr val="tx1"/>
+        </a:solidFill>
+        <a:latin typeface="+mn-lt"/>
+        <a:ea typeface="+mn-ea"/>
+        <a:cs typeface="+mn-cs"/>
+      </a:defRPr>
+    </a:lvl3pPr>
+    <a:lvl4pPr marL="1371600" algn="l" defTabSz="914400" rtl="0" eaLnBrk="1" latinLnBrk="0" hangingPunct="1">
+      <a:defRPr sz="1200" kern="1200">
+        <a:solidFill>
+          <a:schemeClr val="tx1"/>
+        </a:solidFill>
+        <a:latin typeface="+mn-lt"/>
+        <a:ea typeface="+mn-ea"/>
+        <a:cs typeface="+mn-cs"/>
+      </a:defRPr>
+    </a:lvl4pPr>
+    <a:lvl5pPr marL="1828800" algn="l" defTabSz="914400" rtl="0" eaLnBrk="1" latinLnBrk="0" hangingPunct="1">
+      <a:defRPr sz="1200" kern="1200">
+        <a:solidFill>
+          <a:schemeClr val="tx1"/>
+        </a:solidFill>
+        <a:latin typeface="+mn-lt"/>
+        <a:ea typeface="+mn-ea"/>
+        <a:cs typeface="+mn-cs"/>
+      </a:defRPr>
+    </a:lvl5pPr>
+    <a:lvl6pPr marL="2286000" algn="l" defTabSz="914400" rtl="0" eaLnBrk="1" latinLnBrk="0" hangingPunct="1">
+      <a:defRPr sz="1200" kern="1200">
+        <a:solidFill>
+          <a:schemeClr val="tx1"/>
+        </a:solidFill>
+        <a:latin typeface="+mn-lt"/>
+        <a:ea typeface="+mn-ea"/>
+        <a:cs typeface="+mn-cs"/>
+      </a:defRPr>
+    </a:lvl6pPr>
+    <a:lvl7pPr marL="2743200" algn="l" defTabSz="914400" rtl="0" eaLnBrk="1" latinLnBrk="0" hangingPunct="1">
+      <a:defRPr sz="1200" kern="1200">
+        <a:solidFill>
+          <a:schemeClr val="tx1"/>
+        </a:solidFill>
+        <a:latin typeface="+mn-lt"/>
+        <a:ea typeface="+mn-ea"/>
+        <a:cs typeface="+mn-cs"/>
+      </a:defRPr>
+    </a:lvl7pPr>
+    <a:lvl8pPr marL="3200400" algn="l" defTabSz="914400" rtl="0" eaLnBrk="1" latinLnBrk="0" hangingPunct="1">
+      <a:defRPr sz="1200" kern="1200">
+        <a:solidFill>
+          <a:schemeClr val="tx1"/>
+        </a:solidFill>
+        <a:latin typeface="+mn-lt"/>
+        <a:ea typeface="+mn-ea"/>
+        <a:cs typeface="+mn-cs"/>
+      </a:defRPr>
+    </a:lvl8pPr>
+    <a:lvl9pPr marL="3657600" algn="l" defTabSz="914400" rtl="0" eaLnBrk="1" latinLnBrk="0" hangingPunct="1">
+      <a:defRPr sz="1200" kern="1200">
+        <a:solidFill>
+          <a:schemeClr val="tx1"/>
+        </a:solidFill>
+        <a:latin typeface="+mn-lt"/>
+        <a:ea typeface="+mn-ea"/>
+        <a:cs typeface="+mn-cs"/>
+      </a:defRPr>
+    </a:lvl9pPr>
+  </p:notesStyle>
+</p:notesMaster>
+</file>
+
+<file path=ppt/notesSlides/notesSlide1.xml><?xml version="1.0" encoding="utf-8"?>
+<p:notes xmlns:a="http://schemas.openxmlformats.org/drawingml/2006/main" xmlns:r="http://schemas.openxmlformats.org/officeDocument/2006/relationships" xmlns:p="http://schemas.openxmlformats.org/presentationml/2006/main">
+  <p:cSld>
+    <p:spTree>
+      <p:nvGrpSpPr>
+        <p:cNvPr id="1" name=""/>
+        <p:cNvGrpSpPr/>
+        <p:nvPr/>
+      </p:nvGrpSpPr>
+      <p:grpSpPr>
+        <a:xfrm>
+          <a:off x="0" y="0"/>
+          <a:ext cx="0" cy="0"/>
+          <a:chOff x="0" y="0"/>
+          <a:chExt cx="0" cy="0"/>
+        </a:xfrm>
+      </p:grpSpPr>
+      <p:sp>
+        <p:nvSpPr>
+          <p:cNvPr id="2" name="Slide Image Placeholder 1"/>
+          <p:cNvSpPr>
+            <a:spLocks noGrp="1" noRot="1" noChangeAspect="1"/>
+          </p:cNvSpPr>
+          <p:nvPr>
+            <p:ph type="sldImg"/>
+          </p:nvPr>
+        </p:nvSpPr>
+        <p:spPr/>
+      </p:sp>
+      <p:sp>
+        <p:nvSpPr>
+          <p:cNvPr id="3" name="Notes Placeholder 2"/>
+          <p:cNvSpPr>
+            <a:spLocks noGrp="1"/>
+          </p:cNvSpPr>
+          <p:nvPr>
+            <p:ph type="body" idx="1"/>
+          </p:nvPr>
+        </p:nvSpPr>
+        <p:spPr/>
+        <p:txBody>
+          <a:bodyPr/>
+          <a:lstStyle/>
+          <a:p>
+            <a:endParaRPr lang="en-TH" dirty="0"/>
+          </a:p>
+        </p:txBody>
+      </p:sp>
+      <p:sp>
+        <p:nvSpPr>
+          <p:cNvPr id="4" name="Slide Number Placeholder 3"/>
+          <p:cNvSpPr>
+            <a:spLocks noGrp="1"/>
+          </p:cNvSpPr>
+          <p:nvPr>
+            <p:ph type="sldNum" sz="quarter" idx="5"/>
+          </p:nvPr>
+        </p:nvSpPr>
+        <p:spPr/>
+        <p:txBody>
+          <a:bodyPr/>
+          <a:lstStyle/>
+          <a:p>
+            <a:fld id="{AA64EDD8-97F7-F743-8D90-743F9A54AECB}" type="slidenum">
+              <a:rPr lang="en-TH" smtClean="0"/>
+              <a:t>1</a:t>
+            </a:fld>
+            <a:endParaRPr lang="en-TH"/>
+          </a:p>
+        </p:txBody>
+      </p:sp>
+    </p:spTree>
+    <p:extLst>
+      <p:ext uri="{BB962C8B-B14F-4D97-AF65-F5344CB8AC3E}">
+        <p14:creationId xmlns:p14="http://schemas.microsoft.com/office/powerpoint/2010/main" val="516739236"/>
+      </p:ext>
+    </p:extLst>
+  </p:cSld>
+  <p:clrMapOvr>
+    <a:masterClrMapping/>
+  </p:clrMapOvr>
+</p:notes>
 </file>
 
 <file path=ppt/slideLayouts/slideLayout1.xml><?xml version="1.0" encoding="utf-8"?>
@@ -159,10 +612,9 @@
           <a:lstStyle/>
           <a:p>
             <a:r>
-              <a:rPr lang="en-US" smtClean="0"/>
+              <a:rPr lang="en-US"/>
               <a:t>Click to edit Master title style</a:t>
             </a:r>
-            <a:endParaRPr lang="en-US"/>
           </a:p>
         </p:txBody>
       </p:sp>
@@ -278,10 +730,9 @@
           </a:lstStyle>
           <a:p>
             <a:r>
-              <a:rPr lang="en-US" smtClean="0"/>
+              <a:rPr lang="en-US"/>
               <a:t>Click to edit Master subtitle style</a:t>
             </a:r>
-            <a:endParaRPr lang="en-US"/>
           </a:p>
         </p:txBody>
       </p:sp>
@@ -302,7 +753,7 @@
           <a:p>
             <a:fld id="{5BCAD085-E8A6-8845-BD4E-CB4CCA059FC4}" type="datetimeFigureOut">
               <a:rPr lang="en-US" smtClean="0"/>
-              <a:t>1/27/13</a:t>
+              <a:t>7/31/26</a:t>
             </a:fld>
             <a:endParaRPr lang="en-US"/>
           </a:p>
@@ -396,10 +847,9 @@
           <a:lstStyle/>
           <a:p>
             <a:r>
-              <a:rPr lang="en-US" smtClean="0"/>
+              <a:rPr lang="en-US"/>
               <a:t>Click to edit Master title style</a:t>
             </a:r>
-            <a:endParaRPr lang="en-US"/>
           </a:p>
         </p:txBody>
       </p:sp>
@@ -420,38 +870,37 @@
           <a:p>
             <a:pPr lvl="0"/>
             <a:r>
-              <a:rPr lang="en-US" smtClean="0"/>
+              <a:rPr lang="en-US"/>
               <a:t>Click to edit Master text styles</a:t>
             </a:r>
           </a:p>
           <a:p>
             <a:pPr lvl="1"/>
             <a:r>
-              <a:rPr lang="en-US" smtClean="0"/>
+              <a:rPr lang="en-US"/>
               <a:t>Second level</a:t>
             </a:r>
           </a:p>
           <a:p>
             <a:pPr lvl="2"/>
             <a:r>
-              <a:rPr lang="en-US" smtClean="0"/>
+              <a:rPr lang="en-US"/>
               <a:t>Third level</a:t>
             </a:r>
           </a:p>
           <a:p>
             <a:pPr lvl="3"/>
             <a:r>
-              <a:rPr lang="en-US" smtClean="0"/>
+              <a:rPr lang="en-US"/>
               <a:t>Fourth level</a:t>
             </a:r>
           </a:p>
           <a:p>
             <a:pPr lvl="4"/>
             <a:r>
-              <a:rPr lang="en-US" smtClean="0"/>
+              <a:rPr lang="en-US"/>
               <a:t>Fifth level</a:t>
             </a:r>
-            <a:endParaRPr lang="en-US"/>
           </a:p>
         </p:txBody>
       </p:sp>
@@ -472,7 +921,7 @@
           <a:p>
             <a:fld id="{5BCAD085-E8A6-8845-BD4E-CB4CCA059FC4}" type="datetimeFigureOut">
               <a:rPr lang="en-US" smtClean="0"/>
-              <a:t>1/27/13</a:t>
+              <a:t>7/31/26</a:t>
             </a:fld>
             <a:endParaRPr lang="en-US"/>
           </a:p>
@@ -571,10 +1020,9 @@
           <a:lstStyle/>
           <a:p>
             <a:r>
-              <a:rPr lang="en-US" smtClean="0"/>
+              <a:rPr lang="en-US"/>
               <a:t>Click to edit Master title style</a:t>
             </a:r>
-            <a:endParaRPr lang="en-US"/>
           </a:p>
         </p:txBody>
       </p:sp>
@@ -600,38 +1048,37 @@
           <a:p>
             <a:pPr lvl="0"/>
             <a:r>
-              <a:rPr lang="en-US" smtClean="0"/>
+              <a:rPr lang="en-US"/>
               <a:t>Click to edit Master text styles</a:t>
             </a:r>
           </a:p>
           <a:p>
             <a:pPr lvl="1"/>
             <a:r>
-              <a:rPr lang="en-US" smtClean="0"/>
+              <a:rPr lang="en-US"/>
               <a:t>Second level</a:t>
             </a:r>
           </a:p>
           <a:p>
             <a:pPr lvl="2"/>
             <a:r>
-              <a:rPr lang="en-US" smtClean="0"/>
+              <a:rPr lang="en-US"/>
               <a:t>Third level</a:t>
             </a:r>
           </a:p>
           <a:p>
             <a:pPr lvl="3"/>
             <a:r>
-              <a:rPr lang="en-US" smtClean="0"/>
+              <a:rPr lang="en-US"/>
               <a:t>Fourth level</a:t>
             </a:r>
           </a:p>
           <a:p>
             <a:pPr lvl="4"/>
             <a:r>
-              <a:rPr lang="en-US" smtClean="0"/>
+              <a:rPr lang="en-US"/>
               <a:t>Fifth level</a:t>
             </a:r>
-            <a:endParaRPr lang="en-US"/>
           </a:p>
         </p:txBody>
       </p:sp>
@@ -652,7 +1099,7 @@
           <a:p>
             <a:fld id="{5BCAD085-E8A6-8845-BD4E-CB4CCA059FC4}" type="datetimeFigureOut">
               <a:rPr lang="en-US" smtClean="0"/>
-              <a:t>1/27/13</a:t>
+              <a:t>7/31/26</a:t>
             </a:fld>
             <a:endParaRPr lang="en-US"/>
           </a:p>
@@ -746,10 +1193,9 @@
           <a:lstStyle/>
           <a:p>
             <a:r>
-              <a:rPr lang="en-US" smtClean="0"/>
+              <a:rPr lang="en-US"/>
               <a:t>Click to edit Master title style</a:t>
             </a:r>
-            <a:endParaRPr lang="en-US"/>
           </a:p>
         </p:txBody>
       </p:sp>
@@ -770,38 +1216,37 @@
           <a:p>
             <a:pPr lvl="0"/>
             <a:r>
-              <a:rPr lang="en-US" smtClean="0"/>
+              <a:rPr lang="en-US"/>
               <a:t>Click to edit Master text styles</a:t>
             </a:r>
           </a:p>
           <a:p>
             <a:pPr lvl="1"/>
             <a:r>
-              <a:rPr lang="en-US" smtClean="0"/>
+              <a:rPr lang="en-US"/>
               <a:t>Second level</a:t>
             </a:r>
           </a:p>
           <a:p>
             <a:pPr lvl="2"/>
             <a:r>
-              <a:rPr lang="en-US" smtClean="0"/>
+              <a:rPr lang="en-US"/>
               <a:t>Third level</a:t>
             </a:r>
           </a:p>
           <a:p>
             <a:pPr lvl="3"/>
             <a:r>
-              <a:rPr lang="en-US" smtClean="0"/>
+              <a:rPr lang="en-US"/>
               <a:t>Fourth level</a:t>
             </a:r>
           </a:p>
           <a:p>
             <a:pPr lvl="4"/>
             <a:r>
-              <a:rPr lang="en-US" smtClean="0"/>
+              <a:rPr lang="en-US"/>
               <a:t>Fifth level</a:t>
             </a:r>
-            <a:endParaRPr lang="en-US"/>
           </a:p>
         </p:txBody>
       </p:sp>
@@ -822,7 +1267,7 @@
           <a:p>
             <a:fld id="{5BCAD085-E8A6-8845-BD4E-CB4CCA059FC4}" type="datetimeFigureOut">
               <a:rPr lang="en-US" smtClean="0"/>
-              <a:t>1/27/13</a:t>
+              <a:t>7/31/26</a:t>
             </a:fld>
             <a:endParaRPr lang="en-US"/>
           </a:p>
@@ -925,10 +1370,9 @@
           </a:lstStyle>
           <a:p>
             <a:r>
-              <a:rPr lang="en-US" smtClean="0"/>
+              <a:rPr lang="en-US"/>
               <a:t>Click to edit Master title style</a:t>
             </a:r>
-            <a:endParaRPr lang="en-US"/>
           </a:p>
         </p:txBody>
       </p:sp>
@@ -1045,7 +1489,7 @@
           <a:p>
             <a:pPr lvl="0"/>
             <a:r>
-              <a:rPr lang="en-US" smtClean="0"/>
+              <a:rPr lang="en-US"/>
               <a:t>Click to edit Master text styles</a:t>
             </a:r>
           </a:p>
@@ -1068,7 +1512,7 @@
           <a:p>
             <a:fld id="{5BCAD085-E8A6-8845-BD4E-CB4CCA059FC4}" type="datetimeFigureOut">
               <a:rPr lang="en-US" smtClean="0"/>
-              <a:t>1/27/13</a:t>
+              <a:t>7/31/26</a:t>
             </a:fld>
             <a:endParaRPr lang="en-US"/>
           </a:p>
@@ -1162,10 +1606,9 @@
           <a:lstStyle/>
           <a:p>
             <a:r>
-              <a:rPr lang="en-US" smtClean="0"/>
+              <a:rPr lang="en-US"/>
               <a:t>Click to edit Master title style</a:t>
             </a:r>
-            <a:endParaRPr lang="en-US"/>
           </a:p>
         </p:txBody>
       </p:sp>
@@ -1219,38 +1662,37 @@
           <a:p>
             <a:pPr lvl="0"/>
             <a:r>
-              <a:rPr lang="en-US" smtClean="0"/>
+              <a:rPr lang="en-US"/>
               <a:t>Click to edit Master text styles</a:t>
             </a:r>
           </a:p>
           <a:p>
             <a:pPr lvl="1"/>
             <a:r>
-              <a:rPr lang="en-US" smtClean="0"/>
+              <a:rPr lang="en-US"/>
               <a:t>Second level</a:t>
             </a:r>
           </a:p>
           <a:p>
             <a:pPr lvl="2"/>
             <a:r>
-              <a:rPr lang="en-US" smtClean="0"/>
+              <a:rPr lang="en-US"/>
               <a:t>Third level</a:t>
             </a:r>
           </a:p>
           <a:p>
             <a:pPr lvl="3"/>
             <a:r>
-              <a:rPr lang="en-US" smtClean="0"/>
+              <a:rPr lang="en-US"/>
               <a:t>Fourth level</a:t>
             </a:r>
           </a:p>
           <a:p>
             <a:pPr lvl="4"/>
             <a:r>
-              <a:rPr lang="en-US" smtClean="0"/>
+              <a:rPr lang="en-US"/>
               <a:t>Fifth level</a:t>
             </a:r>
-            <a:endParaRPr lang="en-US"/>
           </a:p>
         </p:txBody>
       </p:sp>
@@ -1304,38 +1746,37 @@
           <a:p>
             <a:pPr lvl="0"/>
             <a:r>
-              <a:rPr lang="en-US" smtClean="0"/>
+              <a:rPr lang="en-US"/>
               <a:t>Click to edit Master text styles</a:t>
             </a:r>
           </a:p>
           <a:p>
             <a:pPr lvl="1"/>
             <a:r>
-              <a:rPr lang="en-US" smtClean="0"/>
+              <a:rPr lang="en-US"/>
               <a:t>Second level</a:t>
             </a:r>
           </a:p>
           <a:p>
             <a:pPr lvl="2"/>
             <a:r>
-              <a:rPr lang="en-US" smtClean="0"/>
+              <a:rPr lang="en-US"/>
               <a:t>Third level</a:t>
             </a:r>
           </a:p>
           <a:p>
             <a:pPr lvl="3"/>
             <a:r>
-              <a:rPr lang="en-US" smtClean="0"/>
+              <a:rPr lang="en-US"/>
               <a:t>Fourth level</a:t>
             </a:r>
           </a:p>
           <a:p>
             <a:pPr lvl="4"/>
             <a:r>
-              <a:rPr lang="en-US" smtClean="0"/>
+              <a:rPr lang="en-US"/>
               <a:t>Fifth level</a:t>
             </a:r>
-            <a:endParaRPr lang="en-US"/>
           </a:p>
         </p:txBody>
       </p:sp>
@@ -1356,7 +1797,7 @@
           <a:p>
             <a:fld id="{5BCAD085-E8A6-8845-BD4E-CB4CCA059FC4}" type="datetimeFigureOut">
               <a:rPr lang="en-US" smtClean="0"/>
-              <a:t>1/27/13</a:t>
+              <a:t>7/31/26</a:t>
             </a:fld>
             <a:endParaRPr lang="en-US"/>
           </a:p>
@@ -1454,10 +1895,9 @@
           </a:lstStyle>
           <a:p>
             <a:r>
-              <a:rPr lang="en-US" smtClean="0"/>
+              <a:rPr lang="en-US"/>
               <a:t>Click to edit Master title style</a:t>
             </a:r>
-            <a:endParaRPr lang="en-US"/>
           </a:p>
         </p:txBody>
       </p:sp>
@@ -1520,7 +1960,7 @@
           <a:p>
             <a:pPr lvl="0"/>
             <a:r>
-              <a:rPr lang="en-US" smtClean="0"/>
+              <a:rPr lang="en-US"/>
               <a:t>Click to edit Master text styles</a:t>
             </a:r>
           </a:p>
@@ -1576,38 +2016,37 @@
           <a:p>
             <a:pPr lvl="0"/>
             <a:r>
-              <a:rPr lang="en-US" smtClean="0"/>
+              <a:rPr lang="en-US"/>
               <a:t>Click to edit Master text styles</a:t>
             </a:r>
           </a:p>
           <a:p>
             <a:pPr lvl="1"/>
             <a:r>
-              <a:rPr lang="en-US" smtClean="0"/>
+              <a:rPr lang="en-US"/>
               <a:t>Second level</a:t>
             </a:r>
           </a:p>
           <a:p>
             <a:pPr lvl="2"/>
             <a:r>
-              <a:rPr lang="en-US" smtClean="0"/>
+              <a:rPr lang="en-US"/>
               <a:t>Third level</a:t>
             </a:r>
           </a:p>
           <a:p>
             <a:pPr lvl="3"/>
             <a:r>
-              <a:rPr lang="en-US" smtClean="0"/>
+              <a:rPr lang="en-US"/>
               <a:t>Fourth level</a:t>
             </a:r>
           </a:p>
           <a:p>
             <a:pPr lvl="4"/>
             <a:r>
-              <a:rPr lang="en-US" smtClean="0"/>
+              <a:rPr lang="en-US"/>
               <a:t>Fifth level</a:t>
             </a:r>
-            <a:endParaRPr lang="en-US"/>
           </a:p>
         </p:txBody>
       </p:sp>
@@ -1670,7 +2109,7 @@
           <a:p>
             <a:pPr lvl="0"/>
             <a:r>
-              <a:rPr lang="en-US" smtClean="0"/>
+              <a:rPr lang="en-US"/>
               <a:t>Click to edit Master text styles</a:t>
             </a:r>
           </a:p>
@@ -1726,38 +2165,37 @@
           <a:p>
             <a:pPr lvl="0"/>
             <a:r>
-              <a:rPr lang="en-US" smtClean="0"/>
+              <a:rPr lang="en-US"/>
               <a:t>Click to edit Master text styles</a:t>
             </a:r>
           </a:p>
           <a:p>
             <a:pPr lvl="1"/>
             <a:r>
-              <a:rPr lang="en-US" smtClean="0"/>
+              <a:rPr lang="en-US"/>
               <a:t>Second level</a:t>
             </a:r>
           </a:p>
           <a:p>
             <a:pPr lvl="2"/>
             <a:r>
-              <a:rPr lang="en-US" smtClean="0"/>
+              <a:rPr lang="en-US"/>
               <a:t>Third level</a:t>
             </a:r>
           </a:p>
           <a:p>
             <a:pPr lvl="3"/>
             <a:r>
-              <a:rPr lang="en-US" smtClean="0"/>
+              <a:rPr lang="en-US"/>
               <a:t>Fourth level</a:t>
             </a:r>
           </a:p>
           <a:p>
             <a:pPr lvl="4"/>
             <a:r>
-              <a:rPr lang="en-US" smtClean="0"/>
+              <a:rPr lang="en-US"/>
               <a:t>Fifth level</a:t>
             </a:r>
-            <a:endParaRPr lang="en-US"/>
           </a:p>
         </p:txBody>
       </p:sp>
@@ -1778,7 +2216,7 @@
           <a:p>
             <a:fld id="{5BCAD085-E8A6-8845-BD4E-CB4CCA059FC4}" type="datetimeFigureOut">
               <a:rPr lang="en-US" smtClean="0"/>
-              <a:t>1/27/13</a:t>
+              <a:t>7/31/26</a:t>
             </a:fld>
             <a:endParaRPr lang="en-US"/>
           </a:p>
@@ -1872,10 +2310,9 @@
           <a:lstStyle/>
           <a:p>
             <a:r>
-              <a:rPr lang="en-US" smtClean="0"/>
+              <a:rPr lang="en-US"/>
               <a:t>Click to edit Master title style</a:t>
             </a:r>
-            <a:endParaRPr lang="en-US"/>
           </a:p>
         </p:txBody>
       </p:sp>
@@ -1896,7 +2333,7 @@
           <a:p>
             <a:fld id="{5BCAD085-E8A6-8845-BD4E-CB4CCA059FC4}" type="datetimeFigureOut">
               <a:rPr lang="en-US" smtClean="0"/>
-              <a:t>1/27/13</a:t>
+              <a:t>7/31/26</a:t>
             </a:fld>
             <a:endParaRPr lang="en-US"/>
           </a:p>
@@ -1991,7 +2428,7 @@
           <a:p>
             <a:fld id="{5BCAD085-E8A6-8845-BD4E-CB4CCA059FC4}" type="datetimeFigureOut">
               <a:rPr lang="en-US" smtClean="0"/>
-              <a:t>1/27/13</a:t>
+              <a:t>7/31/26</a:t>
             </a:fld>
             <a:endParaRPr lang="en-US"/>
           </a:p>
@@ -2094,10 +2531,9 @@
           </a:lstStyle>
           <a:p>
             <a:r>
-              <a:rPr lang="en-US" smtClean="0"/>
+              <a:rPr lang="en-US"/>
               <a:t>Click to edit Master title style</a:t>
             </a:r>
-            <a:endParaRPr lang="en-US"/>
           </a:p>
         </p:txBody>
       </p:sp>
@@ -2151,38 +2587,37 @@
           <a:p>
             <a:pPr lvl="0"/>
             <a:r>
-              <a:rPr lang="en-US" smtClean="0"/>
+              <a:rPr lang="en-US"/>
               <a:t>Click to edit Master text styles</a:t>
             </a:r>
           </a:p>
           <a:p>
             <a:pPr lvl="1"/>
             <a:r>
-              <a:rPr lang="en-US" smtClean="0"/>
+              <a:rPr lang="en-US"/>
               <a:t>Second level</a:t>
             </a:r>
           </a:p>
           <a:p>
             <a:pPr lvl="2"/>
             <a:r>
-              <a:rPr lang="en-US" smtClean="0"/>
+              <a:rPr lang="en-US"/>
               <a:t>Third level</a:t>
             </a:r>
           </a:p>
           <a:p>
             <a:pPr lvl="3"/>
             <a:r>
-              <a:rPr lang="en-US" smtClean="0"/>
+              <a:rPr lang="en-US"/>
               <a:t>Fourth level</a:t>
             </a:r>
           </a:p>
           <a:p>
             <a:pPr lvl="4"/>
             <a:r>
-              <a:rPr lang="en-US" smtClean="0"/>
+              <a:rPr lang="en-US"/>
               <a:t>Fifth level</a:t>
             </a:r>
-            <a:endParaRPr lang="en-US"/>
           </a:p>
         </p:txBody>
       </p:sp>
@@ -2245,7 +2680,7 @@
           <a:p>
             <a:pPr lvl="0"/>
             <a:r>
-              <a:rPr lang="en-US" smtClean="0"/>
+              <a:rPr lang="en-US"/>
               <a:t>Click to edit Master text styles</a:t>
             </a:r>
           </a:p>
@@ -2268,7 +2703,7 @@
           <a:p>
             <a:fld id="{5BCAD085-E8A6-8845-BD4E-CB4CCA059FC4}" type="datetimeFigureOut">
               <a:rPr lang="en-US" smtClean="0"/>
-              <a:t>1/27/13</a:t>
+              <a:t>7/31/26</a:t>
             </a:fld>
             <a:endParaRPr lang="en-US"/>
           </a:p>
@@ -2371,10 +2806,9 @@
           </a:lstStyle>
           <a:p>
             <a:r>
-              <a:rPr lang="en-US" smtClean="0"/>
+              <a:rPr lang="en-US"/>
               <a:t>Click to edit Master title style</a:t>
             </a:r>
-            <a:endParaRPr lang="en-US"/>
           </a:p>
         </p:txBody>
       </p:sp>
@@ -2498,7 +2932,7 @@
           <a:p>
             <a:pPr lvl="0"/>
             <a:r>
-              <a:rPr lang="en-US" smtClean="0"/>
+              <a:rPr lang="en-US"/>
               <a:t>Click to edit Master text styles</a:t>
             </a:r>
           </a:p>
@@ -2521,7 +2955,7 @@
           <a:p>
             <a:fld id="{5BCAD085-E8A6-8845-BD4E-CB4CCA059FC4}" type="datetimeFigureOut">
               <a:rPr lang="en-US" smtClean="0"/>
-              <a:t>1/27/13</a:t>
+              <a:t>7/31/26</a:t>
             </a:fld>
             <a:endParaRPr lang="en-US"/>
           </a:p>
@@ -2630,10 +3064,9 @@
           <a:lstStyle/>
           <a:p>
             <a:r>
-              <a:rPr lang="en-US" smtClean="0"/>
+              <a:rPr lang="en-US"/>
               <a:t>Click to edit Master title style</a:t>
             </a:r>
-            <a:endParaRPr lang="en-US"/>
           </a:p>
         </p:txBody>
       </p:sp>
@@ -2664,38 +3097,37 @@
           <a:p>
             <a:pPr lvl="0"/>
             <a:r>
-              <a:rPr lang="en-US" smtClean="0"/>
+              <a:rPr lang="en-US"/>
               <a:t>Click to edit Master text styles</a:t>
             </a:r>
           </a:p>
           <a:p>
             <a:pPr lvl="1"/>
             <a:r>
-              <a:rPr lang="en-US" smtClean="0"/>
+              <a:rPr lang="en-US"/>
               <a:t>Second level</a:t>
             </a:r>
           </a:p>
           <a:p>
             <a:pPr lvl="2"/>
             <a:r>
-              <a:rPr lang="en-US" smtClean="0"/>
+              <a:rPr lang="en-US"/>
               <a:t>Third level</a:t>
             </a:r>
           </a:p>
           <a:p>
             <a:pPr lvl="3"/>
             <a:r>
-              <a:rPr lang="en-US" smtClean="0"/>
+              <a:rPr lang="en-US"/>
               <a:t>Fourth level</a:t>
             </a:r>
           </a:p>
           <a:p>
             <a:pPr lvl="4"/>
             <a:r>
-              <a:rPr lang="en-US" smtClean="0"/>
+              <a:rPr lang="en-US"/>
               <a:t>Fifth level</a:t>
             </a:r>
-            <a:endParaRPr lang="en-US"/>
           </a:p>
         </p:txBody>
       </p:sp>
@@ -2734,7 +3166,7 @@
           <a:p>
             <a:fld id="{5BCAD085-E8A6-8845-BD4E-CB4CCA059FC4}" type="datetimeFigureOut">
               <a:rPr lang="en-US" smtClean="0"/>
-              <a:t>1/27/13</a:t>
+              <a:t>7/31/26</a:t>
             </a:fld>
             <a:endParaRPr lang="en-US"/>
           </a:p>
@@ -3093,7 +3525,7 @@
 </file>
 
 <file path=ppt/slides/slide1.xml><?xml version="1.0" encoding="utf-8"?>
-<p:sld xmlns:a="http://schemas.openxmlformats.org/drawingml/2006/main" xmlns:p="http://schemas.openxmlformats.org/presentationml/2006/main" xmlns:r="http://schemas.openxmlformats.org/officeDocument/2006/relationships">
+<p:sld xmlns:a="http://schemas.openxmlformats.org/drawingml/2006/main" xmlns:r="http://schemas.openxmlformats.org/officeDocument/2006/relationships" xmlns:p="http://schemas.openxmlformats.org/presentationml/2006/main">
   <p:cSld>
     <p:spTree>
       <p:nvGrpSpPr>
@@ -3101,7 +3533,14 @@
         <p:cNvGrpSpPr/>
         <p:nvPr/>
       </p:nvGrpSpPr>
-      <p:grpSpPr/>
+      <p:grpSpPr>
+        <a:xfrm>
+          <a:off x="0" y="0"/>
+          <a:ext cx="0" cy="0"/>
+          <a:chOff x="0" y="0"/>
+          <a:chExt cx="0" cy="0"/>
+        </a:xfrm>
+      </p:grpSpPr>
       <p:pic>
         <p:nvPicPr>
           <p:cNvPr id="2" name="Picture 1" descr="bg_cover.png"/>
@@ -3111,7 +3550,7 @@
           <p:nvPr/>
         </p:nvPicPr>
         <p:blipFill>
-          <a:blip r:embed="rId2"/>
+          <a:blip r:embed="rId3"/>
           <a:stretch>
             <a:fillRect/>
           </a:stretch>
@@ -3143,7 +3582,7 @@
           <a:noFill/>
         </p:spPr>
         <p:txBody>
-          <a:bodyPr wrap="square" lIns="0" rIns="0" tIns="0" bIns="0" anchor="t">
+          <a:bodyPr wrap="square" lIns="0" tIns="0" rIns="0" bIns="0" anchor="t">
             <a:spAutoFit/>
           </a:bodyPr>
           <a:lstStyle/>
@@ -3188,7 +3627,7 @@
           <a:noFill/>
         </p:spPr>
         <p:txBody>
-          <a:bodyPr wrap="square" lIns="0" rIns="0" tIns="0" bIns="0" anchor="t">
+          <a:bodyPr wrap="square" lIns="0" tIns="0" rIns="0" bIns="0" anchor="t">
             <a:spAutoFit/>
           </a:bodyPr>
           <a:lstStyle/>
@@ -3233,7 +3672,7 @@
           <a:noFill/>
         </p:spPr>
         <p:txBody>
-          <a:bodyPr wrap="square" lIns="0" rIns="0" tIns="0" bIns="0" anchor="t">
+          <a:bodyPr wrap="square" lIns="0" tIns="0" rIns="0" bIns="0" anchor="t">
             <a:spAutoFit/>
           </a:bodyPr>
           <a:lstStyle/>
@@ -3302,7 +3741,7 @@
           <a:noFill/>
         </p:spPr>
         <p:txBody>
-          <a:bodyPr wrap="square" lIns="0" rIns="0" tIns="0" bIns="0" anchor="t">
+          <a:bodyPr wrap="square" lIns="0" tIns="0" rIns="0" bIns="0" anchor="t">
             <a:spAutoFit/>
           </a:bodyPr>
           <a:lstStyle/>
@@ -3347,7 +3786,7 @@
           <a:noFill/>
         </p:spPr>
         <p:txBody>
-          <a:bodyPr wrap="square" lIns="0" rIns="0" tIns="0" bIns="0" anchor="t">
+          <a:bodyPr wrap="square" lIns="0" tIns="0" rIns="0" bIns="0" anchor="t">
             <a:spAutoFit/>
           </a:bodyPr>
           <a:lstStyle/>
@@ -3417,6 +3856,7 @@
           <a:lstStyle/>
           <a:p>
             <a:pPr algn="ctr"/>
+            <a:endParaRPr/>
           </a:p>
         </p:txBody>
       </p:sp>
@@ -3437,7 +3877,7 @@
           <a:noFill/>
         </p:spPr>
         <p:txBody>
-          <a:bodyPr wrap="square" lIns="0" rIns="0" tIns="0" bIns="0" anchor="ctr">
+          <a:bodyPr wrap="square" lIns="0" tIns="0" rIns="0" bIns="0" anchor="ctr">
             <a:spAutoFit/>
           </a:bodyPr>
           <a:lstStyle/>
@@ -3482,7 +3922,7 @@
           <a:noFill/>
         </p:spPr>
         <p:txBody>
-          <a:bodyPr wrap="square" lIns="0" rIns="0" tIns="0" bIns="0" anchor="t">
+          <a:bodyPr wrap="square" lIns="0" tIns="0" rIns="0" bIns="0" anchor="t">
             <a:spAutoFit/>
           </a:bodyPr>
           <a:lstStyle/>
@@ -3527,7 +3967,7 @@
           <a:noFill/>
         </p:spPr>
         <p:txBody>
-          <a:bodyPr wrap="square" lIns="0" rIns="0" tIns="0" bIns="0" anchor="t">
+          <a:bodyPr wrap="square" lIns="0" tIns="0" rIns="0" bIns="0" anchor="t">
             <a:spAutoFit/>
           </a:bodyPr>
           <a:lstStyle/>
@@ -3595,6 +4035,7 @@
           <a:lstStyle/>
           <a:p>
             <a:pPr algn="ctr"/>
+            <a:endParaRPr/>
           </a:p>
         </p:txBody>
       </p:sp>
@@ -3615,7 +4056,7 @@
           <a:noFill/>
         </p:spPr>
         <p:txBody>
-          <a:bodyPr wrap="square" lIns="0" rIns="0" tIns="0" bIns="0" anchor="ctr">
+          <a:bodyPr wrap="square" lIns="0" tIns="0" rIns="0" bIns="0" anchor="ctr">
             <a:spAutoFit/>
           </a:bodyPr>
           <a:lstStyle/>
@@ -3652,7 +4093,7 @@
         </p:nvCxnSpPr>
         <p:spPr>
           <a:xfrm flipH="1" flipV="1">
-            <a:off x="8293608" y="1463040"/>
+            <a:off x="8165592" y="1014984"/>
             <a:ext cx="438912" cy="1847088"/>
           </a:xfrm>
           <a:prstGeom prst="line">
@@ -3719,6 +4160,7 @@
           <a:lstStyle/>
           <a:p>
             <a:pPr algn="ctr"/>
+            <a:endParaRPr/>
           </a:p>
         </p:txBody>
       </p:sp>
@@ -3739,7 +4181,7 @@
           <a:noFill/>
         </p:spPr>
         <p:txBody>
-          <a:bodyPr wrap="square" lIns="0" rIns="0" tIns="0" bIns="0" anchor="ctr">
+          <a:bodyPr wrap="square" lIns="0" tIns="0" rIns="0" bIns="0" anchor="ctr">
             <a:spAutoFit/>
           </a:bodyPr>
           <a:lstStyle/>
@@ -3776,7 +4218,7 @@
         </p:nvCxnSpPr>
         <p:spPr>
           <a:xfrm flipV="1">
-            <a:off x="8732520" y="1517904"/>
+            <a:off x="9006840" y="1142369"/>
             <a:ext cx="1481328" cy="1792224"/>
           </a:xfrm>
           <a:prstGeom prst="line">
@@ -3843,6 +4285,7 @@
           <a:lstStyle/>
           <a:p>
             <a:pPr algn="ctr"/>
+            <a:endParaRPr/>
           </a:p>
         </p:txBody>
       </p:sp>
@@ -3863,7 +4306,7 @@
           <a:noFill/>
         </p:spPr>
         <p:txBody>
-          <a:bodyPr wrap="square" lIns="0" rIns="0" tIns="0" bIns="0" anchor="ctr">
+          <a:bodyPr wrap="square" lIns="0" tIns="0" rIns="0" bIns="0" anchor="ctr">
             <a:spAutoFit/>
           </a:bodyPr>
           <a:lstStyle/>
@@ -3900,7 +4343,7 @@
         </p:nvCxnSpPr>
         <p:spPr>
           <a:xfrm>
-            <a:off x="8732520" y="3310128"/>
+            <a:off x="9107424" y="3612511"/>
             <a:ext cx="2029968" cy="1508760"/>
           </a:xfrm>
           <a:prstGeom prst="line">
@@ -3967,6 +4410,7 @@
           <a:lstStyle/>
           <a:p>
             <a:pPr algn="ctr"/>
+            <a:endParaRPr/>
           </a:p>
         </p:txBody>
       </p:sp>
@@ -3987,7 +4431,7 @@
           <a:noFill/>
         </p:spPr>
         <p:txBody>
-          <a:bodyPr wrap="square" lIns="0" rIns="0" tIns="0" bIns="0" anchor="ctr">
+          <a:bodyPr wrap="square" lIns="0" tIns="0" rIns="0" bIns="0" anchor="ctr">
             <a:spAutoFit/>
           </a:bodyPr>
           <a:lstStyle/>
@@ -4024,7 +4468,7 @@
         </p:nvCxnSpPr>
         <p:spPr>
           <a:xfrm flipH="1">
-            <a:off x="8229600" y="3721608"/>
+            <a:off x="7909560" y="3785616"/>
             <a:ext cx="914400" cy="1536192"/>
           </a:xfrm>
           <a:prstGeom prst="line">
@@ -4059,7 +4503,7 @@
         </p:nvSpPr>
         <p:spPr>
           <a:xfrm>
-            <a:off x="7754112" y="5138928"/>
+            <a:off x="7525512" y="5056633"/>
             <a:ext cx="1051560" cy="1051560"/>
           </a:xfrm>
           <a:prstGeom prst="ellipse">
@@ -4091,6 +4535,7 @@
           <a:lstStyle/>
           <a:p>
             <a:pPr algn="ctr"/>
+            <a:endParaRPr/>
           </a:p>
         </p:txBody>
       </p:sp>
@@ -4102,7 +4547,7 @@
         </p:nvSpPr>
         <p:spPr>
           <a:xfrm>
-            <a:off x="7827264" y="5212080"/>
+            <a:off x="7598664" y="5129785"/>
             <a:ext cx="905255" cy="905255"/>
           </a:xfrm>
           <a:prstGeom prst="rect">
@@ -4111,7 +4556,7 @@
           <a:noFill/>
         </p:spPr>
         <p:txBody>
-          <a:bodyPr wrap="square" lIns="0" rIns="0" tIns="0" bIns="0" anchor="ctr">
+          <a:bodyPr wrap="square" lIns="0" tIns="0" rIns="0" bIns="0" anchor="ctr">
             <a:spAutoFit/>
           </a:bodyPr>
           <a:lstStyle/>
@@ -4157,7 +4602,7 @@
           <a:noFill/>
         </p:spPr>
         <p:txBody>
-          <a:bodyPr wrap="square" lIns="0" rIns="0" tIns="0" bIns="0" anchor="t">
+          <a:bodyPr wrap="square" lIns="0" tIns="0" rIns="0" bIns="0" anchor="t">
             <a:spAutoFit/>
           </a:bodyPr>
           <a:lstStyle/>
@@ -4195,7 +4640,7 @@
 </file>
 
 <file path=ppt/slides/slide10.xml><?xml version="1.0" encoding="utf-8"?>
-<p:sld xmlns:a="http://schemas.openxmlformats.org/drawingml/2006/main" xmlns:p="http://schemas.openxmlformats.org/presentationml/2006/main" xmlns:r="http://schemas.openxmlformats.org/officeDocument/2006/relationships">
+<p:sld xmlns:a="http://schemas.openxmlformats.org/drawingml/2006/main" xmlns:r="http://schemas.openxmlformats.org/officeDocument/2006/relationships" xmlns:p="http://schemas.openxmlformats.org/presentationml/2006/main">
   <p:cSld>
     <p:spTree>
       <p:nvGrpSpPr>
@@ -4203,7 +4648,14 @@
         <p:cNvGrpSpPr/>
         <p:nvPr/>
       </p:nvGrpSpPr>
-      <p:grpSpPr/>
+      <p:grpSpPr>
+        <a:xfrm>
+          <a:off x="0" y="0"/>
+          <a:ext cx="0" cy="0"/>
+          <a:chOff x="0" y="0"/>
+          <a:chExt cx="0" cy="0"/>
+        </a:xfrm>
+      </p:grpSpPr>
       <p:pic>
         <p:nvPicPr>
           <p:cNvPr id="2" name="Picture 1" descr="bg_subtle.png"/>
@@ -4245,7 +4697,7 @@
           <a:noFill/>
         </p:spPr>
         <p:txBody>
-          <a:bodyPr wrap="square" lIns="0" rIns="0" tIns="0" bIns="0" anchor="t">
+          <a:bodyPr wrap="square" lIns="0" tIns="0" rIns="0" bIns="0" anchor="t">
             <a:spAutoFit/>
           </a:bodyPr>
           <a:lstStyle/>
@@ -4290,7 +4742,7 @@
           <a:noFill/>
         </p:spPr>
         <p:txBody>
-          <a:bodyPr wrap="square" lIns="0" rIns="0" tIns="0" bIns="0" anchor="t">
+          <a:bodyPr wrap="square" lIns="0" tIns="0" rIns="0" bIns="0" anchor="t">
             <a:spAutoFit/>
           </a:bodyPr>
           <a:lstStyle/>
@@ -4335,7 +4787,7 @@
           <a:noFill/>
         </p:spPr>
         <p:txBody>
-          <a:bodyPr wrap="square" lIns="0" rIns="0" tIns="0" bIns="0" anchor="t">
+          <a:bodyPr wrap="square" lIns="0" tIns="0" rIns="0" bIns="0" anchor="t">
             <a:spAutoFit/>
           </a:bodyPr>
           <a:lstStyle/>
@@ -4380,7 +4832,7 @@
           <a:noFill/>
         </p:spPr>
         <p:txBody>
-          <a:bodyPr wrap="square" lIns="0" rIns="0" tIns="0" bIns="0" anchor="t">
+          <a:bodyPr wrap="square" lIns="0" tIns="0" rIns="0" bIns="0" anchor="t">
             <a:spAutoFit/>
           </a:bodyPr>
           <a:lstStyle/>
@@ -4449,7 +4901,7 @@
           <a:noFill/>
         </p:spPr>
         <p:txBody>
-          <a:bodyPr wrap="square" lIns="0" rIns="0" tIns="0" bIns="0" anchor="t">
+          <a:bodyPr wrap="square" lIns="0" tIns="0" rIns="0" bIns="0" anchor="t">
             <a:spAutoFit/>
           </a:bodyPr>
           <a:lstStyle/>
@@ -4517,6 +4969,7 @@
           <a:lstStyle/>
           <a:p>
             <a:pPr algn="ctr"/>
+            <a:endParaRPr/>
           </a:p>
         </p:txBody>
       </p:sp>
@@ -4537,7 +4990,7 @@
           <a:noFill/>
         </p:spPr>
         <p:txBody>
-          <a:bodyPr wrap="square" lIns="0" rIns="0" tIns="0" bIns="0" anchor="ctr">
+          <a:bodyPr wrap="square" lIns="0" tIns="0" rIns="0" bIns="0" anchor="ctr">
             <a:spAutoFit/>
           </a:bodyPr>
           <a:lstStyle/>
@@ -4607,6 +5060,7 @@
           <a:lstStyle/>
           <a:p>
             <a:pPr algn="ctr"/>
+            <a:endParaRPr/>
           </a:p>
         </p:txBody>
       </p:sp>
@@ -4627,7 +5081,7 @@
           <a:noFill/>
         </p:spPr>
         <p:txBody>
-          <a:bodyPr wrap="square" lIns="0" rIns="0" tIns="0" bIns="0" anchor="ctr">
+          <a:bodyPr wrap="square" lIns="0" tIns="0" rIns="0" bIns="0" anchor="ctr">
             <a:spAutoFit/>
           </a:bodyPr>
           <a:lstStyle/>
@@ -4672,7 +5126,7 @@
           <a:noFill/>
         </p:spPr>
         <p:txBody>
-          <a:bodyPr wrap="square" lIns="0" rIns="0" tIns="0" bIns="0" anchor="t">
+          <a:bodyPr wrap="square" lIns="0" tIns="0" rIns="0" bIns="0" anchor="t">
             <a:spAutoFit/>
           </a:bodyPr>
           <a:lstStyle/>
@@ -4742,6 +5196,7 @@
           <a:lstStyle/>
           <a:p>
             <a:pPr algn="ctr"/>
+            <a:endParaRPr/>
           </a:p>
         </p:txBody>
       </p:sp>
@@ -4762,7 +5217,7 @@
           <a:noFill/>
         </p:spPr>
         <p:txBody>
-          <a:bodyPr wrap="square" lIns="0" rIns="0" tIns="0" bIns="0" anchor="ctr">
+          <a:bodyPr wrap="square" lIns="0" tIns="0" rIns="0" bIns="0" anchor="ctr">
             <a:spAutoFit/>
           </a:bodyPr>
           <a:lstStyle/>
@@ -4808,7 +5263,7 @@
           <a:noFill/>
         </p:spPr>
         <p:txBody>
-          <a:bodyPr wrap="square" lIns="0" rIns="0" tIns="0" bIns="0" anchor="t">
+          <a:bodyPr wrap="square" lIns="0" tIns="0" rIns="0" bIns="0" anchor="t">
             <a:spAutoFit/>
           </a:bodyPr>
           <a:lstStyle/>
@@ -4878,6 +5333,7 @@
           <a:lstStyle/>
           <a:p>
             <a:pPr algn="ctr"/>
+            <a:endParaRPr/>
           </a:p>
         </p:txBody>
       </p:sp>
@@ -4898,7 +5354,7 @@
           <a:noFill/>
         </p:spPr>
         <p:txBody>
-          <a:bodyPr wrap="square" lIns="0" rIns="0" tIns="0" bIns="0" anchor="ctr">
+          <a:bodyPr wrap="square" lIns="0" tIns="0" rIns="0" bIns="0" anchor="ctr">
             <a:spAutoFit/>
           </a:bodyPr>
           <a:lstStyle/>
@@ -4968,6 +5424,7 @@
           <a:lstStyle/>
           <a:p>
             <a:pPr algn="ctr"/>
+            <a:endParaRPr/>
           </a:p>
         </p:txBody>
       </p:sp>
@@ -4988,7 +5445,7 @@
           <a:noFill/>
         </p:spPr>
         <p:txBody>
-          <a:bodyPr wrap="square" lIns="0" rIns="0" tIns="0" bIns="0" anchor="t">
+          <a:bodyPr wrap="square" lIns="0" tIns="0" rIns="0" bIns="0" anchor="t">
             <a:spAutoFit/>
           </a:bodyPr>
           <a:lstStyle/>
@@ -5095,6 +5552,7 @@
           <a:lstStyle/>
           <a:p>
             <a:pPr algn="ctr"/>
+            <a:endParaRPr/>
           </a:p>
         </p:txBody>
       </p:sp>
@@ -5115,7 +5573,7 @@
           <a:noFill/>
         </p:spPr>
         <p:txBody>
-          <a:bodyPr wrap="square" lIns="0" rIns="0" tIns="0" bIns="0" anchor="ctr">
+          <a:bodyPr wrap="square" lIns="0" tIns="0" rIns="0" bIns="0" anchor="ctr">
             <a:spAutoFit/>
           </a:bodyPr>
           <a:lstStyle/>
@@ -5185,6 +5643,7 @@
           <a:lstStyle/>
           <a:p>
             <a:pPr algn="ctr"/>
+            <a:endParaRPr/>
           </a:p>
         </p:txBody>
       </p:sp>
@@ -5205,7 +5664,7 @@
           <a:noFill/>
         </p:spPr>
         <p:txBody>
-          <a:bodyPr wrap="square" lIns="0" rIns="0" tIns="0" bIns="0" anchor="ctr">
+          <a:bodyPr wrap="square" lIns="0" tIns="0" rIns="0" bIns="0" anchor="ctr">
             <a:spAutoFit/>
           </a:bodyPr>
           <a:lstStyle/>
@@ -5250,7 +5709,7 @@
           <a:noFill/>
         </p:spPr>
         <p:txBody>
-          <a:bodyPr wrap="square" lIns="0" rIns="0" tIns="0" bIns="0" anchor="t">
+          <a:bodyPr wrap="square" lIns="0" tIns="0" rIns="0" bIns="0" anchor="t">
             <a:spAutoFit/>
           </a:bodyPr>
           <a:lstStyle/>
@@ -5320,6 +5779,7 @@
           <a:lstStyle/>
           <a:p>
             <a:pPr algn="ctr"/>
+            <a:endParaRPr/>
           </a:p>
         </p:txBody>
       </p:sp>
@@ -5340,7 +5800,7 @@
           <a:noFill/>
         </p:spPr>
         <p:txBody>
-          <a:bodyPr wrap="square" lIns="0" rIns="0" tIns="0" bIns="0" anchor="ctr">
+          <a:bodyPr wrap="square" lIns="0" tIns="0" rIns="0" bIns="0" anchor="ctr">
             <a:spAutoFit/>
           </a:bodyPr>
           <a:lstStyle/>
@@ -5385,7 +5845,7 @@
           <a:noFill/>
         </p:spPr>
         <p:txBody>
-          <a:bodyPr wrap="square" lIns="0" rIns="0" tIns="0" bIns="0" anchor="t">
+          <a:bodyPr wrap="square" lIns="0" tIns="0" rIns="0" bIns="0" anchor="t">
             <a:spAutoFit/>
           </a:bodyPr>
           <a:lstStyle/>
@@ -5455,6 +5915,7 @@
           <a:lstStyle/>
           <a:p>
             <a:pPr algn="ctr"/>
+            <a:endParaRPr/>
           </a:p>
         </p:txBody>
       </p:sp>
@@ -5475,7 +5936,7 @@
           <a:noFill/>
         </p:spPr>
         <p:txBody>
-          <a:bodyPr wrap="square" lIns="0" rIns="0" tIns="0" bIns="0" anchor="ctr">
+          <a:bodyPr wrap="square" lIns="0" tIns="0" rIns="0" bIns="0" anchor="ctr">
             <a:spAutoFit/>
           </a:bodyPr>
           <a:lstStyle/>
@@ -5545,6 +6006,7 @@
           <a:lstStyle/>
           <a:p>
             <a:pPr algn="ctr"/>
+            <a:endParaRPr/>
           </a:p>
         </p:txBody>
       </p:sp>
@@ -5565,7 +6027,7 @@
           <a:noFill/>
         </p:spPr>
         <p:txBody>
-          <a:bodyPr wrap="square" lIns="0" rIns="0" tIns="0" bIns="0" anchor="ctr">
+          <a:bodyPr wrap="square" lIns="0" tIns="0" rIns="0" bIns="0" anchor="ctr">
             <a:spAutoFit/>
           </a:bodyPr>
           <a:lstStyle/>
@@ -5610,7 +6072,7 @@
           <a:noFill/>
         </p:spPr>
         <p:txBody>
-          <a:bodyPr wrap="square" lIns="0" rIns="0" tIns="0" bIns="0" anchor="t">
+          <a:bodyPr wrap="square" lIns="0" tIns="0" rIns="0" bIns="0" anchor="t">
             <a:spAutoFit/>
           </a:bodyPr>
           <a:lstStyle/>
@@ -5680,6 +6142,7 @@
           <a:lstStyle/>
           <a:p>
             <a:pPr algn="ctr"/>
+            <a:endParaRPr/>
           </a:p>
         </p:txBody>
       </p:sp>
@@ -5700,7 +6163,7 @@
           <a:noFill/>
         </p:spPr>
         <p:txBody>
-          <a:bodyPr wrap="square" lIns="0" rIns="0" tIns="0" bIns="0" anchor="ctr">
+          <a:bodyPr wrap="square" lIns="0" tIns="0" rIns="0" bIns="0" anchor="ctr">
             <a:spAutoFit/>
           </a:bodyPr>
           <a:lstStyle/>
@@ -5745,7 +6208,7 @@
           <a:noFill/>
         </p:spPr>
         <p:txBody>
-          <a:bodyPr wrap="square" lIns="0" rIns="0" tIns="0" bIns="0" anchor="t">
+          <a:bodyPr wrap="square" lIns="0" tIns="0" rIns="0" bIns="0" anchor="t">
             <a:spAutoFit/>
           </a:bodyPr>
           <a:lstStyle/>
@@ -5815,6 +6278,7 @@
           <a:lstStyle/>
           <a:p>
             <a:pPr algn="ctr"/>
+            <a:endParaRPr/>
           </a:p>
         </p:txBody>
       </p:sp>
@@ -5835,7 +6299,7 @@
           <a:noFill/>
         </p:spPr>
         <p:txBody>
-          <a:bodyPr wrap="square" lIns="0" rIns="0" tIns="0" bIns="0" anchor="ctr">
+          <a:bodyPr wrap="square" lIns="0" tIns="0" rIns="0" bIns="0" anchor="ctr">
             <a:spAutoFit/>
           </a:bodyPr>
           <a:lstStyle/>
@@ -5880,7 +6344,7 @@
           <a:noFill/>
         </p:spPr>
         <p:txBody>
-          <a:bodyPr wrap="square" lIns="0" rIns="0" tIns="0" bIns="0" anchor="t">
+          <a:bodyPr wrap="square" lIns="0" tIns="0" rIns="0" bIns="0" anchor="t">
             <a:spAutoFit/>
           </a:bodyPr>
           <a:lstStyle/>
@@ -5950,6 +6414,7 @@
           <a:lstStyle/>
           <a:p>
             <a:pPr algn="ctr"/>
+            <a:endParaRPr/>
           </a:p>
         </p:txBody>
       </p:sp>
@@ -5970,7 +6435,7 @@
           <a:noFill/>
         </p:spPr>
         <p:txBody>
-          <a:bodyPr wrap="square" lIns="0" rIns="0" tIns="0" bIns="0" anchor="t">
+          <a:bodyPr wrap="square" lIns="0" tIns="0" rIns="0" bIns="0" anchor="t">
             <a:spAutoFit/>
           </a:bodyPr>
           <a:lstStyle/>
@@ -6030,7 +6495,7 @@
           <a:noFill/>
         </p:spPr>
         <p:txBody>
-          <a:bodyPr wrap="square" lIns="0" rIns="0" tIns="0" bIns="0" anchor="t">
+          <a:bodyPr wrap="square" lIns="0" tIns="0" rIns="0" bIns="0" anchor="t">
             <a:spAutoFit/>
           </a:bodyPr>
           <a:lstStyle/>
@@ -6067,7 +6532,7 @@
 </file>
 
 <file path=ppt/slides/slide11.xml><?xml version="1.0" encoding="utf-8"?>
-<p:sld xmlns:a="http://schemas.openxmlformats.org/drawingml/2006/main" xmlns:p="http://schemas.openxmlformats.org/presentationml/2006/main" xmlns:r="http://schemas.openxmlformats.org/officeDocument/2006/relationships">
+<p:sld xmlns:a="http://schemas.openxmlformats.org/drawingml/2006/main" xmlns:r="http://schemas.openxmlformats.org/officeDocument/2006/relationships" xmlns:p="http://schemas.openxmlformats.org/presentationml/2006/main">
   <p:cSld>
     <p:spTree>
       <p:nvGrpSpPr>
@@ -6075,7 +6540,14 @@
         <p:cNvGrpSpPr/>
         <p:nvPr/>
       </p:nvGrpSpPr>
-      <p:grpSpPr/>
+      <p:grpSpPr>
+        <a:xfrm>
+          <a:off x="0" y="0"/>
+          <a:ext cx="0" cy="0"/>
+          <a:chOff x="0" y="0"/>
+          <a:chExt cx="0" cy="0"/>
+        </a:xfrm>
+      </p:grpSpPr>
       <p:pic>
         <p:nvPicPr>
           <p:cNvPr id="2" name="Picture 1" descr="bg_subtle.png"/>
@@ -6117,7 +6589,7 @@
           <a:noFill/>
         </p:spPr>
         <p:txBody>
-          <a:bodyPr wrap="square" lIns="0" rIns="0" tIns="0" bIns="0" anchor="t">
+          <a:bodyPr wrap="square" lIns="0" tIns="0" rIns="0" bIns="0" anchor="t">
             <a:spAutoFit/>
           </a:bodyPr>
           <a:lstStyle/>
@@ -6162,7 +6634,7 @@
           <a:noFill/>
         </p:spPr>
         <p:txBody>
-          <a:bodyPr wrap="square" lIns="0" rIns="0" tIns="0" bIns="0" anchor="t">
+          <a:bodyPr wrap="square" lIns="0" tIns="0" rIns="0" bIns="0" anchor="t">
             <a:spAutoFit/>
           </a:bodyPr>
           <a:lstStyle/>
@@ -6207,7 +6679,7 @@
           <a:noFill/>
         </p:spPr>
         <p:txBody>
-          <a:bodyPr wrap="square" lIns="0" rIns="0" tIns="0" bIns="0" anchor="t">
+          <a:bodyPr wrap="square" lIns="0" tIns="0" rIns="0" bIns="0" anchor="t">
             <a:spAutoFit/>
           </a:bodyPr>
           <a:lstStyle/>
@@ -6252,7 +6724,7 @@
           <a:noFill/>
         </p:spPr>
         <p:txBody>
-          <a:bodyPr wrap="square" lIns="0" rIns="0" tIns="0" bIns="0" anchor="t">
+          <a:bodyPr wrap="square" lIns="0" tIns="0" rIns="0" bIns="0" anchor="t">
             <a:spAutoFit/>
           </a:bodyPr>
           <a:lstStyle/>
@@ -6321,7 +6793,7 @@
           <a:noFill/>
         </p:spPr>
         <p:txBody>
-          <a:bodyPr wrap="square" lIns="0" rIns="0" tIns="0" bIns="0" anchor="t">
+          <a:bodyPr wrap="square" lIns="0" tIns="0" rIns="0" bIns="0" anchor="t">
             <a:spAutoFit/>
           </a:bodyPr>
           <a:lstStyle/>
@@ -6391,6 +6863,7 @@
           <a:lstStyle/>
           <a:p>
             <a:pPr algn="ctr"/>
+            <a:endParaRPr/>
           </a:p>
         </p:txBody>
       </p:sp>
@@ -6411,7 +6884,7 @@
           <a:noFill/>
         </p:spPr>
         <p:txBody>
-          <a:bodyPr wrap="square" lIns="0" rIns="0" tIns="0" bIns="0" anchor="ctr">
+          <a:bodyPr wrap="square" lIns="0" tIns="0" rIns="0" bIns="0" anchor="ctr">
             <a:spAutoFit/>
           </a:bodyPr>
           <a:lstStyle/>
@@ -6457,7 +6930,7 @@
           <a:noFill/>
         </p:spPr>
         <p:txBody>
-          <a:bodyPr wrap="square" lIns="0" rIns="0" tIns="0" bIns="0" anchor="t">
+          <a:bodyPr wrap="square" lIns="0" tIns="0" rIns="0" bIns="0" anchor="t">
             <a:spAutoFit/>
           </a:bodyPr>
           <a:lstStyle/>
@@ -6527,6 +7000,7 @@
           <a:lstStyle/>
           <a:p>
             <a:pPr algn="ctr"/>
+            <a:endParaRPr/>
           </a:p>
         </p:txBody>
       </p:sp>
@@ -6547,7 +7021,7 @@
           <a:noFill/>
         </p:spPr>
         <p:txBody>
-          <a:bodyPr wrap="square" lIns="0" rIns="0" tIns="0" bIns="0" anchor="ctr">
+          <a:bodyPr wrap="square" lIns="0" tIns="0" rIns="0" bIns="0" anchor="ctr">
             <a:spAutoFit/>
           </a:bodyPr>
           <a:lstStyle/>
@@ -6593,7 +7067,7 @@
           <a:noFill/>
         </p:spPr>
         <p:txBody>
-          <a:bodyPr wrap="square" lIns="0" rIns="0" tIns="0" bIns="0" anchor="t">
+          <a:bodyPr wrap="square" lIns="0" tIns="0" rIns="0" bIns="0" anchor="t">
             <a:spAutoFit/>
           </a:bodyPr>
           <a:lstStyle/>
@@ -6663,6 +7137,7 @@
           <a:lstStyle/>
           <a:p>
             <a:pPr algn="ctr"/>
+            <a:endParaRPr/>
           </a:p>
         </p:txBody>
       </p:sp>
@@ -6683,7 +7158,7 @@
           <a:noFill/>
         </p:spPr>
         <p:txBody>
-          <a:bodyPr wrap="square" lIns="0" rIns="0" tIns="0" bIns="0" anchor="ctr">
+          <a:bodyPr wrap="square" lIns="0" tIns="0" rIns="0" bIns="0" anchor="ctr">
             <a:spAutoFit/>
           </a:bodyPr>
           <a:lstStyle/>
@@ -6729,7 +7204,7 @@
           <a:noFill/>
         </p:spPr>
         <p:txBody>
-          <a:bodyPr wrap="square" lIns="0" rIns="0" tIns="0" bIns="0" anchor="t">
+          <a:bodyPr wrap="square" lIns="0" tIns="0" rIns="0" bIns="0" anchor="t">
             <a:spAutoFit/>
           </a:bodyPr>
           <a:lstStyle/>
@@ -6799,6 +7274,7 @@
           <a:lstStyle/>
           <a:p>
             <a:pPr algn="ctr"/>
+            <a:endParaRPr/>
           </a:p>
         </p:txBody>
       </p:sp>
@@ -6819,7 +7295,7 @@
           <a:noFill/>
         </p:spPr>
         <p:txBody>
-          <a:bodyPr wrap="square" lIns="0" rIns="0" tIns="0" bIns="0" anchor="ctr">
+          <a:bodyPr wrap="square" lIns="0" tIns="0" rIns="0" bIns="0" anchor="ctr">
             <a:spAutoFit/>
           </a:bodyPr>
           <a:lstStyle/>
@@ -6865,7 +7341,7 @@
           <a:noFill/>
         </p:spPr>
         <p:txBody>
-          <a:bodyPr wrap="square" lIns="0" rIns="0" tIns="0" bIns="0" anchor="t">
+          <a:bodyPr wrap="square" lIns="0" tIns="0" rIns="0" bIns="0" anchor="t">
             <a:spAutoFit/>
           </a:bodyPr>
           <a:lstStyle/>
@@ -6935,6 +7411,7 @@
           <a:lstStyle/>
           <a:p>
             <a:pPr algn="ctr"/>
+            <a:endParaRPr/>
           </a:p>
         </p:txBody>
       </p:sp>
@@ -6955,7 +7432,7 @@
           <a:noFill/>
         </p:spPr>
         <p:txBody>
-          <a:bodyPr wrap="square" lIns="0" rIns="0" tIns="0" bIns="0" anchor="ctr">
+          <a:bodyPr wrap="square" lIns="0" tIns="0" rIns="0" bIns="0" anchor="ctr">
             <a:spAutoFit/>
           </a:bodyPr>
           <a:lstStyle/>
@@ -7001,7 +7478,7 @@
           <a:noFill/>
         </p:spPr>
         <p:txBody>
-          <a:bodyPr wrap="square" lIns="0" rIns="0" tIns="0" bIns="0" anchor="t">
+          <a:bodyPr wrap="square" lIns="0" tIns="0" rIns="0" bIns="0" anchor="t">
             <a:spAutoFit/>
           </a:bodyPr>
           <a:lstStyle/>
@@ -7071,6 +7548,7 @@
           <a:lstStyle/>
           <a:p>
             <a:pPr algn="ctr"/>
+            <a:endParaRPr/>
           </a:p>
         </p:txBody>
       </p:sp>
@@ -7091,7 +7569,7 @@
           <a:noFill/>
         </p:spPr>
         <p:txBody>
-          <a:bodyPr wrap="square" lIns="0" rIns="0" tIns="0" bIns="0" anchor="ctr">
+          <a:bodyPr wrap="square" lIns="0" tIns="0" rIns="0" bIns="0" anchor="ctr">
             <a:spAutoFit/>
           </a:bodyPr>
           <a:lstStyle/>
@@ -7137,7 +7615,7 @@
           <a:noFill/>
         </p:spPr>
         <p:txBody>
-          <a:bodyPr wrap="square" lIns="0" rIns="0" tIns="0" bIns="0" anchor="t">
+          <a:bodyPr wrap="square" lIns="0" tIns="0" rIns="0" bIns="0" anchor="t">
             <a:spAutoFit/>
           </a:bodyPr>
           <a:lstStyle/>
@@ -7205,6 +7683,7 @@
           <a:lstStyle/>
           <a:p>
             <a:pPr algn="ctr"/>
+            <a:endParaRPr/>
           </a:p>
         </p:txBody>
       </p:sp>
@@ -7225,7 +7704,7 @@
           <a:noFill/>
         </p:spPr>
         <p:txBody>
-          <a:bodyPr wrap="square" lIns="0" rIns="0" tIns="0" bIns="0" anchor="t">
+          <a:bodyPr wrap="square" lIns="0" tIns="0" rIns="0" bIns="0" anchor="t">
             <a:spAutoFit/>
           </a:bodyPr>
           <a:lstStyle/>
@@ -7293,6 +7772,7 @@
           <a:lstStyle/>
           <a:p>
             <a:pPr algn="ctr"/>
+            <a:endParaRPr/>
           </a:p>
         </p:txBody>
       </p:sp>
@@ -7313,7 +7793,7 @@
           <a:noFill/>
         </p:spPr>
         <p:txBody>
-          <a:bodyPr wrap="square" lIns="0" rIns="0" tIns="0" bIns="0" anchor="t">
+          <a:bodyPr wrap="square" lIns="0" tIns="0" rIns="0" bIns="0" anchor="t">
             <a:spAutoFit/>
           </a:bodyPr>
           <a:lstStyle/>
@@ -7381,6 +7861,7 @@
           <a:lstStyle/>
           <a:p>
             <a:pPr algn="ctr"/>
+            <a:endParaRPr/>
           </a:p>
         </p:txBody>
       </p:sp>
@@ -7401,7 +7882,7 @@
           <a:noFill/>
         </p:spPr>
         <p:txBody>
-          <a:bodyPr wrap="square" lIns="0" rIns="0" tIns="0" bIns="0" anchor="t">
+          <a:bodyPr wrap="square" lIns="0" tIns="0" rIns="0" bIns="0" anchor="t">
             <a:spAutoFit/>
           </a:bodyPr>
           <a:lstStyle/>
@@ -7469,6 +7950,7 @@
           <a:lstStyle/>
           <a:p>
             <a:pPr algn="ctr"/>
+            <a:endParaRPr/>
           </a:p>
         </p:txBody>
       </p:sp>
@@ -7489,7 +7971,7 @@
           <a:noFill/>
         </p:spPr>
         <p:txBody>
-          <a:bodyPr wrap="square" lIns="0" rIns="0" tIns="0" bIns="0" anchor="t">
+          <a:bodyPr wrap="square" lIns="0" tIns="0" rIns="0" bIns="0" anchor="t">
             <a:spAutoFit/>
           </a:bodyPr>
           <a:lstStyle/>
@@ -7557,6 +8039,7 @@
           <a:lstStyle/>
           <a:p>
             <a:pPr algn="ctr"/>
+            <a:endParaRPr/>
           </a:p>
         </p:txBody>
       </p:sp>
@@ -7577,7 +8060,7 @@
           <a:noFill/>
         </p:spPr>
         <p:txBody>
-          <a:bodyPr wrap="square" lIns="0" rIns="0" tIns="0" bIns="0" anchor="t">
+          <a:bodyPr wrap="square" lIns="0" tIns="0" rIns="0" bIns="0" anchor="t">
             <a:spAutoFit/>
           </a:bodyPr>
           <a:lstStyle/>
@@ -7647,6 +8130,7 @@
           <a:lstStyle/>
           <a:p>
             <a:pPr algn="ctr"/>
+            <a:endParaRPr/>
           </a:p>
         </p:txBody>
       </p:sp>
@@ -7667,7 +8151,7 @@
           <a:noFill/>
         </p:spPr>
         <p:txBody>
-          <a:bodyPr wrap="square" lIns="0" rIns="0" tIns="0" bIns="0" anchor="t">
+          <a:bodyPr wrap="square" lIns="0" tIns="0" rIns="0" bIns="0" anchor="t">
             <a:spAutoFit/>
           </a:bodyPr>
           <a:lstStyle/>
@@ -7712,7 +8196,7 @@
           <a:noFill/>
         </p:spPr>
         <p:txBody>
-          <a:bodyPr wrap="square" lIns="0" rIns="0" tIns="0" bIns="0" anchor="t">
+          <a:bodyPr wrap="square" lIns="0" tIns="0" rIns="0" bIns="0" anchor="t">
             <a:spAutoFit/>
           </a:bodyPr>
           <a:lstStyle/>
@@ -7782,6 +8266,7 @@
           <a:lstStyle/>
           <a:p>
             <a:pPr algn="ctr"/>
+            <a:endParaRPr/>
           </a:p>
         </p:txBody>
       </p:sp>
@@ -7802,7 +8287,7 @@
           <a:noFill/>
         </p:spPr>
         <p:txBody>
-          <a:bodyPr wrap="square" lIns="0" rIns="0" tIns="0" bIns="0" anchor="t">
+          <a:bodyPr wrap="square" lIns="0" tIns="0" rIns="0" bIns="0" anchor="t">
             <a:spAutoFit/>
           </a:bodyPr>
           <a:lstStyle/>
@@ -7847,7 +8332,7 @@
           <a:noFill/>
         </p:spPr>
         <p:txBody>
-          <a:bodyPr wrap="square" lIns="0" rIns="0" tIns="0" bIns="0" anchor="t">
+          <a:bodyPr wrap="square" lIns="0" tIns="0" rIns="0" bIns="0" anchor="t">
             <a:spAutoFit/>
           </a:bodyPr>
           <a:lstStyle/>
@@ -7917,6 +8402,7 @@
           <a:lstStyle/>
           <a:p>
             <a:pPr algn="ctr"/>
+            <a:endParaRPr/>
           </a:p>
         </p:txBody>
       </p:sp>
@@ -7937,7 +8423,7 @@
           <a:noFill/>
         </p:spPr>
         <p:txBody>
-          <a:bodyPr wrap="square" lIns="0" rIns="0" tIns="0" bIns="0" anchor="t">
+          <a:bodyPr wrap="square" lIns="0" tIns="0" rIns="0" bIns="0" anchor="t">
             <a:spAutoFit/>
           </a:bodyPr>
           <a:lstStyle/>
@@ -7982,7 +8468,7 @@
           <a:noFill/>
         </p:spPr>
         <p:txBody>
-          <a:bodyPr wrap="square" lIns="0" rIns="0" tIns="0" bIns="0" anchor="t">
+          <a:bodyPr wrap="square" lIns="0" tIns="0" rIns="0" bIns="0" anchor="t">
             <a:spAutoFit/>
           </a:bodyPr>
           <a:lstStyle/>
@@ -8052,6 +8538,7 @@
           <a:lstStyle/>
           <a:p>
             <a:pPr algn="ctr"/>
+            <a:endParaRPr/>
           </a:p>
         </p:txBody>
       </p:sp>
@@ -8072,7 +8559,7 @@
           <a:noFill/>
         </p:spPr>
         <p:txBody>
-          <a:bodyPr wrap="square" lIns="0" rIns="0" tIns="0" bIns="0" anchor="t">
+          <a:bodyPr wrap="square" lIns="0" tIns="0" rIns="0" bIns="0" anchor="t">
             <a:spAutoFit/>
           </a:bodyPr>
           <a:lstStyle/>
@@ -8117,7 +8604,7 @@
           <a:noFill/>
         </p:spPr>
         <p:txBody>
-          <a:bodyPr wrap="square" lIns="0" rIns="0" tIns="0" bIns="0" anchor="t">
+          <a:bodyPr wrap="square" lIns="0" tIns="0" rIns="0" bIns="0" anchor="t">
             <a:spAutoFit/>
           </a:bodyPr>
           <a:lstStyle/>
@@ -8162,7 +8649,7 @@
           <a:noFill/>
         </p:spPr>
         <p:txBody>
-          <a:bodyPr wrap="square" lIns="0" rIns="0" tIns="0" bIns="0" anchor="t">
+          <a:bodyPr wrap="square" lIns="0" tIns="0" rIns="0" bIns="0" anchor="t">
             <a:spAutoFit/>
           </a:bodyPr>
           <a:lstStyle/>
@@ -8207,7 +8694,7 @@
           <a:noFill/>
         </p:spPr>
         <p:txBody>
-          <a:bodyPr wrap="square" lIns="0" rIns="0" tIns="0" bIns="0" anchor="t">
+          <a:bodyPr wrap="square" lIns="0" tIns="0" rIns="0" bIns="0" anchor="t">
             <a:spAutoFit/>
           </a:bodyPr>
           <a:lstStyle/>
@@ -8244,7 +8731,7 @@
 </file>
 
 <file path=ppt/slides/slide12.xml><?xml version="1.0" encoding="utf-8"?>
-<p:sld xmlns:a="http://schemas.openxmlformats.org/drawingml/2006/main" xmlns:p="http://schemas.openxmlformats.org/presentationml/2006/main" xmlns:r="http://schemas.openxmlformats.org/officeDocument/2006/relationships">
+<p:sld xmlns:a="http://schemas.openxmlformats.org/drawingml/2006/main" xmlns:r="http://schemas.openxmlformats.org/officeDocument/2006/relationships" xmlns:p="http://schemas.openxmlformats.org/presentationml/2006/main">
   <p:cSld>
     <p:spTree>
       <p:nvGrpSpPr>
@@ -8252,7 +8739,14 @@
         <p:cNvGrpSpPr/>
         <p:nvPr/>
       </p:nvGrpSpPr>
-      <p:grpSpPr/>
+      <p:grpSpPr>
+        <a:xfrm>
+          <a:off x="0" y="0"/>
+          <a:ext cx="0" cy="0"/>
+          <a:chOff x="0" y="0"/>
+          <a:chExt cx="0" cy="0"/>
+        </a:xfrm>
+      </p:grpSpPr>
       <p:pic>
         <p:nvPicPr>
           <p:cNvPr id="2" name="Picture 1" descr="bg_subtle.png"/>
@@ -8294,7 +8788,7 @@
           <a:noFill/>
         </p:spPr>
         <p:txBody>
-          <a:bodyPr wrap="square" lIns="0" rIns="0" tIns="0" bIns="0" anchor="t">
+          <a:bodyPr wrap="square" lIns="0" tIns="0" rIns="0" bIns="0" anchor="t">
             <a:spAutoFit/>
           </a:bodyPr>
           <a:lstStyle/>
@@ -8339,7 +8833,7 @@
           <a:noFill/>
         </p:spPr>
         <p:txBody>
-          <a:bodyPr wrap="square" lIns="0" rIns="0" tIns="0" bIns="0" anchor="t">
+          <a:bodyPr wrap="square" lIns="0" tIns="0" rIns="0" bIns="0" anchor="t">
             <a:spAutoFit/>
           </a:bodyPr>
           <a:lstStyle/>
@@ -8384,7 +8878,7 @@
           <a:noFill/>
         </p:spPr>
         <p:txBody>
-          <a:bodyPr wrap="square" lIns="0" rIns="0" tIns="0" bIns="0" anchor="t">
+          <a:bodyPr wrap="square" lIns="0" tIns="0" rIns="0" bIns="0" anchor="t">
             <a:spAutoFit/>
           </a:bodyPr>
           <a:lstStyle/>
@@ -8429,7 +8923,7 @@
           <a:noFill/>
         </p:spPr>
         <p:txBody>
-          <a:bodyPr wrap="square" lIns="0" rIns="0" tIns="0" bIns="0" anchor="t">
+          <a:bodyPr wrap="square" lIns="0" tIns="0" rIns="0" bIns="0" anchor="t">
             <a:spAutoFit/>
           </a:bodyPr>
           <a:lstStyle/>
@@ -8498,7 +8992,7 @@
           <a:noFill/>
         </p:spPr>
         <p:txBody>
-          <a:bodyPr wrap="square" lIns="0" rIns="0" tIns="0" bIns="0" anchor="t">
+          <a:bodyPr wrap="square" lIns="0" tIns="0" rIns="0" bIns="0" anchor="t">
             <a:spAutoFit/>
           </a:bodyPr>
           <a:lstStyle/>
@@ -8568,6 +9062,7 @@
           <a:lstStyle/>
           <a:p>
             <a:pPr algn="ctr"/>
+            <a:endParaRPr/>
           </a:p>
         </p:txBody>
       </p:sp>
@@ -8638,6 +9133,7 @@
           <a:lstStyle/>
           <a:p>
             <a:pPr algn="ctr"/>
+            <a:endParaRPr/>
           </a:p>
         </p:txBody>
       </p:sp>
@@ -8658,7 +9154,7 @@
           <a:noFill/>
         </p:spPr>
         <p:txBody>
-          <a:bodyPr wrap="square" lIns="0" rIns="0" tIns="0" bIns="0" anchor="ctr">
+          <a:bodyPr wrap="square" lIns="0" tIns="0" rIns="0" bIns="0" anchor="ctr">
             <a:spAutoFit/>
           </a:bodyPr>
           <a:lstStyle/>
@@ -8703,7 +9199,7 @@
           <a:noFill/>
         </p:spPr>
         <p:txBody>
-          <a:bodyPr wrap="square" lIns="0" rIns="0" tIns="0" bIns="0" anchor="t">
+          <a:bodyPr wrap="square" lIns="0" tIns="0" rIns="0" bIns="0" anchor="t">
             <a:spAutoFit/>
           </a:bodyPr>
           <a:lstStyle/>
@@ -8773,6 +9269,7 @@
           <a:lstStyle/>
           <a:p>
             <a:pPr algn="ctr"/>
+            <a:endParaRPr/>
           </a:p>
         </p:txBody>
       </p:sp>
@@ -8843,6 +9340,7 @@
           <a:lstStyle/>
           <a:p>
             <a:pPr algn="ctr"/>
+            <a:endParaRPr/>
           </a:p>
         </p:txBody>
       </p:sp>
@@ -8863,7 +9361,7 @@
           <a:noFill/>
         </p:spPr>
         <p:txBody>
-          <a:bodyPr wrap="square" lIns="0" rIns="0" tIns="0" bIns="0" anchor="ctr">
+          <a:bodyPr wrap="square" lIns="0" tIns="0" rIns="0" bIns="0" anchor="ctr">
             <a:spAutoFit/>
           </a:bodyPr>
           <a:lstStyle/>
@@ -8908,7 +9406,7 @@
           <a:noFill/>
         </p:spPr>
         <p:txBody>
-          <a:bodyPr wrap="square" lIns="0" rIns="0" tIns="0" bIns="0" anchor="t">
+          <a:bodyPr wrap="square" lIns="0" tIns="0" rIns="0" bIns="0" anchor="t">
             <a:spAutoFit/>
           </a:bodyPr>
           <a:lstStyle/>
@@ -8978,6 +9476,7 @@
           <a:lstStyle/>
           <a:p>
             <a:pPr algn="ctr"/>
+            <a:endParaRPr/>
           </a:p>
         </p:txBody>
       </p:sp>
@@ -9048,6 +9547,7 @@
           <a:lstStyle/>
           <a:p>
             <a:pPr algn="ctr"/>
+            <a:endParaRPr/>
           </a:p>
         </p:txBody>
       </p:sp>
@@ -9068,7 +9568,7 @@
           <a:noFill/>
         </p:spPr>
         <p:txBody>
-          <a:bodyPr wrap="square" lIns="0" rIns="0" tIns="0" bIns="0" anchor="ctr">
+          <a:bodyPr wrap="square" lIns="0" tIns="0" rIns="0" bIns="0" anchor="ctr">
             <a:spAutoFit/>
           </a:bodyPr>
           <a:lstStyle/>
@@ -9113,7 +9613,7 @@
           <a:noFill/>
         </p:spPr>
         <p:txBody>
-          <a:bodyPr wrap="square" lIns="0" rIns="0" tIns="0" bIns="0" anchor="t">
+          <a:bodyPr wrap="square" lIns="0" tIns="0" rIns="0" bIns="0" anchor="t">
             <a:spAutoFit/>
           </a:bodyPr>
           <a:lstStyle/>
@@ -9183,6 +9683,7 @@
           <a:lstStyle/>
           <a:p>
             <a:pPr algn="ctr"/>
+            <a:endParaRPr/>
           </a:p>
         </p:txBody>
       </p:sp>
@@ -9203,7 +9704,7 @@
           <a:noFill/>
         </p:spPr>
         <p:txBody>
-          <a:bodyPr wrap="square" lIns="0" rIns="0" tIns="0" bIns="0" anchor="ctr">
+          <a:bodyPr wrap="square" lIns="0" tIns="0" rIns="0" bIns="0" anchor="ctr">
             <a:spAutoFit/>
           </a:bodyPr>
           <a:lstStyle/>
@@ -9273,6 +9774,7 @@
           <a:lstStyle/>
           <a:p>
             <a:pPr algn="ctr"/>
+            <a:endParaRPr/>
           </a:p>
         </p:txBody>
       </p:sp>
@@ -9293,7 +9795,7 @@
           <a:noFill/>
         </p:spPr>
         <p:txBody>
-          <a:bodyPr wrap="square" lIns="0" rIns="0" tIns="0" bIns="0" anchor="ctr">
+          <a:bodyPr wrap="square" lIns="0" tIns="0" rIns="0" bIns="0" anchor="ctr">
             <a:spAutoFit/>
           </a:bodyPr>
           <a:lstStyle/>
@@ -9363,6 +9865,7 @@
           <a:lstStyle/>
           <a:p>
             <a:pPr algn="ctr"/>
+            <a:endParaRPr/>
           </a:p>
         </p:txBody>
       </p:sp>
@@ -9383,7 +9886,7 @@
           <a:noFill/>
         </p:spPr>
         <p:txBody>
-          <a:bodyPr wrap="square" lIns="0" rIns="0" tIns="0" bIns="0" anchor="ctr">
+          <a:bodyPr wrap="square" lIns="0" tIns="0" rIns="0" bIns="0" anchor="ctr">
             <a:spAutoFit/>
           </a:bodyPr>
           <a:lstStyle/>
@@ -9453,6 +9956,7 @@
           <a:lstStyle/>
           <a:p>
             <a:pPr algn="ctr"/>
+            <a:endParaRPr/>
           </a:p>
         </p:txBody>
       </p:sp>
@@ -9473,7 +9977,7 @@
           <a:noFill/>
         </p:spPr>
         <p:txBody>
-          <a:bodyPr wrap="square" lIns="0" rIns="0" tIns="0" bIns="0" anchor="ctr">
+          <a:bodyPr wrap="square" lIns="0" tIns="0" rIns="0" bIns="0" anchor="ctr">
             <a:spAutoFit/>
           </a:bodyPr>
           <a:lstStyle/>
@@ -9543,6 +10047,7 @@
           <a:lstStyle/>
           <a:p>
             <a:pPr algn="ctr"/>
+            <a:endParaRPr/>
           </a:p>
         </p:txBody>
       </p:sp>
@@ -9563,7 +10068,7 @@
           <a:noFill/>
         </p:spPr>
         <p:txBody>
-          <a:bodyPr wrap="square" lIns="0" rIns="0" tIns="0" bIns="0" anchor="ctr">
+          <a:bodyPr wrap="square" lIns="0" tIns="0" rIns="0" bIns="0" anchor="ctr">
             <a:spAutoFit/>
           </a:bodyPr>
           <a:lstStyle/>
@@ -9633,6 +10138,7 @@
           <a:lstStyle/>
           <a:p>
             <a:pPr algn="ctr"/>
+            <a:endParaRPr/>
           </a:p>
         </p:txBody>
       </p:sp>
@@ -9653,7 +10159,7 @@
           <a:noFill/>
         </p:spPr>
         <p:txBody>
-          <a:bodyPr wrap="square" lIns="0" rIns="0" tIns="0" bIns="0" anchor="ctr">
+          <a:bodyPr wrap="square" lIns="0" tIns="0" rIns="0" bIns="0" anchor="ctr">
             <a:spAutoFit/>
           </a:bodyPr>
           <a:lstStyle/>
@@ -9698,7 +10204,7 @@
           <a:noFill/>
         </p:spPr>
         <p:txBody>
-          <a:bodyPr wrap="square" lIns="0" rIns="0" tIns="0" bIns="0" anchor="t">
+          <a:bodyPr wrap="square" lIns="0" tIns="0" rIns="0" bIns="0" anchor="t">
             <a:spAutoFit/>
           </a:bodyPr>
           <a:lstStyle/>
@@ -9743,7 +10249,7 @@
           <a:noFill/>
         </p:spPr>
         <p:txBody>
-          <a:bodyPr wrap="square" lIns="0" rIns="0" tIns="0" bIns="0" anchor="t">
+          <a:bodyPr wrap="square" lIns="0" tIns="0" rIns="0" bIns="0" anchor="t">
             <a:spAutoFit/>
           </a:bodyPr>
           <a:lstStyle/>
@@ -9780,7 +10286,7 @@
 </file>
 
 <file path=ppt/slides/slide13.xml><?xml version="1.0" encoding="utf-8"?>
-<p:sld xmlns:a="http://schemas.openxmlformats.org/drawingml/2006/main" xmlns:p="http://schemas.openxmlformats.org/presentationml/2006/main" xmlns:r="http://schemas.openxmlformats.org/officeDocument/2006/relationships">
+<p:sld xmlns:a="http://schemas.openxmlformats.org/drawingml/2006/main" xmlns:r="http://schemas.openxmlformats.org/officeDocument/2006/relationships" xmlns:p="http://schemas.openxmlformats.org/presentationml/2006/main">
   <p:cSld>
     <p:spTree>
       <p:nvGrpSpPr>
@@ -9788,7 +10294,14 @@
         <p:cNvGrpSpPr/>
         <p:nvPr/>
       </p:nvGrpSpPr>
-      <p:grpSpPr/>
+      <p:grpSpPr>
+        <a:xfrm>
+          <a:off x="0" y="0"/>
+          <a:ext cx="0" cy="0"/>
+          <a:chOff x="0" y="0"/>
+          <a:chExt cx="0" cy="0"/>
+        </a:xfrm>
+      </p:grpSpPr>
       <p:pic>
         <p:nvPicPr>
           <p:cNvPr id="2" name="Picture 1" descr="bg_subtle.png"/>
@@ -9830,7 +10343,7 @@
           <a:noFill/>
         </p:spPr>
         <p:txBody>
-          <a:bodyPr wrap="square" lIns="0" rIns="0" tIns="0" bIns="0" anchor="t">
+          <a:bodyPr wrap="square" lIns="0" tIns="0" rIns="0" bIns="0" anchor="t">
             <a:spAutoFit/>
           </a:bodyPr>
           <a:lstStyle/>
@@ -9875,7 +10388,7 @@
           <a:noFill/>
         </p:spPr>
         <p:txBody>
-          <a:bodyPr wrap="square" lIns="0" rIns="0" tIns="0" bIns="0" anchor="t">
+          <a:bodyPr wrap="square" lIns="0" tIns="0" rIns="0" bIns="0" anchor="t">
             <a:spAutoFit/>
           </a:bodyPr>
           <a:lstStyle/>
@@ -9920,7 +10433,7 @@
           <a:noFill/>
         </p:spPr>
         <p:txBody>
-          <a:bodyPr wrap="square" lIns="0" rIns="0" tIns="0" bIns="0" anchor="t">
+          <a:bodyPr wrap="square" lIns="0" tIns="0" rIns="0" bIns="0" anchor="t">
             <a:spAutoFit/>
           </a:bodyPr>
           <a:lstStyle/>
@@ -9965,7 +10478,7 @@
           <a:noFill/>
         </p:spPr>
         <p:txBody>
-          <a:bodyPr wrap="square" lIns="0" rIns="0" tIns="0" bIns="0" anchor="t">
+          <a:bodyPr wrap="square" lIns="0" tIns="0" rIns="0" bIns="0" anchor="t">
             <a:spAutoFit/>
           </a:bodyPr>
           <a:lstStyle/>
@@ -10034,7 +10547,7 @@
           <a:noFill/>
         </p:spPr>
         <p:txBody>
-          <a:bodyPr wrap="square" lIns="0" rIns="0" tIns="0" bIns="0" anchor="t">
+          <a:bodyPr wrap="square" lIns="0" tIns="0" rIns="0" bIns="0" anchor="t">
             <a:spAutoFit/>
           </a:bodyPr>
           <a:lstStyle/>
@@ -10104,6 +10617,7 @@
           <a:lstStyle/>
           <a:p>
             <a:pPr algn="ctr"/>
+            <a:endParaRPr/>
           </a:p>
         </p:txBody>
       </p:sp>
@@ -10124,7 +10638,7 @@
           <a:noFill/>
         </p:spPr>
         <p:txBody>
-          <a:bodyPr wrap="square" lIns="0" rIns="0" tIns="0" bIns="0" anchor="ctr">
+          <a:bodyPr wrap="square" lIns="0" tIns="0" rIns="0" bIns="0" anchor="ctr">
             <a:spAutoFit/>
           </a:bodyPr>
           <a:lstStyle/>
@@ -10194,6 +10708,7 @@
           <a:lstStyle/>
           <a:p>
             <a:pPr algn="ctr"/>
+            <a:endParaRPr/>
           </a:p>
         </p:txBody>
       </p:sp>
@@ -10214,7 +10729,7 @@
           <a:noFill/>
         </p:spPr>
         <p:txBody>
-          <a:bodyPr wrap="square" lIns="0" rIns="0" tIns="0" bIns="0" anchor="t">
+          <a:bodyPr wrap="square" lIns="0" tIns="0" rIns="0" bIns="0" anchor="t">
             <a:spAutoFit/>
           </a:bodyPr>
           <a:lstStyle/>
@@ -10259,7 +10774,7 @@
           <a:noFill/>
         </p:spPr>
         <p:txBody>
-          <a:bodyPr wrap="square" lIns="0" rIns="0" tIns="0" bIns="0" anchor="t">
+          <a:bodyPr wrap="square" lIns="0" tIns="0" rIns="0" bIns="0" anchor="t">
             <a:spAutoFit/>
           </a:bodyPr>
           <a:lstStyle/>
@@ -10329,6 +10844,7 @@
           <a:lstStyle/>
           <a:p>
             <a:pPr algn="ctr"/>
+            <a:endParaRPr/>
           </a:p>
         </p:txBody>
       </p:sp>
@@ -10349,7 +10865,7 @@
           <a:noFill/>
         </p:spPr>
         <p:txBody>
-          <a:bodyPr wrap="square" lIns="0" rIns="0" tIns="0" bIns="0" anchor="t">
+          <a:bodyPr wrap="square" lIns="0" tIns="0" rIns="0" bIns="0" anchor="t">
             <a:spAutoFit/>
           </a:bodyPr>
           <a:lstStyle/>
@@ -10394,7 +10910,7 @@
           <a:noFill/>
         </p:spPr>
         <p:txBody>
-          <a:bodyPr wrap="square" lIns="0" rIns="0" tIns="0" bIns="0" anchor="t">
+          <a:bodyPr wrap="square" lIns="0" tIns="0" rIns="0" bIns="0" anchor="t">
             <a:spAutoFit/>
           </a:bodyPr>
           <a:lstStyle/>
@@ -10464,6 +10980,7 @@
           <a:lstStyle/>
           <a:p>
             <a:pPr algn="ctr"/>
+            <a:endParaRPr/>
           </a:p>
         </p:txBody>
       </p:sp>
@@ -10484,7 +11001,7 @@
           <a:noFill/>
         </p:spPr>
         <p:txBody>
-          <a:bodyPr wrap="square" lIns="0" rIns="0" tIns="0" bIns="0" anchor="t">
+          <a:bodyPr wrap="square" lIns="0" tIns="0" rIns="0" bIns="0" anchor="t">
             <a:spAutoFit/>
           </a:bodyPr>
           <a:lstStyle/>
@@ -10529,7 +11046,7 @@
           <a:noFill/>
         </p:spPr>
         <p:txBody>
-          <a:bodyPr wrap="square" lIns="0" rIns="0" tIns="0" bIns="0" anchor="t">
+          <a:bodyPr wrap="square" lIns="0" tIns="0" rIns="0" bIns="0" anchor="t">
             <a:spAutoFit/>
           </a:bodyPr>
           <a:lstStyle/>
@@ -10599,6 +11116,7 @@
           <a:lstStyle/>
           <a:p>
             <a:pPr algn="ctr"/>
+            <a:endParaRPr/>
           </a:p>
         </p:txBody>
       </p:sp>
@@ -10619,7 +11137,7 @@
           <a:noFill/>
         </p:spPr>
         <p:txBody>
-          <a:bodyPr wrap="square" lIns="0" rIns="0" tIns="0" bIns="0" anchor="t">
+          <a:bodyPr wrap="square" lIns="0" tIns="0" rIns="0" bIns="0" anchor="t">
             <a:spAutoFit/>
           </a:bodyPr>
           <a:lstStyle/>
@@ -10687,6 +11205,7 @@
           <a:lstStyle/>
           <a:p>
             <a:pPr algn="ctr"/>
+            <a:endParaRPr/>
           </a:p>
         </p:txBody>
       </p:sp>
@@ -10707,7 +11226,7 @@
           <a:noFill/>
         </p:spPr>
         <p:txBody>
-          <a:bodyPr wrap="square" lIns="0" rIns="0" tIns="0" bIns="0" anchor="ctr">
+          <a:bodyPr wrap="square" lIns="0" tIns="0" rIns="0" bIns="0" anchor="ctr">
             <a:spAutoFit/>
           </a:bodyPr>
           <a:lstStyle/>
@@ -10775,6 +11294,7 @@
           <a:lstStyle/>
           <a:p>
             <a:pPr algn="ctr"/>
+            <a:endParaRPr/>
           </a:p>
         </p:txBody>
       </p:sp>
@@ -10795,7 +11315,7 @@
           <a:noFill/>
         </p:spPr>
         <p:txBody>
-          <a:bodyPr wrap="square" lIns="0" rIns="0" tIns="0" bIns="0" anchor="ctr">
+          <a:bodyPr wrap="square" lIns="0" tIns="0" rIns="0" bIns="0" anchor="ctr">
             <a:spAutoFit/>
           </a:bodyPr>
           <a:lstStyle/>
@@ -10840,7 +11360,7 @@
           <a:noFill/>
         </p:spPr>
         <p:txBody>
-          <a:bodyPr wrap="square" lIns="0" rIns="0" tIns="0" bIns="0" anchor="t">
+          <a:bodyPr wrap="square" lIns="0" tIns="0" rIns="0" bIns="0" anchor="t">
             <a:spAutoFit/>
           </a:bodyPr>
           <a:lstStyle/>
@@ -10885,7 +11405,7 @@
           <a:noFill/>
         </p:spPr>
         <p:txBody>
-          <a:bodyPr wrap="square" lIns="0" rIns="0" tIns="0" bIns="0" anchor="t">
+          <a:bodyPr wrap="square" lIns="0" tIns="0" rIns="0" bIns="0" anchor="t">
             <a:spAutoFit/>
           </a:bodyPr>
           <a:lstStyle/>
@@ -10930,7 +11450,7 @@
           <a:noFill/>
         </p:spPr>
         <p:txBody>
-          <a:bodyPr wrap="square" lIns="0" rIns="0" tIns="0" bIns="0" anchor="t">
+          <a:bodyPr wrap="square" lIns="0" tIns="0" rIns="0" bIns="0" anchor="t">
             <a:spAutoFit/>
           </a:bodyPr>
           <a:lstStyle/>
@@ -10998,6 +11518,7 @@
           <a:lstStyle/>
           <a:p>
             <a:pPr algn="ctr"/>
+            <a:endParaRPr/>
           </a:p>
         </p:txBody>
       </p:sp>
@@ -11018,7 +11539,7 @@
           <a:noFill/>
         </p:spPr>
         <p:txBody>
-          <a:bodyPr wrap="square" lIns="0" rIns="0" tIns="0" bIns="0" anchor="ctr">
+          <a:bodyPr wrap="square" lIns="0" tIns="0" rIns="0" bIns="0" anchor="ctr">
             <a:spAutoFit/>
           </a:bodyPr>
           <a:lstStyle/>
@@ -11063,7 +11584,7 @@
           <a:noFill/>
         </p:spPr>
         <p:txBody>
-          <a:bodyPr wrap="square" lIns="0" rIns="0" tIns="0" bIns="0" anchor="t">
+          <a:bodyPr wrap="square" lIns="0" tIns="0" rIns="0" bIns="0" anchor="t">
             <a:spAutoFit/>
           </a:bodyPr>
           <a:lstStyle/>
@@ -11108,7 +11629,7 @@
           <a:noFill/>
         </p:spPr>
         <p:txBody>
-          <a:bodyPr wrap="square" lIns="0" rIns="0" tIns="0" bIns="0" anchor="t">
+          <a:bodyPr wrap="square" lIns="0" tIns="0" rIns="0" bIns="0" anchor="t">
             <a:spAutoFit/>
           </a:bodyPr>
           <a:lstStyle/>
@@ -11153,7 +11674,7 @@
           <a:noFill/>
         </p:spPr>
         <p:txBody>
-          <a:bodyPr wrap="square" lIns="0" rIns="0" tIns="0" bIns="0" anchor="t">
+          <a:bodyPr wrap="square" lIns="0" tIns="0" rIns="0" bIns="0" anchor="t">
             <a:spAutoFit/>
           </a:bodyPr>
           <a:lstStyle/>
@@ -11221,6 +11742,7 @@
           <a:lstStyle/>
           <a:p>
             <a:pPr algn="ctr"/>
+            <a:endParaRPr/>
           </a:p>
         </p:txBody>
       </p:sp>
@@ -11241,7 +11763,7 @@
           <a:noFill/>
         </p:spPr>
         <p:txBody>
-          <a:bodyPr wrap="square" lIns="0" rIns="0" tIns="0" bIns="0" anchor="ctr">
+          <a:bodyPr wrap="square" lIns="0" tIns="0" rIns="0" bIns="0" anchor="ctr">
             <a:spAutoFit/>
           </a:bodyPr>
           <a:lstStyle/>
@@ -11286,7 +11808,7 @@
           <a:noFill/>
         </p:spPr>
         <p:txBody>
-          <a:bodyPr wrap="square" lIns="0" rIns="0" tIns="0" bIns="0" anchor="t">
+          <a:bodyPr wrap="square" lIns="0" tIns="0" rIns="0" bIns="0" anchor="t">
             <a:spAutoFit/>
           </a:bodyPr>
           <a:lstStyle/>
@@ -11331,7 +11853,7 @@
           <a:noFill/>
         </p:spPr>
         <p:txBody>
-          <a:bodyPr wrap="square" lIns="0" rIns="0" tIns="0" bIns="0" anchor="t">
+          <a:bodyPr wrap="square" lIns="0" tIns="0" rIns="0" bIns="0" anchor="t">
             <a:spAutoFit/>
           </a:bodyPr>
           <a:lstStyle/>
@@ -11376,7 +11898,7 @@
           <a:noFill/>
         </p:spPr>
         <p:txBody>
-          <a:bodyPr wrap="square" lIns="0" rIns="0" tIns="0" bIns="0" anchor="t">
+          <a:bodyPr wrap="square" lIns="0" tIns="0" rIns="0" bIns="0" anchor="t">
             <a:spAutoFit/>
           </a:bodyPr>
           <a:lstStyle/>
@@ -11444,6 +11966,7 @@
           <a:lstStyle/>
           <a:p>
             <a:pPr algn="ctr"/>
+            <a:endParaRPr/>
           </a:p>
         </p:txBody>
       </p:sp>
@@ -11464,7 +11987,7 @@
           <a:noFill/>
         </p:spPr>
         <p:txBody>
-          <a:bodyPr wrap="square" lIns="0" rIns="0" tIns="0" bIns="0" anchor="ctr">
+          <a:bodyPr wrap="square" lIns="0" tIns="0" rIns="0" bIns="0" anchor="ctr">
             <a:spAutoFit/>
           </a:bodyPr>
           <a:lstStyle/>
@@ -11509,7 +12032,7 @@
           <a:noFill/>
         </p:spPr>
         <p:txBody>
-          <a:bodyPr wrap="square" lIns="0" rIns="0" tIns="0" bIns="0" anchor="t">
+          <a:bodyPr wrap="square" lIns="0" tIns="0" rIns="0" bIns="0" anchor="t">
             <a:spAutoFit/>
           </a:bodyPr>
           <a:lstStyle/>
@@ -11554,7 +12077,7 @@
           <a:noFill/>
         </p:spPr>
         <p:txBody>
-          <a:bodyPr wrap="square" lIns="0" rIns="0" tIns="0" bIns="0" anchor="t">
+          <a:bodyPr wrap="square" lIns="0" tIns="0" rIns="0" bIns="0" anchor="t">
             <a:spAutoFit/>
           </a:bodyPr>
           <a:lstStyle/>
@@ -11599,7 +12122,7 @@
           <a:noFill/>
         </p:spPr>
         <p:txBody>
-          <a:bodyPr wrap="square" lIns="0" rIns="0" tIns="0" bIns="0" anchor="t">
+          <a:bodyPr wrap="square" lIns="0" tIns="0" rIns="0" bIns="0" anchor="t">
             <a:spAutoFit/>
           </a:bodyPr>
           <a:lstStyle/>
@@ -11667,6 +12190,7 @@
           <a:lstStyle/>
           <a:p>
             <a:pPr algn="ctr"/>
+            <a:endParaRPr/>
           </a:p>
         </p:txBody>
       </p:sp>
@@ -11687,7 +12211,7 @@
           <a:noFill/>
         </p:spPr>
         <p:txBody>
-          <a:bodyPr wrap="square" lIns="0" rIns="0" tIns="0" bIns="0" anchor="ctr">
+          <a:bodyPr wrap="square" lIns="0" tIns="0" rIns="0" bIns="0" anchor="ctr">
             <a:spAutoFit/>
           </a:bodyPr>
           <a:lstStyle/>
@@ -11732,7 +12256,7 @@
           <a:noFill/>
         </p:spPr>
         <p:txBody>
-          <a:bodyPr wrap="square" lIns="0" rIns="0" tIns="0" bIns="0" anchor="t">
+          <a:bodyPr wrap="square" lIns="0" tIns="0" rIns="0" bIns="0" anchor="t">
             <a:spAutoFit/>
           </a:bodyPr>
           <a:lstStyle/>
@@ -11777,7 +12301,7 @@
           <a:noFill/>
         </p:spPr>
         <p:txBody>
-          <a:bodyPr wrap="square" lIns="0" rIns="0" tIns="0" bIns="0" anchor="t">
+          <a:bodyPr wrap="square" lIns="0" tIns="0" rIns="0" bIns="0" anchor="t">
             <a:spAutoFit/>
           </a:bodyPr>
           <a:lstStyle/>
@@ -11858,7 +12382,7 @@
           <a:noFill/>
         </p:spPr>
         <p:txBody>
-          <a:bodyPr wrap="square" lIns="0" rIns="0" tIns="0" bIns="0" anchor="t">
+          <a:bodyPr wrap="square" lIns="0" tIns="0" rIns="0" bIns="0" anchor="t">
             <a:spAutoFit/>
           </a:bodyPr>
           <a:lstStyle/>
@@ -11928,6 +12452,7 @@
           <a:lstStyle/>
           <a:p>
             <a:pPr algn="ctr"/>
+            <a:endParaRPr/>
           </a:p>
         </p:txBody>
       </p:sp>
@@ -11948,7 +12473,7 @@
           <a:noFill/>
         </p:spPr>
         <p:txBody>
-          <a:bodyPr wrap="square" lIns="0" rIns="0" tIns="0" bIns="0" anchor="t">
+          <a:bodyPr wrap="square" lIns="0" tIns="0" rIns="0" bIns="0" anchor="t">
             <a:spAutoFit/>
           </a:bodyPr>
           <a:lstStyle/>
@@ -11993,7 +12518,7 @@
           <a:noFill/>
         </p:spPr>
         <p:txBody>
-          <a:bodyPr wrap="square" lIns="0" rIns="0" tIns="0" bIns="0" anchor="t">
+          <a:bodyPr wrap="square" lIns="0" tIns="0" rIns="0" bIns="0" anchor="t">
             <a:spAutoFit/>
           </a:bodyPr>
           <a:lstStyle/>
@@ -12038,7 +12563,7 @@
           <a:noFill/>
         </p:spPr>
         <p:txBody>
-          <a:bodyPr wrap="square" lIns="0" rIns="0" tIns="0" bIns="0" anchor="t">
+          <a:bodyPr wrap="square" lIns="0" tIns="0" rIns="0" bIns="0" anchor="t">
             <a:spAutoFit/>
           </a:bodyPr>
           <a:lstStyle/>
@@ -12083,7 +12608,7 @@
           <a:noFill/>
         </p:spPr>
         <p:txBody>
-          <a:bodyPr wrap="square" lIns="0" rIns="0" tIns="0" bIns="0" anchor="t">
+          <a:bodyPr wrap="square" lIns="0" tIns="0" rIns="0" bIns="0" anchor="t">
             <a:spAutoFit/>
           </a:bodyPr>
           <a:lstStyle/>
@@ -12128,7 +12653,7 @@
           <a:noFill/>
         </p:spPr>
         <p:txBody>
-          <a:bodyPr wrap="square" lIns="0" rIns="0" tIns="0" bIns="0" anchor="t">
+          <a:bodyPr wrap="square" lIns="0" tIns="0" rIns="0" bIns="0" anchor="t">
             <a:spAutoFit/>
           </a:bodyPr>
           <a:lstStyle/>
@@ -12173,7 +12698,7 @@
           <a:noFill/>
         </p:spPr>
         <p:txBody>
-          <a:bodyPr wrap="square" lIns="0" rIns="0" tIns="0" bIns="0" anchor="t">
+          <a:bodyPr wrap="square" lIns="0" tIns="0" rIns="0" bIns="0" anchor="t">
             <a:spAutoFit/>
           </a:bodyPr>
           <a:lstStyle/>
@@ -12218,7 +12743,7 @@
           <a:noFill/>
         </p:spPr>
         <p:txBody>
-          <a:bodyPr wrap="square" lIns="0" rIns="0" tIns="0" bIns="0" anchor="t">
+          <a:bodyPr wrap="square" lIns="0" tIns="0" rIns="0" bIns="0" anchor="t">
             <a:spAutoFit/>
           </a:bodyPr>
           <a:lstStyle/>
@@ -12263,7 +12788,7 @@
           <a:noFill/>
         </p:spPr>
         <p:txBody>
-          <a:bodyPr wrap="square" lIns="0" rIns="0" tIns="0" bIns="0" anchor="t">
+          <a:bodyPr wrap="square" lIns="0" tIns="0" rIns="0" bIns="0" anchor="t">
             <a:spAutoFit/>
           </a:bodyPr>
           <a:lstStyle/>
@@ -12308,7 +12833,7 @@
           <a:noFill/>
         </p:spPr>
         <p:txBody>
-          <a:bodyPr wrap="square" lIns="0" rIns="0" tIns="0" bIns="0" anchor="t">
+          <a:bodyPr wrap="square" lIns="0" tIns="0" rIns="0" bIns="0" anchor="t">
             <a:spAutoFit/>
           </a:bodyPr>
           <a:lstStyle/>
@@ -12353,7 +12878,7 @@
           <a:noFill/>
         </p:spPr>
         <p:txBody>
-          <a:bodyPr wrap="square" lIns="0" rIns="0" tIns="0" bIns="0" anchor="t">
+          <a:bodyPr wrap="square" lIns="0" tIns="0" rIns="0" bIns="0" anchor="t">
             <a:spAutoFit/>
           </a:bodyPr>
           <a:lstStyle/>
@@ -12398,7 +12923,7 @@
           <a:noFill/>
         </p:spPr>
         <p:txBody>
-          <a:bodyPr wrap="square" lIns="0" rIns="0" tIns="0" bIns="0" anchor="t">
+          <a:bodyPr wrap="square" lIns="0" tIns="0" rIns="0" bIns="0" anchor="t">
             <a:spAutoFit/>
           </a:bodyPr>
           <a:lstStyle/>
@@ -12435,7 +12960,7 @@
 </file>
 
 <file path=ppt/slides/slide14.xml><?xml version="1.0" encoding="utf-8"?>
-<p:sld xmlns:a="http://schemas.openxmlformats.org/drawingml/2006/main" xmlns:p="http://schemas.openxmlformats.org/presentationml/2006/main" xmlns:r="http://schemas.openxmlformats.org/officeDocument/2006/relationships">
+<p:sld xmlns:a="http://schemas.openxmlformats.org/drawingml/2006/main" xmlns:r="http://schemas.openxmlformats.org/officeDocument/2006/relationships" xmlns:p="http://schemas.openxmlformats.org/presentationml/2006/main">
   <p:cSld>
     <p:spTree>
       <p:nvGrpSpPr>
@@ -12443,7 +12968,14 @@
         <p:cNvGrpSpPr/>
         <p:nvPr/>
       </p:nvGrpSpPr>
-      <p:grpSpPr/>
+      <p:grpSpPr>
+        <a:xfrm>
+          <a:off x="0" y="0"/>
+          <a:ext cx="0" cy="0"/>
+          <a:chOff x="0" y="0"/>
+          <a:chExt cx="0" cy="0"/>
+        </a:xfrm>
+      </p:grpSpPr>
       <p:pic>
         <p:nvPicPr>
           <p:cNvPr id="2" name="Picture 1" descr="bg_subtle.png"/>
@@ -12485,7 +13017,7 @@
           <a:noFill/>
         </p:spPr>
         <p:txBody>
-          <a:bodyPr wrap="square" lIns="0" rIns="0" tIns="0" bIns="0" anchor="t">
+          <a:bodyPr wrap="square" lIns="0" tIns="0" rIns="0" bIns="0" anchor="t">
             <a:spAutoFit/>
           </a:bodyPr>
           <a:lstStyle/>
@@ -12530,7 +13062,7 @@
           <a:noFill/>
         </p:spPr>
         <p:txBody>
-          <a:bodyPr wrap="square" lIns="0" rIns="0" tIns="0" bIns="0" anchor="t">
+          <a:bodyPr wrap="square" lIns="0" tIns="0" rIns="0" bIns="0" anchor="t">
             <a:spAutoFit/>
           </a:bodyPr>
           <a:lstStyle/>
@@ -12575,7 +13107,7 @@
           <a:noFill/>
         </p:spPr>
         <p:txBody>
-          <a:bodyPr wrap="square" lIns="0" rIns="0" tIns="0" bIns="0" anchor="t">
+          <a:bodyPr wrap="square" lIns="0" tIns="0" rIns="0" bIns="0" anchor="t">
             <a:spAutoFit/>
           </a:bodyPr>
           <a:lstStyle/>
@@ -12620,7 +13152,7 @@
           <a:noFill/>
         </p:spPr>
         <p:txBody>
-          <a:bodyPr wrap="square" lIns="0" rIns="0" tIns="0" bIns="0" anchor="t">
+          <a:bodyPr wrap="square" lIns="0" tIns="0" rIns="0" bIns="0" anchor="t">
             <a:spAutoFit/>
           </a:bodyPr>
           <a:lstStyle/>
@@ -12689,7 +13221,7 @@
           <a:noFill/>
         </p:spPr>
         <p:txBody>
-          <a:bodyPr wrap="square" lIns="0" rIns="0" tIns="0" bIns="0" anchor="t">
+          <a:bodyPr wrap="square" lIns="0" tIns="0" rIns="0" bIns="0" anchor="t">
             <a:spAutoFit/>
           </a:bodyPr>
           <a:lstStyle/>
@@ -12759,6 +13291,7 @@
           <a:lstStyle/>
           <a:p>
             <a:pPr algn="ctr"/>
+            <a:endParaRPr/>
           </a:p>
         </p:txBody>
       </p:sp>
@@ -12779,7 +13312,7 @@
           <a:noFill/>
         </p:spPr>
         <p:txBody>
-          <a:bodyPr wrap="square" lIns="0" rIns="0" tIns="0" bIns="0" anchor="t">
+          <a:bodyPr wrap="square" lIns="0" tIns="0" rIns="0" bIns="0" anchor="t">
             <a:spAutoFit/>
           </a:bodyPr>
           <a:lstStyle/>
@@ -12862,6 +13395,7 @@
           <a:lstStyle/>
           <a:p>
             <a:pPr algn="ctr"/>
+            <a:endParaRPr/>
           </a:p>
         </p:txBody>
       </p:sp>
@@ -12882,7 +13416,7 @@
           <a:noFill/>
         </p:spPr>
         <p:txBody>
-          <a:bodyPr wrap="square" lIns="0" rIns="0" tIns="0" bIns="0" anchor="ctr">
+          <a:bodyPr wrap="square" lIns="0" tIns="0" rIns="0" bIns="0" anchor="ctr">
             <a:spAutoFit/>
           </a:bodyPr>
           <a:lstStyle/>
@@ -12927,7 +13461,7 @@
           <a:noFill/>
         </p:spPr>
         <p:txBody>
-          <a:bodyPr wrap="square" lIns="0" rIns="0" tIns="0" bIns="0" anchor="t">
+          <a:bodyPr wrap="square" lIns="0" tIns="0" rIns="0" bIns="0" anchor="t">
             <a:spAutoFit/>
           </a:bodyPr>
           <a:lstStyle/>
@@ -12972,7 +13506,7 @@
           <a:noFill/>
         </p:spPr>
         <p:txBody>
-          <a:bodyPr wrap="square" lIns="0" rIns="0" tIns="0" bIns="0" anchor="t">
+          <a:bodyPr wrap="square" lIns="0" tIns="0" rIns="0" bIns="0" anchor="t">
             <a:spAutoFit/>
           </a:bodyPr>
           <a:lstStyle/>
@@ -13075,6 +13609,7 @@
           <a:lstStyle/>
           <a:p>
             <a:pPr algn="ctr"/>
+            <a:endParaRPr/>
           </a:p>
         </p:txBody>
       </p:sp>
@@ -13095,7 +13630,7 @@
           <a:noFill/>
         </p:spPr>
         <p:txBody>
-          <a:bodyPr wrap="square" lIns="0" rIns="0" tIns="0" bIns="0" anchor="ctr">
+          <a:bodyPr wrap="square" lIns="0" tIns="0" rIns="0" bIns="0" anchor="ctr">
             <a:spAutoFit/>
           </a:bodyPr>
           <a:lstStyle/>
@@ -13140,7 +13675,7 @@
           <a:noFill/>
         </p:spPr>
         <p:txBody>
-          <a:bodyPr wrap="square" lIns="0" rIns="0" tIns="0" bIns="0" anchor="t">
+          <a:bodyPr wrap="square" lIns="0" tIns="0" rIns="0" bIns="0" anchor="t">
             <a:spAutoFit/>
           </a:bodyPr>
           <a:lstStyle/>
@@ -13185,7 +13720,7 @@
           <a:noFill/>
         </p:spPr>
         <p:txBody>
-          <a:bodyPr wrap="square" lIns="0" rIns="0" tIns="0" bIns="0" anchor="t">
+          <a:bodyPr wrap="square" lIns="0" tIns="0" rIns="0" bIns="0" anchor="t">
             <a:spAutoFit/>
           </a:bodyPr>
           <a:lstStyle/>
@@ -13288,6 +13823,7 @@
           <a:lstStyle/>
           <a:p>
             <a:pPr algn="ctr"/>
+            <a:endParaRPr/>
           </a:p>
         </p:txBody>
       </p:sp>
@@ -13308,7 +13844,7 @@
           <a:noFill/>
         </p:spPr>
         <p:txBody>
-          <a:bodyPr wrap="square" lIns="0" rIns="0" tIns="0" bIns="0" anchor="ctr">
+          <a:bodyPr wrap="square" lIns="0" tIns="0" rIns="0" bIns="0" anchor="ctr">
             <a:spAutoFit/>
           </a:bodyPr>
           <a:lstStyle/>
@@ -13353,7 +13889,7 @@
           <a:noFill/>
         </p:spPr>
         <p:txBody>
-          <a:bodyPr wrap="square" lIns="0" rIns="0" tIns="0" bIns="0" anchor="t">
+          <a:bodyPr wrap="square" lIns="0" tIns="0" rIns="0" bIns="0" anchor="t">
             <a:spAutoFit/>
           </a:bodyPr>
           <a:lstStyle/>
@@ -13398,7 +13934,7 @@
           <a:noFill/>
         </p:spPr>
         <p:txBody>
-          <a:bodyPr wrap="square" lIns="0" rIns="0" tIns="0" bIns="0" anchor="t">
+          <a:bodyPr wrap="square" lIns="0" tIns="0" rIns="0" bIns="0" anchor="t">
             <a:spAutoFit/>
           </a:bodyPr>
           <a:lstStyle/>
@@ -13501,6 +14037,7 @@
           <a:lstStyle/>
           <a:p>
             <a:pPr algn="ctr"/>
+            <a:endParaRPr/>
           </a:p>
         </p:txBody>
       </p:sp>
@@ -13521,7 +14058,7 @@
           <a:noFill/>
         </p:spPr>
         <p:txBody>
-          <a:bodyPr wrap="square" lIns="0" rIns="0" tIns="0" bIns="0" anchor="ctr">
+          <a:bodyPr wrap="square" lIns="0" tIns="0" rIns="0" bIns="0" anchor="ctr">
             <a:spAutoFit/>
           </a:bodyPr>
           <a:lstStyle/>
@@ -13566,7 +14103,7 @@
           <a:noFill/>
         </p:spPr>
         <p:txBody>
-          <a:bodyPr wrap="square" lIns="0" rIns="0" tIns="0" bIns="0" anchor="t">
+          <a:bodyPr wrap="square" lIns="0" tIns="0" rIns="0" bIns="0" anchor="t">
             <a:spAutoFit/>
           </a:bodyPr>
           <a:lstStyle/>
@@ -13611,7 +14148,7 @@
           <a:noFill/>
         </p:spPr>
         <p:txBody>
-          <a:bodyPr wrap="square" lIns="0" rIns="0" tIns="0" bIns="0" anchor="t">
+          <a:bodyPr wrap="square" lIns="0" tIns="0" rIns="0" bIns="0" anchor="t">
             <a:spAutoFit/>
           </a:bodyPr>
           <a:lstStyle/>
@@ -13714,6 +14251,7 @@
           <a:lstStyle/>
           <a:p>
             <a:pPr algn="ctr"/>
+            <a:endParaRPr/>
           </a:p>
         </p:txBody>
       </p:sp>
@@ -13734,7 +14272,7 @@
           <a:noFill/>
         </p:spPr>
         <p:txBody>
-          <a:bodyPr wrap="square" lIns="0" rIns="0" tIns="0" bIns="0" anchor="ctr">
+          <a:bodyPr wrap="square" lIns="0" tIns="0" rIns="0" bIns="0" anchor="ctr">
             <a:spAutoFit/>
           </a:bodyPr>
           <a:lstStyle/>
@@ -13779,7 +14317,7 @@
           <a:noFill/>
         </p:spPr>
         <p:txBody>
-          <a:bodyPr wrap="square" lIns="0" rIns="0" tIns="0" bIns="0" anchor="t">
+          <a:bodyPr wrap="square" lIns="0" tIns="0" rIns="0" bIns="0" anchor="t">
             <a:spAutoFit/>
           </a:bodyPr>
           <a:lstStyle/>
@@ -13824,7 +14362,7 @@
           <a:noFill/>
         </p:spPr>
         <p:txBody>
-          <a:bodyPr wrap="square" lIns="0" rIns="0" tIns="0" bIns="0" anchor="t">
+          <a:bodyPr wrap="square" lIns="0" tIns="0" rIns="0" bIns="0" anchor="t">
             <a:spAutoFit/>
           </a:bodyPr>
           <a:lstStyle/>
@@ -13927,6 +14465,7 @@
           <a:lstStyle/>
           <a:p>
             <a:pPr algn="ctr"/>
+            <a:endParaRPr/>
           </a:p>
         </p:txBody>
       </p:sp>
@@ -13947,7 +14486,7 @@
           <a:noFill/>
         </p:spPr>
         <p:txBody>
-          <a:bodyPr wrap="square" lIns="0" rIns="0" tIns="0" bIns="0" anchor="ctr">
+          <a:bodyPr wrap="square" lIns="0" tIns="0" rIns="0" bIns="0" anchor="ctr">
             <a:spAutoFit/>
           </a:bodyPr>
           <a:lstStyle/>
@@ -13992,7 +14531,7 @@
           <a:noFill/>
         </p:spPr>
         <p:txBody>
-          <a:bodyPr wrap="square" lIns="0" rIns="0" tIns="0" bIns="0" anchor="t">
+          <a:bodyPr wrap="square" lIns="0" tIns="0" rIns="0" bIns="0" anchor="t">
             <a:spAutoFit/>
           </a:bodyPr>
           <a:lstStyle/>
@@ -14037,7 +14576,7 @@
           <a:noFill/>
         </p:spPr>
         <p:txBody>
-          <a:bodyPr wrap="square" lIns="0" rIns="0" tIns="0" bIns="0" anchor="t">
+          <a:bodyPr wrap="square" lIns="0" tIns="0" rIns="0" bIns="0" anchor="t">
             <a:spAutoFit/>
           </a:bodyPr>
           <a:lstStyle/>
@@ -14082,7 +14621,7 @@
           <a:noFill/>
         </p:spPr>
         <p:txBody>
-          <a:bodyPr wrap="square" lIns="0" rIns="0" tIns="0" bIns="0" anchor="t">
+          <a:bodyPr wrap="square" lIns="0" tIns="0" rIns="0" bIns="0" anchor="t">
             <a:spAutoFit/>
           </a:bodyPr>
           <a:lstStyle/>
@@ -14152,6 +14691,7 @@
           <a:lstStyle/>
           <a:p>
             <a:pPr algn="ctr"/>
+            <a:endParaRPr/>
           </a:p>
         </p:txBody>
       </p:sp>
@@ -14172,7 +14712,7 @@
           <a:noFill/>
         </p:spPr>
         <p:txBody>
-          <a:bodyPr wrap="square" lIns="0" rIns="0" tIns="0" bIns="0" anchor="t">
+          <a:bodyPr wrap="square" lIns="0" tIns="0" rIns="0" bIns="0" anchor="t">
             <a:spAutoFit/>
           </a:bodyPr>
           <a:lstStyle/>
@@ -14217,7 +14757,7 @@
           <a:noFill/>
         </p:spPr>
         <p:txBody>
-          <a:bodyPr wrap="square" lIns="0" rIns="0" tIns="0" bIns="0" anchor="t">
+          <a:bodyPr wrap="square" lIns="0" tIns="0" rIns="0" bIns="0" anchor="t">
             <a:spAutoFit/>
           </a:bodyPr>
           <a:lstStyle/>
@@ -14287,6 +14827,7 @@
           <a:lstStyle/>
           <a:p>
             <a:pPr algn="ctr"/>
+            <a:endParaRPr/>
           </a:p>
         </p:txBody>
       </p:sp>
@@ -14307,7 +14848,7 @@
           <a:noFill/>
         </p:spPr>
         <p:txBody>
-          <a:bodyPr wrap="square" lIns="0" rIns="0" tIns="0" bIns="0" anchor="t">
+          <a:bodyPr wrap="square" lIns="0" tIns="0" rIns="0" bIns="0" anchor="t">
             <a:spAutoFit/>
           </a:bodyPr>
           <a:lstStyle/>
@@ -14352,7 +14893,7 @@
           <a:noFill/>
         </p:spPr>
         <p:txBody>
-          <a:bodyPr wrap="square" lIns="0" rIns="0" tIns="0" bIns="0" anchor="t">
+          <a:bodyPr wrap="square" lIns="0" tIns="0" rIns="0" bIns="0" anchor="t">
             <a:spAutoFit/>
           </a:bodyPr>
           <a:lstStyle/>
@@ -14422,6 +14963,7 @@
           <a:lstStyle/>
           <a:p>
             <a:pPr algn="ctr"/>
+            <a:endParaRPr/>
           </a:p>
         </p:txBody>
       </p:sp>
@@ -14442,7 +14984,7 @@
           <a:noFill/>
         </p:spPr>
         <p:txBody>
-          <a:bodyPr wrap="square" lIns="0" rIns="0" tIns="0" bIns="0" anchor="t">
+          <a:bodyPr wrap="square" lIns="0" tIns="0" rIns="0" bIns="0" anchor="t">
             <a:spAutoFit/>
           </a:bodyPr>
           <a:lstStyle/>
@@ -14487,7 +15029,7 @@
           <a:noFill/>
         </p:spPr>
         <p:txBody>
-          <a:bodyPr wrap="square" lIns="0" rIns="0" tIns="0" bIns="0" anchor="t">
+          <a:bodyPr wrap="square" lIns="0" tIns="0" rIns="0" bIns="0" anchor="t">
             <a:spAutoFit/>
           </a:bodyPr>
           <a:lstStyle/>
@@ -14557,6 +15099,7 @@
           <a:lstStyle/>
           <a:p>
             <a:pPr algn="ctr"/>
+            <a:endParaRPr/>
           </a:p>
         </p:txBody>
       </p:sp>
@@ -14577,7 +15120,7 @@
           <a:noFill/>
         </p:spPr>
         <p:txBody>
-          <a:bodyPr wrap="square" lIns="0" rIns="0" tIns="0" bIns="0" anchor="t">
+          <a:bodyPr wrap="square" lIns="0" tIns="0" rIns="0" bIns="0" anchor="t">
             <a:spAutoFit/>
           </a:bodyPr>
           <a:lstStyle/>
@@ -14622,7 +15165,7 @@
           <a:noFill/>
         </p:spPr>
         <p:txBody>
-          <a:bodyPr wrap="square" lIns="0" rIns="0" tIns="0" bIns="0" anchor="t">
+          <a:bodyPr wrap="square" lIns="0" tIns="0" rIns="0" bIns="0" anchor="t">
             <a:spAutoFit/>
           </a:bodyPr>
           <a:lstStyle/>
@@ -14692,6 +15235,7 @@
           <a:lstStyle/>
           <a:p>
             <a:pPr algn="ctr"/>
+            <a:endParaRPr/>
           </a:p>
         </p:txBody>
       </p:sp>
@@ -14712,7 +15256,7 @@
           <a:noFill/>
         </p:spPr>
         <p:txBody>
-          <a:bodyPr wrap="square" lIns="0" rIns="0" tIns="0" bIns="0" anchor="t">
+          <a:bodyPr wrap="square" lIns="0" tIns="0" rIns="0" bIns="0" anchor="t">
             <a:spAutoFit/>
           </a:bodyPr>
           <a:lstStyle/>
@@ -14757,7 +15301,7 @@
           <a:noFill/>
         </p:spPr>
         <p:txBody>
-          <a:bodyPr wrap="square" lIns="0" rIns="0" tIns="0" bIns="0" anchor="t">
+          <a:bodyPr wrap="square" lIns="0" tIns="0" rIns="0" bIns="0" anchor="t">
             <a:spAutoFit/>
           </a:bodyPr>
           <a:lstStyle/>
@@ -14794,7 +15338,7 @@
 </file>
 
 <file path=ppt/slides/slide15.xml><?xml version="1.0" encoding="utf-8"?>
-<p:sld xmlns:a="http://schemas.openxmlformats.org/drawingml/2006/main" xmlns:p="http://schemas.openxmlformats.org/presentationml/2006/main" xmlns:r="http://schemas.openxmlformats.org/officeDocument/2006/relationships">
+<p:sld xmlns:a="http://schemas.openxmlformats.org/drawingml/2006/main" xmlns:r="http://schemas.openxmlformats.org/officeDocument/2006/relationships" xmlns:p="http://schemas.openxmlformats.org/presentationml/2006/main">
   <p:cSld>
     <p:spTree>
       <p:nvGrpSpPr>
@@ -14802,7 +15346,14 @@
         <p:cNvGrpSpPr/>
         <p:nvPr/>
       </p:nvGrpSpPr>
-      <p:grpSpPr/>
+      <p:grpSpPr>
+        <a:xfrm>
+          <a:off x="0" y="0"/>
+          <a:ext cx="0" cy="0"/>
+          <a:chOff x="0" y="0"/>
+          <a:chExt cx="0" cy="0"/>
+        </a:xfrm>
+      </p:grpSpPr>
       <p:pic>
         <p:nvPicPr>
           <p:cNvPr id="2" name="Picture 1" descr="bg_subtle.png"/>
@@ -14844,7 +15395,7 @@
           <a:noFill/>
         </p:spPr>
         <p:txBody>
-          <a:bodyPr wrap="square" lIns="0" rIns="0" tIns="0" bIns="0" anchor="t">
+          <a:bodyPr wrap="square" lIns="0" tIns="0" rIns="0" bIns="0" anchor="t">
             <a:spAutoFit/>
           </a:bodyPr>
           <a:lstStyle/>
@@ -14889,7 +15440,7 @@
           <a:noFill/>
         </p:spPr>
         <p:txBody>
-          <a:bodyPr wrap="square" lIns="0" rIns="0" tIns="0" bIns="0" anchor="t">
+          <a:bodyPr wrap="square" lIns="0" tIns="0" rIns="0" bIns="0" anchor="t">
             <a:spAutoFit/>
           </a:bodyPr>
           <a:lstStyle/>
@@ -14934,7 +15485,7 @@
           <a:noFill/>
         </p:spPr>
         <p:txBody>
-          <a:bodyPr wrap="square" lIns="0" rIns="0" tIns="0" bIns="0" anchor="t">
+          <a:bodyPr wrap="square" lIns="0" tIns="0" rIns="0" bIns="0" anchor="t">
             <a:spAutoFit/>
           </a:bodyPr>
           <a:lstStyle/>
@@ -14979,7 +15530,7 @@
           <a:noFill/>
         </p:spPr>
         <p:txBody>
-          <a:bodyPr wrap="square" lIns="0" rIns="0" tIns="0" bIns="0" anchor="t">
+          <a:bodyPr wrap="square" lIns="0" tIns="0" rIns="0" bIns="0" anchor="t">
             <a:spAutoFit/>
           </a:bodyPr>
           <a:lstStyle/>
@@ -15048,7 +15599,7 @@
           <a:noFill/>
         </p:spPr>
         <p:txBody>
-          <a:bodyPr wrap="square" lIns="0" rIns="0" tIns="0" bIns="0" anchor="t">
+          <a:bodyPr wrap="square" lIns="0" tIns="0" rIns="0" bIns="0" anchor="t">
             <a:spAutoFit/>
           </a:bodyPr>
           <a:lstStyle/>
@@ -15151,6 +15702,7 @@
           <a:lstStyle/>
           <a:p>
             <a:pPr algn="ctr"/>
+            <a:endParaRPr/>
           </a:p>
         </p:txBody>
       </p:sp>
@@ -15171,7 +15723,7 @@
           <a:noFill/>
         </p:spPr>
         <p:txBody>
-          <a:bodyPr wrap="square" lIns="0" rIns="0" tIns="0" bIns="0" anchor="ctr">
+          <a:bodyPr wrap="square" lIns="0" tIns="0" rIns="0" bIns="0" anchor="ctr">
             <a:spAutoFit/>
           </a:bodyPr>
           <a:lstStyle/>
@@ -15216,7 +15768,7 @@
           <a:noFill/>
         </p:spPr>
         <p:txBody>
-          <a:bodyPr wrap="square" lIns="0" rIns="0" tIns="0" bIns="0" anchor="t">
+          <a:bodyPr wrap="square" lIns="0" tIns="0" rIns="0" bIns="0" anchor="t">
             <a:spAutoFit/>
           </a:bodyPr>
           <a:lstStyle/>
@@ -15261,7 +15813,7 @@
           <a:noFill/>
         </p:spPr>
         <p:txBody>
-          <a:bodyPr wrap="square" lIns="0" rIns="0" tIns="0" bIns="0" anchor="t">
+          <a:bodyPr wrap="square" lIns="0" tIns="0" rIns="0" bIns="0" anchor="t">
             <a:spAutoFit/>
           </a:bodyPr>
           <a:lstStyle/>
@@ -15329,6 +15881,7 @@
           <a:lstStyle/>
           <a:p>
             <a:pPr algn="ctr"/>
+            <a:endParaRPr/>
           </a:p>
         </p:txBody>
       </p:sp>
@@ -15349,7 +15902,7 @@
           <a:noFill/>
         </p:spPr>
         <p:txBody>
-          <a:bodyPr wrap="square" lIns="0" rIns="0" tIns="0" bIns="0" anchor="ctr">
+          <a:bodyPr wrap="square" lIns="0" tIns="0" rIns="0" bIns="0" anchor="ctr">
             <a:spAutoFit/>
           </a:bodyPr>
           <a:lstStyle/>
@@ -15394,7 +15947,7 @@
           <a:noFill/>
         </p:spPr>
         <p:txBody>
-          <a:bodyPr wrap="square" lIns="0" rIns="0" tIns="0" bIns="0" anchor="t">
+          <a:bodyPr wrap="square" lIns="0" tIns="0" rIns="0" bIns="0" anchor="t">
             <a:spAutoFit/>
           </a:bodyPr>
           <a:lstStyle/>
@@ -15440,7 +15993,7 @@
           <a:noFill/>
         </p:spPr>
         <p:txBody>
-          <a:bodyPr wrap="square" lIns="0" rIns="0" tIns="0" bIns="0" anchor="t">
+          <a:bodyPr wrap="square" lIns="0" tIns="0" rIns="0" bIns="0" anchor="t">
             <a:spAutoFit/>
           </a:bodyPr>
           <a:lstStyle/>
@@ -15508,6 +16061,7 @@
           <a:lstStyle/>
           <a:p>
             <a:pPr algn="ctr"/>
+            <a:endParaRPr/>
           </a:p>
         </p:txBody>
       </p:sp>
@@ -15528,7 +16082,7 @@
           <a:noFill/>
         </p:spPr>
         <p:txBody>
-          <a:bodyPr wrap="square" lIns="0" rIns="0" tIns="0" bIns="0" anchor="ctr">
+          <a:bodyPr wrap="square" lIns="0" tIns="0" rIns="0" bIns="0" anchor="ctr">
             <a:spAutoFit/>
           </a:bodyPr>
           <a:lstStyle/>
@@ -15573,7 +16127,7 @@
           <a:noFill/>
         </p:spPr>
         <p:txBody>
-          <a:bodyPr wrap="square" lIns="0" rIns="0" tIns="0" bIns="0" anchor="t">
+          <a:bodyPr wrap="square" lIns="0" tIns="0" rIns="0" bIns="0" anchor="t">
             <a:spAutoFit/>
           </a:bodyPr>
           <a:lstStyle/>
@@ -15618,7 +16172,7 @@
           <a:noFill/>
         </p:spPr>
         <p:txBody>
-          <a:bodyPr wrap="square" lIns="0" rIns="0" tIns="0" bIns="0" anchor="t">
+          <a:bodyPr wrap="square" lIns="0" tIns="0" rIns="0" bIns="0" anchor="t">
             <a:spAutoFit/>
           </a:bodyPr>
           <a:lstStyle/>
@@ -15686,6 +16240,7 @@
           <a:lstStyle/>
           <a:p>
             <a:pPr algn="ctr"/>
+            <a:endParaRPr/>
           </a:p>
         </p:txBody>
       </p:sp>
@@ -15706,7 +16261,7 @@
           <a:noFill/>
         </p:spPr>
         <p:txBody>
-          <a:bodyPr wrap="square" lIns="0" rIns="0" tIns="0" bIns="0" anchor="ctr">
+          <a:bodyPr wrap="square" lIns="0" tIns="0" rIns="0" bIns="0" anchor="ctr">
             <a:spAutoFit/>
           </a:bodyPr>
           <a:lstStyle/>
@@ -15751,7 +16306,7 @@
           <a:noFill/>
         </p:spPr>
         <p:txBody>
-          <a:bodyPr wrap="square" lIns="0" rIns="0" tIns="0" bIns="0" anchor="t">
+          <a:bodyPr wrap="square" lIns="0" tIns="0" rIns="0" bIns="0" anchor="t">
             <a:spAutoFit/>
           </a:bodyPr>
           <a:lstStyle/>
@@ -15796,7 +16351,7 @@
           <a:noFill/>
         </p:spPr>
         <p:txBody>
-          <a:bodyPr wrap="square" lIns="0" rIns="0" tIns="0" bIns="0" anchor="t">
+          <a:bodyPr wrap="square" lIns="0" tIns="0" rIns="0" bIns="0" anchor="t">
             <a:spAutoFit/>
           </a:bodyPr>
           <a:lstStyle/>
@@ -15864,6 +16419,7 @@
           <a:lstStyle/>
           <a:p>
             <a:pPr algn="ctr"/>
+            <a:endParaRPr/>
           </a:p>
         </p:txBody>
       </p:sp>
@@ -15884,7 +16440,7 @@
           <a:noFill/>
         </p:spPr>
         <p:txBody>
-          <a:bodyPr wrap="square" lIns="0" rIns="0" tIns="0" bIns="0" anchor="ctr">
+          <a:bodyPr wrap="square" lIns="0" tIns="0" rIns="0" bIns="0" anchor="ctr">
             <a:spAutoFit/>
           </a:bodyPr>
           <a:lstStyle/>
@@ -15929,7 +16485,7 @@
           <a:noFill/>
         </p:spPr>
         <p:txBody>
-          <a:bodyPr wrap="square" lIns="0" rIns="0" tIns="0" bIns="0" anchor="t">
+          <a:bodyPr wrap="square" lIns="0" tIns="0" rIns="0" bIns="0" anchor="t">
             <a:spAutoFit/>
           </a:bodyPr>
           <a:lstStyle/>
@@ -15974,7 +16530,7 @@
           <a:noFill/>
         </p:spPr>
         <p:txBody>
-          <a:bodyPr wrap="square" lIns="0" rIns="0" tIns="0" bIns="0" anchor="t">
+          <a:bodyPr wrap="square" lIns="0" tIns="0" rIns="0" bIns="0" anchor="t">
             <a:spAutoFit/>
           </a:bodyPr>
           <a:lstStyle/>
@@ -16019,7 +16575,7 @@
           <a:noFill/>
         </p:spPr>
         <p:txBody>
-          <a:bodyPr wrap="square" lIns="0" rIns="0" tIns="0" bIns="0" anchor="t">
+          <a:bodyPr wrap="square" lIns="0" tIns="0" rIns="0" bIns="0" anchor="t">
             <a:spAutoFit/>
           </a:bodyPr>
           <a:lstStyle/>
@@ -16089,6 +16645,7 @@
           <a:lstStyle/>
           <a:p>
             <a:pPr algn="ctr"/>
+            <a:endParaRPr/>
           </a:p>
         </p:txBody>
       </p:sp>
@@ -16109,7 +16666,7 @@
           <a:noFill/>
         </p:spPr>
         <p:txBody>
-          <a:bodyPr wrap="square" lIns="0" rIns="0" tIns="0" bIns="0" anchor="t">
+          <a:bodyPr wrap="square" lIns="0" tIns="0" rIns="0" bIns="0" anchor="t">
             <a:spAutoFit/>
           </a:bodyPr>
           <a:lstStyle/>
@@ -16160,7 +16717,7 @@
           <a:noFill/>
         </p:spPr>
         <p:txBody>
-          <a:bodyPr wrap="square" lIns="0" rIns="0" tIns="0" bIns="0" anchor="t">
+          <a:bodyPr wrap="square" lIns="0" tIns="0" rIns="0" bIns="0" anchor="t">
             <a:spAutoFit/>
           </a:bodyPr>
           <a:lstStyle/>
@@ -16205,7 +16762,7 @@
           <a:noFill/>
         </p:spPr>
         <p:txBody>
-          <a:bodyPr wrap="square" lIns="0" rIns="0" tIns="0" bIns="0" anchor="t">
+          <a:bodyPr wrap="square" lIns="0" tIns="0" rIns="0" bIns="0" anchor="t">
             <a:spAutoFit/>
           </a:bodyPr>
           <a:lstStyle/>
@@ -16250,7 +16807,7 @@
           <a:noFill/>
         </p:spPr>
         <p:txBody>
-          <a:bodyPr wrap="square" lIns="0" rIns="0" tIns="0" bIns="0">
+          <a:bodyPr wrap="square" lIns="0" tIns="0" rIns="0" bIns="0">
             <a:spAutoFit/>
           </a:bodyPr>
           <a:lstStyle/>
@@ -16427,7 +16984,7 @@
           <a:noFill/>
         </p:spPr>
         <p:txBody>
-          <a:bodyPr wrap="square" lIns="0" rIns="0" tIns="0" bIns="0" anchor="t">
+          <a:bodyPr wrap="square" lIns="0" tIns="0" rIns="0" bIns="0" anchor="t">
             <a:spAutoFit/>
           </a:bodyPr>
           <a:lstStyle/>
@@ -16464,7 +17021,7 @@
 </file>
 
 <file path=ppt/slides/slide2.xml><?xml version="1.0" encoding="utf-8"?>
-<p:sld xmlns:a="http://schemas.openxmlformats.org/drawingml/2006/main" xmlns:p="http://schemas.openxmlformats.org/presentationml/2006/main" xmlns:r="http://schemas.openxmlformats.org/officeDocument/2006/relationships">
+<p:sld xmlns:a="http://schemas.openxmlformats.org/drawingml/2006/main" xmlns:r="http://schemas.openxmlformats.org/officeDocument/2006/relationships" xmlns:p="http://schemas.openxmlformats.org/presentationml/2006/main">
   <p:cSld>
     <p:spTree>
       <p:nvGrpSpPr>
@@ -16472,7 +17029,14 @@
         <p:cNvGrpSpPr/>
         <p:nvPr/>
       </p:nvGrpSpPr>
-      <p:grpSpPr/>
+      <p:grpSpPr>
+        <a:xfrm>
+          <a:off x="0" y="0"/>
+          <a:ext cx="0" cy="0"/>
+          <a:chOff x="0" y="0"/>
+          <a:chExt cx="0" cy="0"/>
+        </a:xfrm>
+      </p:grpSpPr>
       <p:pic>
         <p:nvPicPr>
           <p:cNvPr id="2" name="Picture 1" descr="bg_subtle.png"/>
@@ -16514,7 +17078,7 @@
           <a:noFill/>
         </p:spPr>
         <p:txBody>
-          <a:bodyPr wrap="square" lIns="0" rIns="0" tIns="0" bIns="0" anchor="t">
+          <a:bodyPr wrap="square" lIns="0" tIns="0" rIns="0" bIns="0" anchor="t">
             <a:spAutoFit/>
           </a:bodyPr>
           <a:lstStyle/>
@@ -16559,7 +17123,7 @@
           <a:noFill/>
         </p:spPr>
         <p:txBody>
-          <a:bodyPr wrap="square" lIns="0" rIns="0" tIns="0" bIns="0" anchor="t">
+          <a:bodyPr wrap="square" lIns="0" tIns="0" rIns="0" bIns="0" anchor="t">
             <a:spAutoFit/>
           </a:bodyPr>
           <a:lstStyle/>
@@ -16604,7 +17168,7 @@
           <a:noFill/>
         </p:spPr>
         <p:txBody>
-          <a:bodyPr wrap="square" lIns="0" rIns="0" tIns="0" bIns="0" anchor="t">
+          <a:bodyPr wrap="square" lIns="0" tIns="0" rIns="0" bIns="0" anchor="t">
             <a:spAutoFit/>
           </a:bodyPr>
           <a:lstStyle/>
@@ -16649,7 +17213,7 @@
           <a:noFill/>
         </p:spPr>
         <p:txBody>
-          <a:bodyPr wrap="square" lIns="0" rIns="0" tIns="0" bIns="0" anchor="t">
+          <a:bodyPr wrap="square" lIns="0" tIns="0" rIns="0" bIns="0" anchor="t">
             <a:spAutoFit/>
           </a:bodyPr>
           <a:lstStyle/>
@@ -16718,7 +17282,7 @@
           <a:noFill/>
         </p:spPr>
         <p:txBody>
-          <a:bodyPr wrap="square" lIns="0" rIns="0" tIns="0" bIns="0" anchor="t">
+          <a:bodyPr wrap="square" lIns="0" tIns="0" rIns="0" bIns="0" anchor="t">
             <a:spAutoFit/>
           </a:bodyPr>
           <a:lstStyle/>
@@ -16763,7 +17327,7 @@
           <a:noFill/>
         </p:spPr>
         <p:txBody>
-          <a:bodyPr wrap="square" lIns="0" rIns="0" tIns="0" bIns="0" anchor="t">
+          <a:bodyPr wrap="square" lIns="0" tIns="0" rIns="0" bIns="0" anchor="t">
             <a:spAutoFit/>
           </a:bodyPr>
           <a:lstStyle/>
@@ -16809,7 +17373,7 @@
           <a:noFill/>
         </p:spPr>
         <p:txBody>
-          <a:bodyPr wrap="square" lIns="0" rIns="0" tIns="0" bIns="0" anchor="t">
+          <a:bodyPr wrap="square" lIns="0" tIns="0" rIns="0" bIns="0" anchor="t">
             <a:spAutoFit/>
           </a:bodyPr>
           <a:lstStyle/>
@@ -16854,7 +17418,7 @@
           <a:noFill/>
         </p:spPr>
         <p:txBody>
-          <a:bodyPr wrap="square" lIns="0" rIns="0" tIns="0" bIns="0" anchor="t">
+          <a:bodyPr wrap="square" lIns="0" tIns="0" rIns="0" bIns="0" anchor="t">
             <a:spAutoFit/>
           </a:bodyPr>
           <a:lstStyle/>
@@ -16899,7 +17463,7 @@
           <a:noFill/>
         </p:spPr>
         <p:txBody>
-          <a:bodyPr wrap="square" lIns="0" rIns="0" tIns="0" bIns="0" anchor="t">
+          <a:bodyPr wrap="square" lIns="0" tIns="0" rIns="0" bIns="0" anchor="t">
             <a:spAutoFit/>
           </a:bodyPr>
           <a:lstStyle/>
@@ -16967,6 +17531,7 @@
           <a:lstStyle/>
           <a:p>
             <a:pPr algn="ctr"/>
+            <a:endParaRPr/>
           </a:p>
         </p:txBody>
       </p:sp>
@@ -16987,7 +17552,7 @@
           <a:noFill/>
         </p:spPr>
         <p:txBody>
-          <a:bodyPr wrap="square" lIns="0" rIns="0" tIns="0" bIns="0" anchor="ctr">
+          <a:bodyPr wrap="square" lIns="0" tIns="0" rIns="0" bIns="0" anchor="ctr">
             <a:spAutoFit/>
           </a:bodyPr>
           <a:lstStyle/>
@@ -17055,6 +17620,7 @@
           <a:lstStyle/>
           <a:p>
             <a:pPr algn="ctr"/>
+            <a:endParaRPr/>
           </a:p>
         </p:txBody>
       </p:sp>
@@ -17075,7 +17641,7 @@
           <a:noFill/>
         </p:spPr>
         <p:txBody>
-          <a:bodyPr wrap="square" lIns="0" rIns="0" tIns="0" bIns="0" anchor="ctr">
+          <a:bodyPr wrap="square" lIns="0" tIns="0" rIns="0" bIns="0" anchor="ctr">
             <a:spAutoFit/>
           </a:bodyPr>
           <a:lstStyle/>
@@ -17250,6 +17816,7 @@
           <a:lstStyle/>
           <a:p>
             <a:pPr algn="ctr"/>
+            <a:endParaRPr/>
           </a:p>
         </p:txBody>
       </p:sp>
@@ -17270,7 +17837,7 @@
           <a:noFill/>
         </p:spPr>
         <p:txBody>
-          <a:bodyPr wrap="square" lIns="0" rIns="0" tIns="0" bIns="0" anchor="ctr">
+          <a:bodyPr wrap="square" lIns="0" tIns="0" rIns="0" bIns="0" anchor="ctr">
             <a:spAutoFit/>
           </a:bodyPr>
           <a:lstStyle/>
@@ -17341,6 +17908,7 @@
           <a:lstStyle/>
           <a:p>
             <a:pPr algn="ctr"/>
+            <a:endParaRPr/>
           </a:p>
         </p:txBody>
       </p:sp>
@@ -17361,7 +17929,7 @@
           <a:noFill/>
         </p:spPr>
         <p:txBody>
-          <a:bodyPr wrap="square" lIns="0" rIns="0" tIns="0" bIns="0" anchor="ctr">
+          <a:bodyPr wrap="square" lIns="0" tIns="0" rIns="0" bIns="0" anchor="ctr">
             <a:spAutoFit/>
           </a:bodyPr>
           <a:lstStyle/>
@@ -17432,6 +18000,7 @@
           <a:lstStyle/>
           <a:p>
             <a:pPr algn="ctr"/>
+            <a:endParaRPr/>
           </a:p>
         </p:txBody>
       </p:sp>
@@ -17452,7 +18021,7 @@
           <a:noFill/>
         </p:spPr>
         <p:txBody>
-          <a:bodyPr wrap="square" lIns="0" rIns="0" tIns="0" bIns="0" anchor="ctr">
+          <a:bodyPr wrap="square" lIns="0" tIns="0" rIns="0" bIns="0" anchor="ctr">
             <a:spAutoFit/>
           </a:bodyPr>
           <a:lstStyle/>
@@ -17628,6 +18197,7 @@
           <a:lstStyle/>
           <a:p>
             <a:pPr algn="ctr"/>
+            <a:endParaRPr/>
           </a:p>
         </p:txBody>
       </p:sp>
@@ -17648,7 +18218,7 @@
           <a:noFill/>
         </p:spPr>
         <p:txBody>
-          <a:bodyPr wrap="square" lIns="0" rIns="0" tIns="0" bIns="0" anchor="ctr">
+          <a:bodyPr wrap="square" lIns="0" tIns="0" rIns="0" bIns="0" anchor="ctr">
             <a:spAutoFit/>
           </a:bodyPr>
           <a:lstStyle/>
@@ -17719,6 +18289,7 @@
           <a:lstStyle/>
           <a:p>
             <a:pPr algn="ctr"/>
+            <a:endParaRPr/>
           </a:p>
         </p:txBody>
       </p:sp>
@@ -17739,7 +18310,7 @@
           <a:noFill/>
         </p:spPr>
         <p:txBody>
-          <a:bodyPr wrap="square" lIns="0" rIns="0" tIns="0" bIns="0" anchor="ctr">
+          <a:bodyPr wrap="square" lIns="0" tIns="0" rIns="0" bIns="0" anchor="ctr">
             <a:spAutoFit/>
           </a:bodyPr>
           <a:lstStyle/>
@@ -17810,6 +18381,7 @@
           <a:lstStyle/>
           <a:p>
             <a:pPr algn="ctr"/>
+            <a:endParaRPr/>
           </a:p>
         </p:txBody>
       </p:sp>
@@ -17830,7 +18402,7 @@
           <a:noFill/>
         </p:spPr>
         <p:txBody>
-          <a:bodyPr wrap="square" lIns="0" rIns="0" tIns="0" bIns="0" anchor="ctr">
+          <a:bodyPr wrap="square" lIns="0" tIns="0" rIns="0" bIns="0" anchor="ctr">
             <a:spAutoFit/>
           </a:bodyPr>
           <a:lstStyle/>
@@ -17901,6 +18473,7 @@
           <a:lstStyle/>
           <a:p>
             <a:pPr algn="ctr"/>
+            <a:endParaRPr/>
           </a:p>
         </p:txBody>
       </p:sp>
@@ -17921,7 +18494,7 @@
           <a:noFill/>
         </p:spPr>
         <p:txBody>
-          <a:bodyPr wrap="square" lIns="0" rIns="0" tIns="0" bIns="0" anchor="t">
+          <a:bodyPr wrap="square" lIns="0" tIns="0" rIns="0" bIns="0" anchor="t">
             <a:spAutoFit/>
           </a:bodyPr>
           <a:lstStyle/>
@@ -17991,6 +18564,7 @@
           <a:lstStyle/>
           <a:p>
             <a:pPr algn="ctr"/>
+            <a:endParaRPr/>
           </a:p>
         </p:txBody>
       </p:sp>
@@ -18011,7 +18585,7 @@
           <a:noFill/>
         </p:spPr>
         <p:txBody>
-          <a:bodyPr wrap="square" lIns="0" rIns="0" tIns="0" bIns="0" anchor="t">
+          <a:bodyPr wrap="square" lIns="0" tIns="0" rIns="0" bIns="0" anchor="t">
             <a:spAutoFit/>
           </a:bodyPr>
           <a:lstStyle/>
@@ -18056,7 +18630,7 @@
           <a:noFill/>
         </p:spPr>
         <p:txBody>
-          <a:bodyPr wrap="square" lIns="0" rIns="0" tIns="0" bIns="0" anchor="t">
+          <a:bodyPr wrap="square" lIns="0" tIns="0" rIns="0" bIns="0" anchor="t">
             <a:spAutoFit/>
           </a:bodyPr>
           <a:lstStyle/>
@@ -18093,7 +18667,7 @@
 </file>
 
 <file path=ppt/slides/slide3.xml><?xml version="1.0" encoding="utf-8"?>
-<p:sld xmlns:a="http://schemas.openxmlformats.org/drawingml/2006/main" xmlns:p="http://schemas.openxmlformats.org/presentationml/2006/main" xmlns:r="http://schemas.openxmlformats.org/officeDocument/2006/relationships">
+<p:sld xmlns:a="http://schemas.openxmlformats.org/drawingml/2006/main" xmlns:r="http://schemas.openxmlformats.org/officeDocument/2006/relationships" xmlns:p="http://schemas.openxmlformats.org/presentationml/2006/main">
   <p:cSld>
     <p:spTree>
       <p:nvGrpSpPr>
@@ -18101,7 +18675,14 @@
         <p:cNvGrpSpPr/>
         <p:nvPr/>
       </p:nvGrpSpPr>
-      <p:grpSpPr/>
+      <p:grpSpPr>
+        <a:xfrm>
+          <a:off x="0" y="0"/>
+          <a:ext cx="0" cy="0"/>
+          <a:chOff x="0" y="0"/>
+          <a:chExt cx="0" cy="0"/>
+        </a:xfrm>
+      </p:grpSpPr>
       <p:pic>
         <p:nvPicPr>
           <p:cNvPr id="2" name="Picture 1" descr="bg_subtle.png"/>
@@ -18143,7 +18724,7 @@
           <a:noFill/>
         </p:spPr>
         <p:txBody>
-          <a:bodyPr wrap="square" lIns="0" rIns="0" tIns="0" bIns="0" anchor="t">
+          <a:bodyPr wrap="square" lIns="0" tIns="0" rIns="0" bIns="0" anchor="t">
             <a:spAutoFit/>
           </a:bodyPr>
           <a:lstStyle/>
@@ -18188,7 +18769,7 @@
           <a:noFill/>
         </p:spPr>
         <p:txBody>
-          <a:bodyPr wrap="square" lIns="0" rIns="0" tIns="0" bIns="0" anchor="t">
+          <a:bodyPr wrap="square" lIns="0" tIns="0" rIns="0" bIns="0" anchor="t">
             <a:spAutoFit/>
           </a:bodyPr>
           <a:lstStyle/>
@@ -18233,7 +18814,7 @@
           <a:noFill/>
         </p:spPr>
         <p:txBody>
-          <a:bodyPr wrap="square" lIns="0" rIns="0" tIns="0" bIns="0" anchor="t">
+          <a:bodyPr wrap="square" lIns="0" tIns="0" rIns="0" bIns="0" anchor="t">
             <a:spAutoFit/>
           </a:bodyPr>
           <a:lstStyle/>
@@ -18278,7 +18859,7 @@
           <a:noFill/>
         </p:spPr>
         <p:txBody>
-          <a:bodyPr wrap="square" lIns="0" rIns="0" tIns="0" bIns="0" anchor="t">
+          <a:bodyPr wrap="square" lIns="0" tIns="0" rIns="0" bIns="0" anchor="t">
             <a:spAutoFit/>
           </a:bodyPr>
           <a:lstStyle/>
@@ -18347,7 +18928,7 @@
           <a:noFill/>
         </p:spPr>
         <p:txBody>
-          <a:bodyPr wrap="square" lIns="0" rIns="0" tIns="0" bIns="0" anchor="t">
+          <a:bodyPr wrap="square" lIns="0" tIns="0" rIns="0" bIns="0" anchor="t">
             <a:spAutoFit/>
           </a:bodyPr>
           <a:lstStyle/>
@@ -18417,6 +18998,7 @@
           <a:lstStyle/>
           <a:p>
             <a:pPr algn="ctr"/>
+            <a:endParaRPr/>
           </a:p>
         </p:txBody>
       </p:sp>
@@ -18460,6 +19042,7 @@
           <a:lstStyle/>
           <a:p>
             <a:pPr algn="ctr"/>
+            <a:endParaRPr/>
           </a:p>
         </p:txBody>
       </p:sp>
@@ -18480,7 +19063,7 @@
           <a:noFill/>
         </p:spPr>
         <p:txBody>
-          <a:bodyPr wrap="square" lIns="0" rIns="0" tIns="0" bIns="0" anchor="t">
+          <a:bodyPr wrap="square" lIns="0" tIns="0" rIns="0" bIns="0" anchor="t">
             <a:spAutoFit/>
           </a:bodyPr>
           <a:lstStyle/>
@@ -18525,7 +19108,7 @@
           <a:noFill/>
         </p:spPr>
         <p:txBody>
-          <a:bodyPr wrap="square" lIns="0" rIns="0" tIns="0" bIns="0" anchor="t">
+          <a:bodyPr wrap="square" lIns="0" tIns="0" rIns="0" bIns="0" anchor="t">
             <a:spAutoFit/>
           </a:bodyPr>
           <a:lstStyle/>
@@ -18570,7 +19153,7 @@
           <a:noFill/>
         </p:spPr>
         <p:txBody>
-          <a:bodyPr wrap="square" lIns="0" rIns="0" tIns="0" bIns="0" anchor="t">
+          <a:bodyPr wrap="square" lIns="0" tIns="0" rIns="0" bIns="0" anchor="t">
             <a:spAutoFit/>
           </a:bodyPr>
           <a:lstStyle/>
@@ -18640,6 +19223,7 @@
           <a:lstStyle/>
           <a:p>
             <a:pPr algn="ctr"/>
+            <a:endParaRPr/>
           </a:p>
         </p:txBody>
       </p:sp>
@@ -18683,6 +19267,7 @@
           <a:lstStyle/>
           <a:p>
             <a:pPr algn="ctr"/>
+            <a:endParaRPr/>
           </a:p>
         </p:txBody>
       </p:sp>
@@ -18703,7 +19288,7 @@
           <a:noFill/>
         </p:spPr>
         <p:txBody>
-          <a:bodyPr wrap="square" lIns="0" rIns="0" tIns="0" bIns="0" anchor="t">
+          <a:bodyPr wrap="square" lIns="0" tIns="0" rIns="0" bIns="0" anchor="t">
             <a:spAutoFit/>
           </a:bodyPr>
           <a:lstStyle/>
@@ -18748,7 +19333,7 @@
           <a:noFill/>
         </p:spPr>
         <p:txBody>
-          <a:bodyPr wrap="square" lIns="0" rIns="0" tIns="0" bIns="0" anchor="t">
+          <a:bodyPr wrap="square" lIns="0" tIns="0" rIns="0" bIns="0" anchor="t">
             <a:spAutoFit/>
           </a:bodyPr>
           <a:lstStyle/>
@@ -18793,7 +19378,7 @@
           <a:noFill/>
         </p:spPr>
         <p:txBody>
-          <a:bodyPr wrap="square" lIns="0" rIns="0" tIns="0" bIns="0" anchor="t">
+          <a:bodyPr wrap="square" lIns="0" tIns="0" rIns="0" bIns="0" anchor="t">
             <a:spAutoFit/>
           </a:bodyPr>
           <a:lstStyle/>
@@ -18863,6 +19448,7 @@
           <a:lstStyle/>
           <a:p>
             <a:pPr algn="ctr"/>
+            <a:endParaRPr/>
           </a:p>
         </p:txBody>
       </p:sp>
@@ -18906,6 +19492,7 @@
           <a:lstStyle/>
           <a:p>
             <a:pPr algn="ctr"/>
+            <a:endParaRPr/>
           </a:p>
         </p:txBody>
       </p:sp>
@@ -18926,7 +19513,7 @@
           <a:noFill/>
         </p:spPr>
         <p:txBody>
-          <a:bodyPr wrap="square" lIns="0" rIns="0" tIns="0" bIns="0" anchor="t">
+          <a:bodyPr wrap="square" lIns="0" tIns="0" rIns="0" bIns="0" anchor="t">
             <a:spAutoFit/>
           </a:bodyPr>
           <a:lstStyle/>
@@ -18971,7 +19558,7 @@
           <a:noFill/>
         </p:spPr>
         <p:txBody>
-          <a:bodyPr wrap="square" lIns="0" rIns="0" tIns="0" bIns="0" anchor="t">
+          <a:bodyPr wrap="square" lIns="0" tIns="0" rIns="0" bIns="0" anchor="t">
             <a:spAutoFit/>
           </a:bodyPr>
           <a:lstStyle/>
@@ -19016,7 +19603,7 @@
           <a:noFill/>
         </p:spPr>
         <p:txBody>
-          <a:bodyPr wrap="square" lIns="0" rIns="0" tIns="0" bIns="0" anchor="t">
+          <a:bodyPr wrap="square" lIns="0" tIns="0" rIns="0" bIns="0" anchor="t">
             <a:spAutoFit/>
           </a:bodyPr>
           <a:lstStyle/>
@@ -19086,6 +19673,7 @@
           <a:lstStyle/>
           <a:p>
             <a:pPr algn="ctr"/>
+            <a:endParaRPr/>
           </a:p>
         </p:txBody>
       </p:sp>
@@ -19106,7 +19694,7 @@
           <a:noFill/>
         </p:spPr>
         <p:txBody>
-          <a:bodyPr wrap="square" lIns="0" rIns="0" tIns="0" bIns="0" anchor="t">
+          <a:bodyPr wrap="square" lIns="0" tIns="0" rIns="0" bIns="0" anchor="t">
             <a:spAutoFit/>
           </a:bodyPr>
           <a:lstStyle/>
@@ -19157,7 +19745,7 @@
           <a:noFill/>
         </p:spPr>
         <p:txBody>
-          <a:bodyPr wrap="square" lIns="0" rIns="0" tIns="0" bIns="0" anchor="t">
+          <a:bodyPr wrap="square" lIns="0" tIns="0" rIns="0" bIns="0" anchor="t">
             <a:spAutoFit/>
           </a:bodyPr>
           <a:lstStyle/>
@@ -19202,7 +19790,7 @@
           <a:noFill/>
         </p:spPr>
         <p:txBody>
-          <a:bodyPr wrap="square" lIns="0" rIns="0" tIns="0" bIns="0" anchor="t">
+          <a:bodyPr wrap="square" lIns="0" tIns="0" rIns="0" bIns="0" anchor="t">
             <a:spAutoFit/>
           </a:bodyPr>
           <a:lstStyle/>
@@ -19239,7 +19827,7 @@
 </file>
 
 <file path=ppt/slides/slide4.xml><?xml version="1.0" encoding="utf-8"?>
-<p:sld xmlns:a="http://schemas.openxmlformats.org/drawingml/2006/main" xmlns:p="http://schemas.openxmlformats.org/presentationml/2006/main" xmlns:r="http://schemas.openxmlformats.org/officeDocument/2006/relationships">
+<p:sld xmlns:a="http://schemas.openxmlformats.org/drawingml/2006/main" xmlns:r="http://schemas.openxmlformats.org/officeDocument/2006/relationships" xmlns:p="http://schemas.openxmlformats.org/presentationml/2006/main">
   <p:cSld>
     <p:spTree>
       <p:nvGrpSpPr>
@@ -19247,7 +19835,14 @@
         <p:cNvGrpSpPr/>
         <p:nvPr/>
       </p:nvGrpSpPr>
-      <p:grpSpPr/>
+      <p:grpSpPr>
+        <a:xfrm>
+          <a:off x="0" y="0"/>
+          <a:ext cx="0" cy="0"/>
+          <a:chOff x="0" y="0"/>
+          <a:chExt cx="0" cy="0"/>
+        </a:xfrm>
+      </p:grpSpPr>
       <p:pic>
         <p:nvPicPr>
           <p:cNvPr id="2" name="Picture 1" descr="bg_subtle.png"/>
@@ -19289,7 +19884,7 @@
           <a:noFill/>
         </p:spPr>
         <p:txBody>
-          <a:bodyPr wrap="square" lIns="0" rIns="0" tIns="0" bIns="0" anchor="t">
+          <a:bodyPr wrap="square" lIns="0" tIns="0" rIns="0" bIns="0" anchor="t">
             <a:spAutoFit/>
           </a:bodyPr>
           <a:lstStyle/>
@@ -19334,7 +19929,7 @@
           <a:noFill/>
         </p:spPr>
         <p:txBody>
-          <a:bodyPr wrap="square" lIns="0" rIns="0" tIns="0" bIns="0" anchor="t">
+          <a:bodyPr wrap="square" lIns="0" tIns="0" rIns="0" bIns="0" anchor="t">
             <a:spAutoFit/>
           </a:bodyPr>
           <a:lstStyle/>
@@ -19379,7 +19974,7 @@
           <a:noFill/>
         </p:spPr>
         <p:txBody>
-          <a:bodyPr wrap="square" lIns="0" rIns="0" tIns="0" bIns="0" anchor="t">
+          <a:bodyPr wrap="square" lIns="0" tIns="0" rIns="0" bIns="0" anchor="t">
             <a:spAutoFit/>
           </a:bodyPr>
           <a:lstStyle/>
@@ -19424,7 +20019,7 @@
           <a:noFill/>
         </p:spPr>
         <p:txBody>
-          <a:bodyPr wrap="square" lIns="0" rIns="0" tIns="0" bIns="0" anchor="t">
+          <a:bodyPr wrap="square" lIns="0" tIns="0" rIns="0" bIns="0" anchor="t">
             <a:spAutoFit/>
           </a:bodyPr>
           <a:lstStyle/>
@@ -19493,7 +20088,7 @@
           <a:noFill/>
         </p:spPr>
         <p:txBody>
-          <a:bodyPr wrap="square" lIns="0" rIns="0" tIns="0" bIns="0" anchor="t">
+          <a:bodyPr wrap="square" lIns="0" tIns="0" rIns="0" bIns="0" anchor="t">
             <a:spAutoFit/>
           </a:bodyPr>
           <a:lstStyle/>
@@ -19538,7 +20133,7 @@
           <a:noFill/>
         </p:spPr>
         <p:txBody>
-          <a:bodyPr wrap="square" lIns="0" rIns="0" tIns="0" bIns="0" anchor="t">
+          <a:bodyPr wrap="square" lIns="0" tIns="0" rIns="0" bIns="0" anchor="t">
             <a:spAutoFit/>
           </a:bodyPr>
           <a:lstStyle/>
@@ -19608,6 +20203,7 @@
           <a:lstStyle/>
           <a:p>
             <a:pPr algn="ctr"/>
+            <a:endParaRPr/>
           </a:p>
         </p:txBody>
       </p:sp>
@@ -19628,7 +20224,7 @@
           <a:noFill/>
         </p:spPr>
         <p:txBody>
-          <a:bodyPr wrap="square" lIns="0" rIns="0" tIns="0" bIns="0" anchor="ctr">
+          <a:bodyPr wrap="square" lIns="0" tIns="0" rIns="0" bIns="0" anchor="ctr">
             <a:spAutoFit/>
           </a:bodyPr>
           <a:lstStyle/>
@@ -19675,7 +20271,7 @@
           <a:noFill/>
         </p:spPr>
         <p:txBody>
-          <a:bodyPr wrap="square" lIns="0" rIns="0" tIns="0" bIns="0" anchor="t">
+          <a:bodyPr wrap="square" lIns="0" tIns="0" rIns="0" bIns="0" anchor="t">
             <a:spAutoFit/>
           </a:bodyPr>
           <a:lstStyle/>
@@ -19720,7 +20316,7 @@
           <a:noFill/>
         </p:spPr>
         <p:txBody>
-          <a:bodyPr wrap="square" lIns="0" rIns="0" tIns="0" bIns="0" anchor="t">
+          <a:bodyPr wrap="square" lIns="0" tIns="0" rIns="0" bIns="0" anchor="t">
             <a:spAutoFit/>
           </a:bodyPr>
           <a:lstStyle/>
@@ -19790,6 +20386,7 @@
           <a:lstStyle/>
           <a:p>
             <a:pPr algn="ctr"/>
+            <a:endParaRPr/>
           </a:p>
         </p:txBody>
       </p:sp>
@@ -19810,7 +20407,7 @@
           <a:noFill/>
         </p:spPr>
         <p:txBody>
-          <a:bodyPr wrap="square" lIns="0" rIns="0" tIns="0" bIns="0" anchor="ctr">
+          <a:bodyPr wrap="square" lIns="0" tIns="0" rIns="0" bIns="0" anchor="ctr">
             <a:spAutoFit/>
           </a:bodyPr>
           <a:lstStyle/>
@@ -19856,7 +20453,7 @@
           <a:noFill/>
         </p:spPr>
         <p:txBody>
-          <a:bodyPr wrap="square" lIns="0" rIns="0" tIns="0" bIns="0" anchor="t">
+          <a:bodyPr wrap="square" lIns="0" tIns="0" rIns="0" bIns="0" anchor="t">
             <a:spAutoFit/>
           </a:bodyPr>
           <a:lstStyle/>
@@ -19901,7 +20498,7 @@
           <a:noFill/>
         </p:spPr>
         <p:txBody>
-          <a:bodyPr wrap="square" lIns="0" rIns="0" tIns="0" bIns="0" anchor="t">
+          <a:bodyPr wrap="square" lIns="0" tIns="0" rIns="0" bIns="0" anchor="t">
             <a:spAutoFit/>
           </a:bodyPr>
           <a:lstStyle/>
@@ -19971,6 +20568,7 @@
           <a:lstStyle/>
           <a:p>
             <a:pPr algn="ctr"/>
+            <a:endParaRPr/>
           </a:p>
         </p:txBody>
       </p:sp>
@@ -19991,7 +20589,7 @@
           <a:noFill/>
         </p:spPr>
         <p:txBody>
-          <a:bodyPr wrap="square" lIns="0" rIns="0" tIns="0" bIns="0" anchor="ctr">
+          <a:bodyPr wrap="square" lIns="0" tIns="0" rIns="0" bIns="0" anchor="ctr">
             <a:spAutoFit/>
           </a:bodyPr>
           <a:lstStyle/>
@@ -20037,7 +20635,7 @@
           <a:noFill/>
         </p:spPr>
         <p:txBody>
-          <a:bodyPr wrap="square" lIns="0" rIns="0" tIns="0" bIns="0" anchor="t">
+          <a:bodyPr wrap="square" lIns="0" tIns="0" rIns="0" bIns="0" anchor="t">
             <a:spAutoFit/>
           </a:bodyPr>
           <a:lstStyle/>
@@ -20082,7 +20680,7 @@
           <a:noFill/>
         </p:spPr>
         <p:txBody>
-          <a:bodyPr wrap="square" lIns="0" rIns="0" tIns="0" bIns="0" anchor="t">
+          <a:bodyPr wrap="square" lIns="0" tIns="0" rIns="0" bIns="0" anchor="t">
             <a:spAutoFit/>
           </a:bodyPr>
           <a:lstStyle/>
@@ -20152,6 +20750,7 @@
           <a:lstStyle/>
           <a:p>
             <a:pPr algn="ctr"/>
+            <a:endParaRPr/>
           </a:p>
         </p:txBody>
       </p:sp>
@@ -20172,7 +20771,7 @@
           <a:noFill/>
         </p:spPr>
         <p:txBody>
-          <a:bodyPr wrap="square" lIns="0" rIns="0" tIns="0" bIns="0" anchor="ctr">
+          <a:bodyPr wrap="square" lIns="0" tIns="0" rIns="0" bIns="0" anchor="ctr">
             <a:spAutoFit/>
           </a:bodyPr>
           <a:lstStyle/>
@@ -20218,7 +20817,7 @@
           <a:noFill/>
         </p:spPr>
         <p:txBody>
-          <a:bodyPr wrap="square" lIns="0" rIns="0" tIns="0" bIns="0" anchor="t">
+          <a:bodyPr wrap="square" lIns="0" tIns="0" rIns="0" bIns="0" anchor="t">
             <a:spAutoFit/>
           </a:bodyPr>
           <a:lstStyle/>
@@ -20288,6 +20887,7 @@
           <a:lstStyle/>
           <a:p>
             <a:pPr algn="ctr"/>
+            <a:endParaRPr/>
           </a:p>
         </p:txBody>
       </p:sp>
@@ -20333,6 +20933,7 @@
           <a:lstStyle/>
           <a:p>
             <a:pPr algn="ctr"/>
+            <a:endParaRPr/>
           </a:p>
         </p:txBody>
       </p:sp>
@@ -20353,7 +20954,7 @@
           <a:noFill/>
         </p:spPr>
         <p:txBody>
-          <a:bodyPr wrap="square" lIns="0" rIns="0" tIns="0" bIns="0" anchor="ctr">
+          <a:bodyPr wrap="square" lIns="0" tIns="0" rIns="0" bIns="0" anchor="ctr">
             <a:spAutoFit/>
           </a:bodyPr>
           <a:lstStyle/>
@@ -20398,7 +20999,7 @@
           <a:noFill/>
         </p:spPr>
         <p:txBody>
-          <a:bodyPr wrap="square" lIns="0" rIns="0" tIns="0" bIns="0" anchor="t">
+          <a:bodyPr wrap="square" lIns="0" tIns="0" rIns="0" bIns="0" anchor="t">
             <a:spAutoFit/>
           </a:bodyPr>
           <a:lstStyle/>
@@ -20468,6 +21069,7 @@
           <a:lstStyle/>
           <a:p>
             <a:pPr algn="ctr"/>
+            <a:endParaRPr/>
           </a:p>
         </p:txBody>
       </p:sp>
@@ -20488,7 +21090,7 @@
           <a:noFill/>
         </p:spPr>
         <p:txBody>
-          <a:bodyPr wrap="square" lIns="0" rIns="0" tIns="0" bIns="0" anchor="ctr">
+          <a:bodyPr wrap="square" lIns="0" tIns="0" rIns="0" bIns="0" anchor="ctr">
             <a:spAutoFit/>
           </a:bodyPr>
           <a:lstStyle/>
@@ -20533,7 +21135,7 @@
           <a:noFill/>
         </p:spPr>
         <p:txBody>
-          <a:bodyPr wrap="square" lIns="0" rIns="0" tIns="0" bIns="0" anchor="t">
+          <a:bodyPr wrap="square" lIns="0" tIns="0" rIns="0" bIns="0" anchor="t">
             <a:spAutoFit/>
           </a:bodyPr>
           <a:lstStyle/>
@@ -20603,6 +21205,7 @@
           <a:lstStyle/>
           <a:p>
             <a:pPr algn="ctr"/>
+            <a:endParaRPr/>
           </a:p>
         </p:txBody>
       </p:sp>
@@ -20623,7 +21226,7 @@
           <a:noFill/>
         </p:spPr>
         <p:txBody>
-          <a:bodyPr wrap="square" lIns="0" rIns="0" tIns="0" bIns="0" anchor="ctr">
+          <a:bodyPr wrap="square" lIns="0" tIns="0" rIns="0" bIns="0" anchor="ctr">
             <a:spAutoFit/>
           </a:bodyPr>
           <a:lstStyle/>
@@ -20668,7 +21271,7 @@
           <a:noFill/>
         </p:spPr>
         <p:txBody>
-          <a:bodyPr wrap="square" lIns="0" rIns="0" tIns="0" bIns="0" anchor="t">
+          <a:bodyPr wrap="square" lIns="0" tIns="0" rIns="0" bIns="0" anchor="t">
             <a:spAutoFit/>
           </a:bodyPr>
           <a:lstStyle/>
@@ -20738,6 +21341,7 @@
           <a:lstStyle/>
           <a:p>
             <a:pPr algn="ctr"/>
+            <a:endParaRPr/>
           </a:p>
         </p:txBody>
       </p:sp>
@@ -20758,7 +21362,7 @@
           <a:noFill/>
         </p:spPr>
         <p:txBody>
-          <a:bodyPr wrap="square" lIns="0" rIns="0" tIns="0" bIns="0" anchor="ctr">
+          <a:bodyPr wrap="square" lIns="0" tIns="0" rIns="0" bIns="0" anchor="ctr">
             <a:spAutoFit/>
           </a:bodyPr>
           <a:lstStyle/>
@@ -20803,7 +21407,7 @@
           <a:noFill/>
         </p:spPr>
         <p:txBody>
-          <a:bodyPr wrap="square" lIns="0" rIns="0" tIns="0" bIns="0" anchor="t">
+          <a:bodyPr wrap="square" lIns="0" tIns="0" rIns="0" bIns="0" anchor="t">
             <a:spAutoFit/>
           </a:bodyPr>
           <a:lstStyle/>
@@ -20848,7 +21452,7 @@
           <a:noFill/>
         </p:spPr>
         <p:txBody>
-          <a:bodyPr wrap="square" lIns="0" rIns="0" tIns="0" bIns="0" anchor="t">
+          <a:bodyPr wrap="square" lIns="0" tIns="0" rIns="0" bIns="0" anchor="t">
             <a:spAutoFit/>
           </a:bodyPr>
           <a:lstStyle/>
@@ -20885,7 +21489,7 @@
 </file>
 
 <file path=ppt/slides/slide5.xml><?xml version="1.0" encoding="utf-8"?>
-<p:sld xmlns:a="http://schemas.openxmlformats.org/drawingml/2006/main" xmlns:p="http://schemas.openxmlformats.org/presentationml/2006/main" xmlns:r="http://schemas.openxmlformats.org/officeDocument/2006/relationships">
+<p:sld xmlns:a="http://schemas.openxmlformats.org/drawingml/2006/main" xmlns:r="http://schemas.openxmlformats.org/officeDocument/2006/relationships" xmlns:p="http://schemas.openxmlformats.org/presentationml/2006/main">
   <p:cSld>
     <p:spTree>
       <p:nvGrpSpPr>
@@ -20893,7 +21497,14 @@
         <p:cNvGrpSpPr/>
         <p:nvPr/>
       </p:nvGrpSpPr>
-      <p:grpSpPr/>
+      <p:grpSpPr>
+        <a:xfrm>
+          <a:off x="0" y="0"/>
+          <a:ext cx="0" cy="0"/>
+          <a:chOff x="0" y="0"/>
+          <a:chExt cx="0" cy="0"/>
+        </a:xfrm>
+      </p:grpSpPr>
       <p:pic>
         <p:nvPicPr>
           <p:cNvPr id="2" name="Picture 1" descr="bg_subtle.png"/>
@@ -20935,7 +21546,7 @@
           <a:noFill/>
         </p:spPr>
         <p:txBody>
-          <a:bodyPr wrap="square" lIns="0" rIns="0" tIns="0" bIns="0" anchor="t">
+          <a:bodyPr wrap="square" lIns="0" tIns="0" rIns="0" bIns="0" anchor="t">
             <a:spAutoFit/>
           </a:bodyPr>
           <a:lstStyle/>
@@ -20980,7 +21591,7 @@
           <a:noFill/>
         </p:spPr>
         <p:txBody>
-          <a:bodyPr wrap="square" lIns="0" rIns="0" tIns="0" bIns="0" anchor="t">
+          <a:bodyPr wrap="square" lIns="0" tIns="0" rIns="0" bIns="0" anchor="t">
             <a:spAutoFit/>
           </a:bodyPr>
           <a:lstStyle/>
@@ -21025,7 +21636,7 @@
           <a:noFill/>
         </p:spPr>
         <p:txBody>
-          <a:bodyPr wrap="square" lIns="0" rIns="0" tIns="0" bIns="0" anchor="t">
+          <a:bodyPr wrap="square" lIns="0" tIns="0" rIns="0" bIns="0" anchor="t">
             <a:spAutoFit/>
           </a:bodyPr>
           <a:lstStyle/>
@@ -21070,7 +21681,7 @@
           <a:noFill/>
         </p:spPr>
         <p:txBody>
-          <a:bodyPr wrap="square" lIns="0" rIns="0" tIns="0" bIns="0" anchor="t">
+          <a:bodyPr wrap="square" lIns="0" tIns="0" rIns="0" bIns="0" anchor="t">
             <a:spAutoFit/>
           </a:bodyPr>
           <a:lstStyle/>
@@ -21139,7 +21750,7 @@
           <a:noFill/>
         </p:spPr>
         <p:txBody>
-          <a:bodyPr wrap="square" lIns="0" rIns="0" tIns="0" bIns="0" anchor="t">
+          <a:bodyPr wrap="square" lIns="0" tIns="0" rIns="0" bIns="0" anchor="t">
             <a:spAutoFit/>
           </a:bodyPr>
           <a:lstStyle/>
@@ -21207,6 +21818,7 @@
           <a:lstStyle/>
           <a:p>
             <a:pPr algn="ctr"/>
+            <a:endParaRPr/>
           </a:p>
         </p:txBody>
       </p:sp>
@@ -21227,7 +21839,7 @@
           <a:noFill/>
         </p:spPr>
         <p:txBody>
-          <a:bodyPr wrap="square" lIns="0" rIns="0" tIns="0" bIns="0" anchor="ctr">
+          <a:bodyPr wrap="square" lIns="0" tIns="0" rIns="0" bIns="0" anchor="ctr">
             <a:spAutoFit/>
           </a:bodyPr>
           <a:lstStyle/>
@@ -21272,7 +21884,7 @@
           <a:noFill/>
         </p:spPr>
         <p:txBody>
-          <a:bodyPr wrap="square" lIns="0" rIns="0" tIns="0" bIns="0" anchor="t">
+          <a:bodyPr wrap="square" lIns="0" tIns="0" rIns="0" bIns="0" anchor="t">
             <a:spAutoFit/>
           </a:bodyPr>
           <a:lstStyle/>
@@ -21317,7 +21929,7 @@
           <a:noFill/>
         </p:spPr>
         <p:txBody>
-          <a:bodyPr wrap="square" lIns="0" rIns="0" tIns="0" bIns="0" anchor="t">
+          <a:bodyPr wrap="square" lIns="0" tIns="0" rIns="0" bIns="0" anchor="t">
             <a:spAutoFit/>
           </a:bodyPr>
           <a:lstStyle/>
@@ -21363,7 +21975,7 @@
           <a:noFill/>
         </p:spPr>
         <p:txBody>
-          <a:bodyPr wrap="square" lIns="0" rIns="0" tIns="0" bIns="0" anchor="t">
+          <a:bodyPr wrap="square" lIns="0" tIns="0" rIns="0" bIns="0" anchor="t">
             <a:spAutoFit/>
           </a:bodyPr>
           <a:lstStyle/>
@@ -21431,6 +22043,7 @@
           <a:lstStyle/>
           <a:p>
             <a:pPr algn="ctr"/>
+            <a:endParaRPr/>
           </a:p>
         </p:txBody>
       </p:sp>
@@ -21451,7 +22064,7 @@
           <a:noFill/>
         </p:spPr>
         <p:txBody>
-          <a:bodyPr wrap="square" lIns="0" rIns="0" tIns="0" bIns="0" anchor="ctr">
+          <a:bodyPr wrap="square" lIns="0" tIns="0" rIns="0" bIns="0" anchor="ctr">
             <a:spAutoFit/>
           </a:bodyPr>
           <a:lstStyle/>
@@ -21496,7 +22109,7 @@
           <a:noFill/>
         </p:spPr>
         <p:txBody>
-          <a:bodyPr wrap="square" lIns="0" rIns="0" tIns="0" bIns="0" anchor="t">
+          <a:bodyPr wrap="square" lIns="0" tIns="0" rIns="0" bIns="0" anchor="t">
             <a:spAutoFit/>
           </a:bodyPr>
           <a:lstStyle/>
@@ -21541,7 +22154,7 @@
           <a:noFill/>
         </p:spPr>
         <p:txBody>
-          <a:bodyPr wrap="square" lIns="0" rIns="0" tIns="0" bIns="0" anchor="t">
+          <a:bodyPr wrap="square" lIns="0" tIns="0" rIns="0" bIns="0" anchor="t">
             <a:spAutoFit/>
           </a:bodyPr>
           <a:lstStyle/>
@@ -21587,7 +22200,7 @@
           <a:noFill/>
         </p:spPr>
         <p:txBody>
-          <a:bodyPr wrap="square" lIns="0" rIns="0" tIns="0" bIns="0" anchor="t">
+          <a:bodyPr wrap="square" lIns="0" tIns="0" rIns="0" bIns="0" anchor="t">
             <a:spAutoFit/>
           </a:bodyPr>
           <a:lstStyle/>
@@ -21655,6 +22268,7 @@
           <a:lstStyle/>
           <a:p>
             <a:pPr algn="ctr"/>
+            <a:endParaRPr/>
           </a:p>
         </p:txBody>
       </p:sp>
@@ -21675,7 +22289,7 @@
           <a:noFill/>
         </p:spPr>
         <p:txBody>
-          <a:bodyPr wrap="square" lIns="0" rIns="0" tIns="0" bIns="0" anchor="ctr">
+          <a:bodyPr wrap="square" lIns="0" tIns="0" rIns="0" bIns="0" anchor="ctr">
             <a:spAutoFit/>
           </a:bodyPr>
           <a:lstStyle/>
@@ -21720,7 +22334,7 @@
           <a:noFill/>
         </p:spPr>
         <p:txBody>
-          <a:bodyPr wrap="square" lIns="0" rIns="0" tIns="0" bIns="0" anchor="t">
+          <a:bodyPr wrap="square" lIns="0" tIns="0" rIns="0" bIns="0" anchor="t">
             <a:spAutoFit/>
           </a:bodyPr>
           <a:lstStyle/>
@@ -21765,7 +22379,7 @@
           <a:noFill/>
         </p:spPr>
         <p:txBody>
-          <a:bodyPr wrap="square" lIns="0" rIns="0" tIns="0" bIns="0" anchor="t">
+          <a:bodyPr wrap="square" lIns="0" tIns="0" rIns="0" bIns="0" anchor="t">
             <a:spAutoFit/>
           </a:bodyPr>
           <a:lstStyle/>
@@ -21811,7 +22425,7 @@
           <a:noFill/>
         </p:spPr>
         <p:txBody>
-          <a:bodyPr wrap="square" lIns="0" rIns="0" tIns="0" bIns="0" anchor="t">
+          <a:bodyPr wrap="square" lIns="0" tIns="0" rIns="0" bIns="0" anchor="t">
             <a:spAutoFit/>
           </a:bodyPr>
           <a:lstStyle/>
@@ -21879,6 +22493,7 @@
           <a:lstStyle/>
           <a:p>
             <a:pPr algn="ctr"/>
+            <a:endParaRPr/>
           </a:p>
         </p:txBody>
       </p:sp>
@@ -21899,7 +22514,7 @@
           <a:noFill/>
         </p:spPr>
         <p:txBody>
-          <a:bodyPr wrap="square" lIns="0" rIns="0" tIns="0" bIns="0" anchor="ctr">
+          <a:bodyPr wrap="square" lIns="0" tIns="0" rIns="0" bIns="0" anchor="ctr">
             <a:spAutoFit/>
           </a:bodyPr>
           <a:lstStyle/>
@@ -21944,7 +22559,7 @@
           <a:noFill/>
         </p:spPr>
         <p:txBody>
-          <a:bodyPr wrap="square" lIns="0" rIns="0" tIns="0" bIns="0" anchor="t">
+          <a:bodyPr wrap="square" lIns="0" tIns="0" rIns="0" bIns="0" anchor="t">
             <a:spAutoFit/>
           </a:bodyPr>
           <a:lstStyle/>
@@ -21989,7 +22604,7 @@
           <a:noFill/>
         </p:spPr>
         <p:txBody>
-          <a:bodyPr wrap="square" lIns="0" rIns="0" tIns="0" bIns="0" anchor="t">
+          <a:bodyPr wrap="square" lIns="0" tIns="0" rIns="0" bIns="0" anchor="t">
             <a:spAutoFit/>
           </a:bodyPr>
           <a:lstStyle/>
@@ -22035,7 +22650,7 @@
           <a:noFill/>
         </p:spPr>
         <p:txBody>
-          <a:bodyPr wrap="square" lIns="0" rIns="0" tIns="0" bIns="0" anchor="t">
+          <a:bodyPr wrap="square" lIns="0" tIns="0" rIns="0" bIns="0" anchor="t">
             <a:spAutoFit/>
           </a:bodyPr>
           <a:lstStyle/>
@@ -22103,6 +22718,7 @@
           <a:lstStyle/>
           <a:p>
             <a:pPr algn="ctr"/>
+            <a:endParaRPr/>
           </a:p>
         </p:txBody>
       </p:sp>
@@ -22123,7 +22739,7 @@
           <a:noFill/>
         </p:spPr>
         <p:txBody>
-          <a:bodyPr wrap="square" lIns="0" rIns="0" tIns="0" bIns="0" anchor="ctr">
+          <a:bodyPr wrap="square" lIns="0" tIns="0" rIns="0" bIns="0" anchor="ctr">
             <a:spAutoFit/>
           </a:bodyPr>
           <a:lstStyle/>
@@ -22168,7 +22784,7 @@
           <a:noFill/>
         </p:spPr>
         <p:txBody>
-          <a:bodyPr wrap="square" lIns="0" rIns="0" tIns="0" bIns="0" anchor="t">
+          <a:bodyPr wrap="square" lIns="0" tIns="0" rIns="0" bIns="0" anchor="t">
             <a:spAutoFit/>
           </a:bodyPr>
           <a:lstStyle/>
@@ -22213,7 +22829,7 @@
           <a:noFill/>
         </p:spPr>
         <p:txBody>
-          <a:bodyPr wrap="square" lIns="0" rIns="0" tIns="0" bIns="0" anchor="t">
+          <a:bodyPr wrap="square" lIns="0" tIns="0" rIns="0" bIns="0" anchor="t">
             <a:spAutoFit/>
           </a:bodyPr>
           <a:lstStyle/>
@@ -22284,6 +22900,7 @@
           <a:lstStyle/>
           <a:p>
             <a:pPr algn="ctr"/>
+            <a:endParaRPr/>
           </a:p>
         </p:txBody>
       </p:sp>
@@ -22304,7 +22921,7 @@
           <a:noFill/>
         </p:spPr>
         <p:txBody>
-          <a:bodyPr wrap="square" lIns="0" rIns="0" tIns="0" bIns="0" anchor="t">
+          <a:bodyPr wrap="square" lIns="0" tIns="0" rIns="0" bIns="0" anchor="t">
             <a:spAutoFit/>
           </a:bodyPr>
           <a:lstStyle/>
@@ -22364,7 +22981,7 @@
           <a:noFill/>
         </p:spPr>
         <p:txBody>
-          <a:bodyPr wrap="square" lIns="0" rIns="0" tIns="0" bIns="0" anchor="t">
+          <a:bodyPr wrap="square" lIns="0" tIns="0" rIns="0" bIns="0" anchor="t">
             <a:spAutoFit/>
           </a:bodyPr>
           <a:lstStyle/>
@@ -22409,7 +23026,7 @@
           <a:noFill/>
         </p:spPr>
         <p:txBody>
-          <a:bodyPr wrap="square" lIns="0" rIns="0" tIns="0" bIns="0" anchor="t">
+          <a:bodyPr wrap="square" lIns="0" tIns="0" rIns="0" bIns="0" anchor="t">
             <a:spAutoFit/>
           </a:bodyPr>
           <a:lstStyle/>
@@ -22446,7 +23063,7 @@
 </file>
 
 <file path=ppt/slides/slide6.xml><?xml version="1.0" encoding="utf-8"?>
-<p:sld xmlns:a="http://schemas.openxmlformats.org/drawingml/2006/main" xmlns:p="http://schemas.openxmlformats.org/presentationml/2006/main" xmlns:r="http://schemas.openxmlformats.org/officeDocument/2006/relationships">
+<p:sld xmlns:a="http://schemas.openxmlformats.org/drawingml/2006/main" xmlns:r="http://schemas.openxmlformats.org/officeDocument/2006/relationships" xmlns:p="http://schemas.openxmlformats.org/presentationml/2006/main">
   <p:cSld>
     <p:spTree>
       <p:nvGrpSpPr>
@@ -22454,7 +23071,14 @@
         <p:cNvGrpSpPr/>
         <p:nvPr/>
       </p:nvGrpSpPr>
-      <p:grpSpPr/>
+      <p:grpSpPr>
+        <a:xfrm>
+          <a:off x="0" y="0"/>
+          <a:ext cx="0" cy="0"/>
+          <a:chOff x="0" y="0"/>
+          <a:chExt cx="0" cy="0"/>
+        </a:xfrm>
+      </p:grpSpPr>
       <p:pic>
         <p:nvPicPr>
           <p:cNvPr id="2" name="Picture 1" descr="bg_subtle.png"/>
@@ -22496,7 +23120,7 @@
           <a:noFill/>
         </p:spPr>
         <p:txBody>
-          <a:bodyPr wrap="square" lIns="0" rIns="0" tIns="0" bIns="0" anchor="t">
+          <a:bodyPr wrap="square" lIns="0" tIns="0" rIns="0" bIns="0" anchor="t">
             <a:spAutoFit/>
           </a:bodyPr>
           <a:lstStyle/>
@@ -22541,7 +23165,7 @@
           <a:noFill/>
         </p:spPr>
         <p:txBody>
-          <a:bodyPr wrap="square" lIns="0" rIns="0" tIns="0" bIns="0" anchor="t">
+          <a:bodyPr wrap="square" lIns="0" tIns="0" rIns="0" bIns="0" anchor="t">
             <a:spAutoFit/>
           </a:bodyPr>
           <a:lstStyle/>
@@ -22586,7 +23210,7 @@
           <a:noFill/>
         </p:spPr>
         <p:txBody>
-          <a:bodyPr wrap="square" lIns="0" rIns="0" tIns="0" bIns="0" anchor="t">
+          <a:bodyPr wrap="square" lIns="0" tIns="0" rIns="0" bIns="0" anchor="t">
             <a:spAutoFit/>
           </a:bodyPr>
           <a:lstStyle/>
@@ -22631,7 +23255,7 @@
           <a:noFill/>
         </p:spPr>
         <p:txBody>
-          <a:bodyPr wrap="square" lIns="0" rIns="0" tIns="0" bIns="0" anchor="t">
+          <a:bodyPr wrap="square" lIns="0" tIns="0" rIns="0" bIns="0" anchor="t">
             <a:spAutoFit/>
           </a:bodyPr>
           <a:lstStyle/>
@@ -22700,7 +23324,7 @@
           <a:noFill/>
         </p:spPr>
         <p:txBody>
-          <a:bodyPr wrap="square" lIns="0" rIns="0" tIns="0" bIns="0" anchor="t">
+          <a:bodyPr wrap="square" lIns="0" tIns="0" rIns="0" bIns="0" anchor="t">
             <a:spAutoFit/>
           </a:bodyPr>
           <a:lstStyle/>
@@ -22736,8 +23360,8 @@
         </p:nvSpPr>
         <p:spPr>
           <a:xfrm>
-            <a:off x="841248" y="1901952"/>
-            <a:ext cx="3200400" cy="3200400"/>
+            <a:off x="246888" y="1926336"/>
+            <a:ext cx="3840480" cy="3200400"/>
           </a:xfrm>
           <a:prstGeom prst="hexagon">
             <a:avLst/>
@@ -22770,6 +23394,7 @@
           <a:lstStyle/>
           <a:p>
             <a:pPr algn="ctr"/>
+            <a:endParaRPr/>
           </a:p>
         </p:txBody>
       </p:sp>
@@ -22781,7 +23406,7 @@
         </p:nvSpPr>
         <p:spPr>
           <a:xfrm>
-            <a:off x="1709928" y="2889504"/>
+            <a:off x="1461516" y="2907792"/>
             <a:ext cx="1463040" cy="457200"/>
           </a:xfrm>
           <a:prstGeom prst="rect">
@@ -22790,7 +23415,7 @@
           <a:noFill/>
         </p:spPr>
         <p:txBody>
-          <a:bodyPr wrap="square" lIns="0" rIns="0" tIns="0" bIns="0" anchor="t">
+          <a:bodyPr wrap="square" lIns="0" tIns="0" rIns="0" bIns="0" anchor="t">
             <a:spAutoFit/>
           </a:bodyPr>
           <a:lstStyle/>
@@ -22807,7 +23432,7 @@
               </a:spcAft>
             </a:pPr>
             <a:r>
-              <a:rPr sz="2400" b="1" i="0">
+              <a:rPr sz="2400" b="1" i="0" dirty="0">
                 <a:solidFill>
                   <a:srgbClr val="F5F5FA"/>
                 </a:solidFill>
@@ -22826,7 +23451,7 @@
         </p:nvSpPr>
         <p:spPr>
           <a:xfrm>
-            <a:off x="1801368" y="3401568"/>
+            <a:off x="1527048" y="3409188"/>
             <a:ext cx="1280160" cy="502920"/>
           </a:xfrm>
           <a:prstGeom prst="rect">
@@ -22835,7 +23460,7 @@
           <a:noFill/>
         </p:spPr>
         <p:txBody>
-          <a:bodyPr wrap="square" lIns="0" rIns="0" tIns="0" bIns="0" anchor="t">
+          <a:bodyPr wrap="square" lIns="0" tIns="0" rIns="0" bIns="0" anchor="t">
             <a:spAutoFit/>
           </a:bodyPr>
           <a:lstStyle/>
@@ -22852,7 +23477,7 @@
               </a:spcAft>
             </a:pPr>
             <a:r>
-              <a:rPr sz="1200" b="0" i="0">
+              <a:rPr sz="1200" b="0" i="0" dirty="0">
                 <a:solidFill>
                   <a:srgbClr val="A8A8BE"/>
                 </a:solidFill>
@@ -22904,6 +23529,7 @@
           <a:lstStyle/>
           <a:p>
             <a:pPr algn="ctr"/>
+            <a:endParaRPr/>
           </a:p>
         </p:txBody>
       </p:sp>
@@ -22924,7 +23550,7 @@
           <a:noFill/>
         </p:spPr>
         <p:txBody>
-          <a:bodyPr wrap="square" lIns="0" rIns="0" tIns="0" bIns="0" anchor="ctr">
+          <a:bodyPr wrap="square" lIns="0" tIns="0" rIns="0" bIns="0" anchor="ctr">
             <a:spAutoFit/>
           </a:bodyPr>
           <a:lstStyle/>
@@ -22969,7 +23595,7 @@
           <a:noFill/>
         </p:spPr>
         <p:txBody>
-          <a:bodyPr wrap="square" lIns="0" rIns="0" tIns="0" bIns="0" anchor="t">
+          <a:bodyPr wrap="square" lIns="0" tIns="0" rIns="0" bIns="0" anchor="t">
             <a:spAutoFit/>
           </a:bodyPr>
           <a:lstStyle/>
@@ -23037,6 +23663,7 @@
           <a:lstStyle/>
           <a:p>
             <a:pPr algn="ctr"/>
+            <a:endParaRPr/>
           </a:p>
         </p:txBody>
       </p:sp>
@@ -23057,7 +23684,7 @@
           <a:noFill/>
         </p:spPr>
         <p:txBody>
-          <a:bodyPr wrap="square" lIns="0" rIns="0" tIns="0" bIns="0" anchor="ctr">
+          <a:bodyPr wrap="square" lIns="0" tIns="0" rIns="0" bIns="0" anchor="ctr">
             <a:spAutoFit/>
           </a:bodyPr>
           <a:lstStyle/>
@@ -23102,7 +23729,7 @@
           <a:noFill/>
         </p:spPr>
         <p:txBody>
-          <a:bodyPr wrap="square" lIns="0" rIns="0" tIns="0" bIns="0" anchor="t">
+          <a:bodyPr wrap="square" lIns="0" tIns="0" rIns="0" bIns="0" anchor="t">
             <a:spAutoFit/>
           </a:bodyPr>
           <a:lstStyle/>
@@ -23170,6 +23797,7 @@
           <a:lstStyle/>
           <a:p>
             <a:pPr algn="ctr"/>
+            <a:endParaRPr/>
           </a:p>
         </p:txBody>
       </p:sp>
@@ -23190,7 +23818,7 @@
           <a:noFill/>
         </p:spPr>
         <p:txBody>
-          <a:bodyPr wrap="square" lIns="0" rIns="0" tIns="0" bIns="0" anchor="ctr">
+          <a:bodyPr wrap="square" lIns="0" tIns="0" rIns="0" bIns="0" anchor="ctr">
             <a:spAutoFit/>
           </a:bodyPr>
           <a:lstStyle/>
@@ -23235,7 +23863,7 @@
           <a:noFill/>
         </p:spPr>
         <p:txBody>
-          <a:bodyPr wrap="square" lIns="0" rIns="0" tIns="0" bIns="0" anchor="t">
+          <a:bodyPr wrap="square" lIns="0" tIns="0" rIns="0" bIns="0" anchor="t">
             <a:spAutoFit/>
           </a:bodyPr>
           <a:lstStyle/>
@@ -23303,6 +23931,7 @@
           <a:lstStyle/>
           <a:p>
             <a:pPr algn="ctr"/>
+            <a:endParaRPr/>
           </a:p>
         </p:txBody>
       </p:sp>
@@ -23323,7 +23952,7 @@
           <a:noFill/>
         </p:spPr>
         <p:txBody>
-          <a:bodyPr wrap="square" lIns="0" rIns="0" tIns="0" bIns="0" anchor="ctr">
+          <a:bodyPr wrap="square" lIns="0" tIns="0" rIns="0" bIns="0" anchor="ctr">
             <a:spAutoFit/>
           </a:bodyPr>
           <a:lstStyle/>
@@ -23368,7 +23997,7 @@
           <a:noFill/>
         </p:spPr>
         <p:txBody>
-          <a:bodyPr wrap="square" lIns="0" rIns="0" tIns="0" bIns="0" anchor="t">
+          <a:bodyPr wrap="square" lIns="0" tIns="0" rIns="0" bIns="0" anchor="t">
             <a:spAutoFit/>
           </a:bodyPr>
           <a:lstStyle/>
@@ -23436,6 +24065,7 @@
           <a:lstStyle/>
           <a:p>
             <a:pPr algn="ctr"/>
+            <a:endParaRPr/>
           </a:p>
         </p:txBody>
       </p:sp>
@@ -23456,7 +24086,7 @@
           <a:noFill/>
         </p:spPr>
         <p:txBody>
-          <a:bodyPr wrap="square" lIns="0" rIns="0" tIns="0" bIns="0" anchor="ctr">
+          <a:bodyPr wrap="square" lIns="0" tIns="0" rIns="0" bIns="0" anchor="ctr">
             <a:spAutoFit/>
           </a:bodyPr>
           <a:lstStyle/>
@@ -23501,7 +24131,7 @@
           <a:noFill/>
         </p:spPr>
         <p:txBody>
-          <a:bodyPr wrap="square" lIns="0" rIns="0" tIns="0" bIns="0" anchor="t">
+          <a:bodyPr wrap="square" lIns="0" tIns="0" rIns="0" bIns="0" anchor="t">
             <a:spAutoFit/>
           </a:bodyPr>
           <a:lstStyle/>
@@ -23569,6 +24199,7 @@
           <a:lstStyle/>
           <a:p>
             <a:pPr algn="ctr"/>
+            <a:endParaRPr/>
           </a:p>
         </p:txBody>
       </p:sp>
@@ -23589,7 +24220,7 @@
           <a:noFill/>
         </p:spPr>
         <p:txBody>
-          <a:bodyPr wrap="square" lIns="0" rIns="0" tIns="0" bIns="0" anchor="ctr">
+          <a:bodyPr wrap="square" lIns="0" tIns="0" rIns="0" bIns="0" anchor="ctr">
             <a:spAutoFit/>
           </a:bodyPr>
           <a:lstStyle/>
@@ -23634,7 +24265,7 @@
           <a:noFill/>
         </p:spPr>
         <p:txBody>
-          <a:bodyPr wrap="square" lIns="0" rIns="0" tIns="0" bIns="0" anchor="t">
+          <a:bodyPr wrap="square" lIns="0" tIns="0" rIns="0" bIns="0" anchor="t">
             <a:spAutoFit/>
           </a:bodyPr>
           <a:lstStyle/>
@@ -23704,6 +24335,7 @@
           <a:lstStyle/>
           <a:p>
             <a:pPr algn="ctr"/>
+            <a:endParaRPr/>
           </a:p>
         </p:txBody>
       </p:sp>
@@ -23724,7 +24356,7 @@
           <a:noFill/>
         </p:spPr>
         <p:txBody>
-          <a:bodyPr wrap="square" lIns="0" rIns="0" tIns="0" bIns="0" anchor="t">
+          <a:bodyPr wrap="square" lIns="0" tIns="0" rIns="0" bIns="0" anchor="t">
             <a:spAutoFit/>
           </a:bodyPr>
           <a:lstStyle/>
@@ -23769,7 +24401,7 @@
           <a:noFill/>
         </p:spPr>
         <p:txBody>
-          <a:bodyPr wrap="square" lIns="0" rIns="0" tIns="0" bIns="0" anchor="t">
+          <a:bodyPr wrap="square" lIns="0" tIns="0" rIns="0" bIns="0" anchor="t">
             <a:spAutoFit/>
           </a:bodyPr>
           <a:lstStyle/>
@@ -23814,7 +24446,7 @@
           <a:noFill/>
         </p:spPr>
         <p:txBody>
-          <a:bodyPr wrap="square" lIns="0" rIns="0" tIns="0" bIns="0" anchor="t">
+          <a:bodyPr wrap="square" lIns="0" tIns="0" rIns="0" bIns="0" anchor="t">
             <a:spAutoFit/>
           </a:bodyPr>
           <a:lstStyle/>
@@ -23884,6 +24516,7 @@
           <a:lstStyle/>
           <a:p>
             <a:pPr algn="ctr"/>
+            <a:endParaRPr/>
           </a:p>
         </p:txBody>
       </p:sp>
@@ -23904,7 +24537,7 @@
           <a:noFill/>
         </p:spPr>
         <p:txBody>
-          <a:bodyPr wrap="square" lIns="0" rIns="0" tIns="0" bIns="0" anchor="t">
+          <a:bodyPr wrap="square" lIns="0" tIns="0" rIns="0" bIns="0" anchor="t">
             <a:spAutoFit/>
           </a:bodyPr>
           <a:lstStyle/>
@@ -23949,7 +24582,7 @@
           <a:noFill/>
         </p:spPr>
         <p:txBody>
-          <a:bodyPr wrap="square" lIns="0" rIns="0" tIns="0" bIns="0" anchor="t">
+          <a:bodyPr wrap="square" lIns="0" tIns="0" rIns="0" bIns="0" anchor="t">
             <a:spAutoFit/>
           </a:bodyPr>
           <a:lstStyle/>
@@ -23994,7 +24627,7 @@
           <a:noFill/>
         </p:spPr>
         <p:txBody>
-          <a:bodyPr wrap="square" lIns="0" rIns="0" tIns="0" bIns="0" anchor="t">
+          <a:bodyPr wrap="square" lIns="0" tIns="0" rIns="0" bIns="0" anchor="t">
             <a:spAutoFit/>
           </a:bodyPr>
           <a:lstStyle/>
@@ -24064,6 +24697,7 @@
           <a:lstStyle/>
           <a:p>
             <a:pPr algn="ctr"/>
+            <a:endParaRPr/>
           </a:p>
         </p:txBody>
       </p:sp>
@@ -24084,7 +24718,7 @@
           <a:noFill/>
         </p:spPr>
         <p:txBody>
-          <a:bodyPr wrap="square" lIns="0" rIns="0" tIns="0" bIns="0" anchor="t">
+          <a:bodyPr wrap="square" lIns="0" tIns="0" rIns="0" bIns="0" anchor="t">
             <a:spAutoFit/>
           </a:bodyPr>
           <a:lstStyle/>
@@ -24129,7 +24763,7 @@
           <a:noFill/>
         </p:spPr>
         <p:txBody>
-          <a:bodyPr wrap="square" lIns="0" rIns="0" tIns="0" bIns="0" anchor="t">
+          <a:bodyPr wrap="square" lIns="0" tIns="0" rIns="0" bIns="0" anchor="t">
             <a:spAutoFit/>
           </a:bodyPr>
           <a:lstStyle/>
@@ -24174,7 +24808,7 @@
           <a:noFill/>
         </p:spPr>
         <p:txBody>
-          <a:bodyPr wrap="square" lIns="0" rIns="0" tIns="0" bIns="0" anchor="t">
+          <a:bodyPr wrap="square" lIns="0" tIns="0" rIns="0" bIns="0" anchor="t">
             <a:spAutoFit/>
           </a:bodyPr>
           <a:lstStyle/>
@@ -24244,6 +24878,7 @@
           <a:lstStyle/>
           <a:p>
             <a:pPr algn="ctr"/>
+            <a:endParaRPr/>
           </a:p>
         </p:txBody>
       </p:sp>
@@ -24264,7 +24899,7 @@
           <a:noFill/>
         </p:spPr>
         <p:txBody>
-          <a:bodyPr wrap="square" lIns="0" rIns="0" tIns="0" bIns="0" anchor="t">
+          <a:bodyPr wrap="square" lIns="0" tIns="0" rIns="0" bIns="0" anchor="t">
             <a:spAutoFit/>
           </a:bodyPr>
           <a:lstStyle/>
@@ -24309,7 +24944,7 @@
           <a:noFill/>
         </p:spPr>
         <p:txBody>
-          <a:bodyPr wrap="square" lIns="0" rIns="0" tIns="0" bIns="0" anchor="t">
+          <a:bodyPr wrap="square" lIns="0" tIns="0" rIns="0" bIns="0" anchor="t">
             <a:spAutoFit/>
           </a:bodyPr>
           <a:lstStyle/>
@@ -24354,7 +24989,7 @@
           <a:noFill/>
         </p:spPr>
         <p:txBody>
-          <a:bodyPr wrap="square" lIns="0" rIns="0" tIns="0" bIns="0" anchor="t">
+          <a:bodyPr wrap="square" lIns="0" tIns="0" rIns="0" bIns="0" anchor="t">
             <a:spAutoFit/>
           </a:bodyPr>
           <a:lstStyle/>
@@ -24424,6 +25059,7 @@
           <a:lstStyle/>
           <a:p>
             <a:pPr algn="ctr"/>
+            <a:endParaRPr/>
           </a:p>
         </p:txBody>
       </p:sp>
@@ -24444,7 +25080,7 @@
           <a:noFill/>
         </p:spPr>
         <p:txBody>
-          <a:bodyPr wrap="square" lIns="0" rIns="0" tIns="0" bIns="0" anchor="t">
+          <a:bodyPr wrap="square" lIns="0" tIns="0" rIns="0" bIns="0" anchor="t">
             <a:spAutoFit/>
           </a:bodyPr>
           <a:lstStyle/>
@@ -24489,7 +25125,7 @@
           <a:noFill/>
         </p:spPr>
         <p:txBody>
-          <a:bodyPr wrap="square" lIns="0" rIns="0" tIns="0" bIns="0" anchor="t">
+          <a:bodyPr wrap="square" lIns="0" tIns="0" rIns="0" bIns="0" anchor="t">
             <a:spAutoFit/>
           </a:bodyPr>
           <a:lstStyle/>
@@ -24526,7 +25162,7 @@
 </file>
 
 <file path=ppt/slides/slide7.xml><?xml version="1.0" encoding="utf-8"?>
-<p:sld xmlns:a="http://schemas.openxmlformats.org/drawingml/2006/main" xmlns:p="http://schemas.openxmlformats.org/presentationml/2006/main" xmlns:r="http://schemas.openxmlformats.org/officeDocument/2006/relationships">
+<p:sld xmlns:a="http://schemas.openxmlformats.org/drawingml/2006/main" xmlns:r="http://schemas.openxmlformats.org/officeDocument/2006/relationships" xmlns:p="http://schemas.openxmlformats.org/presentationml/2006/main">
   <p:cSld>
     <p:spTree>
       <p:nvGrpSpPr>
@@ -24534,7 +25170,14 @@
         <p:cNvGrpSpPr/>
         <p:nvPr/>
       </p:nvGrpSpPr>
-      <p:grpSpPr/>
+      <p:grpSpPr>
+        <a:xfrm>
+          <a:off x="0" y="0"/>
+          <a:ext cx="0" cy="0"/>
+          <a:chOff x="0" y="0"/>
+          <a:chExt cx="0" cy="0"/>
+        </a:xfrm>
+      </p:grpSpPr>
       <p:pic>
         <p:nvPicPr>
           <p:cNvPr id="2" name="Picture 1" descr="bg_subtle.png"/>
@@ -24576,7 +25219,7 @@
           <a:noFill/>
         </p:spPr>
         <p:txBody>
-          <a:bodyPr wrap="square" lIns="0" rIns="0" tIns="0" bIns="0" anchor="t">
+          <a:bodyPr wrap="square" lIns="0" tIns="0" rIns="0" bIns="0" anchor="t">
             <a:spAutoFit/>
           </a:bodyPr>
           <a:lstStyle/>
@@ -24621,7 +25264,7 @@
           <a:noFill/>
         </p:spPr>
         <p:txBody>
-          <a:bodyPr wrap="square" lIns="0" rIns="0" tIns="0" bIns="0" anchor="t">
+          <a:bodyPr wrap="square" lIns="0" tIns="0" rIns="0" bIns="0" anchor="t">
             <a:spAutoFit/>
           </a:bodyPr>
           <a:lstStyle/>
@@ -24666,7 +25309,7 @@
           <a:noFill/>
         </p:spPr>
         <p:txBody>
-          <a:bodyPr wrap="square" lIns="0" rIns="0" tIns="0" bIns="0" anchor="t">
+          <a:bodyPr wrap="square" lIns="0" tIns="0" rIns="0" bIns="0" anchor="t">
             <a:spAutoFit/>
           </a:bodyPr>
           <a:lstStyle/>
@@ -24711,7 +25354,7 @@
           <a:noFill/>
         </p:spPr>
         <p:txBody>
-          <a:bodyPr wrap="square" lIns="0" rIns="0" tIns="0" bIns="0" anchor="t">
+          <a:bodyPr wrap="square" lIns="0" tIns="0" rIns="0" bIns="0" anchor="t">
             <a:spAutoFit/>
           </a:bodyPr>
           <a:lstStyle/>
@@ -24780,7 +25423,7 @@
           <a:noFill/>
         </p:spPr>
         <p:txBody>
-          <a:bodyPr wrap="square" lIns="0" rIns="0" tIns="0" bIns="0" anchor="t">
+          <a:bodyPr wrap="square" lIns="0" tIns="0" rIns="0" bIns="0" anchor="t">
             <a:spAutoFit/>
           </a:bodyPr>
           <a:lstStyle/>
@@ -24825,7 +25468,7 @@
           <a:noFill/>
         </p:spPr>
         <p:txBody>
-          <a:bodyPr wrap="square" lIns="0" rIns="0" tIns="0" bIns="0" anchor="t">
+          <a:bodyPr wrap="square" lIns="0" tIns="0" rIns="0" bIns="0" anchor="t">
             <a:spAutoFit/>
           </a:bodyPr>
           <a:lstStyle/>
@@ -24870,7 +25513,7 @@
           <a:noFill/>
         </p:spPr>
         <p:txBody>
-          <a:bodyPr wrap="square" lIns="0" rIns="0" tIns="0" bIns="0" anchor="t">
+          <a:bodyPr wrap="square" lIns="0" tIns="0" rIns="0" bIns="0" anchor="t">
             <a:spAutoFit/>
           </a:bodyPr>
           <a:lstStyle/>
@@ -24915,7 +25558,7 @@
           <a:noFill/>
         </p:spPr>
         <p:txBody>
-          <a:bodyPr wrap="square" lIns="0" rIns="0" tIns="0" bIns="0" anchor="t">
+          <a:bodyPr wrap="square" lIns="0" tIns="0" rIns="0" bIns="0" anchor="t">
             <a:spAutoFit/>
           </a:bodyPr>
           <a:lstStyle/>
@@ -24960,7 +25603,7 @@
           <a:noFill/>
         </p:spPr>
         <p:txBody>
-          <a:bodyPr wrap="square" lIns="0" rIns="0" tIns="0" bIns="0" anchor="t">
+          <a:bodyPr wrap="square" lIns="0" tIns="0" rIns="0" bIns="0" anchor="t">
             <a:spAutoFit/>
           </a:bodyPr>
           <a:lstStyle/>
@@ -25040,7 +25683,7 @@
           <a:noFill/>
         </p:spPr>
         <p:txBody>
-          <a:bodyPr wrap="square" lIns="0" rIns="0" tIns="0" bIns="0" anchor="t">
+          <a:bodyPr wrap="square" lIns="0" tIns="0" rIns="0" bIns="0" anchor="t">
             <a:spAutoFit/>
           </a:bodyPr>
           <a:lstStyle/>
@@ -25085,7 +25728,7 @@
           <a:noFill/>
         </p:spPr>
         <p:txBody>
-          <a:bodyPr wrap="square" lIns="0" rIns="0" tIns="0" bIns="0" anchor="t">
+          <a:bodyPr wrap="square" lIns="0" tIns="0" rIns="0" bIns="0" anchor="t">
             <a:spAutoFit/>
           </a:bodyPr>
           <a:lstStyle/>
@@ -25130,7 +25773,7 @@
           <a:noFill/>
         </p:spPr>
         <p:txBody>
-          <a:bodyPr wrap="square" lIns="0" rIns="0" tIns="0" bIns="0" anchor="t">
+          <a:bodyPr wrap="square" lIns="0" tIns="0" rIns="0" bIns="0" anchor="t">
             <a:spAutoFit/>
           </a:bodyPr>
           <a:lstStyle/>
@@ -25175,7 +25818,7 @@
           <a:noFill/>
         </p:spPr>
         <p:txBody>
-          <a:bodyPr wrap="square" lIns="0" rIns="0" tIns="0" bIns="0" anchor="t">
+          <a:bodyPr wrap="square" lIns="0" tIns="0" rIns="0" bIns="0" anchor="t">
             <a:spAutoFit/>
           </a:bodyPr>
           <a:lstStyle/>
@@ -25255,7 +25898,7 @@
           <a:noFill/>
         </p:spPr>
         <p:txBody>
-          <a:bodyPr wrap="square" lIns="0" rIns="0" tIns="0" bIns="0" anchor="t">
+          <a:bodyPr wrap="square" lIns="0" tIns="0" rIns="0" bIns="0" anchor="t">
             <a:spAutoFit/>
           </a:bodyPr>
           <a:lstStyle/>
@@ -25300,7 +25943,7 @@
           <a:noFill/>
         </p:spPr>
         <p:txBody>
-          <a:bodyPr wrap="square" lIns="0" rIns="0" tIns="0" bIns="0" anchor="t">
+          <a:bodyPr wrap="square" lIns="0" tIns="0" rIns="0" bIns="0" anchor="t">
             <a:spAutoFit/>
           </a:bodyPr>
           <a:lstStyle/>
@@ -25345,7 +25988,7 @@
           <a:noFill/>
         </p:spPr>
         <p:txBody>
-          <a:bodyPr wrap="square" lIns="0" rIns="0" tIns="0" bIns="0" anchor="t">
+          <a:bodyPr wrap="square" lIns="0" tIns="0" rIns="0" bIns="0" anchor="t">
             <a:spAutoFit/>
           </a:bodyPr>
           <a:lstStyle/>
@@ -25390,7 +26033,7 @@
           <a:noFill/>
         </p:spPr>
         <p:txBody>
-          <a:bodyPr wrap="square" lIns="0" rIns="0" tIns="0" bIns="0" anchor="t">
+          <a:bodyPr wrap="square" lIns="0" tIns="0" rIns="0" bIns="0" anchor="t">
             <a:spAutoFit/>
           </a:bodyPr>
           <a:lstStyle/>
@@ -25470,7 +26113,7 @@
           <a:noFill/>
         </p:spPr>
         <p:txBody>
-          <a:bodyPr wrap="square" lIns="0" rIns="0" tIns="0" bIns="0" anchor="t">
+          <a:bodyPr wrap="square" lIns="0" tIns="0" rIns="0" bIns="0" anchor="t">
             <a:spAutoFit/>
           </a:bodyPr>
           <a:lstStyle/>
@@ -25515,7 +26158,7 @@
           <a:noFill/>
         </p:spPr>
         <p:txBody>
-          <a:bodyPr wrap="square" lIns="0" rIns="0" tIns="0" bIns="0" anchor="t">
+          <a:bodyPr wrap="square" lIns="0" tIns="0" rIns="0" bIns="0" anchor="t">
             <a:spAutoFit/>
           </a:bodyPr>
           <a:lstStyle/>
@@ -25560,7 +26203,7 @@
           <a:noFill/>
         </p:spPr>
         <p:txBody>
-          <a:bodyPr wrap="square" lIns="0" rIns="0" tIns="0" bIns="0" anchor="t">
+          <a:bodyPr wrap="square" lIns="0" tIns="0" rIns="0" bIns="0" anchor="t">
             <a:spAutoFit/>
           </a:bodyPr>
           <a:lstStyle/>
@@ -25605,7 +26248,7 @@
           <a:noFill/>
         </p:spPr>
         <p:txBody>
-          <a:bodyPr wrap="square" lIns="0" rIns="0" tIns="0" bIns="0" anchor="t">
+          <a:bodyPr wrap="square" lIns="0" tIns="0" rIns="0" bIns="0" anchor="t">
             <a:spAutoFit/>
           </a:bodyPr>
           <a:lstStyle/>
@@ -25685,7 +26328,7 @@
           <a:noFill/>
         </p:spPr>
         <p:txBody>
-          <a:bodyPr wrap="square" lIns="0" rIns="0" tIns="0" bIns="0" anchor="t">
+          <a:bodyPr wrap="square" lIns="0" tIns="0" rIns="0" bIns="0" anchor="t">
             <a:spAutoFit/>
           </a:bodyPr>
           <a:lstStyle/>
@@ -25730,7 +26373,7 @@
           <a:noFill/>
         </p:spPr>
         <p:txBody>
-          <a:bodyPr wrap="square" lIns="0" rIns="0" tIns="0" bIns="0" anchor="t">
+          <a:bodyPr wrap="square" lIns="0" tIns="0" rIns="0" bIns="0" anchor="t">
             <a:spAutoFit/>
           </a:bodyPr>
           <a:lstStyle/>
@@ -25775,7 +26418,7 @@
           <a:noFill/>
         </p:spPr>
         <p:txBody>
-          <a:bodyPr wrap="square" lIns="0" rIns="0" tIns="0" bIns="0" anchor="t">
+          <a:bodyPr wrap="square" lIns="0" tIns="0" rIns="0" bIns="0" anchor="t">
             <a:spAutoFit/>
           </a:bodyPr>
           <a:lstStyle/>
@@ -25820,7 +26463,7 @@
           <a:noFill/>
         </p:spPr>
         <p:txBody>
-          <a:bodyPr wrap="square" lIns="0" rIns="0" tIns="0" bIns="0" anchor="t">
+          <a:bodyPr wrap="square" lIns="0" tIns="0" rIns="0" bIns="0" anchor="t">
             <a:spAutoFit/>
           </a:bodyPr>
           <a:lstStyle/>
@@ -25925,6 +26568,7 @@
           <a:lstStyle/>
           <a:p>
             <a:pPr algn="ctr"/>
+            <a:endParaRPr/>
           </a:p>
         </p:txBody>
       </p:sp>
@@ -25945,7 +26589,7 @@
           <a:noFill/>
         </p:spPr>
         <p:txBody>
-          <a:bodyPr wrap="square" lIns="0" rIns="0" tIns="0" bIns="0" anchor="t">
+          <a:bodyPr wrap="square" lIns="0" tIns="0" rIns="0" bIns="0" anchor="t">
             <a:spAutoFit/>
           </a:bodyPr>
           <a:lstStyle/>
@@ -25990,7 +26634,7 @@
           <a:noFill/>
         </p:spPr>
         <p:txBody>
-          <a:bodyPr wrap="square" lIns="0" rIns="0" tIns="0" bIns="0" anchor="t">
+          <a:bodyPr wrap="square" lIns="0" tIns="0" rIns="0" bIns="0" anchor="t">
             <a:spAutoFit/>
           </a:bodyPr>
           <a:lstStyle/>
@@ -26027,7 +26671,7 @@
 </file>
 
 <file path=ppt/slides/slide8.xml><?xml version="1.0" encoding="utf-8"?>
-<p:sld xmlns:a="http://schemas.openxmlformats.org/drawingml/2006/main" xmlns:p="http://schemas.openxmlformats.org/presentationml/2006/main" xmlns:r="http://schemas.openxmlformats.org/officeDocument/2006/relationships">
+<p:sld xmlns:a="http://schemas.openxmlformats.org/drawingml/2006/main" xmlns:r="http://schemas.openxmlformats.org/officeDocument/2006/relationships" xmlns:p="http://schemas.openxmlformats.org/presentationml/2006/main">
   <p:cSld>
     <p:spTree>
       <p:nvGrpSpPr>
@@ -26035,7 +26679,14 @@
         <p:cNvGrpSpPr/>
         <p:nvPr/>
       </p:nvGrpSpPr>
-      <p:grpSpPr/>
+      <p:grpSpPr>
+        <a:xfrm>
+          <a:off x="0" y="0"/>
+          <a:ext cx="0" cy="0"/>
+          <a:chOff x="0" y="0"/>
+          <a:chExt cx="0" cy="0"/>
+        </a:xfrm>
+      </p:grpSpPr>
       <p:pic>
         <p:nvPicPr>
           <p:cNvPr id="2" name="Picture 1" descr="bg_subtle.png"/>
@@ -26077,7 +26728,7 @@
           <a:noFill/>
         </p:spPr>
         <p:txBody>
-          <a:bodyPr wrap="square" lIns="0" rIns="0" tIns="0" bIns="0" anchor="t">
+          <a:bodyPr wrap="square" lIns="0" tIns="0" rIns="0" bIns="0" anchor="t">
             <a:spAutoFit/>
           </a:bodyPr>
           <a:lstStyle/>
@@ -26122,7 +26773,7 @@
           <a:noFill/>
         </p:spPr>
         <p:txBody>
-          <a:bodyPr wrap="square" lIns="0" rIns="0" tIns="0" bIns="0" anchor="t">
+          <a:bodyPr wrap="square" lIns="0" tIns="0" rIns="0" bIns="0" anchor="t">
             <a:spAutoFit/>
           </a:bodyPr>
           <a:lstStyle/>
@@ -26167,7 +26818,7 @@
           <a:noFill/>
         </p:spPr>
         <p:txBody>
-          <a:bodyPr wrap="square" lIns="0" rIns="0" tIns="0" bIns="0" anchor="t">
+          <a:bodyPr wrap="square" lIns="0" tIns="0" rIns="0" bIns="0" anchor="t">
             <a:spAutoFit/>
           </a:bodyPr>
           <a:lstStyle/>
@@ -26212,7 +26863,7 @@
           <a:noFill/>
         </p:spPr>
         <p:txBody>
-          <a:bodyPr wrap="square" lIns="0" rIns="0" tIns="0" bIns="0" anchor="t">
+          <a:bodyPr wrap="square" lIns="0" tIns="0" rIns="0" bIns="0" anchor="t">
             <a:spAutoFit/>
           </a:bodyPr>
           <a:lstStyle/>
@@ -26281,7 +26932,7 @@
           <a:noFill/>
         </p:spPr>
         <p:txBody>
-          <a:bodyPr wrap="square" lIns="0" rIns="0" tIns="0" bIns="0" anchor="t">
+          <a:bodyPr wrap="square" lIns="0" tIns="0" rIns="0" bIns="0" anchor="t">
             <a:spAutoFit/>
           </a:bodyPr>
           <a:lstStyle/>
@@ -26349,6 +27000,7 @@
           <a:lstStyle/>
           <a:p>
             <a:pPr algn="ctr"/>
+            <a:endParaRPr/>
           </a:p>
         </p:txBody>
       </p:sp>
@@ -26369,7 +27021,7 @@
           <a:noFill/>
         </p:spPr>
         <p:txBody>
-          <a:bodyPr wrap="square" lIns="0" rIns="0" tIns="0" bIns="0" anchor="ctr">
+          <a:bodyPr wrap="square" lIns="0" tIns="0" rIns="0" bIns="0" anchor="ctr">
             <a:spAutoFit/>
           </a:bodyPr>
           <a:lstStyle/>
@@ -26414,7 +27066,7 @@
           <a:noFill/>
         </p:spPr>
         <p:txBody>
-          <a:bodyPr wrap="square" lIns="0" rIns="0" tIns="0" bIns="0" anchor="t">
+          <a:bodyPr wrap="square" lIns="0" tIns="0" rIns="0" bIns="0" anchor="t">
             <a:spAutoFit/>
           </a:bodyPr>
           <a:lstStyle/>
@@ -26459,7 +27111,7 @@
           <a:noFill/>
         </p:spPr>
         <p:txBody>
-          <a:bodyPr wrap="square" lIns="0" rIns="0" tIns="0" bIns="0" anchor="t">
+          <a:bodyPr wrap="square" lIns="0" tIns="0" rIns="0" bIns="0" anchor="t">
             <a:spAutoFit/>
           </a:bodyPr>
           <a:lstStyle/>
@@ -26505,7 +27157,7 @@
           <a:noFill/>
         </p:spPr>
         <p:txBody>
-          <a:bodyPr wrap="square" lIns="0" rIns="0" tIns="0" bIns="0" anchor="t">
+          <a:bodyPr wrap="square" lIns="0" tIns="0" rIns="0" bIns="0" anchor="t">
             <a:spAutoFit/>
           </a:bodyPr>
           <a:lstStyle/>
@@ -26573,6 +27225,7 @@
           <a:lstStyle/>
           <a:p>
             <a:pPr algn="ctr"/>
+            <a:endParaRPr/>
           </a:p>
         </p:txBody>
       </p:sp>
@@ -26593,7 +27246,7 @@
           <a:noFill/>
         </p:spPr>
         <p:txBody>
-          <a:bodyPr wrap="square" lIns="0" rIns="0" tIns="0" bIns="0" anchor="ctr">
+          <a:bodyPr wrap="square" lIns="0" tIns="0" rIns="0" bIns="0" anchor="ctr">
             <a:spAutoFit/>
           </a:bodyPr>
           <a:lstStyle/>
@@ -26638,7 +27291,7 @@
           <a:noFill/>
         </p:spPr>
         <p:txBody>
-          <a:bodyPr wrap="square" lIns="0" rIns="0" tIns="0" bIns="0" anchor="t">
+          <a:bodyPr wrap="square" lIns="0" tIns="0" rIns="0" bIns="0" anchor="t">
             <a:spAutoFit/>
           </a:bodyPr>
           <a:lstStyle/>
@@ -26683,7 +27336,7 @@
           <a:noFill/>
         </p:spPr>
         <p:txBody>
-          <a:bodyPr wrap="square" lIns="0" rIns="0" tIns="0" bIns="0" anchor="t">
+          <a:bodyPr wrap="square" lIns="0" tIns="0" rIns="0" bIns="0" anchor="t">
             <a:spAutoFit/>
           </a:bodyPr>
           <a:lstStyle/>
@@ -26729,7 +27382,7 @@
           <a:noFill/>
         </p:spPr>
         <p:txBody>
-          <a:bodyPr wrap="square" lIns="0" rIns="0" tIns="0" bIns="0" anchor="t">
+          <a:bodyPr wrap="square" lIns="0" tIns="0" rIns="0" bIns="0" anchor="t">
             <a:spAutoFit/>
           </a:bodyPr>
           <a:lstStyle/>
@@ -26797,6 +27450,7 @@
           <a:lstStyle/>
           <a:p>
             <a:pPr algn="ctr"/>
+            <a:endParaRPr/>
           </a:p>
         </p:txBody>
       </p:sp>
@@ -26817,7 +27471,7 @@
           <a:noFill/>
         </p:spPr>
         <p:txBody>
-          <a:bodyPr wrap="square" lIns="0" rIns="0" tIns="0" bIns="0" anchor="ctr">
+          <a:bodyPr wrap="square" lIns="0" tIns="0" rIns="0" bIns="0" anchor="ctr">
             <a:spAutoFit/>
           </a:bodyPr>
           <a:lstStyle/>
@@ -26862,7 +27516,7 @@
           <a:noFill/>
         </p:spPr>
         <p:txBody>
-          <a:bodyPr wrap="square" lIns="0" rIns="0" tIns="0" bIns="0" anchor="t">
+          <a:bodyPr wrap="square" lIns="0" tIns="0" rIns="0" bIns="0" anchor="t">
             <a:spAutoFit/>
           </a:bodyPr>
           <a:lstStyle/>
@@ -26907,7 +27561,7 @@
           <a:noFill/>
         </p:spPr>
         <p:txBody>
-          <a:bodyPr wrap="square" lIns="0" rIns="0" tIns="0" bIns="0" anchor="t">
+          <a:bodyPr wrap="square" lIns="0" tIns="0" rIns="0" bIns="0" anchor="t">
             <a:spAutoFit/>
           </a:bodyPr>
           <a:lstStyle/>
@@ -26953,7 +27607,7 @@
           <a:noFill/>
         </p:spPr>
         <p:txBody>
-          <a:bodyPr wrap="square" lIns="0" rIns="0" tIns="0" bIns="0" anchor="t">
+          <a:bodyPr wrap="square" lIns="0" tIns="0" rIns="0" bIns="0" anchor="t">
             <a:spAutoFit/>
           </a:bodyPr>
           <a:lstStyle/>
@@ -27021,6 +27675,7 @@
           <a:lstStyle/>
           <a:p>
             <a:pPr algn="ctr"/>
+            <a:endParaRPr/>
           </a:p>
         </p:txBody>
       </p:sp>
@@ -27041,7 +27696,7 @@
           <a:noFill/>
         </p:spPr>
         <p:txBody>
-          <a:bodyPr wrap="square" lIns="0" rIns="0" tIns="0" bIns="0" anchor="ctr">
+          <a:bodyPr wrap="square" lIns="0" tIns="0" rIns="0" bIns="0" anchor="ctr">
             <a:spAutoFit/>
           </a:bodyPr>
           <a:lstStyle/>
@@ -27086,7 +27741,7 @@
           <a:noFill/>
         </p:spPr>
         <p:txBody>
-          <a:bodyPr wrap="square" lIns="0" rIns="0" tIns="0" bIns="0" anchor="t">
+          <a:bodyPr wrap="square" lIns="0" tIns="0" rIns="0" bIns="0" anchor="t">
             <a:spAutoFit/>
           </a:bodyPr>
           <a:lstStyle/>
@@ -27131,7 +27786,7 @@
           <a:noFill/>
         </p:spPr>
         <p:txBody>
-          <a:bodyPr wrap="square" lIns="0" rIns="0" tIns="0" bIns="0" anchor="t">
+          <a:bodyPr wrap="square" lIns="0" tIns="0" rIns="0" bIns="0" anchor="t">
             <a:spAutoFit/>
           </a:bodyPr>
           <a:lstStyle/>
@@ -27177,7 +27832,7 @@
           <a:noFill/>
         </p:spPr>
         <p:txBody>
-          <a:bodyPr wrap="square" lIns="0" rIns="0" tIns="0" bIns="0" anchor="t">
+          <a:bodyPr wrap="square" lIns="0" tIns="0" rIns="0" bIns="0" anchor="t">
             <a:spAutoFit/>
           </a:bodyPr>
           <a:lstStyle/>
@@ -27245,6 +27900,7 @@
           <a:lstStyle/>
           <a:p>
             <a:pPr algn="ctr"/>
+            <a:endParaRPr/>
           </a:p>
         </p:txBody>
       </p:sp>
@@ -27265,7 +27921,7 @@
           <a:noFill/>
         </p:spPr>
         <p:txBody>
-          <a:bodyPr wrap="square" lIns="0" rIns="0" tIns="0" bIns="0" anchor="ctr">
+          <a:bodyPr wrap="square" lIns="0" tIns="0" rIns="0" bIns="0" anchor="ctr">
             <a:spAutoFit/>
           </a:bodyPr>
           <a:lstStyle/>
@@ -27310,7 +27966,7 @@
           <a:noFill/>
         </p:spPr>
         <p:txBody>
-          <a:bodyPr wrap="square" lIns="0" rIns="0" tIns="0" bIns="0" anchor="t">
+          <a:bodyPr wrap="square" lIns="0" tIns="0" rIns="0" bIns="0" anchor="t">
             <a:spAutoFit/>
           </a:bodyPr>
           <a:lstStyle/>
@@ -27355,7 +28011,7 @@
           <a:noFill/>
         </p:spPr>
         <p:txBody>
-          <a:bodyPr wrap="square" lIns="0" rIns="0" tIns="0" bIns="0" anchor="t">
+          <a:bodyPr wrap="square" lIns="0" tIns="0" rIns="0" bIns="0" anchor="t">
             <a:spAutoFit/>
           </a:bodyPr>
           <a:lstStyle/>
@@ -27426,6 +28082,7 @@
           <a:lstStyle/>
           <a:p>
             <a:pPr algn="ctr"/>
+            <a:endParaRPr/>
           </a:p>
         </p:txBody>
       </p:sp>
@@ -27446,7 +28103,7 @@
           <a:noFill/>
         </p:spPr>
         <p:txBody>
-          <a:bodyPr wrap="square" lIns="0" rIns="0" tIns="0" bIns="0" anchor="t">
+          <a:bodyPr wrap="square" lIns="0" tIns="0" rIns="0" bIns="0" anchor="t">
             <a:spAutoFit/>
           </a:bodyPr>
           <a:lstStyle/>
@@ -27491,7 +28148,7 @@
           <a:noFill/>
         </p:spPr>
         <p:txBody>
-          <a:bodyPr wrap="square" lIns="0" rIns="0" tIns="0" bIns="0" anchor="t">
+          <a:bodyPr wrap="square" lIns="0" tIns="0" rIns="0" bIns="0" anchor="t">
             <a:spAutoFit/>
           </a:bodyPr>
           <a:lstStyle/>
@@ -27536,7 +28193,7 @@
           <a:noFill/>
         </p:spPr>
         <p:txBody>
-          <a:bodyPr wrap="square" lIns="0" rIns="0" tIns="0" bIns="0" anchor="t">
+          <a:bodyPr wrap="square" lIns="0" tIns="0" rIns="0" bIns="0" anchor="t">
             <a:spAutoFit/>
           </a:bodyPr>
           <a:lstStyle/>
@@ -27573,7 +28230,7 @@
 </file>
 
 <file path=ppt/slides/slide9.xml><?xml version="1.0" encoding="utf-8"?>
-<p:sld xmlns:a="http://schemas.openxmlformats.org/drawingml/2006/main" xmlns:p="http://schemas.openxmlformats.org/presentationml/2006/main" xmlns:r="http://schemas.openxmlformats.org/officeDocument/2006/relationships">
+<p:sld xmlns:a="http://schemas.openxmlformats.org/drawingml/2006/main" xmlns:r="http://schemas.openxmlformats.org/officeDocument/2006/relationships" xmlns:p="http://schemas.openxmlformats.org/presentationml/2006/main">
   <p:cSld>
     <p:spTree>
       <p:nvGrpSpPr>
@@ -27581,7 +28238,14 @@
         <p:cNvGrpSpPr/>
         <p:nvPr/>
       </p:nvGrpSpPr>
-      <p:grpSpPr/>
+      <p:grpSpPr>
+        <a:xfrm>
+          <a:off x="0" y="0"/>
+          <a:ext cx="0" cy="0"/>
+          <a:chOff x="0" y="0"/>
+          <a:chExt cx="0" cy="0"/>
+        </a:xfrm>
+      </p:grpSpPr>
       <p:pic>
         <p:nvPicPr>
           <p:cNvPr id="2" name="Picture 1" descr="bg_subtle.png"/>
@@ -27623,7 +28287,7 @@
           <a:noFill/>
         </p:spPr>
         <p:txBody>
-          <a:bodyPr wrap="square" lIns="0" rIns="0" tIns="0" bIns="0" anchor="t">
+          <a:bodyPr wrap="square" lIns="0" tIns="0" rIns="0" bIns="0" anchor="t">
             <a:spAutoFit/>
           </a:bodyPr>
           <a:lstStyle/>
@@ -27668,7 +28332,7 @@
           <a:noFill/>
         </p:spPr>
         <p:txBody>
-          <a:bodyPr wrap="square" lIns="0" rIns="0" tIns="0" bIns="0" anchor="t">
+          <a:bodyPr wrap="square" lIns="0" tIns="0" rIns="0" bIns="0" anchor="t">
             <a:spAutoFit/>
           </a:bodyPr>
           <a:lstStyle/>
@@ -27713,7 +28377,7 @@
           <a:noFill/>
         </p:spPr>
         <p:txBody>
-          <a:bodyPr wrap="square" lIns="0" rIns="0" tIns="0" bIns="0" anchor="t">
+          <a:bodyPr wrap="square" lIns="0" tIns="0" rIns="0" bIns="0" anchor="t">
             <a:spAutoFit/>
           </a:bodyPr>
           <a:lstStyle/>
@@ -27758,7 +28422,7 @@
           <a:noFill/>
         </p:spPr>
         <p:txBody>
-          <a:bodyPr wrap="square" lIns="0" rIns="0" tIns="0" bIns="0" anchor="t">
+          <a:bodyPr wrap="square" lIns="0" tIns="0" rIns="0" bIns="0" anchor="t">
             <a:spAutoFit/>
           </a:bodyPr>
           <a:lstStyle/>
@@ -27827,7 +28491,7 @@
           <a:noFill/>
         </p:spPr>
         <p:txBody>
-          <a:bodyPr wrap="square" lIns="0" rIns="0" tIns="0" bIns="0" anchor="t">
+          <a:bodyPr wrap="square" lIns="0" tIns="0" rIns="0" bIns="0" anchor="t">
             <a:spAutoFit/>
           </a:bodyPr>
           <a:lstStyle/>
@@ -27930,6 +28594,7 @@
           <a:lstStyle/>
           <a:p>
             <a:pPr algn="ctr"/>
+            <a:endParaRPr/>
           </a:p>
         </p:txBody>
       </p:sp>
@@ -27950,7 +28615,7 @@
           <a:noFill/>
         </p:spPr>
         <p:txBody>
-          <a:bodyPr wrap="square" lIns="0" rIns="0" tIns="0" bIns="0" anchor="ctr">
+          <a:bodyPr wrap="square" lIns="0" tIns="0" rIns="0" bIns="0" anchor="ctr">
             <a:spAutoFit/>
           </a:bodyPr>
           <a:lstStyle/>
@@ -27995,7 +28660,7 @@
           <a:noFill/>
         </p:spPr>
         <p:txBody>
-          <a:bodyPr wrap="square" lIns="0" rIns="0" tIns="0" bIns="0" anchor="t">
+          <a:bodyPr wrap="square" lIns="0" tIns="0" rIns="0" bIns="0" anchor="t">
             <a:spAutoFit/>
           </a:bodyPr>
           <a:lstStyle/>
@@ -28066,6 +28731,7 @@
           <a:lstStyle/>
           <a:p>
             <a:pPr algn="ctr"/>
+            <a:endParaRPr/>
           </a:p>
         </p:txBody>
       </p:sp>
@@ -28086,7 +28752,7 @@
           <a:noFill/>
         </p:spPr>
         <p:txBody>
-          <a:bodyPr wrap="square" lIns="0" rIns="0" tIns="0" bIns="0" anchor="ctr">
+          <a:bodyPr wrap="square" lIns="0" tIns="0" rIns="0" bIns="0" anchor="ctr">
             <a:spAutoFit/>
           </a:bodyPr>
           <a:lstStyle/>
@@ -28155,6 +28821,7 @@
           <a:lstStyle/>
           <a:p>
             <a:pPr algn="ctr"/>
+            <a:endParaRPr/>
           </a:p>
         </p:txBody>
       </p:sp>
@@ -28175,7 +28842,7 @@
           <a:noFill/>
         </p:spPr>
         <p:txBody>
-          <a:bodyPr wrap="square" lIns="0" rIns="0" tIns="0" bIns="0" anchor="ctr">
+          <a:bodyPr wrap="square" lIns="0" tIns="0" rIns="0" bIns="0" anchor="ctr">
             <a:spAutoFit/>
           </a:bodyPr>
           <a:lstStyle/>
@@ -28220,7 +28887,7 @@
           <a:noFill/>
         </p:spPr>
         <p:txBody>
-          <a:bodyPr wrap="square" lIns="0" rIns="0" tIns="0" bIns="0" anchor="t">
+          <a:bodyPr wrap="square" lIns="0" tIns="0" rIns="0" bIns="0" anchor="t">
             <a:spAutoFit/>
           </a:bodyPr>
           <a:lstStyle/>
@@ -28291,6 +28958,7 @@
           <a:lstStyle/>
           <a:p>
             <a:pPr algn="ctr"/>
+            <a:endParaRPr/>
           </a:p>
         </p:txBody>
       </p:sp>
@@ -28311,7 +28979,7 @@
           <a:noFill/>
         </p:spPr>
         <p:txBody>
-          <a:bodyPr wrap="square" lIns="0" rIns="0" tIns="0" bIns="0" anchor="ctr">
+          <a:bodyPr wrap="square" lIns="0" tIns="0" rIns="0" bIns="0" anchor="ctr">
             <a:spAutoFit/>
           </a:bodyPr>
           <a:lstStyle/>
@@ -28380,6 +29048,7 @@
           <a:lstStyle/>
           <a:p>
             <a:pPr algn="ctr"/>
+            <a:endParaRPr/>
           </a:p>
         </p:txBody>
       </p:sp>
@@ -28400,7 +29069,7 @@
           <a:noFill/>
         </p:spPr>
         <p:txBody>
-          <a:bodyPr wrap="square" lIns="0" rIns="0" tIns="0" bIns="0" anchor="ctr">
+          <a:bodyPr wrap="square" lIns="0" tIns="0" rIns="0" bIns="0" anchor="ctr">
             <a:spAutoFit/>
           </a:bodyPr>
           <a:lstStyle/>
@@ -28445,7 +29114,7 @@
           <a:noFill/>
         </p:spPr>
         <p:txBody>
-          <a:bodyPr wrap="square" lIns="0" rIns="0" tIns="0" bIns="0" anchor="t">
+          <a:bodyPr wrap="square" lIns="0" tIns="0" rIns="0" bIns="0" anchor="t">
             <a:spAutoFit/>
           </a:bodyPr>
           <a:lstStyle/>
@@ -28516,6 +29185,7 @@
           <a:lstStyle/>
           <a:p>
             <a:pPr algn="ctr"/>
+            <a:endParaRPr/>
           </a:p>
         </p:txBody>
       </p:sp>
@@ -28536,7 +29206,7 @@
           <a:noFill/>
         </p:spPr>
         <p:txBody>
-          <a:bodyPr wrap="square" lIns="0" rIns="0" tIns="0" bIns="0" anchor="ctr">
+          <a:bodyPr wrap="square" lIns="0" tIns="0" rIns="0" bIns="0" anchor="ctr">
             <a:spAutoFit/>
           </a:bodyPr>
           <a:lstStyle/>
@@ -28605,6 +29275,7 @@
           <a:lstStyle/>
           <a:p>
             <a:pPr algn="ctr"/>
+            <a:endParaRPr/>
           </a:p>
         </p:txBody>
       </p:sp>
@@ -28625,7 +29296,7 @@
           <a:noFill/>
         </p:spPr>
         <p:txBody>
-          <a:bodyPr wrap="square" lIns="0" rIns="0" tIns="0" bIns="0" anchor="ctr">
+          <a:bodyPr wrap="square" lIns="0" tIns="0" rIns="0" bIns="0" anchor="ctr">
             <a:spAutoFit/>
           </a:bodyPr>
           <a:lstStyle/>
@@ -28670,7 +29341,7 @@
           <a:noFill/>
         </p:spPr>
         <p:txBody>
-          <a:bodyPr wrap="square" lIns="0" rIns="0" tIns="0" bIns="0" anchor="t">
+          <a:bodyPr wrap="square" lIns="0" tIns="0" rIns="0" bIns="0" anchor="t">
             <a:spAutoFit/>
           </a:bodyPr>
           <a:lstStyle/>
@@ -28741,6 +29412,7 @@
           <a:lstStyle/>
           <a:p>
             <a:pPr algn="ctr"/>
+            <a:endParaRPr/>
           </a:p>
         </p:txBody>
       </p:sp>
@@ -28761,7 +29433,7 @@
           <a:noFill/>
         </p:spPr>
         <p:txBody>
-          <a:bodyPr wrap="square" lIns="0" rIns="0" tIns="0" bIns="0" anchor="ctr">
+          <a:bodyPr wrap="square" lIns="0" tIns="0" rIns="0" bIns="0" anchor="ctr">
             <a:spAutoFit/>
           </a:bodyPr>
           <a:lstStyle/>
@@ -28830,6 +29502,7 @@
           <a:lstStyle/>
           <a:p>
             <a:pPr algn="ctr"/>
+            <a:endParaRPr/>
           </a:p>
         </p:txBody>
       </p:sp>
@@ -28850,7 +29523,7 @@
           <a:noFill/>
         </p:spPr>
         <p:txBody>
-          <a:bodyPr wrap="square" lIns="0" rIns="0" tIns="0" bIns="0" anchor="ctr">
+          <a:bodyPr wrap="square" lIns="0" tIns="0" rIns="0" bIns="0" anchor="ctr">
             <a:spAutoFit/>
           </a:bodyPr>
           <a:lstStyle/>
@@ -28895,7 +29568,7 @@
           <a:noFill/>
         </p:spPr>
         <p:txBody>
-          <a:bodyPr wrap="square" lIns="0" rIns="0" tIns="0" bIns="0" anchor="t">
+          <a:bodyPr wrap="square" lIns="0" tIns="0" rIns="0" bIns="0" anchor="t">
             <a:spAutoFit/>
           </a:bodyPr>
           <a:lstStyle/>
@@ -28966,6 +29639,7 @@
           <a:lstStyle/>
           <a:p>
             <a:pPr algn="ctr"/>
+            <a:endParaRPr/>
           </a:p>
         </p:txBody>
       </p:sp>
@@ -28986,7 +29660,7 @@
           <a:noFill/>
         </p:spPr>
         <p:txBody>
-          <a:bodyPr wrap="square" lIns="0" rIns="0" tIns="0" bIns="0" anchor="ctr">
+          <a:bodyPr wrap="square" lIns="0" tIns="0" rIns="0" bIns="0" anchor="ctr">
             <a:spAutoFit/>
           </a:bodyPr>
           <a:lstStyle/>
@@ -29057,6 +29731,7 @@
           <a:lstStyle/>
           <a:p>
             <a:pPr algn="ctr"/>
+            <a:endParaRPr/>
           </a:p>
         </p:txBody>
       </p:sp>
@@ -29077,7 +29752,7 @@
           <a:noFill/>
         </p:spPr>
         <p:txBody>
-          <a:bodyPr wrap="square" lIns="0" rIns="0" tIns="0" bIns="0" anchor="t">
+          <a:bodyPr wrap="square" lIns="0" tIns="0" rIns="0" bIns="0" anchor="t">
             <a:spAutoFit/>
           </a:bodyPr>
           <a:lstStyle/>
@@ -29122,7 +29797,7 @@
           <a:noFill/>
         </p:spPr>
         <p:txBody>
-          <a:bodyPr wrap="square" lIns="0" rIns="0" tIns="0" bIns="0" anchor="t">
+          <a:bodyPr wrap="square" lIns="0" tIns="0" rIns="0" bIns="0" anchor="t">
             <a:spAutoFit/>
           </a:bodyPr>
           <a:lstStyle/>
@@ -29476,4 +30151,325 @@
   </a:objectDefaults>
   <a:extraClrSchemeLst/>
 </a:theme>
+</file>
+
+<file path=ppt/theme/theme2.xml><?xml version="1.0" encoding="utf-8"?>
+<a:theme xmlns:a="http://schemas.openxmlformats.org/drawingml/2006/main" name="Office Theme">
+  <a:themeElements>
+    <a:clrScheme name="Office">
+      <a:dk1>
+        <a:sysClr val="windowText" lastClr="000000"/>
+      </a:dk1>
+      <a:lt1>
+        <a:sysClr val="window" lastClr="FFFFFF"/>
+      </a:lt1>
+      <a:dk2>
+        <a:srgbClr val="0E2841"/>
+      </a:dk2>
+      <a:lt2>
+        <a:srgbClr val="E8E8E8"/>
+      </a:lt2>
+      <a:accent1>
+        <a:srgbClr val="156082"/>
+      </a:accent1>
+      <a:accent2>
+        <a:srgbClr val="E97132"/>
+      </a:accent2>
+      <a:accent3>
+        <a:srgbClr val="196B24"/>
+      </a:accent3>
+      <a:accent4>
+        <a:srgbClr val="0F9ED5"/>
+      </a:accent4>
+      <a:accent5>
+        <a:srgbClr val="A02B93"/>
+      </a:accent5>
+      <a:accent6>
+        <a:srgbClr val="4EA72E"/>
+      </a:accent6>
+      <a:hlink>
+        <a:srgbClr val="467886"/>
+      </a:hlink>
+      <a:folHlink>
+        <a:srgbClr val="96607D"/>
+      </a:folHlink>
+    </a:clrScheme>
+    <a:fontScheme name="Office">
+      <a:majorFont>
+        <a:latin typeface="Aptos Display" panose="02110004020202020204"/>
+        <a:ea typeface=""/>
+        <a:cs typeface=""/>
+        <a:font script="Jpan" typeface="游ゴシック Light"/>
+        <a:font script="Hang" typeface="맑은 고딕"/>
+        <a:font script="Hans" typeface="等线 Light"/>
+        <a:font script="Hant" typeface="新細明體"/>
+        <a:font script="Arab" typeface="Times New Roman"/>
+        <a:font script="Hebr" typeface="Times New Roman"/>
+        <a:font script="Thai" typeface="Angsana New"/>
+        <a:font script="Ethi" typeface="Nyala"/>
+        <a:font script="Beng" typeface="Vrinda"/>
+        <a:font script="Gujr" typeface="Shruti"/>
+        <a:font script="Khmr" typeface="MoolBoran"/>
+        <a:font script="Knda" typeface="Tunga"/>
+        <a:font script="Guru" typeface="Raavi"/>
+        <a:font script="Cans" typeface="Euphemia"/>
+        <a:font script="Cher" typeface="Plantagenet Cherokee"/>
+        <a:font script="Yiii" typeface="Microsoft Yi Baiti"/>
+        <a:font script="Tibt" typeface="Microsoft Himalaya"/>
+        <a:font script="Thaa" typeface="MV Boli"/>
+        <a:font script="Deva" typeface="Mangal"/>
+        <a:font script="Telu" typeface="Gautami"/>
+        <a:font script="Taml" typeface="Latha"/>
+        <a:font script="Syrc" typeface="Estrangelo Edessa"/>
+        <a:font script="Orya" typeface="Kalinga"/>
+        <a:font script="Mlym" typeface="Kartika"/>
+        <a:font script="Laoo" typeface="DokChampa"/>
+        <a:font script="Sinh" typeface="Iskoola Pota"/>
+        <a:font script="Mong" typeface="Mongolian Baiti"/>
+        <a:font script="Viet" typeface="Times New Roman"/>
+        <a:font script="Uigh" typeface="Microsoft Uighur"/>
+        <a:font script="Geor" typeface="Sylfaen"/>
+        <a:font script="Armn" typeface="Arial"/>
+        <a:font script="Bugi" typeface="Leelawadee UI"/>
+        <a:font script="Bopo" typeface="Microsoft JhengHei"/>
+        <a:font script="Java" typeface="Javanese Text"/>
+        <a:font script="Lisu" typeface="Segoe UI"/>
+        <a:font script="Mymr" typeface="Myanmar Text"/>
+        <a:font script="Nkoo" typeface="Ebrima"/>
+        <a:font script="Olck" typeface="Nirmala UI"/>
+        <a:font script="Osma" typeface="Ebrima"/>
+        <a:font script="Phag" typeface="Phagspa"/>
+        <a:font script="Syrn" typeface="Estrangelo Edessa"/>
+        <a:font script="Syrj" typeface="Estrangelo Edessa"/>
+        <a:font script="Syre" typeface="Estrangelo Edessa"/>
+        <a:font script="Sora" typeface="Nirmala UI"/>
+        <a:font script="Tale" typeface="Microsoft Tai Le"/>
+        <a:font script="Talu" typeface="Microsoft New Tai Lue"/>
+        <a:font script="Tfng" typeface="Ebrima"/>
+      </a:majorFont>
+      <a:minorFont>
+        <a:latin typeface="Aptos" panose="02110004020202020204"/>
+        <a:ea typeface=""/>
+        <a:cs typeface=""/>
+        <a:font script="Jpan" typeface="游ゴシック"/>
+        <a:font script="Hang" typeface="맑은 고딕"/>
+        <a:font script="Hans" typeface="等线"/>
+        <a:font script="Hant" typeface="新細明體"/>
+        <a:font script="Arab" typeface="Arial"/>
+        <a:font script="Hebr" typeface="Arial"/>
+        <a:font script="Thai" typeface="Cordia New"/>
+        <a:font script="Ethi" typeface="Nyala"/>
+        <a:font script="Beng" typeface="Vrinda"/>
+        <a:font script="Gujr" typeface="Shruti"/>
+        <a:font script="Khmr" typeface="DaunPenh"/>
+        <a:font script="Knda" typeface="Tunga"/>
+        <a:font script="Guru" typeface="Raavi"/>
+        <a:font script="Cans" typeface="Euphemia"/>
+        <a:font script="Cher" typeface="Plantagenet Cherokee"/>
+        <a:font script="Yiii" typeface="Microsoft Yi Baiti"/>
+        <a:font script="Tibt" typeface="Microsoft Himalaya"/>
+        <a:font script="Thaa" typeface="MV Boli"/>
+        <a:font script="Deva" typeface="Mangal"/>
+        <a:font script="Telu" typeface="Gautami"/>
+        <a:font script="Taml" typeface="Latha"/>
+        <a:font script="Syrc" typeface="Estrangelo Edessa"/>
+        <a:font script="Orya" typeface="Kalinga"/>
+        <a:font script="Mlym" typeface="Kartika"/>
+        <a:font script="Laoo" typeface="DokChampa"/>
+        <a:font script="Sinh" typeface="Iskoola Pota"/>
+        <a:font script="Mong" typeface="Mongolian Baiti"/>
+        <a:font script="Viet" typeface="Arial"/>
+        <a:font script="Uigh" typeface="Microsoft Uighur"/>
+        <a:font script="Geor" typeface="Sylfaen"/>
+        <a:font script="Armn" typeface="Arial"/>
+        <a:font script="Bugi" typeface="Leelawadee UI"/>
+        <a:font script="Bopo" typeface="Microsoft JhengHei"/>
+        <a:font script="Java" typeface="Javanese Text"/>
+        <a:font script="Lisu" typeface="Segoe UI"/>
+        <a:font script="Mymr" typeface="Myanmar Text"/>
+        <a:font script="Nkoo" typeface="Ebrima"/>
+        <a:font script="Olck" typeface="Nirmala UI"/>
+        <a:font script="Osma" typeface="Ebrima"/>
+        <a:font script="Phag" typeface="Phagspa"/>
+        <a:font script="Syrn" typeface="Estrangelo Edessa"/>
+        <a:font script="Syrj" typeface="Estrangelo Edessa"/>
+        <a:font script="Syre" typeface="Estrangelo Edessa"/>
+        <a:font script="Sora" typeface="Nirmala UI"/>
+        <a:font script="Tale" typeface="Microsoft Tai Le"/>
+        <a:font script="Talu" typeface="Microsoft New Tai Lue"/>
+        <a:font script="Tfng" typeface="Ebrima"/>
+      </a:minorFont>
+    </a:fontScheme>
+    <a:fmtScheme name="Office">
+      <a:fillStyleLst>
+        <a:solidFill>
+          <a:schemeClr val="phClr"/>
+        </a:solidFill>
+        <a:gradFill rotWithShape="1">
+          <a:gsLst>
+            <a:gs pos="0">
+              <a:schemeClr val="phClr">
+                <a:lumMod val="110000"/>
+                <a:satMod val="105000"/>
+                <a:tint val="67000"/>
+              </a:schemeClr>
+            </a:gs>
+            <a:gs pos="50000">
+              <a:schemeClr val="phClr">
+                <a:lumMod val="105000"/>
+                <a:satMod val="103000"/>
+                <a:tint val="73000"/>
+              </a:schemeClr>
+            </a:gs>
+            <a:gs pos="100000">
+              <a:schemeClr val="phClr">
+                <a:lumMod val="105000"/>
+                <a:satMod val="109000"/>
+                <a:tint val="81000"/>
+              </a:schemeClr>
+            </a:gs>
+          </a:gsLst>
+          <a:lin ang="5400000" scaled="0"/>
+        </a:gradFill>
+        <a:gradFill rotWithShape="1">
+          <a:gsLst>
+            <a:gs pos="0">
+              <a:schemeClr val="phClr">
+                <a:satMod val="103000"/>
+                <a:lumMod val="102000"/>
+                <a:tint val="94000"/>
+              </a:schemeClr>
+            </a:gs>
+            <a:gs pos="50000">
+              <a:schemeClr val="phClr">
+                <a:satMod val="110000"/>
+                <a:lumMod val="100000"/>
+                <a:shade val="100000"/>
+              </a:schemeClr>
+            </a:gs>
+            <a:gs pos="100000">
+              <a:schemeClr val="phClr">
+                <a:lumMod val="99000"/>
+                <a:satMod val="120000"/>
+                <a:shade val="78000"/>
+              </a:schemeClr>
+            </a:gs>
+          </a:gsLst>
+          <a:lin ang="5400000" scaled="0"/>
+        </a:gradFill>
+      </a:fillStyleLst>
+      <a:lnStyleLst>
+        <a:ln w="12700" cap="flat" cmpd="sng" algn="ctr">
+          <a:solidFill>
+            <a:schemeClr val="phClr"/>
+          </a:solidFill>
+          <a:prstDash val="solid"/>
+          <a:miter lim="800000"/>
+        </a:ln>
+        <a:ln w="19050" cap="flat" cmpd="sng" algn="ctr">
+          <a:solidFill>
+            <a:schemeClr val="phClr"/>
+          </a:solidFill>
+          <a:prstDash val="solid"/>
+          <a:miter lim="800000"/>
+        </a:ln>
+        <a:ln w="25400" cap="flat" cmpd="sng" algn="ctr">
+          <a:solidFill>
+            <a:schemeClr val="phClr"/>
+          </a:solidFill>
+          <a:prstDash val="solid"/>
+          <a:miter lim="800000"/>
+        </a:ln>
+      </a:lnStyleLst>
+      <a:effectStyleLst>
+        <a:effectStyle>
+          <a:effectLst/>
+        </a:effectStyle>
+        <a:effectStyle>
+          <a:effectLst/>
+        </a:effectStyle>
+        <a:effectStyle>
+          <a:effectLst>
+            <a:outerShdw blurRad="57150" dist="19050" dir="5400000" algn="ctr" rotWithShape="0">
+              <a:srgbClr val="000000">
+                <a:alpha val="63000"/>
+              </a:srgbClr>
+            </a:outerShdw>
+          </a:effectLst>
+        </a:effectStyle>
+      </a:effectStyleLst>
+      <a:bgFillStyleLst>
+        <a:solidFill>
+          <a:schemeClr val="phClr"/>
+        </a:solidFill>
+        <a:solidFill>
+          <a:schemeClr val="phClr">
+            <a:tint val="95000"/>
+            <a:satMod val="170000"/>
+          </a:schemeClr>
+        </a:solidFill>
+        <a:gradFill rotWithShape="1">
+          <a:gsLst>
+            <a:gs pos="0">
+              <a:schemeClr val="phClr">
+                <a:tint val="93000"/>
+                <a:satMod val="150000"/>
+                <a:shade val="98000"/>
+                <a:lumMod val="102000"/>
+              </a:schemeClr>
+            </a:gs>
+            <a:gs pos="50000">
+              <a:schemeClr val="phClr">
+                <a:tint val="98000"/>
+                <a:satMod val="130000"/>
+                <a:shade val="90000"/>
+                <a:lumMod val="103000"/>
+              </a:schemeClr>
+            </a:gs>
+            <a:gs pos="100000">
+              <a:schemeClr val="phClr">
+                <a:shade val="63000"/>
+                <a:satMod val="120000"/>
+              </a:schemeClr>
+            </a:gs>
+          </a:gsLst>
+          <a:lin ang="5400000" scaled="0"/>
+        </a:gradFill>
+      </a:bgFillStyleLst>
+    </a:fmtScheme>
+  </a:themeElements>
+  <a:objectDefaults>
+    <a:lnDef>
+      <a:spPr/>
+      <a:bodyPr/>
+      <a:lstStyle/>
+      <a:style>
+        <a:lnRef idx="2">
+          <a:schemeClr val="accent1"/>
+        </a:lnRef>
+        <a:fillRef idx="0">
+          <a:schemeClr val="accent1"/>
+        </a:fillRef>
+        <a:effectRef idx="1">
+          <a:schemeClr val="accent1"/>
+        </a:effectRef>
+        <a:fontRef idx="minor">
+          <a:schemeClr val="tx1"/>
+        </a:fontRef>
+      </a:style>
+    </a:lnDef>
+  </a:objectDefaults>
+  <a:extraClrSchemeLst/>
+  <a:extLst>
+    <a:ext uri="{05A4C25C-085E-4340-85A3-A5531E510DB2}">
+      <thm15:themeFamily xmlns:thm15="http://schemas.microsoft.com/office/thememl/2012/main" name="Office Theme" id="{2E142A2C-CD16-42D6-873A-C26D2A0506FA}" vid="{1BDDFF52-6CD6-40A5-AB3C-68EB2F1E4D0A}"/>
+    </a:ext>
+  </a:extLst>
+</a:theme>
+</file>
+
+<file path=docMetadata/LabelInfo.xml><?xml version="1.0" encoding="utf-8"?>
+<clbl:labelList xmlns:clbl="http://schemas.microsoft.com/office/2020/mipLabelMetadata">
+  <clbl:label id="{353f86ff-bbc3-4a83-bcc4-920535c0b83f}" enabled="1" method="Standard" siteId="{dbf170fd-2115-452e-8c9d-43c7495ef306}" contentBits="0" removed="0"/>
+</clbl:labelList>
 </file>
--- a/Presentation/FutureMe_Project_Presentation.pptx
+++ b/Presentation/FutureMe_Project_Presentation.pptx
@@ -2,27 +2,27 @@
 <file path=ppt/presentation.xml><?xml version="1.0" encoding="utf-8"?>
 <p:presentation xmlns:p="http://schemas.openxmlformats.org/presentationml/2006/main">
   <p:sldMasterIdLst>
-    <p:sldMasterId xmlns:r="http://schemas.openxmlformats.org/officeDocument/2006/relationships" id="2147483648" r:id="Rd65914bf24a248be"/>
+    <p:sldMasterId xmlns:r="http://schemas.openxmlformats.org/officeDocument/2006/relationships" id="2147483648" r:id="R7094ddbbe93a4f5a"/>
   </p:sldMasterIdLst>
   <p:notesMasterIdLst>
-    <p:notesMasterId xmlns:r="http://schemas.openxmlformats.org/officeDocument/2006/relationships" r:id="R682807080c874123"/>
+    <p:notesMasterId xmlns:r="http://schemas.openxmlformats.org/officeDocument/2006/relationships" r:id="R8073e5e1d9cc4904"/>
   </p:notesMasterIdLst>
   <p:sldIdLst>
-    <p:sldId xmlns:r="http://schemas.openxmlformats.org/officeDocument/2006/relationships" id="256" r:id="R1bfdaa6deee44876"/>
-    <p:sldId xmlns:r="http://schemas.openxmlformats.org/officeDocument/2006/relationships" id="257" r:id="R1535b352722146de"/>
-    <p:sldId xmlns:r="http://schemas.openxmlformats.org/officeDocument/2006/relationships" id="258" r:id="R273a3ec498924cc8"/>
-    <p:sldId xmlns:r="http://schemas.openxmlformats.org/officeDocument/2006/relationships" id="259" r:id="Reb367167c6704d1d"/>
-    <p:sldId xmlns:r="http://schemas.openxmlformats.org/officeDocument/2006/relationships" id="260" r:id="Rccfdcbd245854cc2"/>
-    <p:sldId xmlns:r="http://schemas.openxmlformats.org/officeDocument/2006/relationships" id="261" r:id="R31829015e7384da6"/>
-    <p:sldId xmlns:r="http://schemas.openxmlformats.org/officeDocument/2006/relationships" id="262" r:id="R98fb1791878b4cb9"/>
-    <p:sldId xmlns:r="http://schemas.openxmlformats.org/officeDocument/2006/relationships" id="263" r:id="Rcf05e42704a7413f"/>
-    <p:sldId xmlns:r="http://schemas.openxmlformats.org/officeDocument/2006/relationships" id="264" r:id="R5d1d3f4657ee47f2"/>
-    <p:sldId xmlns:r="http://schemas.openxmlformats.org/officeDocument/2006/relationships" id="265" r:id="Rf2a4bb56356949e1"/>
-    <p:sldId xmlns:r="http://schemas.openxmlformats.org/officeDocument/2006/relationships" id="266" r:id="Rf7f308c04a45496a"/>
-    <p:sldId xmlns:r="http://schemas.openxmlformats.org/officeDocument/2006/relationships" id="267" r:id="R670a9c2b53b04fdb"/>
-    <p:sldId xmlns:r="http://schemas.openxmlformats.org/officeDocument/2006/relationships" id="268" r:id="R483bc21060f542ec"/>
-    <p:sldId xmlns:r="http://schemas.openxmlformats.org/officeDocument/2006/relationships" id="269" r:id="Rd8f0832dacd9435f"/>
-    <p:sldId xmlns:r="http://schemas.openxmlformats.org/officeDocument/2006/relationships" id="270" r:id="Red0f7d45d767452f"/>
+    <p:sldId xmlns:r="http://schemas.openxmlformats.org/officeDocument/2006/relationships" id="256" r:id="Rff8adb23ee2b4f63"/>
+    <p:sldId xmlns:r="http://schemas.openxmlformats.org/officeDocument/2006/relationships" id="257" r:id="Rbf47c7534741407e"/>
+    <p:sldId xmlns:r="http://schemas.openxmlformats.org/officeDocument/2006/relationships" id="258" r:id="R1f5bd94ec06c4aeb"/>
+    <p:sldId xmlns:r="http://schemas.openxmlformats.org/officeDocument/2006/relationships" id="259" r:id="R76cf64df602e4bfd"/>
+    <p:sldId xmlns:r="http://schemas.openxmlformats.org/officeDocument/2006/relationships" id="260" r:id="R2404a7faeefe4801"/>
+    <p:sldId xmlns:r="http://schemas.openxmlformats.org/officeDocument/2006/relationships" id="261" r:id="Rf615e8877c854422"/>
+    <p:sldId xmlns:r="http://schemas.openxmlformats.org/officeDocument/2006/relationships" id="262" r:id="R21f6784c81a0478a"/>
+    <p:sldId xmlns:r="http://schemas.openxmlformats.org/officeDocument/2006/relationships" id="263" r:id="R9799b24dcebf4bfe"/>
+    <p:sldId xmlns:r="http://schemas.openxmlformats.org/officeDocument/2006/relationships" id="264" r:id="R57bfba2ad1a54080"/>
+    <p:sldId xmlns:r="http://schemas.openxmlformats.org/officeDocument/2006/relationships" id="265" r:id="Re459bddfd2974021"/>
+    <p:sldId xmlns:r="http://schemas.openxmlformats.org/officeDocument/2006/relationships" id="266" r:id="R073d63f588754895"/>
+    <p:sldId xmlns:r="http://schemas.openxmlformats.org/officeDocument/2006/relationships" id="267" r:id="Rc03cee49b4074ca2"/>
+    <p:sldId xmlns:r="http://schemas.openxmlformats.org/officeDocument/2006/relationships" id="268" r:id="R572aa0e1d6e546f8"/>
+    <p:sldId xmlns:r="http://schemas.openxmlformats.org/officeDocument/2006/relationships" id="269" r:id="R74fadf0998174441"/>
+    <p:sldId xmlns:r="http://schemas.openxmlformats.org/officeDocument/2006/relationships" id="270" r:id="Rbb8be573a95843b4"/>
   </p:sldIdLst>
   <p:sldSz cx="12191695" cy="6858000"/>
   <p:notesSz cx="6858000" cy="9144000"/>
@@ -477,7 +477,31 @@
         <p:txBody>
           <a:bodyPr xmlns:a="http://schemas.openxmlformats.org/drawingml/2006/main"/>
           <a:lstStyle xmlns:a="http://schemas.openxmlformats.org/drawingml/2006/main"/>
-          <a:p xmlns:a="http://schemas.openxmlformats.org/drawingml/2006/main"/>
+          <a:p xmlns:a="http://schemas.openxmlformats.org/drawingml/2006/main">
+            <a:r>
+              <a:t>Opening: FutureMe helps a learner choose the next experiment, not a permanent identity.</a:t>
+            </a:r>
+          </a:p>
+          <a:p xmlns:a="http://schemas.openxmlformats.org/drawingml/2006/main">
+            <a:r>
+              <a:t>[Sources]</a:t>
+            </a:r>
+          </a:p>
+          <a:p xmlns:a="http://schemas.openxmlformats.org/drawingml/2006/main">
+            <a:r>
+              <a:t>- README.md — current product boundary and status</a:t>
+            </a:r>
+          </a:p>
+          <a:p xmlns:a="http://schemas.openxmlformats.org/drawingml/2006/main">
+            <a:r>
+              <a:t>- 03_WebApp/Pre_Present/READMEEN.md — implemented learner journey</a:t>
+            </a:r>
+          </a:p>
+          <a:p xmlns:a="http://schemas.openxmlformats.org/drawingml/2006/main">
+            <a:r>
+              <a:t>[/Sources]</a:t>
+            </a:r>
+          </a:p>
         </p:txBody>
       </p:sp>
       <p:sp>
@@ -543,7 +567,41 @@
         <p:txBody>
           <a:bodyPr xmlns:a="http://schemas.openxmlformats.org/drawingml/2006/main"/>
           <a:lstStyle xmlns:a="http://schemas.openxmlformats.org/drawingml/2006/main"/>
-          <a:p xmlns:a="http://schemas.openxmlformats.org/drawingml/2006/main"/>
+          <a:p xmlns:a="http://schemas.openxmlformats.org/drawingml/2006/main">
+            <a:r>
+              <a:t>The 90-item and 1,000-item banks are future research inputs. Neither is imported by the live interview.</a:t>
+            </a:r>
+          </a:p>
+          <a:p xmlns:a="http://schemas.openxmlformats.org/drawingml/2006/main">
+            <a:r>
+              <a:t>[Sources]</a:t>
+            </a:r>
+          </a:p>
+          <a:p xmlns:a="http://schemas.openxmlformats.org/drawingml/2006/main">
+            <a:r>
+              <a:t>- 01_Research/Adaptive_Questionnaire/README.md — 90-item design boundary</a:t>
+            </a:r>
+          </a:p>
+          <a:p xmlns:a="http://schemas.openxmlformats.org/drawingml/2006/main">
+            <a:r>
+              <a:t>- 03_WebApp/Pre_Present/data/question_bank_1000.json — restored research bank</a:t>
+            </a:r>
+          </a:p>
+          <a:p xmlns:a="http://schemas.openxmlformats.org/drawingml/2006/main">
+            <a:r>
+              <a:t>- 03_WebApp/Pre_Present/scripts/validate-future-question-bank.mjs — structural validation</a:t>
+            </a:r>
+          </a:p>
+          <a:p xmlns:a="http://schemas.openxmlformats.org/drawingml/2006/main">
+            <a:r>
+              <a:t>- 03_WebApp/Pre_Present/docs/05-system-architecture.md — current/planned architecture boundary</a:t>
+            </a:r>
+          </a:p>
+          <a:p xmlns:a="http://schemas.openxmlformats.org/drawingml/2006/main">
+            <a:r>
+              <a:t>[/Sources]</a:t>
+            </a:r>
+          </a:p>
         </p:txBody>
       </p:sp>
       <p:sp>
@@ -609,7 +667,31 @@
         <p:txBody>
           <a:bodyPr xmlns:a="http://schemas.openxmlformats.org/drawingml/2006/main"/>
           <a:lstStyle xmlns:a="http://schemas.openxmlformats.org/drawingml/2006/main"/>
-          <a:p xmlns:a="http://schemas.openxmlformats.org/drawingml/2006/main"/>
+          <a:p xmlns:a="http://schemas.openxmlformats.org/drawingml/2006/main">
+            <a:r>
+              <a:t>Eligibility, scoring, refusal, ties and ordering are deterministic. The fixed weights are design judgement.</a:t>
+            </a:r>
+          </a:p>
+          <a:p xmlns:a="http://schemas.openxmlformats.org/drawingml/2006/main">
+            <a:r>
+              <a:t>[Sources]</a:t>
+            </a:r>
+          </a:p>
+          <a:p xmlns:a="http://schemas.openxmlformats.org/drawingml/2006/main">
+            <a:r>
+              <a:t>- 03_WebApp/Pre_Present/lib/decision-engine — current implementation</a:t>
+            </a:r>
+          </a:p>
+          <a:p xmlns:a="http://schemas.openxmlformats.org/drawingml/2006/main">
+            <a:r>
+              <a:t>- 03_WebApp/Pre_Present/docs/04-ai-system.md — scoring and AI boundary</a:t>
+            </a:r>
+          </a:p>
+          <a:p xmlns:a="http://schemas.openxmlformats.org/drawingml/2006/main">
+            <a:r>
+              <a:t>[/Sources]</a:t>
+            </a:r>
+          </a:p>
         </p:txBody>
       </p:sp>
       <p:sp>
@@ -675,7 +757,41 @@
         <p:txBody>
           <a:bodyPr xmlns:a="http://schemas.openxmlformats.org/drawingml/2006/main"/>
           <a:lstStyle xmlns:a="http://schemas.openxmlformats.org/drawingml/2006/main"/>
-          <a:p xmlns:a="http://schemas.openxmlformats.org/drawingml/2006/main"/>
+          <a:p xmlns:a="http://schemas.openxmlformats.org/drawingml/2006/main">
+            <a:r>
+              <a:t>Screenshots were captured from the current app and retained at their inherited crop and placement.</a:t>
+            </a:r>
+          </a:p>
+          <a:p xmlns:a="http://schemas.openxmlformats.org/drawingml/2006/main">
+            <a:r>
+              <a:t>[Sources]</a:t>
+            </a:r>
+          </a:p>
+          <a:p xmlns:a="http://schemas.openxmlformats.org/drawingml/2006/main">
+            <a:r>
+              <a:t>- 03_WebApp/Pre_Present/assets/screenshots/app/interview-2026-08-09.png — Reflect screen</a:t>
+            </a:r>
+          </a:p>
+          <a:p xmlns:a="http://schemas.openxmlformats.org/drawingml/2006/main">
+            <a:r>
+              <a:t>- 03_WebApp/Pre_Present/assets/screenshots/app/routes-2026-08-09.png — Explore screen</a:t>
+            </a:r>
+          </a:p>
+          <a:p xmlns:a="http://schemas.openxmlformats.org/drawingml/2006/main">
+            <a:r>
+              <a:t>- 03_WebApp/Pre_Present/assets/screenshots/app/plan-2026-08-09.png — Act screen</a:t>
+            </a:r>
+          </a:p>
+          <a:p xmlns:a="http://schemas.openxmlformats.org/drawingml/2006/main">
+            <a:r>
+              <a:t>- npm test, 11 Aug 2026 — 26 files and 529 tests passed</a:t>
+            </a:r>
+          </a:p>
+          <a:p xmlns:a="http://schemas.openxmlformats.org/drawingml/2006/main">
+            <a:r>
+              <a:t>[/Sources]</a:t>
+            </a:r>
+          </a:p>
         </p:txBody>
       </p:sp>
       <p:sp>
@@ -741,7 +857,31 @@
         <p:txBody>
           <a:bodyPr xmlns:a="http://schemas.openxmlformats.org/drawingml/2006/main"/>
           <a:lstStyle xmlns:a="http://schemas.openxmlformats.org/drawingml/2006/main"/>
-          <a:p xmlns:a="http://schemas.openxmlformats.org/drawingml/2006/main"/>
+          <a:p xmlns:a="http://schemas.openxmlformats.org/drawingml/2006/main">
+            <a:r>
+              <a:t>FutureMe continues after the score by making evidence, uncertainty and a reversible action visible.</a:t>
+            </a:r>
+          </a:p>
+          <a:p xmlns:a="http://schemas.openxmlformats.org/drawingml/2006/main">
+            <a:r>
+              <a:t>[Sources]</a:t>
+            </a:r>
+          </a:p>
+          <a:p xmlns:a="http://schemas.openxmlformats.org/drawingml/2006/main">
+            <a:r>
+              <a:t>- 03_WebApp/Pre_Present/docs/03-user-experience.md — evidence-loop UX</a:t>
+            </a:r>
+          </a:p>
+          <a:p xmlns:a="http://schemas.openxmlformats.org/drawingml/2006/main">
+            <a:r>
+              <a:t>- 03_WebApp/Pre_Present/READMEEN.md — implemented comparison and plan</a:t>
+            </a:r>
+          </a:p>
+          <a:p xmlns:a="http://schemas.openxmlformats.org/drawingml/2006/main">
+            <a:r>
+              <a:t>[/Sources]</a:t>
+            </a:r>
+          </a:p>
         </p:txBody>
       </p:sp>
       <p:sp>
@@ -807,7 +947,36 @@
         <p:txBody>
           <a:bodyPr xmlns:a="http://schemas.openxmlformats.org/drawingml/2006/main"/>
           <a:lstStyle xmlns:a="http://schemas.openxmlformats.org/drawingml/2006/main"/>
-          <a:p xmlns:a="http://schemas.openxmlformats.org/drawingml/2006/main"/>
+          <a:p xmlns:a="http://schemas.openxmlformats.org/drawingml/2006/main">
+            <a:r>
+              <a:t>Passing code and synthetic-pipeline checks does not establish reliability, validity, fairness or effectiveness.</a:t>
+            </a:r>
+          </a:p>
+          <a:p xmlns:a="http://schemas.openxmlformats.org/drawingml/2006/main">
+            <a:r>
+              <a:t>[Sources]</a:t>
+            </a:r>
+          </a:p>
+          <a:p xmlns:a="http://schemas.openxmlformats.org/drawingml/2006/main">
+            <a:r>
+              <a:t>- 03_WebApp/Pre_Present/docs/validation-plan.md — validation sequence</a:t>
+            </a:r>
+          </a:p>
+          <a:p xmlns:a="http://schemas.openxmlformats.org/drawingml/2006/main">
+            <a:r>
+              <a:t>- 03_WebApp/Pre_Present/docs/pilot-protocol.md — proposed pilot gates</a:t>
+            </a:r>
+          </a:p>
+          <a:p xmlns:a="http://schemas.openxmlformats.org/drawingml/2006/main">
+            <a:r>
+              <a:t>- 01_Research/Adaptive_Questionnaire/sim/README.md — limits of synthetic respondents</a:t>
+            </a:r>
+          </a:p>
+          <a:p xmlns:a="http://schemas.openxmlformats.org/drawingml/2006/main">
+            <a:r>
+              <a:t>[/Sources]</a:t>
+            </a:r>
+          </a:p>
         </p:txBody>
       </p:sp>
       <p:sp>
@@ -873,7 +1042,36 @@
         <p:txBody>
           <a:bodyPr xmlns:a="http://schemas.openxmlformats.org/drawingml/2006/main"/>
           <a:lstStyle xmlns:a="http://schemas.openxmlformats.org/drawingml/2006/main"/>
-          <a:p xmlns:a="http://schemas.openxmlformats.org/drawingml/2006/main"/>
+          <a:p xmlns:a="http://schemas.openxmlformats.org/drawingml/2006/main">
+            <a:r>
+              <a:t>Do not present school, platform or cloud partnerships as confirmed until an agreement exists.</a:t>
+            </a:r>
+          </a:p>
+          <a:p xmlns:a="http://schemas.openxmlformats.org/drawingml/2006/main">
+            <a:r>
+              <a:t>[Sources]</a:t>
+            </a:r>
+          </a:p>
+          <a:p xmlns:a="http://schemas.openxmlformats.org/drawingml/2006/main">
+            <a:r>
+              <a:t>- README.md — current status and repository boundary</a:t>
+            </a:r>
+          </a:p>
+          <a:p xmlns:a="http://schemas.openxmlformats.org/drawingml/2006/main">
+            <a:r>
+              <a:t>- 03_WebApp/Pre_Present/docs/07-roadmap.md — staged roadmap</a:t>
+            </a:r>
+          </a:p>
+          <a:p xmlns:a="http://schemas.openxmlformats.org/drawingml/2006/main">
+            <a:r>
+              <a:t>- 01_Research/Data/REFERENCES.md — source registry</a:t>
+            </a:r>
+          </a:p>
+          <a:p xmlns:a="http://schemas.openxmlformats.org/drawingml/2006/main">
+            <a:r>
+              <a:t>[/Sources]</a:t>
+            </a:r>
+          </a:p>
         </p:txBody>
       </p:sp>
       <p:sp>
@@ -939,7 +1137,31 @@
         <p:txBody>
           <a:bodyPr xmlns:a="http://schemas.openxmlformats.org/drawingml/2006/main"/>
           <a:lstStyle xmlns:a="http://schemas.openxmlformats.org/drawingml/2006/main"/>
-          <a:p xmlns:a="http://schemas.openxmlformats.org/drawingml/2006/main"/>
+          <a:p xmlns:a="http://schemas.openxmlformats.org/drawingml/2006/main">
+            <a:r>
+              <a:t>The choice-point examples are context, not evidence that FutureMe improves outcomes.</a:t>
+            </a:r>
+          </a:p>
+          <a:p xmlns:a="http://schemas.openxmlformats.org/drawingml/2006/main">
+            <a:r>
+              <a:t>[Sources]</a:t>
+            </a:r>
+          </a:p>
+          <a:p xmlns:a="http://schemas.openxmlformats.org/drawingml/2006/main">
+            <a:r>
+              <a:t>- 03_WebApp/Pre_Present/docs/02-research-and-evidence.md — Thai education and mismatch evidence</a:t>
+            </a:r>
+          </a:p>
+          <a:p xmlns:a="http://schemas.openxmlformats.org/drawingml/2006/main">
+            <a:r>
+              <a:t>- 01_Research/Data/SOURCE_AUDIT.md — claim-status audit</a:t>
+            </a:r>
+          </a:p>
+          <a:p xmlns:a="http://schemas.openxmlformats.org/drawingml/2006/main">
+            <a:r>
+              <a:t>[/Sources]</a:t>
+            </a:r>
+          </a:p>
         </p:txBody>
       </p:sp>
       <p:sp>
@@ -1005,7 +1227,36 @@
         <p:txBody>
           <a:bodyPr xmlns:a="http://schemas.openxmlformats.org/drawingml/2006/main"/>
           <a:lstStyle xmlns:a="http://schemas.openxmlformats.org/drawingml/2006/main"/>
-          <a:p xmlns:a="http://schemas.openxmlformats.org/drawingml/2006/main"/>
+          <a:p xmlns:a="http://schemas.openxmlformats.org/drawingml/2006/main">
+            <a:r>
+              <a:t>Do not combine the percentages causally; their scopes and denominators differ.</a:t>
+            </a:r>
+          </a:p>
+          <a:p xmlns:a="http://schemas.openxmlformats.org/drawingml/2006/main">
+            <a:r>
+              <a:t>[Sources]</a:t>
+            </a:r>
+          </a:p>
+          <a:p xmlns:a="http://schemas.openxmlformats.org/drawingml/2006/main">
+            <a:r>
+              <a:t>- https://tdri.or.th/2025/09/thailand-human-capital-development/ — 56% and 27% public context</a:t>
+            </a:r>
+          </a:p>
+          <a:p xmlns:a="http://schemas.openxmlformats.org/drawingml/2006/main">
+            <a:r>
+              <a:t>- https://www.weforum.org/publications/the-future-of-jobs-report-2025/in-full/3-skills-outlook/ — 39% core-skills outlook</a:t>
+            </a:r>
+          </a:p>
+          <a:p xmlns:a="http://schemas.openxmlformats.org/drawingml/2006/main">
+            <a:r>
+              <a:t>- 01_Research/Data/SOURCE_AUDIT.md — interpretation limits</a:t>
+            </a:r>
+          </a:p>
+          <a:p xmlns:a="http://schemas.openxmlformats.org/drawingml/2006/main">
+            <a:r>
+              <a:t>[/Sources]</a:t>
+            </a:r>
+          </a:p>
         </p:txBody>
       </p:sp>
       <p:sp>
@@ -1071,7 +1322,36 @@
         <p:txBody>
           <a:bodyPr xmlns:a="http://schemas.openxmlformats.org/drawingml/2006/main"/>
           <a:lstStyle xmlns:a="http://schemas.openxmlformats.org/drawingml/2006/main"/>
-          <a:p xmlns:a="http://schemas.openxmlformats.org/drawingml/2006/main"/>
+          <a:p xmlns:a="http://schemas.openxmlformats.org/drawingml/2006/main">
+            <a:r>
+              <a:t>This is the current demo-data flow. Unknown values remain unknown instead of being inferred.</a:t>
+            </a:r>
+          </a:p>
+          <a:p xmlns:a="http://schemas.openxmlformats.org/drawingml/2006/main">
+            <a:r>
+              <a:t>[Sources]</a:t>
+            </a:r>
+          </a:p>
+          <a:p xmlns:a="http://schemas.openxmlformats.org/drawingml/2006/main">
+            <a:r>
+              <a:t>- 01_Research/Geography_and_Access/README.md — pipeline, counts and limitations</a:t>
+            </a:r>
+          </a:p>
+          <a:p xmlns:a="http://schemas.openxmlformats.org/drawingml/2006/main">
+            <a:r>
+              <a:t>- 01_Research/Geography_and_Access/PROVENANCE.json — dates, licences and full checksums</a:t>
+            </a:r>
+          </a:p>
+          <a:p xmlns:a="http://schemas.openxmlformats.org/drawingml/2006/main">
+            <a:r>
+              <a:t>- 03_WebApp/Pre_Present/scripts/validate-research-data.mjs — integrity checks</a:t>
+            </a:r>
+          </a:p>
+          <a:p xmlns:a="http://schemas.openxmlformats.org/drawingml/2006/main">
+            <a:r>
+              <a:t>[/Sources]</a:t>
+            </a:r>
+          </a:p>
         </p:txBody>
       </p:sp>
       <p:sp>
@@ -1137,7 +1417,31 @@
         <p:txBody>
           <a:bodyPr xmlns:a="http://schemas.openxmlformats.org/drawingml/2006/main"/>
           <a:lstStyle xmlns:a="http://schemas.openxmlformats.org/drawingml/2006/main"/>
-          <a:p xmlns:a="http://schemas.openxmlformats.org/drawingml/2006/main"/>
+          <a:p xmlns:a="http://schemas.openxmlformats.org/drawingml/2006/main">
+            <a:r>
+              <a:t>The route hypotheses are deliberately reversible.</a:t>
+            </a:r>
+          </a:p>
+          <a:p xmlns:a="http://schemas.openxmlformats.org/drawingml/2006/main">
+            <a:r>
+              <a:t>[Sources]</a:t>
+            </a:r>
+          </a:p>
+          <a:p xmlns:a="http://schemas.openxmlformats.org/drawingml/2006/main">
+            <a:r>
+              <a:t>- 03_WebApp/Pre_Present/docs/01-project-overview.md — product thesis</a:t>
+            </a:r>
+          </a:p>
+          <a:p xmlns:a="http://schemas.openxmlformats.org/drawingml/2006/main">
+            <a:r>
+              <a:t>- 03_WebApp/Pre_Present/docs/03-user-experience.md — evidence-loop design</a:t>
+            </a:r>
+          </a:p>
+          <a:p xmlns:a="http://schemas.openxmlformats.org/drawingml/2006/main">
+            <a:r>
+              <a:t>[/Sources]</a:t>
+            </a:r>
+          </a:p>
         </p:txBody>
       </p:sp>
       <p:sp>
@@ -1203,7 +1507,31 @@
         <p:txBody>
           <a:bodyPr xmlns:a="http://schemas.openxmlformats.org/drawingml/2006/main"/>
           <a:lstStyle xmlns:a="http://schemas.openxmlformats.org/drawingml/2006/main"/>
-          <a:p xmlns:a="http://schemas.openxmlformats.org/drawingml/2006/main"/>
+          <a:p xmlns:a="http://schemas.openxmlformats.org/drawingml/2006/main">
+            <a:r>
+              <a:t>RIASEC structures reflection; it does not make this project-specific instrument validated.</a:t>
+            </a:r>
+          </a:p>
+          <a:p xmlns:a="http://schemas.openxmlformats.org/drawingml/2006/main">
+            <a:r>
+              <a:t>[Sources]</a:t>
+            </a:r>
+          </a:p>
+          <a:p xmlns:a="http://schemas.openxmlformats.org/drawingml/2006/main">
+            <a:r>
+              <a:t>- 03_WebApp/Pre_Present/docs/questionnaire-methodology.md — construct and item provenance</a:t>
+            </a:r>
+          </a:p>
+          <a:p xmlns:a="http://schemas.openxmlformats.org/drawingml/2006/main">
+            <a:r>
+              <a:t>- 01_Research/Adaptive_Questionnaire/README.md — research-only adaptive design</a:t>
+            </a:r>
+          </a:p>
+          <a:p xmlns:a="http://schemas.openxmlformats.org/drawingml/2006/main">
+            <a:r>
+              <a:t>[/Sources]</a:t>
+            </a:r>
+          </a:p>
         </p:txBody>
       </p:sp>
       <p:sp>
@@ -1269,7 +1597,31 @@
         <p:txBody>
           <a:bodyPr xmlns:a="http://schemas.openxmlformats.org/drawingml/2006/main"/>
           <a:lstStyle xmlns:a="http://schemas.openxmlformats.org/drawingml/2006/main"/>
-          <a:p xmlns:a="http://schemas.openxmlformats.org/drawingml/2006/main"/>
+          <a:p xmlns:a="http://schemas.openxmlformats.org/drawingml/2006/main">
+            <a:r>
+              <a:t>These rules are product principles derived from the source audit and safeguarding boundary.</a:t>
+            </a:r>
+          </a:p>
+          <a:p xmlns:a="http://schemas.openxmlformats.org/drawingml/2006/main">
+            <a:r>
+              <a:t>[Sources]</a:t>
+            </a:r>
+          </a:p>
+          <a:p xmlns:a="http://schemas.openxmlformats.org/drawingml/2006/main">
+            <a:r>
+              <a:t>- 03_WebApp/Pre_Present/docs/08-privacy-and-data.md — privacy boundary</a:t>
+            </a:r>
+          </a:p>
+          <a:p xmlns:a="http://schemas.openxmlformats.org/drawingml/2006/main">
+            <a:r>
+              <a:t>- 03_WebApp/Pre_Present/docs/09-source-review.md — provenance and freshness</a:t>
+            </a:r>
+          </a:p>
+          <a:p xmlns:a="http://schemas.openxmlformats.org/drawingml/2006/main">
+            <a:r>
+              <a:t>[/Sources]</a:t>
+            </a:r>
+          </a:p>
         </p:txBody>
       </p:sp>
       <p:sp>
@@ -1335,7 +1687,31 @@
         <p:txBody>
           <a:bodyPr xmlns:a="http://schemas.openxmlformats.org/drawingml/2006/main"/>
           <a:lstStyle xmlns:a="http://schemas.openxmlformats.org/drawingml/2006/main"/>
-          <a:p xmlns:a="http://schemas.openxmlformats.org/drawingml/2006/main"/>
+          <a:p xmlns:a="http://schemas.openxmlformats.org/drawingml/2006/main">
+            <a:r>
+              <a:t>The first answer only changes order: all 30 live interest items are still asked and scoring is unchanged.</a:t>
+            </a:r>
+          </a:p>
+          <a:p xmlns:a="http://schemas.openxmlformats.org/drawingml/2006/main">
+            <a:r>
+              <a:t>[Sources]</a:t>
+            </a:r>
+          </a:p>
+          <a:p xmlns:a="http://schemas.openxmlformats.org/drawingml/2006/main">
+            <a:r>
+              <a:t>- 03_WebApp/Pre_Present/lib/adaptive-engine.ts — branch plan</a:t>
+            </a:r>
+          </a:p>
+          <a:p xmlns:a="http://schemas.openxmlformats.org/drawingml/2006/main">
+            <a:r>
+              <a:t>- 03_WebApp/Pre_Present/tests/unit/adaptive-engine.test.ts — deterministic branch tests</a:t>
+            </a:r>
+          </a:p>
+          <a:p xmlns:a="http://schemas.openxmlformats.org/drawingml/2006/main">
+            <a:r>
+              <a:t>[/Sources]</a:t>
+            </a:r>
+          </a:p>
         </p:txBody>
       </p:sp>
       <p:sp>
@@ -1401,7 +1777,31 @@
         <p:txBody>
           <a:bodyPr xmlns:a="http://schemas.openxmlformats.org/drawingml/2006/main"/>
           <a:lstStyle xmlns:a="http://schemas.openxmlformats.org/drawingml/2006/main"/>
-          <a:p xmlns:a="http://schemas.openxmlformats.org/drawingml/2006/main"/>
+          <a:p xmlns:a="http://schemas.openxmlformats.org/drawingml/2006/main">
+            <a:r>
+              <a:t>The learner can review answers, override a suggested mission, compare again and delete local state.</a:t>
+            </a:r>
+          </a:p>
+          <a:p xmlns:a="http://schemas.openxmlformats.org/drawingml/2006/main">
+            <a:r>
+              <a:t>[Sources]</a:t>
+            </a:r>
+          </a:p>
+          <a:p xmlns:a="http://schemas.openxmlformats.org/drawingml/2006/main">
+            <a:r>
+              <a:t>- 03_WebApp/Pre_Present/READMEEN.md — journey and control surfaces</a:t>
+            </a:r>
+          </a:p>
+          <a:p xmlns:a="http://schemas.openxmlformats.org/drawingml/2006/main">
+            <a:r>
+              <a:t>- 03_WebApp/Pre_Present/e2e/journey.spec.ts — implemented browser journey</a:t>
+            </a:r>
+          </a:p>
+          <a:p xmlns:a="http://schemas.openxmlformats.org/drawingml/2006/main">
+            <a:r>
+              <a:t>[/Sources]</a:t>
+            </a:r>
+          </a:p>
         </p:txBody>
       </p:sp>
       <p:sp>
@@ -4426,17 +4826,17 @@
   </p:cSld>
   <p:clrMap bg1="lt1" tx1="dk1" bg2="lt2" tx2="dk2" accent1="accent1" accent2="accent2" accent3="accent3" accent4="accent4" accent5="accent5" accent6="accent6" hlink="hlink" folHlink="folHlink"/>
   <p:sldLayoutIdLst>
-    <p:sldLayoutId xmlns:r="http://schemas.openxmlformats.org/officeDocument/2006/relationships" id="2147483649" r:id="R1b7977e4311a49e5"/>
-    <p:sldLayoutId xmlns:r="http://schemas.openxmlformats.org/officeDocument/2006/relationships" id="2147483650" r:id="R432d972114234bde"/>
-    <p:sldLayoutId xmlns:r="http://schemas.openxmlformats.org/officeDocument/2006/relationships" id="2147483651" r:id="R5385420762c9404a"/>
-    <p:sldLayoutId xmlns:r="http://schemas.openxmlformats.org/officeDocument/2006/relationships" id="2147483652" r:id="R6f214d798f574937"/>
-    <p:sldLayoutId xmlns:r="http://schemas.openxmlformats.org/officeDocument/2006/relationships" id="2147483653" r:id="R1a8150c2809148d8"/>
-    <p:sldLayoutId xmlns:r="http://schemas.openxmlformats.org/officeDocument/2006/relationships" id="2147483654" r:id="R4ed2fd32ab69404e"/>
-    <p:sldLayoutId xmlns:r="http://schemas.openxmlformats.org/officeDocument/2006/relationships" id="2147483655" r:id="R5f4a77428f914482"/>
-    <p:sldLayoutId xmlns:r="http://schemas.openxmlformats.org/officeDocument/2006/relationships" id="2147483656" r:id="Rf27b8f5bd38b492b"/>
-    <p:sldLayoutId xmlns:r="http://schemas.openxmlformats.org/officeDocument/2006/relationships" id="2147483657" r:id="R3dfcb54fe61c4033"/>
-    <p:sldLayoutId xmlns:r="http://schemas.openxmlformats.org/officeDocument/2006/relationships" id="2147483658" r:id="R456fb62baebd47fe"/>
-    <p:sldLayoutId xmlns:r="http://schemas.openxmlformats.org/officeDocument/2006/relationships" id="2147483659" r:id="R66e60b6ee3014cc9"/>
+    <p:sldLayoutId xmlns:r="http://schemas.openxmlformats.org/officeDocument/2006/relationships" id="2147483649" r:id="R94bf5650d3074799"/>
+    <p:sldLayoutId xmlns:r="http://schemas.openxmlformats.org/officeDocument/2006/relationships" id="2147483650" r:id="Rec2c95d0933e4c3b"/>
+    <p:sldLayoutId xmlns:r="http://schemas.openxmlformats.org/officeDocument/2006/relationships" id="2147483651" r:id="Rc023e9f76a1d47c3"/>
+    <p:sldLayoutId xmlns:r="http://schemas.openxmlformats.org/officeDocument/2006/relationships" id="2147483652" r:id="Rbe16bf8eb50448e0"/>
+    <p:sldLayoutId xmlns:r="http://schemas.openxmlformats.org/officeDocument/2006/relationships" id="2147483653" r:id="R8ebfa86cf7bf456a"/>
+    <p:sldLayoutId xmlns:r="http://schemas.openxmlformats.org/officeDocument/2006/relationships" id="2147483654" r:id="R0b7458e33865422a"/>
+    <p:sldLayoutId xmlns:r="http://schemas.openxmlformats.org/officeDocument/2006/relationships" id="2147483655" r:id="Rb7154f35fe4b430c"/>
+    <p:sldLayoutId xmlns:r="http://schemas.openxmlformats.org/officeDocument/2006/relationships" id="2147483656" r:id="R78d1d581111e4993"/>
+    <p:sldLayoutId xmlns:r="http://schemas.openxmlformats.org/officeDocument/2006/relationships" id="2147483657" r:id="Ref0675b363fb40cc"/>
+    <p:sldLayoutId xmlns:r="http://schemas.openxmlformats.org/officeDocument/2006/relationships" id="2147483658" r:id="Rd246e52a31454014"/>
+    <p:sldLayoutId xmlns:r="http://schemas.openxmlformats.org/officeDocument/2006/relationships" id="2147483659" r:id="Rdbfe202c2ac54a08"/>
   </p:sldLayoutIdLst>
   <p:txStyles>
     <p:titleStyle>
@@ -4986,7 +5386,7 @@
           <p:nvPr/>
         </p:nvPicPr>
         <p:blipFill>
-          <a:blip xmlns:r="http://schemas.openxmlformats.org/officeDocument/2006/relationships" xmlns:a="http://schemas.openxmlformats.org/drawingml/2006/main" r:embed="R9e04637625664912"/>
+          <a:blip xmlns:r="http://schemas.openxmlformats.org/officeDocument/2006/relationships" xmlns:a="http://schemas.openxmlformats.org/drawingml/2006/main" r:embed="Ra0c3ee52b3834d73"/>
           <a:stretch xmlns:a="http://schemas.openxmlformats.org/drawingml/2006/main">
             <a:fillRect l="0" t="0" r="0" b="0"/>
           </a:stretch>
@@ -5052,7 +5452,7 @@
                 <a:ea typeface="Aptos"/>
                 <a:cs typeface="Aptos"/>
               </a:rPr>
-              <a:t>JUMP THAILAND HACKATHON 2026 · PROJECT CASE STUDY</a:t>
+              <a:t>JUMP THAILAND HACKATHON 2026 · UPDATED PROJECT CASE STUDY</a:t>
             </a:r>
           </a:p>
         </p:txBody>
@@ -5306,7 +5706,7 @@
                 <a:ea typeface="Aptos"/>
                 <a:cs typeface="Aptos"/>
               </a:rPr>
-              <a:t>A decision-support prototype for Thai secondary and vocational students.</a:t>
+              <a:t>A runnable decision-support prototype for Thai secondary and vocational students.</a:t>
             </a:r>
           </a:p>
         </p:txBody>
@@ -5529,7 +5929,7 @@
                 <a:ea typeface="Aptos"/>
                 <a:cs typeface="Aptos"/>
               </a:rPr>
-              <a:t>Research synthesis · Product strategy · UX · AI architecture · Validation</a:t>
+              <a:t>Research · Data lineage · Product · Decision logic · Validation</a:t>
             </a:r>
           </a:p>
         </p:txBody>
@@ -6344,7 +6744,7 @@
           <p:nvPr/>
         </p:nvPicPr>
         <p:blipFill>
-          <a:blip xmlns:r="http://schemas.openxmlformats.org/officeDocument/2006/relationships" xmlns:a="http://schemas.openxmlformats.org/drawingml/2006/main" r:embed="R1ac22e49ba804f9c"/>
+          <a:blip xmlns:r="http://schemas.openxmlformats.org/officeDocument/2006/relationships" xmlns:a="http://schemas.openxmlformats.org/drawingml/2006/main" r:embed="R55ed13ab81fa40b6"/>
           <a:stretch xmlns:a="http://schemas.openxmlformats.org/drawingml/2006/main">
             <a:fillRect l="0" t="0" r="0" b="0"/>
           </a:stretch>
@@ -6466,7 +6866,7 @@
                 <a:ea typeface="Aptos"/>
                 <a:cs typeface="Aptos"/>
               </a:rPr>
-              <a:t>AI supports the conversation—not the decision</a:t>
+              <a:t>Rules decide. AI explains. Research stays gated.</a:t>
             </a:r>
           </a:p>
         </p:txBody>
@@ -6522,7 +6922,7 @@
                 <a:ea typeface="Aptos"/>
                 <a:cs typeface="Aptos"/>
               </a:rPr>
-              <a:t>Current capabilities and future architecture are deliberately separated.</a:t>
+              <a:t>The live decision path, future research inputs and production plan remain separate.</a:t>
             </a:r>
           </a:p>
         </p:txBody>
@@ -6592,7 +6992,7 @@
           <p:nvPr/>
         </p:nvPicPr>
         <p:blipFill>
-          <a:blip xmlns:r="http://schemas.openxmlformats.org/officeDocument/2006/relationships" xmlns:a="http://schemas.openxmlformats.org/drawingml/2006/main" r:embed="R5a955d12d62d4812"/>
+          <a:blip xmlns:r="http://schemas.openxmlformats.org/officeDocument/2006/relationships" xmlns:a="http://schemas.openxmlformats.org/drawingml/2006/main" r:embed="R2fe800335fc44cf2"/>
           <a:stretch xmlns:a="http://schemas.openxmlformats.org/drawingml/2006/main">
             <a:fillRect l="0" t="0" r="0" b="0"/>
           </a:stretch>
@@ -6658,7 +7058,7 @@
                 <a:ea typeface="Aptos"/>
                 <a:cs typeface="Aptos"/>
               </a:rPr>
-              <a:t>FutureMe AI · Project case study · July 2026</a:t>
+              <a:t>FutureMe AI · Project case study · August 2026</a:t>
             </a:r>
           </a:p>
         </p:txBody>
@@ -6844,7 +7244,7 @@
         <p:spPr>
           <a:xfrm xmlns:a="http://schemas.openxmlformats.org/drawingml/2006/main">
             <a:off x="960120" y="2185416"/>
-            <a:ext cx="3108960" cy="384048"/>
+            <a:ext cx="3108960" cy="441960"/>
           </a:xfrm>
           <a:prstGeom xmlns:a="http://schemas.openxmlformats.org/drawingml/2006/main" prst="rect">
             <a:avLst/>
@@ -6878,7 +7278,32 @@
                 <a:ea typeface="Aptos"/>
                 <a:cs typeface="Aptos"/>
               </a:rPr>
-              <a:t>Learner input</a:t>
+              <a:t>30 live items</a:t>
+            </a:r>
+          </a:p>
+          <a:p xmlns:a="http://schemas.openxmlformats.org/drawingml/2006/main">
+            <a:pPr algn="ctr">
+              <a:lnSpc>
+                <a:spcPct val="100000"/>
+              </a:lnSpc>
+              <a:spcBef>
+                <a:spcPts val="0"/>
+              </a:spcBef>
+              <a:spcAft>
+                <a:spcPts val="0"/>
+              </a:spcAft>
+              <a:buNone/>
+            </a:pPr>
+            <a:r>
+              <a:rPr sz="1450" b="1" i="0">
+                <a:solidFill>
+                  <a:srgbClr val="F5F5FA"/>
+                </a:solidFill>
+                <a:latin typeface="Aptos"/>
+                <a:ea typeface="Aptos"/>
+                <a:cs typeface="Aptos"/>
+              </a:rPr>
+              <a:t>+ 5 context prompts</a:t>
             </a:r>
           </a:p>
         </p:txBody>
@@ -7011,7 +7436,7 @@
         <p:spPr>
           <a:xfrm xmlns:a="http://schemas.openxmlformats.org/drawingml/2006/main">
             <a:off x="960120" y="3264408"/>
-            <a:ext cx="3108960" cy="384048"/>
+            <a:ext cx="3108960" cy="441960"/>
           </a:xfrm>
           <a:prstGeom xmlns:a="http://schemas.openxmlformats.org/drawingml/2006/main" prst="rect">
             <a:avLst/>
@@ -7045,8 +7470,32 @@
                 <a:ea typeface="Aptos"/>
                 <a:cs typeface="Aptos"/>
               </a:rPr>
-              <a:t>Deterministic
-TypeScript rules</a:t>
+              <a:t>First-answer ordering</a:t>
+            </a:r>
+          </a:p>
+          <a:p xmlns:a="http://schemas.openxmlformats.org/drawingml/2006/main">
+            <a:pPr algn="ctr">
+              <a:lnSpc>
+                <a:spcPct val="100000"/>
+              </a:lnSpc>
+              <a:spcBef>
+                <a:spcPts val="0"/>
+              </a:spcBef>
+              <a:spcAft>
+                <a:spcPts val="0"/>
+              </a:spcAft>
+              <a:buNone/>
+            </a:pPr>
+            <a:r>
+              <a:rPr sz="1450" b="1" i="0">
+                <a:solidFill>
+                  <a:srgbClr val="F5F5FA"/>
+                </a:solidFill>
+                <a:latin typeface="Aptos"/>
+                <a:ea typeface="Aptos"/>
+                <a:cs typeface="Aptos"/>
+              </a:rPr>
+              <a:t>+ deterministic rules</a:t>
             </a:r>
           </a:p>
         </p:txBody>
@@ -7179,7 +7628,7 @@
         <p:spPr>
           <a:xfrm xmlns:a="http://schemas.openxmlformats.org/drawingml/2006/main">
             <a:off x="960120" y="4343400"/>
-            <a:ext cx="3108960" cy="384048"/>
+            <a:ext cx="3108960" cy="441960"/>
           </a:xfrm>
           <a:prstGeom xmlns:a="http://schemas.openxmlformats.org/drawingml/2006/main" prst="rect">
             <a:avLst/>
@@ -7214,6 +7663,31 @@
                 <a:cs typeface="Aptos"/>
               </a:rPr>
               <a:t>0–3 routes</a:t>
+            </a:r>
+          </a:p>
+          <a:p xmlns:a="http://schemas.openxmlformats.org/drawingml/2006/main">
+            <a:pPr algn="ctr">
+              <a:lnSpc>
+                <a:spcPct val="100000"/>
+              </a:lnSpc>
+              <a:spcBef>
+                <a:spcPts val="0"/>
+              </a:spcBef>
+              <a:spcAft>
+                <a:spcPts val="0"/>
+              </a:spcAft>
+              <a:buNone/>
+            </a:pPr>
+            <a:r>
+              <a:rPr sz="1450" b="1" i="0">
+                <a:solidFill>
+                  <a:srgbClr val="07070D"/>
+                </a:solidFill>
+                <a:latin typeface="Aptos"/>
+                <a:ea typeface="Aptos"/>
+                <a:cs typeface="Aptos"/>
+              </a:rPr>
+              <a:t>+ 30-day plan</a:t>
             </a:r>
           </a:p>
         </p:txBody>
@@ -7324,8 +7798,32 @@
                 <a:ea typeface="Aptos"/>
                 <a:cs typeface="Aptos"/>
               </a:rPr>
-              <a:t>Optional LLM: bounded chat + rewording
-Off by default · no assessment answers</a:t>
+              <a:t>Optional LLM: bounded chat + rewording</a:t>
+            </a:r>
+          </a:p>
+          <a:p xmlns:a="http://schemas.openxmlformats.org/drawingml/2006/main">
+            <a:pPr algn="ctr">
+              <a:lnSpc>
+                <a:spcPct val="100000"/>
+              </a:lnSpc>
+              <a:spcBef>
+                <a:spcPts val="0"/>
+              </a:spcBef>
+              <a:spcAft>
+                <a:spcPts val="0"/>
+              </a:spcAft>
+              <a:buNone/>
+            </a:pPr>
+            <a:r>
+              <a:rPr sz="1100" b="0" i="0">
+                <a:solidFill>
+                  <a:srgbClr val="A8A8BE"/>
+                </a:solidFill>
+                <a:latin typeface="Aptos"/>
+                <a:ea typeface="Aptos"/>
+                <a:cs typeface="Aptos"/>
+              </a:rPr>
+              <a:t>Outside scoring · offline fallback</a:t>
             </a:r>
           </a:p>
         </p:txBody>
@@ -7480,7 +7978,7 @@
                 <a:ea typeface="Aptos"/>
                 <a:cs typeface="Aptos"/>
               </a:rPr>
-              <a:t>FUTURE · PLANNED</a:t>
+              <a:t>RESEARCH / FUTURE</a:t>
             </a:r>
           </a:p>
         </p:txBody>
@@ -7557,7 +8055,7 @@
         <p:spPr>
           <a:xfrm xmlns:a="http://schemas.openxmlformats.org/drawingml/2006/main">
             <a:off x="5138928" y="2313432"/>
-            <a:ext cx="1426464" cy="493776"/>
+            <a:ext cx="1426464" cy="525780"/>
           </a:xfrm>
           <a:prstGeom xmlns:a="http://schemas.openxmlformats.org/drawingml/2006/main" prst="rect">
             <a:avLst/>
@@ -7591,7 +8089,32 @@
                 <a:ea typeface="Aptos"/>
                 <a:cs typeface="Aptos"/>
               </a:rPr>
-              <a:t>Adaptive Thai conversation</a:t>
+              <a:t>90-item adaptive design</a:t>
+            </a:r>
+          </a:p>
+          <a:p xmlns:a="http://schemas.openxmlformats.org/drawingml/2006/main">
+            <a:pPr algn="ctr">
+              <a:lnSpc>
+                <a:spcPct val="100000"/>
+              </a:lnSpc>
+              <a:spcBef>
+                <a:spcPts val="0"/>
+              </a:spcBef>
+              <a:spcAft>
+                <a:spcPts val="0"/>
+              </a:spcAft>
+              <a:buNone/>
+            </a:pPr>
+            <a:r>
+              <a:rPr sz="1150" b="1" i="0">
+                <a:solidFill>
+                  <a:srgbClr val="F5F5FA"/>
+                </a:solidFill>
+                <a:latin typeface="Aptos"/>
+                <a:ea typeface="Aptos"/>
+                <a:cs typeface="Aptos"/>
+              </a:rPr>
+              <a:t>not live</a:t>
             </a:r>
           </a:p>
         </p:txBody>
@@ -7724,7 +8247,7 @@
         <p:spPr>
           <a:xfrm xmlns:a="http://schemas.openxmlformats.org/drawingml/2006/main">
             <a:off x="7013448" y="2313432"/>
-            <a:ext cx="1426464" cy="493776"/>
+            <a:ext cx="1426464" cy="525780"/>
           </a:xfrm>
           <a:prstGeom xmlns:a="http://schemas.openxmlformats.org/drawingml/2006/main" prst="rect">
             <a:avLst/>
@@ -7758,7 +8281,32 @@
                 <a:ea typeface="Aptos"/>
                 <a:cs typeface="Aptos"/>
               </a:rPr>
-              <a:t>Structured profile extraction</a:t>
+              <a:t>1,000-item bilingual bank</a:t>
+            </a:r>
+          </a:p>
+          <a:p xmlns:a="http://schemas.openxmlformats.org/drawingml/2006/main">
+            <a:pPr algn="ctr">
+              <a:lnSpc>
+                <a:spcPct val="100000"/>
+              </a:lnSpc>
+              <a:spcBef>
+                <a:spcPts val="0"/>
+              </a:spcBef>
+              <a:spcAft>
+                <a:spcPts val="0"/>
+              </a:spcAft>
+              <a:buNone/>
+            </a:pPr>
+            <a:r>
+              <a:rPr sz="1150" b="1" i="0">
+                <a:solidFill>
+                  <a:srgbClr val="F5F5FA"/>
+                </a:solidFill>
+                <a:latin typeface="Aptos"/>
+                <a:ea typeface="Aptos"/>
+                <a:cs typeface="Aptos"/>
+              </a:rPr>
+              <a:t>structurally checked</a:t>
             </a:r>
           </a:p>
         </p:txBody>
@@ -7891,7 +8439,7 @@
         <p:spPr>
           <a:xfrm xmlns:a="http://schemas.openxmlformats.org/drawingml/2006/main">
             <a:off x="8887967" y="2313432"/>
-            <a:ext cx="1426464" cy="493776"/>
+            <a:ext cx="1426464" cy="525780"/>
           </a:xfrm>
           <a:prstGeom xmlns:a="http://schemas.openxmlformats.org/drawingml/2006/main" prst="rect">
             <a:avLst/>
@@ -7925,7 +8473,32 @@
                 <a:ea typeface="Aptos"/>
                 <a:cs typeface="Aptos"/>
               </a:rPr>
-              <a:t>Rule engine</a:t>
+              <a:t>Expert + student review</a:t>
+            </a:r>
+          </a:p>
+          <a:p xmlns:a="http://schemas.openxmlformats.org/drawingml/2006/main">
+            <a:pPr algn="ctr">
+              <a:lnSpc>
+                <a:spcPct val="100000"/>
+              </a:lnSpc>
+              <a:spcBef>
+                <a:spcPts val="0"/>
+              </a:spcBef>
+              <a:spcAft>
+                <a:spcPts val="0"/>
+              </a:spcAft>
+              <a:buNone/>
+            </a:pPr>
+            <a:r>
+              <a:rPr sz="1150" b="1" i="0">
+                <a:solidFill>
+                  <a:srgbClr val="F5F5FA"/>
+                </a:solidFill>
+                <a:latin typeface="Aptos"/>
+                <a:ea typeface="Aptos"/>
+                <a:cs typeface="Aptos"/>
+              </a:rPr>
+              <a:t>before import</a:t>
             </a:r>
           </a:p>
         </p:txBody>
@@ -8534,29 +9107,7 @@
                 <a:ea typeface="Aptos"/>
                 <a:cs typeface="Aptos"/>
               </a:rPr>
-              <a:t>Rules decide. </a:t>
-            </a:r>
-            <a:r>
-              <a:rPr sz="1600" b="1" i="0">
-                <a:solidFill>
-                  <a:srgbClr val="FFD37A"/>
-                </a:solidFill>
-                <a:latin typeface="Aptos"/>
-                <a:ea typeface="Aptos"/>
-                <a:cs typeface="Aptos"/>
-              </a:rPr>
-              <a:t>Retrieval grounds. </a:t>
-            </a:r>
-            <a:r>
-              <a:rPr sz="1600" b="1" i="0">
-                <a:solidFill>
-                  <a:srgbClr val="F5F5FA"/>
-                </a:solidFill>
-                <a:latin typeface="Aptos"/>
-                <a:ea typeface="Aptos"/>
-                <a:cs typeface="Aptos"/>
-              </a:rPr>
-              <a:t>AI explains.</a:t>
+              <a:t>Rules decide. Validated data grounds. AI explains.</a:t>
             </a:r>
           </a:p>
         </p:txBody>
@@ -8612,7 +9163,7 @@
                 <a:ea typeface="Aptos"/>
                 <a:cs typeface="Aptos"/>
               </a:rPr>
-              <a:t>Sources: current code + planned RAG architecture; Qdrant/AIS/NDLP are not implemented</a:t>
+              <a:t>Sources: current code + research banks; production RAG and cloud services are not implemented</a:t>
             </a:r>
           </a:p>
         </p:txBody>
@@ -8648,7 +9199,7 @@
           <p:nvPr/>
         </p:nvPicPr>
         <p:blipFill>
-          <a:blip xmlns:r="http://schemas.openxmlformats.org/officeDocument/2006/relationships" xmlns:a="http://schemas.openxmlformats.org/drawingml/2006/main" r:embed="Rc1fa03e0cdf9478e"/>
+          <a:blip xmlns:r="http://schemas.openxmlformats.org/officeDocument/2006/relationships" xmlns:a="http://schemas.openxmlformats.org/drawingml/2006/main" r:embed="Re778bba3671f4321"/>
           <a:stretch xmlns:a="http://schemas.openxmlformats.org/drawingml/2006/main">
             <a:fillRect l="0" t="0" r="0" b="0"/>
           </a:stretch>
@@ -8896,7 +9447,7 @@
           <p:nvPr/>
         </p:nvPicPr>
         <p:blipFill>
-          <a:blip xmlns:r="http://schemas.openxmlformats.org/officeDocument/2006/relationships" xmlns:a="http://schemas.openxmlformats.org/drawingml/2006/main" r:embed="R96b817d208e34f21"/>
+          <a:blip xmlns:r="http://schemas.openxmlformats.org/officeDocument/2006/relationships" xmlns:a="http://schemas.openxmlformats.org/drawingml/2006/main" r:embed="Rb2cb558f6ac348d3"/>
           <a:stretch xmlns:a="http://schemas.openxmlformats.org/drawingml/2006/main">
             <a:fillRect l="0" t="0" r="0" b="0"/>
           </a:stretch>
@@ -8962,7 +9513,7 @@
                 <a:ea typeface="Aptos"/>
                 <a:cs typeface="Aptos"/>
               </a:rPr>
-              <a:t>FutureMe AI · Project case study · July 2026</a:t>
+              <a:t>FutureMe AI · Project case study · August 2026</a:t>
             </a:r>
           </a:p>
         </p:txBody>
@@ -9073,8 +9624,32 @@
                 <a:ea typeface="Aptos"/>
                 <a:cs typeface="Aptos"/>
               </a:rPr>
-              <a:t>30 items
-+ context</a:t>
+              <a:t>30 live items</a:t>
+            </a:r>
+          </a:p>
+          <a:p xmlns:a="http://schemas.openxmlformats.org/drawingml/2006/main">
+            <a:pPr algn="ctr">
+              <a:lnSpc>
+                <a:spcPct val="100000"/>
+              </a:lnSpc>
+              <a:spcBef>
+                <a:spcPts val="0"/>
+              </a:spcBef>
+              <a:spcAft>
+                <a:spcPts val="0"/>
+              </a:spcAft>
+              <a:buNone/>
+            </a:pPr>
+            <a:r>
+              <a:rPr sz="1250" b="1" i="0">
+                <a:solidFill>
+                  <a:srgbClr val="F5F5FA"/>
+                </a:solidFill>
+                <a:latin typeface="Aptos"/>
+                <a:ea typeface="Aptos"/>
+                <a:cs typeface="Aptos"/>
+              </a:rPr>
+              <a:t>+ context</a:t>
             </a:r>
           </a:p>
         </p:txBody>
@@ -11239,7 +11814,7 @@
                 <a:ea typeface="Aptos"/>
                 <a:cs typeface="Aptos"/>
               </a:rPr>
-              <a:t>Interest fit and learning-environment affinity both derive from the interview profile; mission evidence is the independent signal.</a:t>
+              <a:t>Live scoring uses 30 items. The 1,000-item bank is structurally checked and research-only.</a:t>
             </a:r>
           </a:p>
         </p:txBody>
@@ -11295,7 +11870,7 @@
                 <a:ea typeface="Aptos"/>
                 <a:cs typeface="Aptos"/>
               </a:rPr>
-              <a:t>Source: lib/decision-engine (current working prototype)</a:t>
+              <a:t>Source: adaptive-engine + decision-engine + future-bank validator (current prototype)</a:t>
             </a:r>
           </a:p>
         </p:txBody>
@@ -11331,7 +11906,7 @@
           <p:nvPr/>
         </p:nvPicPr>
         <p:blipFill>
-          <a:blip xmlns:r="http://schemas.openxmlformats.org/officeDocument/2006/relationships" xmlns:a="http://schemas.openxmlformats.org/drawingml/2006/main" r:embed="Rca8b0af9719c4c78"/>
+          <a:blip xmlns:r="http://schemas.openxmlformats.org/officeDocument/2006/relationships" xmlns:a="http://schemas.openxmlformats.org/drawingml/2006/main" r:embed="R2dbbc139a1e64ae9"/>
           <a:stretch xmlns:a="http://schemas.openxmlformats.org/drawingml/2006/main">
             <a:fillRect l="0" t="0" r="0" b="0"/>
           </a:stretch>
@@ -11453,7 +12028,7 @@
                 <a:ea typeface="Aptos"/>
                 <a:cs typeface="Aptos"/>
               </a:rPr>
-              <a:t>A complete prototype already runs end to end</a:t>
+              <a:t>The latest prototype runs end to end</a:t>
             </a:r>
           </a:p>
         </p:txBody>
@@ -11509,7 +12084,7 @@
                 <a:ea typeface="Aptos"/>
                 <a:cs typeface="Aptos"/>
               </a:rPr>
-              <a:t>These are screenshots from the implemented app—not concept mockups.</a:t>
+              <a:t>Current app screenshots—not concept mockups. Mascot motion is on by default with a persisted system opt-out.</a:t>
             </a:r>
           </a:p>
         </p:txBody>
@@ -11579,7 +12154,7 @@
           <p:nvPr/>
         </p:nvPicPr>
         <p:blipFill>
-          <a:blip xmlns:r="http://schemas.openxmlformats.org/officeDocument/2006/relationships" xmlns:a="http://schemas.openxmlformats.org/drawingml/2006/main" r:embed="Rc38a518bd7f2408f"/>
+          <a:blip xmlns:r="http://schemas.openxmlformats.org/officeDocument/2006/relationships" xmlns:a="http://schemas.openxmlformats.org/drawingml/2006/main" r:embed="Rebb65c8338444226"/>
           <a:stretch xmlns:a="http://schemas.openxmlformats.org/drawingml/2006/main">
             <a:fillRect l="0" t="0" r="0" b="0"/>
           </a:stretch>
@@ -11645,7 +12220,7 @@
                 <a:ea typeface="Aptos"/>
                 <a:cs typeface="Aptos"/>
               </a:rPr>
-              <a:t>FutureMe AI · Project case study · July 2026</a:t>
+              <a:t>FutureMe AI · Project case study · August 2026</a:t>
             </a:r>
           </a:p>
         </p:txBody>
@@ -11714,7 +12289,7 @@
           <p:nvPr/>
         </p:nvPicPr>
         <p:blipFill>
-          <a:blip xmlns:r="http://schemas.openxmlformats.org/officeDocument/2006/relationships" xmlns:a="http://schemas.openxmlformats.org/drawingml/2006/main" r:embed="R93b290f8ccff43fc"/>
+          <a:blip xmlns:r="http://schemas.openxmlformats.org/officeDocument/2006/relationships" xmlns:a="http://schemas.openxmlformats.org/drawingml/2006/main" r:embed="R0655af96176a4e1c"/>
           <a:srcRect xmlns:a="http://schemas.openxmlformats.org/drawingml/2006/main" l="11145" t="0" r="11145" b="0"/>
           <a:stretch xmlns:a="http://schemas.openxmlformats.org/drawingml/2006/main">
             <a:fillRect l="0" t="0" r="0" b="0"/>
@@ -11961,7 +12536,7 @@
           <p:nvPr/>
         </p:nvPicPr>
         <p:blipFill>
-          <a:blip xmlns:r="http://schemas.openxmlformats.org/officeDocument/2006/relationships" xmlns:a="http://schemas.openxmlformats.org/drawingml/2006/main" r:embed="Rc7a3d6e346cf4f64"/>
+          <a:blip xmlns:r="http://schemas.openxmlformats.org/officeDocument/2006/relationships" xmlns:a="http://schemas.openxmlformats.org/drawingml/2006/main" r:embed="Rf7ac22d923e24cfd"/>
           <a:srcRect xmlns:a="http://schemas.openxmlformats.org/drawingml/2006/main" l="0" t="0" r="0" b="29182"/>
           <a:stretch xmlns:a="http://schemas.openxmlformats.org/drawingml/2006/main">
             <a:fillRect l="0" t="0" r="0" b="0"/>
@@ -12208,7 +12783,7 @@
           <p:nvPr/>
         </p:nvPicPr>
         <p:blipFill>
-          <a:blip xmlns:r="http://schemas.openxmlformats.org/officeDocument/2006/relationships" xmlns:a="http://schemas.openxmlformats.org/drawingml/2006/main" r:embed="R601505f1092a4668"/>
+          <a:blip xmlns:r="http://schemas.openxmlformats.org/officeDocument/2006/relationships" xmlns:a="http://schemas.openxmlformats.org/drawingml/2006/main" r:embed="Rbccda1dc30364acc"/>
           <a:srcRect xmlns:a="http://schemas.openxmlformats.org/drawingml/2006/main" l="0" t="0" r="0" b="36198"/>
           <a:stretch xmlns:a="http://schemas.openxmlformats.org/drawingml/2006/main">
             <a:fillRect l="0" t="0" r="0" b="0"/>
@@ -12941,7 +13516,7 @@
                 <a:ea typeface="Aptos"/>
                 <a:cs typeface="Aptos"/>
               </a:rPr>
-              <a:t>522 TESTS</a:t>
+              <a:t>529 TESTS</a:t>
             </a:r>
           </a:p>
         </p:txBody>
@@ -13164,7 +13739,7 @@
                 <a:ea typeface="Aptos"/>
                 <a:cs typeface="Aptos"/>
               </a:rPr>
-              <a:t>Verification rerun 11 Aug 2026: 522 Vitest tests + 94 Playwright journeys passed</a:t>
+              <a:t>Verification rerun 11 Aug 2026: 529 Vitest tests and all 94 Playwright browser journeys passed.</a:t>
             </a:r>
           </a:p>
         </p:txBody>
@@ -13200,7 +13775,7 @@
           <p:nvPr/>
         </p:nvPicPr>
         <p:blipFill>
-          <a:blip xmlns:r="http://schemas.openxmlformats.org/officeDocument/2006/relationships" xmlns:a="http://schemas.openxmlformats.org/drawingml/2006/main" r:embed="Rd52039e167d245b5"/>
+          <a:blip xmlns:r="http://schemas.openxmlformats.org/officeDocument/2006/relationships" xmlns:a="http://schemas.openxmlformats.org/drawingml/2006/main" r:embed="Re99cbcb5ef964fac"/>
           <a:stretch xmlns:a="http://schemas.openxmlformats.org/drawingml/2006/main">
             <a:fillRect l="0" t="0" r="0" b="0"/>
           </a:stretch>
@@ -13448,7 +14023,7 @@
           <p:nvPr/>
         </p:nvPicPr>
         <p:blipFill>
-          <a:blip xmlns:r="http://schemas.openxmlformats.org/officeDocument/2006/relationships" xmlns:a="http://schemas.openxmlformats.org/drawingml/2006/main" r:embed="Rb5f8cb872c6c4084"/>
+          <a:blip xmlns:r="http://schemas.openxmlformats.org/officeDocument/2006/relationships" xmlns:a="http://schemas.openxmlformats.org/drawingml/2006/main" r:embed="Rf7359f731b8e4952"/>
           <a:stretch xmlns:a="http://schemas.openxmlformats.org/drawingml/2006/main">
             <a:fillRect l="0" t="0" r="0" b="0"/>
           </a:stretch>
@@ -13514,7 +14089,7 @@
                 <a:ea typeface="Aptos"/>
                 <a:cs typeface="Aptos"/>
               </a:rPr>
-              <a:t>FutureMe AI · Project case study · July 2026</a:t>
+              <a:t>FutureMe AI · Project case study · August 2026</a:t>
             </a:r>
           </a:p>
         </p:txBody>
@@ -16482,7 +17057,7 @@
           <p:nvPr/>
         </p:nvPicPr>
         <p:blipFill>
-          <a:blip xmlns:r="http://schemas.openxmlformats.org/officeDocument/2006/relationships" xmlns:a="http://schemas.openxmlformats.org/drawingml/2006/main" r:embed="Rd87d61ea958d4a04"/>
+          <a:blip xmlns:r="http://schemas.openxmlformats.org/officeDocument/2006/relationships" xmlns:a="http://schemas.openxmlformats.org/drawingml/2006/main" r:embed="Rf2a9eb0e30334672"/>
           <a:stretch xmlns:a="http://schemas.openxmlformats.org/drawingml/2006/main">
             <a:fillRect l="0" t="0" r="0" b="0"/>
           </a:stretch>
@@ -16660,7 +17235,7 @@
                 <a:ea typeface="Aptos"/>
                 <a:cs typeface="Aptos"/>
               </a:rPr>
-              <a:t>The analysis pipeline is verified. The instrument is not.</a:t>
+              <a:t>Software and data pipelines are verified. The instrument and outcomes are not.</a:t>
             </a:r>
           </a:p>
         </p:txBody>
@@ -16730,7 +17305,7 @@
           <p:nvPr/>
         </p:nvPicPr>
         <p:blipFill>
-          <a:blip xmlns:r="http://schemas.openxmlformats.org/officeDocument/2006/relationships" xmlns:a="http://schemas.openxmlformats.org/drawingml/2006/main" r:embed="R1ba4f27fa8e249eb"/>
+          <a:blip xmlns:r="http://schemas.openxmlformats.org/officeDocument/2006/relationships" xmlns:a="http://schemas.openxmlformats.org/drawingml/2006/main" r:embed="Re04257d5809d4426"/>
           <a:stretch xmlns:a="http://schemas.openxmlformats.org/drawingml/2006/main">
             <a:fillRect l="0" t="0" r="0" b="0"/>
           </a:stretch>
@@ -16796,7 +17371,7 @@
                 <a:ea typeface="Aptos"/>
                 <a:cs typeface="Aptos"/>
               </a:rPr>
-              <a:t>FutureMe AI · Project case study · July 2026</a:t>
+              <a:t>FutureMe AI · Project case study · August 2026</a:t>
             </a:r>
           </a:p>
         </p:txBody>
@@ -16873,7 +17448,7 @@
         <p:spPr>
           <a:xfrm xmlns:a="http://schemas.openxmlformats.org/drawingml/2006/main">
             <a:off x="841248" y="1746504"/>
-            <a:ext cx="3346704" cy="256032"/>
+            <a:ext cx="3346704" cy="457200"/>
           </a:xfrm>
           <a:prstGeom xmlns:a="http://schemas.openxmlformats.org/drawingml/2006/main" prst="rect">
             <a:avLst/>
@@ -16904,29 +17479,7 @@
                 <a:ea typeface="Aptos"/>
                 <a:cs typeface="Aptos"/>
               </a:rPr>
-              <a:t>PIPELINE VERIFIED</a:t>
-            </a:r>
-            <a:r>
-              <a:rPr sz="1500" b="1" i="0">
-                <a:solidFill>
-                  <a:srgbClr val="A8A8BE"/>
-                </a:solidFill>
-                <a:latin typeface="Aptos"/>
-                <a:ea typeface="Aptos"/>
-                <a:cs typeface="Aptos"/>
-              </a:rPr>
-              <a:t>  ≠  </a:t>
-            </a:r>
-            <a:r>
-              <a:rPr sz="1500" b="1" i="0">
-                <a:solidFill>
-                  <a:srgbClr val="FFD37A"/>
-                </a:solidFill>
-                <a:latin typeface="Aptos"/>
-                <a:ea typeface="Aptos"/>
-                <a:cs typeface="Aptos"/>
-              </a:rPr>
-              <a:t>INSTRUMENT VALIDATED</a:t>
+              <a:t>PIPELINES VERIFIED  ≠  PEOPLE VALIDATED</a:t>
             </a:r>
           </a:p>
         </p:txBody>
@@ -19302,7 +19855,7 @@
                 <a:ea typeface="Aptos"/>
                 <a:cs typeface="Aptos"/>
               </a:rPr>
-              <a:t>No reliability, norms or validity results exist yet.</a:t>
+              <a:t>No reliability, validity, fairness or outcome evidence yet.</a:t>
             </a:r>
           </a:p>
         </p:txBody>
@@ -19394,7 +19947,7 @@
           <p:nvPr/>
         </p:nvPicPr>
         <p:blipFill>
-          <a:blip xmlns:r="http://schemas.openxmlformats.org/officeDocument/2006/relationships" xmlns:a="http://schemas.openxmlformats.org/drawingml/2006/main" r:embed="Rf99b40ac53a34a79"/>
+          <a:blip xmlns:r="http://schemas.openxmlformats.org/officeDocument/2006/relationships" xmlns:a="http://schemas.openxmlformats.org/drawingml/2006/main" r:embed="Rafcaea5393c64aff"/>
           <a:stretch xmlns:a="http://schemas.openxmlformats.org/drawingml/2006/main">
             <a:fillRect l="0" t="0" r="0" b="0"/>
           </a:stretch>
@@ -19572,7 +20125,7 @@
                 <a:ea typeface="Aptos"/>
                 <a:cs typeface="Aptos"/>
               </a:rPr>
-              <a:t>Every phase has a gate; partnerships stay exploratory until something is signed.</a:t>
+              <a:t>Current phase: validate with people, not just pipelines.</a:t>
             </a:r>
           </a:p>
         </p:txBody>
@@ -19642,7 +20195,7 @@
           <p:nvPr/>
         </p:nvPicPr>
         <p:blipFill>
-          <a:blip xmlns:r="http://schemas.openxmlformats.org/officeDocument/2006/relationships" xmlns:a="http://schemas.openxmlformats.org/drawingml/2006/main" r:embed="R0685bcb0d6e74a02"/>
+          <a:blip xmlns:r="http://schemas.openxmlformats.org/officeDocument/2006/relationships" xmlns:a="http://schemas.openxmlformats.org/drawingml/2006/main" r:embed="R3a86223977d84601"/>
           <a:stretch xmlns:a="http://schemas.openxmlformats.org/drawingml/2006/main">
             <a:fillRect l="0" t="0" r="0" b="0"/>
           </a:stretch>
@@ -19708,7 +20261,7 @@
                 <a:ea typeface="Aptos"/>
                 <a:cs typeface="Aptos"/>
               </a:rPr>
-              <a:t>FutureMe AI · Project case study · July 2026</a:t>
+              <a:t>FutureMe AI · Project case study · August 2026</a:t>
             </a:r>
           </a:p>
         </p:txBody>
@@ -20415,7 +20968,7 @@
                 <a:ea typeface="Aptos"/>
                 <a:cs typeface="Aptos"/>
               </a:rPr>
-              <a:t>NOW · NEXT</a:t>
+              <a:t>CURRENT · NEXT</a:t>
             </a:r>
           </a:p>
         </p:txBody>
@@ -20913,7 +21466,7 @@
                 <a:ea typeface="Aptos"/>
                 <a:cs typeface="Aptos"/>
               </a:rPr>
-              <a:t>Phase 3: adapt Thai translation · validate instrument + missions · licensed route data · bias + safety audit</a:t>
+              <a:t>Phase 3: Thai adaptation · expert and student review · instrument + mission pilot · licensed route data · bias + safety audit</a:t>
             </a:r>
           </a:p>
         </p:txBody>
@@ -21406,7 +21959,7 @@
                 <a:ea typeface="Aptos"/>
                 <a:cs typeface="Aptos"/>
               </a:rPr>
-              <a:t>Full source registry: 01_Research/Data/REFERENCES.md</a:t>
+              <a:t>Repository evidence: README files · validation plan · source audit · geography provenance</a:t>
             </a:r>
           </a:p>
         </p:txBody>
@@ -21442,7 +21995,7 @@
           <p:nvPr/>
         </p:nvPicPr>
         <p:blipFill>
-          <a:blip xmlns:r="http://schemas.openxmlformats.org/officeDocument/2006/relationships" xmlns:a="http://schemas.openxmlformats.org/drawingml/2006/main" r:embed="R02928d35330a4a8e"/>
+          <a:blip xmlns:r="http://schemas.openxmlformats.org/officeDocument/2006/relationships" xmlns:a="http://schemas.openxmlformats.org/drawingml/2006/main" r:embed="R95ff095bc2154875"/>
           <a:stretch xmlns:a="http://schemas.openxmlformats.org/drawingml/2006/main">
             <a:fillRect l="0" t="0" r="0" b="0"/>
           </a:stretch>
@@ -21690,7 +22243,7 @@
           <p:nvPr/>
         </p:nvPicPr>
         <p:blipFill>
-          <a:blip xmlns:r="http://schemas.openxmlformats.org/officeDocument/2006/relationships" xmlns:a="http://schemas.openxmlformats.org/drawingml/2006/main" r:embed="R3130a64c6d2c4486"/>
+          <a:blip xmlns:r="http://schemas.openxmlformats.org/officeDocument/2006/relationships" xmlns:a="http://schemas.openxmlformats.org/drawingml/2006/main" r:embed="Rd6affd6591d748e6"/>
           <a:stretch xmlns:a="http://schemas.openxmlformats.org/drawingml/2006/main">
             <a:fillRect l="0" t="0" r="0" b="0"/>
           </a:stretch>
@@ -21756,7 +22309,7 @@
                 <a:ea typeface="Aptos"/>
                 <a:cs typeface="Aptos"/>
               </a:rPr>
-              <a:t>FutureMe AI · Project case study · July 2026</a:t>
+              <a:t>FutureMe AI · Project case study · August 2026</a:t>
             </a:r>
           </a:p>
         </p:txBody>
@@ -23443,7 +23996,7 @@
           <p:nvPr/>
         </p:nvPicPr>
         <p:blipFill>
-          <a:blip xmlns:r="http://schemas.openxmlformats.org/officeDocument/2006/relationships" xmlns:a="http://schemas.openxmlformats.org/drawingml/2006/main" r:embed="R27c76cb26cc64ebc"/>
+          <a:blip xmlns:r="http://schemas.openxmlformats.org/officeDocument/2006/relationships" xmlns:a="http://schemas.openxmlformats.org/drawingml/2006/main" r:embed="R70037ce6ade24c8a"/>
           <a:stretch xmlns:a="http://schemas.openxmlformats.org/drawingml/2006/main">
             <a:fillRect l="0" t="0" r="0" b="0"/>
           </a:stretch>
@@ -23691,7 +24244,7 @@
           <p:nvPr/>
         </p:nvPicPr>
         <p:blipFill>
-          <a:blip xmlns:r="http://schemas.openxmlformats.org/officeDocument/2006/relationships" xmlns:a="http://schemas.openxmlformats.org/drawingml/2006/main" r:embed="R0035f820308f490e"/>
+          <a:blip xmlns:r="http://schemas.openxmlformats.org/officeDocument/2006/relationships" xmlns:a="http://schemas.openxmlformats.org/drawingml/2006/main" r:embed="R0e197ca1a8ca436e"/>
           <a:stretch xmlns:a="http://schemas.openxmlformats.org/drawingml/2006/main">
             <a:fillRect l="0" t="0" r="0" b="0"/>
           </a:stretch>
@@ -23757,7 +24310,7 @@
                 <a:ea typeface="Aptos"/>
                 <a:cs typeface="Aptos"/>
               </a:rPr>
-              <a:t>FutureMe AI · Project case study · July 2026</a:t>
+              <a:t>FutureMe AI · Project case study · August 2026</a:t>
             </a:r>
           </a:p>
         </p:txBody>
@@ -24852,7 +25405,7 @@
           <p:nvPr/>
         </p:nvPicPr>
         <p:blipFill>
-          <a:blip xmlns:r="http://schemas.openxmlformats.org/officeDocument/2006/relationships" xmlns:a="http://schemas.openxmlformats.org/drawingml/2006/main" r:embed="R131ecc95a4ff4d9e"/>
+          <a:blip xmlns:r="http://schemas.openxmlformats.org/officeDocument/2006/relationships" xmlns:a="http://schemas.openxmlformats.org/drawingml/2006/main" r:embed="R0e44b6b0efde4738"/>
           <a:stretch xmlns:a="http://schemas.openxmlformats.org/drawingml/2006/main">
             <a:fillRect l="0" t="0" r="0" b="0"/>
           </a:stretch>
@@ -24918,7 +25471,7 @@
                 <a:ea typeface="Aptos"/>
                 <a:cs typeface="Aptos"/>
               </a:rPr>
-              <a:t>CURRENT GAP</a:t>
+              <a:t>DATA PIPELINE</a:t>
             </a:r>
           </a:p>
         </p:txBody>
@@ -24974,7 +25527,7 @@
                 <a:ea typeface="Aptos"/>
                 <a:cs typeface="Aptos"/>
               </a:rPr>
-              <a:t>Information exists. Interpretation is fragmented.</a:t>
+              <a:t>The data pipeline keeps limits attached</a:t>
             </a:r>
           </a:p>
         </p:txBody>
@@ -25030,7 +25583,7 @@
                 <a:ea typeface="Aptos"/>
                 <a:cs typeface="Aptos"/>
               </a:rPr>
-              <a:t>The gap is not another list—it is a visible chain from self-knowledge to action.</a:t>
+              <a:t>Source dates, unknowns and integrity checks travel with every demo record.</a:t>
             </a:r>
           </a:p>
         </p:txBody>
@@ -25100,7 +25653,7 @@
           <p:nvPr/>
         </p:nvPicPr>
         <p:blipFill>
-          <a:blip xmlns:r="http://schemas.openxmlformats.org/officeDocument/2006/relationships" xmlns:a="http://schemas.openxmlformats.org/drawingml/2006/main" r:embed="R4a1aac2deed54a8c"/>
+          <a:blip xmlns:r="http://schemas.openxmlformats.org/officeDocument/2006/relationships" xmlns:a="http://schemas.openxmlformats.org/drawingml/2006/main" r:embed="Rc2c92fd4024a47a0"/>
           <a:stretch xmlns:a="http://schemas.openxmlformats.org/drawingml/2006/main">
             <a:fillRect l="0" t="0" r="0" b="0"/>
           </a:stretch>
@@ -25166,7 +25719,7 @@
                 <a:ea typeface="Aptos"/>
                 <a:cs typeface="Aptos"/>
               </a:rPr>
-              <a:t>FutureMe AI · Project case study · July 2026</a:t>
+              <a:t>FutureMe AI · Project case study · August 2026</a:t>
             </a:r>
           </a:p>
         </p:txBody>
@@ -25222,7 +25775,7 @@
                 <a:ea typeface="Aptos"/>
                 <a:cs typeface="Aptos"/>
               </a:rPr>
-              <a:t>SEARCH</a:t>
+              <a:t>SOURCE</a:t>
             </a:r>
           </a:p>
         </p:txBody>
@@ -25333,9 +25886,57 @@
                 <a:ea typeface="Aptos"/>
                 <a:cs typeface="Aptos"/>
               </a:rPr>
-              <a:t>School plans
-TCAS pages
-Career sites</a:t>
+              <a:t>Official registers</a:t>
+            </a:r>
+          </a:p>
+          <a:p xmlns:a="http://schemas.openxmlformats.org/drawingml/2006/main">
+            <a:pPr algn="ctr">
+              <a:lnSpc>
+                <a:spcPct val="100000"/>
+              </a:lnSpc>
+              <a:spcBef>
+                <a:spcPts val="0"/>
+              </a:spcBef>
+              <a:spcAft>
+                <a:spcPts val="0"/>
+              </a:spcAft>
+              <a:buNone/>
+            </a:pPr>
+            <a:r>
+              <a:rPr sz="1500" b="1" i="0">
+                <a:solidFill>
+                  <a:srgbClr val="F5F5FA"/>
+                </a:solidFill>
+                <a:latin typeface="Aptos"/>
+                <a:ea typeface="Aptos"/>
+                <a:cs typeface="Aptos"/>
+              </a:rPr>
+              <a:t>Audited research</a:t>
+            </a:r>
+          </a:p>
+          <a:p xmlns:a="http://schemas.openxmlformats.org/drawingml/2006/main">
+            <a:pPr algn="ctr">
+              <a:lnSpc>
+                <a:spcPct val="100000"/>
+              </a:lnSpc>
+              <a:spcBef>
+                <a:spcPts val="0"/>
+              </a:spcBef>
+              <a:spcAft>
+                <a:spcPts val="0"/>
+              </a:spcAft>
+              <a:buNone/>
+            </a:pPr>
+            <a:r>
+              <a:rPr sz="1500" b="1" i="0">
+                <a:solidFill>
+                  <a:srgbClr val="F5F5FA"/>
+                </a:solidFill>
+                <a:latin typeface="Aptos"/>
+                <a:ea typeface="Aptos"/>
+                <a:cs typeface="Aptos"/>
+              </a:rPr>
+              <a:t>Project items</a:t>
             </a:r>
           </a:p>
         </p:txBody>
@@ -25447,7 +26048,7 @@
                 <a:ea typeface="Aptos"/>
                 <a:cs typeface="Aptos"/>
               </a:rPr>
-              <a:t>TEST</a:t>
+              <a:t>TRANSFORM</a:t>
             </a:r>
           </a:p>
         </p:txBody>
@@ -25558,8 +26159,32 @@
                 <a:ea typeface="Aptos"/>
                 <a:cs typeface="Aptos"/>
               </a:rPr>
-              <a:t>Static interest
-questionnaire</a:t>
+              <a:t>Reproducible scripts</a:t>
+            </a:r>
+          </a:p>
+          <a:p xmlns:a="http://schemas.openxmlformats.org/drawingml/2006/main">
+            <a:pPr algn="ctr">
+              <a:lnSpc>
+                <a:spcPct val="100000"/>
+              </a:lnSpc>
+              <a:spcBef>
+                <a:spcPts val="0"/>
+              </a:spcBef>
+              <a:spcAft>
+                <a:spcPts val="0"/>
+              </a:spcAft>
+              <a:buNone/>
+            </a:pPr>
+            <a:r>
+              <a:rPr sz="1500" b="1" i="0">
+                <a:solidFill>
+                  <a:srgbClr val="F5F5FA"/>
+                </a:solidFill>
+                <a:latin typeface="Aptos"/>
+                <a:ea typeface="Aptos"/>
+                <a:cs typeface="Aptos"/>
+              </a:rPr>
+              <a:t>Typed JSON</a:t>
             </a:r>
           </a:p>
         </p:txBody>
@@ -25671,7 +26296,7 @@
                 <a:ea typeface="Aptos"/>
                 <a:cs typeface="Aptos"/>
               </a:rPr>
-              <a:t>RESULT</a:t>
+              <a:t>VALIDATE</a:t>
             </a:r>
           </a:p>
         </p:txBody>
@@ -25782,8 +26407,32 @@
                 <a:ea typeface="Aptos"/>
                 <a:cs typeface="Aptos"/>
               </a:rPr>
-              <a:t>Generic career
-or faculty list</a:t>
+              <a:t>Schema · counts</a:t>
+            </a:r>
+          </a:p>
+          <a:p xmlns:a="http://schemas.openxmlformats.org/drawingml/2006/main">
+            <a:pPr algn="ctr">
+              <a:lnSpc>
+                <a:spcPct val="100000"/>
+              </a:lnSpc>
+              <a:spcBef>
+                <a:spcPts val="0"/>
+              </a:spcBef>
+              <a:spcAft>
+                <a:spcPts val="0"/>
+              </a:spcAft>
+              <a:buNone/>
+            </a:pPr>
+            <a:r>
+              <a:rPr sz="1500" b="1" i="0">
+                <a:solidFill>
+                  <a:srgbClr val="F5F5FA"/>
+                </a:solidFill>
+                <a:latin typeface="Aptos"/>
+                <a:ea typeface="Aptos"/>
+                <a:cs typeface="Aptos"/>
+              </a:rPr>
+              <a:t>Hashes · cross-file</a:t>
             </a:r>
           </a:p>
         </p:txBody>
@@ -25895,7 +26544,7 @@
                 <a:ea typeface="Aptos"/>
                 <a:cs typeface="Aptos"/>
               </a:rPr>
-              <a:t>AFTER</a:t>
+              <a:t>SERVE</a:t>
             </a:r>
           </a:p>
         </p:txBody>
@@ -26006,8 +26655,32 @@
                 <a:ea typeface="Aptos"/>
                 <a:cs typeface="Aptos"/>
               </a:rPr>
-              <a:t>Still unsure
-what to try</a:t>
+              <a:t>Browser API</a:t>
+            </a:r>
+          </a:p>
+          <a:p xmlns:a="http://schemas.openxmlformats.org/drawingml/2006/main">
+            <a:pPr algn="ctr">
+              <a:lnSpc>
+                <a:spcPct val="100000"/>
+              </a:lnSpc>
+              <a:spcBef>
+                <a:spcPts val="0"/>
+              </a:spcBef>
+              <a:spcAft>
+                <a:spcPts val="0"/>
+              </a:spcAft>
+              <a:buNone/>
+            </a:pPr>
+            <a:r>
+              <a:rPr sz="1500" b="1" i="0">
+                <a:solidFill>
+                  <a:srgbClr val="F5F5FA"/>
+                </a:solidFill>
+                <a:latin typeface="Aptos"/>
+                <a:ea typeface="Aptos"/>
+                <a:cs typeface="Aptos"/>
+              </a:rPr>
+              <a:t>Warnings included</a:t>
             </a:r>
           </a:p>
         </p:txBody>
@@ -26063,7 +26736,7 @@
                 <a:ea typeface="Aptos"/>
                 <a:cs typeface="Aptos"/>
               </a:rPr>
-              <a:t>What is missing</a:t>
+              <a:t>Controls that stay visible</a:t>
             </a:r>
           </a:p>
         </p:txBody>
@@ -26229,7 +26902,7 @@
                 <a:ea typeface="Aptos"/>
                 <a:cs typeface="Aptos"/>
               </a:rPr>
-              <a:t>WHAT I SAID</a:t>
+              <a:t>PROVENANCE</a:t>
             </a:r>
           </a:p>
         </p:txBody>
@@ -26396,7 +27069,7 @@
                 <a:ea typeface="Aptos"/>
                 <a:cs typeface="Aptos"/>
               </a:rPr>
-              <a:t>WHAT I TRIED</a:t>
+              <a:t>CHECKSUMS</a:t>
             </a:r>
           </a:p>
         </p:txBody>
@@ -26563,7 +27236,7 @@
                 <a:ea typeface="Aptos"/>
                 <a:cs typeface="Aptos"/>
               </a:rPr>
-              <a:t>WHY THIS ROUTE</a:t>
+              <a:t>UNKNOWNS</a:t>
             </a:r>
           </a:p>
         </p:txBody>
@@ -26730,7 +27403,7 @@
                 <a:ea typeface="Aptos"/>
                 <a:cs typeface="Aptos"/>
               </a:rPr>
-              <a:t>WHAT TO DO NEXT</a:t>
+              <a:t>FRESHNESS</a:t>
             </a:r>
           </a:p>
         </p:txBody>
@@ -26786,7 +27459,7 @@
                 <a:ea typeface="Aptos"/>
                 <a:cs typeface="Aptos"/>
               </a:rPr>
-              <a:t>Admission criteria expire. Career-to-programme links are many-to-many. A trustworthy product must show scope, date and source.</a:t>
+              <a:t>1,961 institution options across 77 provinces; 207 coordinates and 987 websites remain explicitly unknown.</a:t>
             </a:r>
           </a:p>
         </p:txBody>
@@ -26842,7 +27515,7 @@
                 <a:ea typeface="Aptos"/>
                 <a:cs typeface="Aptos"/>
               </a:rPr>
-              <a:t>Sources: FutureMe Data/RAG_DATA_SPEC; curriculum and source-audit files</a:t>
+              <a:t>Sources: Geography PROVENANCE + check:data; integration review 11 Aug 2026</a:t>
             </a:r>
           </a:p>
         </p:txBody>
@@ -26878,7 +27551,7 @@
           <p:nvPr/>
         </p:nvPicPr>
         <p:blipFill>
-          <a:blip xmlns:r="http://schemas.openxmlformats.org/officeDocument/2006/relationships" xmlns:a="http://schemas.openxmlformats.org/drawingml/2006/main" r:embed="R611243bf86714bc5"/>
+          <a:blip xmlns:r="http://schemas.openxmlformats.org/officeDocument/2006/relationships" xmlns:a="http://schemas.openxmlformats.org/drawingml/2006/main" r:embed="R0f29ee9d7fd44ae2"/>
           <a:stretch xmlns:a="http://schemas.openxmlformats.org/drawingml/2006/main">
             <a:fillRect l="0" t="0" r="0" b="0"/>
           </a:stretch>
@@ -27126,7 +27799,7 @@
           <p:nvPr/>
         </p:nvPicPr>
         <p:blipFill>
-          <a:blip xmlns:r="http://schemas.openxmlformats.org/officeDocument/2006/relationships" xmlns:a="http://schemas.openxmlformats.org/drawingml/2006/main" r:embed="R378b2a52811c47ae"/>
+          <a:blip xmlns:r="http://schemas.openxmlformats.org/officeDocument/2006/relationships" xmlns:a="http://schemas.openxmlformats.org/drawingml/2006/main" r:embed="R02a26cded7ac4c12"/>
           <a:stretch xmlns:a="http://schemas.openxmlformats.org/drawingml/2006/main">
             <a:fillRect l="0" t="0" r="0" b="0"/>
           </a:stretch>
@@ -27192,7 +27865,7 @@
                 <a:ea typeface="Aptos"/>
                 <a:cs typeface="Aptos"/>
               </a:rPr>
-              <a:t>FutureMe AI · Project case study · July 2026</a:t>
+              <a:t>FutureMe AI · Project case study · August 2026</a:t>
             </a:r>
           </a:p>
         </p:txBody>
@@ -28804,7 +29477,7 @@
           <p:nvPr/>
         </p:nvPicPr>
         <p:blipFill>
-          <a:blip xmlns:r="http://schemas.openxmlformats.org/officeDocument/2006/relationships" xmlns:a="http://schemas.openxmlformats.org/drawingml/2006/main" r:embed="Rfc1f4af5ed504228"/>
+          <a:blip xmlns:r="http://schemas.openxmlformats.org/officeDocument/2006/relationships" xmlns:a="http://schemas.openxmlformats.org/drawingml/2006/main" r:embed="R44d21ec7e4724530"/>
           <a:stretch xmlns:a="http://schemas.openxmlformats.org/drawingml/2006/main">
             <a:fillRect l="0" t="0" r="0" b="0"/>
           </a:stretch>
@@ -29052,7 +29725,7 @@
           <p:nvPr/>
         </p:nvPicPr>
         <p:blipFill>
-          <a:blip xmlns:r="http://schemas.openxmlformats.org/officeDocument/2006/relationships" xmlns:a="http://schemas.openxmlformats.org/drawingml/2006/main" r:embed="Raa383a28288840af"/>
+          <a:blip xmlns:r="http://schemas.openxmlformats.org/officeDocument/2006/relationships" xmlns:a="http://schemas.openxmlformats.org/drawingml/2006/main" r:embed="R1ba025fc02684670"/>
           <a:stretch xmlns:a="http://schemas.openxmlformats.org/drawingml/2006/main">
             <a:fillRect l="0" t="0" r="0" b="0"/>
           </a:stretch>
@@ -29118,7 +29791,7 @@
                 <a:ea typeface="Aptos"/>
                 <a:cs typeface="Aptos"/>
               </a:rPr>
-              <a:t>FutureMe AI · Project case study · July 2026</a:t>
+              <a:t>FutureMe AI · Project case study · August 2026</a:t>
             </a:r>
           </a:p>
         </p:txBody>
@@ -31279,7 +31952,7 @@
                 <a:ea typeface="Aptos"/>
                 <a:cs typeface="Aptos"/>
               </a:rPr>
-              <a:t>The current 30-item instrument is research-informed—but has never been validated.</a:t>
+              <a:t>The live 30-item instrument and both future banks remain unvalidated for real learners.</a:t>
             </a:r>
           </a:p>
         </p:txBody>
@@ -31371,7 +32044,7 @@
           <p:nvPr/>
         </p:nvPicPr>
         <p:blipFill>
-          <a:blip xmlns:r="http://schemas.openxmlformats.org/officeDocument/2006/relationships" xmlns:a="http://schemas.openxmlformats.org/drawingml/2006/main" r:embed="R1bc7e23c182e49bc"/>
+          <a:blip xmlns:r="http://schemas.openxmlformats.org/officeDocument/2006/relationships" xmlns:a="http://schemas.openxmlformats.org/drawingml/2006/main" r:embed="R1305fed729d04c1f"/>
           <a:stretch xmlns:a="http://schemas.openxmlformats.org/drawingml/2006/main">
             <a:fillRect l="0" t="0" r="0" b="0"/>
           </a:stretch>
@@ -31619,7 +32292,7 @@
           <p:nvPr/>
         </p:nvPicPr>
         <p:blipFill>
-          <a:blip xmlns:r="http://schemas.openxmlformats.org/officeDocument/2006/relationships" xmlns:a="http://schemas.openxmlformats.org/drawingml/2006/main" r:embed="R83bb62cb639f4993"/>
+          <a:blip xmlns:r="http://schemas.openxmlformats.org/officeDocument/2006/relationships" xmlns:a="http://schemas.openxmlformats.org/drawingml/2006/main" r:embed="R5c2e5340f0e641bf"/>
           <a:stretch xmlns:a="http://schemas.openxmlformats.org/drawingml/2006/main">
             <a:fillRect l="0" t="0" r="0" b="0"/>
           </a:stretch>
@@ -31685,7 +32358,7 @@
                 <a:ea typeface="Aptos"/>
                 <a:cs typeface="Aptos"/>
               </a:rPr>
-              <a:t>FutureMe AI · Project case study · July 2026</a:t>
+              <a:t>FutureMe AI · Project case study · August 2026</a:t>
             </a:r>
           </a:p>
         </p:txBody>
@@ -33223,7 +33896,7 @@
           <p:nvPr/>
         </p:nvPicPr>
         <p:blipFill>
-          <a:blip xmlns:r="http://schemas.openxmlformats.org/officeDocument/2006/relationships" xmlns:a="http://schemas.openxmlformats.org/drawingml/2006/main" r:embed="Rf94c53b383f543a2"/>
+          <a:blip xmlns:r="http://schemas.openxmlformats.org/officeDocument/2006/relationships" xmlns:a="http://schemas.openxmlformats.org/drawingml/2006/main" r:embed="R82b9b79fd1104694"/>
           <a:stretch xmlns:a="http://schemas.openxmlformats.org/drawingml/2006/main">
             <a:fillRect l="0" t="0" r="0" b="0"/>
           </a:stretch>
@@ -33471,7 +34144,7 @@
           <p:nvPr/>
         </p:nvPicPr>
         <p:blipFill>
-          <a:blip xmlns:r="http://schemas.openxmlformats.org/officeDocument/2006/relationships" xmlns:a="http://schemas.openxmlformats.org/drawingml/2006/main" r:embed="R4475432bd30f4596"/>
+          <a:blip xmlns:r="http://schemas.openxmlformats.org/officeDocument/2006/relationships" xmlns:a="http://schemas.openxmlformats.org/drawingml/2006/main" r:embed="Rbcc86cf6082a4c31"/>
           <a:stretch xmlns:a="http://schemas.openxmlformats.org/drawingml/2006/main">
             <a:fillRect l="0" t="0" r="0" b="0"/>
           </a:stretch>
@@ -33537,7 +34210,7 @@
                 <a:ea typeface="Aptos"/>
                 <a:cs typeface="Aptos"/>
               </a:rPr>
-              <a:t>FutureMe AI · Project case study · July 2026</a:t>
+              <a:t>FutureMe AI · Project case study · August 2026</a:t>
             </a:r>
           </a:p>
         </p:txBody>
@@ -33758,8 +34431,32 @@
                 <a:ea typeface="Aptos"/>
                 <a:cs typeface="Aptos"/>
               </a:rPr>
-              <a:t>30-item
-interest profile</a:t>
+              <a:t>30 live items</a:t>
+            </a:r>
+          </a:p>
+          <a:p xmlns:a="http://schemas.openxmlformats.org/drawingml/2006/main">
+            <a:pPr algn="ctr">
+              <a:lnSpc>
+                <a:spcPct val="100000"/>
+              </a:lnSpc>
+              <a:spcBef>
+                <a:spcPts val="0"/>
+              </a:spcBef>
+              <a:spcAft>
+                <a:spcPts val="0"/>
+              </a:spcAft>
+              <a:buNone/>
+            </a:pPr>
+            <a:r>
+              <a:rPr sz="1400" b="1" i="0">
+                <a:solidFill>
+                  <a:srgbClr val="F5F5FA"/>
+                </a:solidFill>
+                <a:latin typeface="Aptos"/>
+                <a:ea typeface="Aptos"/>
+                <a:cs typeface="Aptos"/>
+              </a:rPr>
+              <a:t>+ first-answer follow-ups</a:t>
             </a:r>
           </a:p>
         </p:txBody>
@@ -35130,7 +35827,7 @@
           <p:nvPr/>
         </p:nvPicPr>
         <p:blipFill>
-          <a:blip xmlns:r="http://schemas.openxmlformats.org/officeDocument/2006/relationships" xmlns:a="http://schemas.openxmlformats.org/drawingml/2006/main" r:embed="R6fbf0239ad79472d"/>
+          <a:blip xmlns:r="http://schemas.openxmlformats.org/officeDocument/2006/relationships" xmlns:a="http://schemas.openxmlformats.org/drawingml/2006/main" r:embed="Ra2dcce338e7140d8"/>
           <a:stretch xmlns:a="http://schemas.openxmlformats.org/drawingml/2006/main">
             <a:fillRect l="0" t="0" r="0" b="0"/>
           </a:stretch>
@@ -35378,7 +36075,7 @@
           <p:nvPr/>
         </p:nvPicPr>
         <p:blipFill>
-          <a:blip xmlns:r="http://schemas.openxmlformats.org/officeDocument/2006/relationships" xmlns:a="http://schemas.openxmlformats.org/drawingml/2006/main" r:embed="R013b3fd75e91438a"/>
+          <a:blip xmlns:r="http://schemas.openxmlformats.org/officeDocument/2006/relationships" xmlns:a="http://schemas.openxmlformats.org/drawingml/2006/main" r:embed="R5204435e7950447a"/>
           <a:stretch xmlns:a="http://schemas.openxmlformats.org/drawingml/2006/main">
             <a:fillRect l="0" t="0" r="0" b="0"/>
           </a:stretch>
@@ -35444,7 +36141,7 @@
                 <a:ea typeface="Aptos"/>
                 <a:cs typeface="Aptos"/>
               </a:rPr>
-              <a:t>FutureMe AI · Project case study · July 2026</a:t>
+              <a:t>FutureMe AI · Project case study · August 2026</a:t>
             </a:r>
           </a:p>
         </p:txBody>
@@ -35652,8 +36349,32 @@
                 <a:ea typeface="Aptos"/>
                 <a:cs typeface="Aptos"/>
               </a:rPr>
-              <a:t>What activities
-draw me?</a:t>
+              <a:t>What do I like—</a:t>
+            </a:r>
+          </a:p>
+          <a:p xmlns:a="http://schemas.openxmlformats.org/drawingml/2006/main">
+            <a:pPr algn="ctr">
+              <a:lnSpc>
+                <a:spcPct val="100000"/>
+              </a:lnSpc>
+              <a:spcBef>
+                <a:spcPts val="0"/>
+              </a:spcBef>
+              <a:spcAft>
+                <a:spcPts val="0"/>
+              </a:spcAft>
+              <a:buNone/>
+            </a:pPr>
+            <a:r>
+              <a:rPr sz="1550" b="1" i="0">
+                <a:solidFill>
+                  <a:srgbClr val="F5F5FA"/>
+                </a:solidFill>
+                <a:latin typeface="Aptos"/>
+                <a:ea typeface="Aptos"/>
+                <a:cs typeface="Aptos"/>
+              </a:rPr>
+              <a:t>and what follows?</a:t>
             </a:r>
           </a:p>
         </p:txBody>
@@ -35764,8 +36485,32 @@
                 <a:ea typeface="Aptos"/>
                 <a:cs typeface="Aptos"/>
               </a:rPr>
-              <a:t>Provisional
-RIASEC vector</a:t>
+              <a:t>30 items; answer 1</a:t>
+            </a:r>
+          </a:p>
+          <a:p xmlns:a="http://schemas.openxmlformats.org/drawingml/2006/main">
+            <a:pPr algn="ctr">
+              <a:lnSpc>
+                <a:spcPct val="100000"/>
+              </a:lnSpc>
+              <a:spcBef>
+                <a:spcPts val="0"/>
+              </a:spcBef>
+              <a:spcAft>
+                <a:spcPts val="0"/>
+              </a:spcAft>
+              <a:buNone/>
+            </a:pPr>
+            <a:r>
+              <a:rPr sz="1150" b="0" i="0">
+                <a:solidFill>
+                  <a:srgbClr val="A8A8BE"/>
+                </a:solidFill>
+                <a:latin typeface="Aptos"/>
+                <a:ea typeface="Aptos"/>
+                <a:cs typeface="Aptos"/>
+              </a:rPr>
+              <a:t>reorders the next two</a:t>
             </a:r>
           </a:p>
         </p:txBody>

--- a/Presentation/FutureMe_Project_Presentation.pptx
+++ b/Presentation/FutureMe_Project_Presentation.pptx
@@ -2,27 +2,27 @@
 <file path=ppt/presentation.xml><?xml version="1.0" encoding="utf-8"?>
 <p:presentation xmlns:p="http://schemas.openxmlformats.org/presentationml/2006/main">
   <p:sldMasterIdLst>
-    <p:sldMasterId xmlns:r="http://schemas.openxmlformats.org/officeDocument/2006/relationships" id="2147483648" r:id="R7094ddbbe93a4f5a"/>
+    <p:sldMasterId xmlns:r="http://schemas.openxmlformats.org/officeDocument/2006/relationships" id="2147483648" r:id="R2beda2e2d67540e6"/>
   </p:sldMasterIdLst>
   <p:notesMasterIdLst>
-    <p:notesMasterId xmlns:r="http://schemas.openxmlformats.org/officeDocument/2006/relationships" r:id="R8073e5e1d9cc4904"/>
+    <p:notesMasterId xmlns:r="http://schemas.openxmlformats.org/officeDocument/2006/relationships" r:id="R97b91ab850f54e9c"/>
   </p:notesMasterIdLst>
   <p:sldIdLst>
-    <p:sldId xmlns:r="http://schemas.openxmlformats.org/officeDocument/2006/relationships" id="256" r:id="Rff8adb23ee2b4f63"/>
-    <p:sldId xmlns:r="http://schemas.openxmlformats.org/officeDocument/2006/relationships" id="257" r:id="Rbf47c7534741407e"/>
-    <p:sldId xmlns:r="http://schemas.openxmlformats.org/officeDocument/2006/relationships" id="258" r:id="R1f5bd94ec06c4aeb"/>
-    <p:sldId xmlns:r="http://schemas.openxmlformats.org/officeDocument/2006/relationships" id="259" r:id="R76cf64df602e4bfd"/>
-    <p:sldId xmlns:r="http://schemas.openxmlformats.org/officeDocument/2006/relationships" id="260" r:id="R2404a7faeefe4801"/>
-    <p:sldId xmlns:r="http://schemas.openxmlformats.org/officeDocument/2006/relationships" id="261" r:id="Rf615e8877c854422"/>
-    <p:sldId xmlns:r="http://schemas.openxmlformats.org/officeDocument/2006/relationships" id="262" r:id="R21f6784c81a0478a"/>
-    <p:sldId xmlns:r="http://schemas.openxmlformats.org/officeDocument/2006/relationships" id="263" r:id="R9799b24dcebf4bfe"/>
-    <p:sldId xmlns:r="http://schemas.openxmlformats.org/officeDocument/2006/relationships" id="264" r:id="R57bfba2ad1a54080"/>
-    <p:sldId xmlns:r="http://schemas.openxmlformats.org/officeDocument/2006/relationships" id="265" r:id="Re459bddfd2974021"/>
-    <p:sldId xmlns:r="http://schemas.openxmlformats.org/officeDocument/2006/relationships" id="266" r:id="R073d63f588754895"/>
-    <p:sldId xmlns:r="http://schemas.openxmlformats.org/officeDocument/2006/relationships" id="267" r:id="Rc03cee49b4074ca2"/>
-    <p:sldId xmlns:r="http://schemas.openxmlformats.org/officeDocument/2006/relationships" id="268" r:id="R572aa0e1d6e546f8"/>
-    <p:sldId xmlns:r="http://schemas.openxmlformats.org/officeDocument/2006/relationships" id="269" r:id="R74fadf0998174441"/>
-    <p:sldId xmlns:r="http://schemas.openxmlformats.org/officeDocument/2006/relationships" id="270" r:id="Rbb8be573a95843b4"/>
+    <p:sldId xmlns:r="http://schemas.openxmlformats.org/officeDocument/2006/relationships" id="256" r:id="Red065a5b95ea45b9"/>
+    <p:sldId xmlns:r="http://schemas.openxmlformats.org/officeDocument/2006/relationships" id="257" r:id="R63c67e71e44741bf"/>
+    <p:sldId xmlns:r="http://schemas.openxmlformats.org/officeDocument/2006/relationships" id="258" r:id="Rab6097b44e604512"/>
+    <p:sldId xmlns:r="http://schemas.openxmlformats.org/officeDocument/2006/relationships" id="259" r:id="R8f998eeb127b40d8"/>
+    <p:sldId xmlns:r="http://schemas.openxmlformats.org/officeDocument/2006/relationships" id="260" r:id="R49b2a7dfb7a646c2"/>
+    <p:sldId xmlns:r="http://schemas.openxmlformats.org/officeDocument/2006/relationships" id="261" r:id="R24f1eae5cd034441"/>
+    <p:sldId xmlns:r="http://schemas.openxmlformats.org/officeDocument/2006/relationships" id="262" r:id="Re9745b70a6464470"/>
+    <p:sldId xmlns:r="http://schemas.openxmlformats.org/officeDocument/2006/relationships" id="263" r:id="Rdf3287bd36984e60"/>
+    <p:sldId xmlns:r="http://schemas.openxmlformats.org/officeDocument/2006/relationships" id="264" r:id="R90e689b1fca2431f"/>
+    <p:sldId xmlns:r="http://schemas.openxmlformats.org/officeDocument/2006/relationships" id="265" r:id="R31faee0125894f7e"/>
+    <p:sldId xmlns:r="http://schemas.openxmlformats.org/officeDocument/2006/relationships" id="266" r:id="Rf9a8023a2f4f4dfd"/>
+    <p:sldId xmlns:r="http://schemas.openxmlformats.org/officeDocument/2006/relationships" id="267" r:id="R034c5a52de9845ff"/>
+    <p:sldId xmlns:r="http://schemas.openxmlformats.org/officeDocument/2006/relationships" id="268" r:id="Rbeecd9691de74aa5"/>
+    <p:sldId xmlns:r="http://schemas.openxmlformats.org/officeDocument/2006/relationships" id="269" r:id="Rfbe15e4c6e9d4ece"/>
+    <p:sldId xmlns:r="http://schemas.openxmlformats.org/officeDocument/2006/relationships" id="270" r:id="R1271a98057424998"/>
   </p:sldIdLst>
   <p:sldSz cx="12191695" cy="6858000"/>
   <p:notesSz cx="6858000" cy="9144000"/>
@@ -494,7 +494,7 @@
           </a:p>
           <a:p xmlns:a="http://schemas.openxmlformats.org/drawingml/2006/main">
             <a:r>
-              <a:t>- 03_WebApp/Pre_Present/READMEEN.md — implemented learner journey</a:t>
+              <a:t>- 03_WebApp/READMEEN.md — implemented learner journey</a:t>
             </a:r>
           </a:p>
           <a:p xmlns:a="http://schemas.openxmlformats.org/drawingml/2006/main">
@@ -584,17 +584,27 @@
           </a:p>
           <a:p xmlns:a="http://schemas.openxmlformats.org/drawingml/2006/main">
             <a:r>
-              <a:t>- 03_WebApp/Pre_Present/data/question_bank_1000.json — restored research bank</a:t>
-            </a:r>
-          </a:p>
-          <a:p xmlns:a="http://schemas.openxmlformats.org/drawingml/2006/main">
-            <a:r>
-              <a:t>- 03_WebApp/Pre_Present/scripts/validate-future-question-bank.mjs — structural validation</a:t>
-            </a:r>
-          </a:p>
-          <a:p xmlns:a="http://schemas.openxmlformats.org/drawingml/2006/main">
-            <a:r>
-              <a:t>- 03_WebApp/Pre_Present/docs/05-system-architecture.md — current/planned architecture boundary</a:t>
+              <a:t>- 03_WebApp/data/question_bank_1000.json — restored research bank</a:t>
+            </a:r>
+          </a:p>
+          <a:p xmlns:a="http://schemas.openxmlformats.org/drawingml/2006/main">
+            <a:r>
+              <a:t>- 03_WebApp/scripts/validate-future-question-bank.mjs — structural validation</a:t>
+            </a:r>
+          </a:p>
+          <a:p xmlns:a="http://schemas.openxmlformats.org/drawingml/2006/main">
+            <a:r>
+              <a:t>- 03_WebApp/docs/05-system-architecture.md — current/planned architecture boundary</a:t>
+            </a:r>
+          </a:p>
+          <a:p xmlns:a="http://schemas.openxmlformats.org/drawingml/2006/main">
+            <a:r>
+              <a:t>- 03_WebApp/data/release.json — component versions and implementation status</a:t>
+            </a:r>
+          </a:p>
+          <a:p xmlns:a="http://schemas.openxmlformats.org/drawingml/2006/main">
+            <a:r>
+              <a:t>- 03_WebApp/data/education-data-registry.json — held-out decision fields</a:t>
             </a:r>
           </a:p>
           <a:p xmlns:a="http://schemas.openxmlformats.org/drawingml/2006/main">
@@ -679,12 +689,12 @@
           </a:p>
           <a:p xmlns:a="http://schemas.openxmlformats.org/drawingml/2006/main">
             <a:r>
-              <a:t>- 03_WebApp/Pre_Present/lib/decision-engine — current implementation</a:t>
-            </a:r>
-          </a:p>
-          <a:p xmlns:a="http://schemas.openxmlformats.org/drawingml/2006/main">
-            <a:r>
-              <a:t>- 03_WebApp/Pre_Present/docs/04-ai-system.md — scoring and AI boundary</a:t>
+              <a:t>- 03_WebApp/lib/decision-engine — current implementation</a:t>
+            </a:r>
+          </a:p>
+          <a:p xmlns:a="http://schemas.openxmlformats.org/drawingml/2006/main">
+            <a:r>
+              <a:t>- 03_WebApp/docs/04-ai-system.md — scoring and AI boundary</a:t>
             </a:r>
           </a:p>
           <a:p xmlns:a="http://schemas.openxmlformats.org/drawingml/2006/main">
@@ -769,22 +779,27 @@
           </a:p>
           <a:p xmlns:a="http://schemas.openxmlformats.org/drawingml/2006/main">
             <a:r>
-              <a:t>- 03_WebApp/Pre_Present/assets/screenshots/app/interview-2026-08-09.png — Reflect screen</a:t>
-            </a:r>
-          </a:p>
-          <a:p xmlns:a="http://schemas.openxmlformats.org/drawingml/2006/main">
-            <a:r>
-              <a:t>- 03_WebApp/Pre_Present/assets/screenshots/app/routes-2026-08-09.png — Explore screen</a:t>
-            </a:r>
-          </a:p>
-          <a:p xmlns:a="http://schemas.openxmlformats.org/drawingml/2006/main">
-            <a:r>
-              <a:t>- 03_WebApp/Pre_Present/assets/screenshots/app/plan-2026-08-09.png — Act screen</a:t>
-            </a:r>
-          </a:p>
-          <a:p xmlns:a="http://schemas.openxmlformats.org/drawingml/2006/main">
-            <a:r>
-              <a:t>- npm test, 11 Aug 2026 — 26 files and 529 tests passed</a:t>
+              <a:t>- 03_WebApp/assets/screenshots/app/interview-2026-08-09.png — Reflect screen</a:t>
+            </a:r>
+          </a:p>
+          <a:p xmlns:a="http://schemas.openxmlformats.org/drawingml/2006/main">
+            <a:r>
+              <a:t>- 03_WebApp/assets/screenshots/app/routes-2026-08-09.png — Explore screen</a:t>
+            </a:r>
+          </a:p>
+          <a:p xmlns:a="http://schemas.openxmlformats.org/drawingml/2006/main">
+            <a:r>
+              <a:t>- 03_WebApp/assets/screenshots/app/plan-2026-08-09.png — Act screen</a:t>
+            </a:r>
+          </a:p>
+          <a:p xmlns:a="http://schemas.openxmlformats.org/drawingml/2006/main">
+            <a:r>
+              <a:t>- npm run verify, 11 Aug 2026 — 27 files and 533 tests plus production build passed</a:t>
+            </a:r>
+          </a:p>
+          <a:p xmlns:a="http://schemas.openxmlformats.org/drawingml/2006/main">
+            <a:r>
+              <a:t>- npm run test:e2e, 11 Aug 2026 — all 95 Playwright browser journeys passed</a:t>
             </a:r>
           </a:p>
           <a:p xmlns:a="http://schemas.openxmlformats.org/drawingml/2006/main">
@@ -869,12 +884,12 @@
           </a:p>
           <a:p xmlns:a="http://schemas.openxmlformats.org/drawingml/2006/main">
             <a:r>
-              <a:t>- 03_WebApp/Pre_Present/docs/03-user-experience.md — evidence-loop UX</a:t>
-            </a:r>
-          </a:p>
-          <a:p xmlns:a="http://schemas.openxmlformats.org/drawingml/2006/main">
-            <a:r>
-              <a:t>- 03_WebApp/Pre_Present/READMEEN.md — implemented comparison and plan</a:t>
+              <a:t>- 03_WebApp/docs/03-user-experience.md — evidence-loop UX</a:t>
+            </a:r>
+          </a:p>
+          <a:p xmlns:a="http://schemas.openxmlformats.org/drawingml/2006/main">
+            <a:r>
+              <a:t>- 03_WebApp/READMEEN.md — implemented comparison and plan</a:t>
             </a:r>
           </a:p>
           <a:p xmlns:a="http://schemas.openxmlformats.org/drawingml/2006/main">
@@ -959,12 +974,12 @@
           </a:p>
           <a:p xmlns:a="http://schemas.openxmlformats.org/drawingml/2006/main">
             <a:r>
-              <a:t>- 03_WebApp/Pre_Present/docs/validation-plan.md — validation sequence</a:t>
-            </a:r>
-          </a:p>
-          <a:p xmlns:a="http://schemas.openxmlformats.org/drawingml/2006/main">
-            <a:r>
-              <a:t>- 03_WebApp/Pre_Present/docs/pilot-protocol.md — proposed pilot gates</a:t>
+              <a:t>- 03_WebApp/docs/validation-plan.md — validation sequence</a:t>
+            </a:r>
+          </a:p>
+          <a:p xmlns:a="http://schemas.openxmlformats.org/drawingml/2006/main">
+            <a:r>
+              <a:t>- 03_WebApp/docs/pilot-protocol.md — proposed pilot gates</a:t>
             </a:r>
           </a:p>
           <a:p xmlns:a="http://schemas.openxmlformats.org/drawingml/2006/main">
@@ -1059,12 +1074,37 @@
           </a:p>
           <a:p xmlns:a="http://schemas.openxmlformats.org/drawingml/2006/main">
             <a:r>
-              <a:t>- 03_WebApp/Pre_Present/docs/07-roadmap.md — staged roadmap</a:t>
+              <a:t>- 03_WebApp/docs/07-roadmap.md — staged roadmap</a:t>
             </a:r>
           </a:p>
           <a:p xmlns:a="http://schemas.openxmlformats.org/drawingml/2006/main">
             <a:r>
               <a:t>- 01_Research/Data/REFERENCES.md — source registry</a:t>
+            </a:r>
+          </a:p>
+          <a:p xmlns:a="http://schemas.openxmlformats.org/drawingml/2006/main">
+            <a:r>
+              <a:t>- 03_WebApp/data/education-data-registry.json — current data coverage and source status</a:t>
+            </a:r>
+          </a:p>
+          <a:p xmlns:a="http://schemas.openxmlformats.org/drawingml/2006/main">
+            <a:r>
+              <a:t>- https://data.mhesi.go.th/dataset/dqe_11_01 — official programme dataset</a:t>
+            </a:r>
+          </a:p>
+          <a:p xmlns:a="http://schemas.openxmlformats.org/drawingml/2006/main">
+            <a:r>
+              <a:t>- https://ckan.vec.go.th/en/dataset/publicschool — official public vocational register</a:t>
+            </a:r>
+          </a:p>
+          <a:p xmlns:a="http://schemas.openxmlformats.org/drawingml/2006/main">
+            <a:r>
+              <a:t>- https://ckan.vec.go.th/en/dataset/privateschool — official private vocational register</a:t>
+            </a:r>
+          </a:p>
+          <a:p xmlns:a="http://schemas.openxmlformats.org/drawingml/2006/main">
+            <a:r>
+              <a:t>- https://www.mytcas.com/ — official TCAS70 portal; reference only</a:t>
             </a:r>
           </a:p>
           <a:p xmlns:a="http://schemas.openxmlformats.org/drawingml/2006/main">
@@ -1149,7 +1189,7 @@
           </a:p>
           <a:p xmlns:a="http://schemas.openxmlformats.org/drawingml/2006/main">
             <a:r>
-              <a:t>- 03_WebApp/Pre_Present/docs/02-research-and-evidence.md — Thai education and mismatch evidence</a:t>
+              <a:t>- 03_WebApp/docs/02-research-and-evidence.md — Thai education and mismatch evidence</a:t>
             </a:r>
           </a:p>
           <a:p xmlns:a="http://schemas.openxmlformats.org/drawingml/2006/main">
@@ -1344,7 +1384,12 @@
           </a:p>
           <a:p xmlns:a="http://schemas.openxmlformats.org/drawingml/2006/main">
             <a:r>
-              <a:t>- 03_WebApp/Pre_Present/scripts/validate-research-data.mjs — integrity checks</a:t>
+              <a:t>- 03_WebApp/scripts/validate-research-data.mjs — integrity checks</a:t>
+            </a:r>
+          </a:p>
+          <a:p xmlns:a="http://schemas.openxmlformats.org/drawingml/2006/main">
+            <a:r>
+              <a:t>- 03_WebApp/data/education-data-registry.json — coverage, status and decision-use boundary</a:t>
             </a:r>
           </a:p>
           <a:p xmlns:a="http://schemas.openxmlformats.org/drawingml/2006/main">
@@ -1429,12 +1474,12 @@
           </a:p>
           <a:p xmlns:a="http://schemas.openxmlformats.org/drawingml/2006/main">
             <a:r>
-              <a:t>- 03_WebApp/Pre_Present/docs/01-project-overview.md — product thesis</a:t>
-            </a:r>
-          </a:p>
-          <a:p xmlns:a="http://schemas.openxmlformats.org/drawingml/2006/main">
-            <a:r>
-              <a:t>- 03_WebApp/Pre_Present/docs/03-user-experience.md — evidence-loop design</a:t>
+              <a:t>- 03_WebApp/docs/01-project-overview.md — product thesis</a:t>
+            </a:r>
+          </a:p>
+          <a:p xmlns:a="http://schemas.openxmlformats.org/drawingml/2006/main">
+            <a:r>
+              <a:t>- 03_WebApp/docs/03-user-experience.md — evidence-loop design</a:t>
             </a:r>
           </a:p>
           <a:p xmlns:a="http://schemas.openxmlformats.org/drawingml/2006/main">
@@ -1519,7 +1564,7 @@
           </a:p>
           <a:p xmlns:a="http://schemas.openxmlformats.org/drawingml/2006/main">
             <a:r>
-              <a:t>- 03_WebApp/Pre_Present/docs/questionnaire-methodology.md — construct and item provenance</a:t>
+              <a:t>- 03_WebApp/docs/questionnaire-methodology.md — construct and item provenance</a:t>
             </a:r>
           </a:p>
           <a:p xmlns:a="http://schemas.openxmlformats.org/drawingml/2006/main">
@@ -1609,12 +1654,12 @@
           </a:p>
           <a:p xmlns:a="http://schemas.openxmlformats.org/drawingml/2006/main">
             <a:r>
-              <a:t>- 03_WebApp/Pre_Present/docs/08-privacy-and-data.md — privacy boundary</a:t>
-            </a:r>
-          </a:p>
-          <a:p xmlns:a="http://schemas.openxmlformats.org/drawingml/2006/main">
-            <a:r>
-              <a:t>- 03_WebApp/Pre_Present/docs/09-source-review.md — provenance and freshness</a:t>
+              <a:t>- 03_WebApp/docs/08-privacy-and-data.md — privacy boundary</a:t>
+            </a:r>
+          </a:p>
+          <a:p xmlns:a="http://schemas.openxmlformats.org/drawingml/2006/main">
+            <a:r>
+              <a:t>- 03_WebApp/docs/09-source-review.md — provenance and freshness</a:t>
             </a:r>
           </a:p>
           <a:p xmlns:a="http://schemas.openxmlformats.org/drawingml/2006/main">
@@ -1699,12 +1744,12 @@
           </a:p>
           <a:p xmlns:a="http://schemas.openxmlformats.org/drawingml/2006/main">
             <a:r>
-              <a:t>- 03_WebApp/Pre_Present/lib/adaptive-engine.ts — branch plan</a:t>
-            </a:r>
-          </a:p>
-          <a:p xmlns:a="http://schemas.openxmlformats.org/drawingml/2006/main">
-            <a:r>
-              <a:t>- 03_WebApp/Pre_Present/tests/unit/adaptive-engine.test.ts — deterministic branch tests</a:t>
+              <a:t>- 03_WebApp/lib/adaptive-engine.ts — branch plan</a:t>
+            </a:r>
+          </a:p>
+          <a:p xmlns:a="http://schemas.openxmlformats.org/drawingml/2006/main">
+            <a:r>
+              <a:t>- 03_WebApp/tests/unit/adaptive-engine.test.ts — deterministic branch tests</a:t>
             </a:r>
           </a:p>
           <a:p xmlns:a="http://schemas.openxmlformats.org/drawingml/2006/main">
@@ -1789,12 +1834,12 @@
           </a:p>
           <a:p xmlns:a="http://schemas.openxmlformats.org/drawingml/2006/main">
             <a:r>
-              <a:t>- 03_WebApp/Pre_Present/READMEEN.md — journey and control surfaces</a:t>
-            </a:r>
-          </a:p>
-          <a:p xmlns:a="http://schemas.openxmlformats.org/drawingml/2006/main">
-            <a:r>
-              <a:t>- 03_WebApp/Pre_Present/e2e/journey.spec.ts — implemented browser journey</a:t>
+              <a:t>- 03_WebApp/READMEEN.md — journey and control surfaces</a:t>
+            </a:r>
+          </a:p>
+          <a:p xmlns:a="http://schemas.openxmlformats.org/drawingml/2006/main">
+            <a:r>
+              <a:t>- 03_WebApp/e2e/journey.spec.ts — implemented browser journey</a:t>
             </a:r>
           </a:p>
           <a:p xmlns:a="http://schemas.openxmlformats.org/drawingml/2006/main">
@@ -4826,17 +4871,17 @@
   </p:cSld>
   <p:clrMap bg1="lt1" tx1="dk1" bg2="lt2" tx2="dk2" accent1="accent1" accent2="accent2" accent3="accent3" accent4="accent4" accent5="accent5" accent6="accent6" hlink="hlink" folHlink="folHlink"/>
   <p:sldLayoutIdLst>
-    <p:sldLayoutId xmlns:r="http://schemas.openxmlformats.org/officeDocument/2006/relationships" id="2147483649" r:id="R94bf5650d3074799"/>
-    <p:sldLayoutId xmlns:r="http://schemas.openxmlformats.org/officeDocument/2006/relationships" id="2147483650" r:id="Rec2c95d0933e4c3b"/>
-    <p:sldLayoutId xmlns:r="http://schemas.openxmlformats.org/officeDocument/2006/relationships" id="2147483651" r:id="Rc023e9f76a1d47c3"/>
-    <p:sldLayoutId xmlns:r="http://schemas.openxmlformats.org/officeDocument/2006/relationships" id="2147483652" r:id="Rbe16bf8eb50448e0"/>
-    <p:sldLayoutId xmlns:r="http://schemas.openxmlformats.org/officeDocument/2006/relationships" id="2147483653" r:id="R8ebfa86cf7bf456a"/>
-    <p:sldLayoutId xmlns:r="http://schemas.openxmlformats.org/officeDocument/2006/relationships" id="2147483654" r:id="R0b7458e33865422a"/>
-    <p:sldLayoutId xmlns:r="http://schemas.openxmlformats.org/officeDocument/2006/relationships" id="2147483655" r:id="Rb7154f35fe4b430c"/>
-    <p:sldLayoutId xmlns:r="http://schemas.openxmlformats.org/officeDocument/2006/relationships" id="2147483656" r:id="R78d1d581111e4993"/>
-    <p:sldLayoutId xmlns:r="http://schemas.openxmlformats.org/officeDocument/2006/relationships" id="2147483657" r:id="Ref0675b363fb40cc"/>
-    <p:sldLayoutId xmlns:r="http://schemas.openxmlformats.org/officeDocument/2006/relationships" id="2147483658" r:id="Rd246e52a31454014"/>
-    <p:sldLayoutId xmlns:r="http://schemas.openxmlformats.org/officeDocument/2006/relationships" id="2147483659" r:id="Rdbfe202c2ac54a08"/>
+    <p:sldLayoutId xmlns:r="http://schemas.openxmlformats.org/officeDocument/2006/relationships" id="2147483649" r:id="Rede2f437662f417d"/>
+    <p:sldLayoutId xmlns:r="http://schemas.openxmlformats.org/officeDocument/2006/relationships" id="2147483650" r:id="R496e7512c0274e03"/>
+    <p:sldLayoutId xmlns:r="http://schemas.openxmlformats.org/officeDocument/2006/relationships" id="2147483651" r:id="Rf855883def634e2c"/>
+    <p:sldLayoutId xmlns:r="http://schemas.openxmlformats.org/officeDocument/2006/relationships" id="2147483652" r:id="Re184e1d5b4a542b1"/>
+    <p:sldLayoutId xmlns:r="http://schemas.openxmlformats.org/officeDocument/2006/relationships" id="2147483653" r:id="R48fdf37dfe8943c8"/>
+    <p:sldLayoutId xmlns:r="http://schemas.openxmlformats.org/officeDocument/2006/relationships" id="2147483654" r:id="R48875c995d3c4d27"/>
+    <p:sldLayoutId xmlns:r="http://schemas.openxmlformats.org/officeDocument/2006/relationships" id="2147483655" r:id="R5f606265670c4c45"/>
+    <p:sldLayoutId xmlns:r="http://schemas.openxmlformats.org/officeDocument/2006/relationships" id="2147483656" r:id="Rd93ba9a09b6145eb"/>
+    <p:sldLayoutId xmlns:r="http://schemas.openxmlformats.org/officeDocument/2006/relationships" id="2147483657" r:id="Rb3f5b99376584f75"/>
+    <p:sldLayoutId xmlns:r="http://schemas.openxmlformats.org/officeDocument/2006/relationships" id="2147483658" r:id="R8a2ed28c6e7647d6"/>
+    <p:sldLayoutId xmlns:r="http://schemas.openxmlformats.org/officeDocument/2006/relationships" id="2147483659" r:id="R44ea5b50e9564afb"/>
   </p:sldLayoutIdLst>
   <p:txStyles>
     <p:titleStyle>
@@ -5386,7 +5431,7 @@
           <p:nvPr/>
         </p:nvPicPr>
         <p:blipFill>
-          <a:blip xmlns:r="http://schemas.openxmlformats.org/officeDocument/2006/relationships" xmlns:a="http://schemas.openxmlformats.org/drawingml/2006/main" r:embed="Ra0c3ee52b3834d73"/>
+          <a:blip xmlns:r="http://schemas.openxmlformats.org/officeDocument/2006/relationships" xmlns:a="http://schemas.openxmlformats.org/drawingml/2006/main" r:embed="R2159a86325e24e4e"/>
           <a:stretch xmlns:a="http://schemas.openxmlformats.org/drawingml/2006/main">
             <a:fillRect l="0" t="0" r="0" b="0"/>
           </a:stretch>
@@ -5452,7 +5497,7 @@
                 <a:ea typeface="Aptos"/>
                 <a:cs typeface="Aptos"/>
               </a:rPr>
-              <a:t>JUMP THAILAND HACKATHON 2026 · UPDATED PROJECT CASE STUDY</a:t>
+              <a:t>FUTUREME 0.2.0 · UPDATED PROJECT CASE STUDY</a:t>
             </a:r>
           </a:p>
         </p:txBody>
@@ -6744,7 +6789,7 @@
           <p:nvPr/>
         </p:nvPicPr>
         <p:blipFill>
-          <a:blip xmlns:r="http://schemas.openxmlformats.org/officeDocument/2006/relationships" xmlns:a="http://schemas.openxmlformats.org/drawingml/2006/main" r:embed="R55ed13ab81fa40b6"/>
+          <a:blip xmlns:r="http://schemas.openxmlformats.org/officeDocument/2006/relationships" xmlns:a="http://schemas.openxmlformats.org/drawingml/2006/main" r:embed="Rc5cd893d6f2b4fbf"/>
           <a:stretch xmlns:a="http://schemas.openxmlformats.org/drawingml/2006/main">
             <a:fillRect l="0" t="0" r="0" b="0"/>
           </a:stretch>
@@ -6992,7 +7037,7 @@
           <p:nvPr/>
         </p:nvPicPr>
         <p:blipFill>
-          <a:blip xmlns:r="http://schemas.openxmlformats.org/officeDocument/2006/relationships" xmlns:a="http://schemas.openxmlformats.org/drawingml/2006/main" r:embed="R2fe800335fc44cf2"/>
+          <a:blip xmlns:r="http://schemas.openxmlformats.org/officeDocument/2006/relationships" xmlns:a="http://schemas.openxmlformats.org/drawingml/2006/main" r:embed="Rbdea6614efcd4dd1"/>
           <a:stretch xmlns:a="http://schemas.openxmlformats.org/drawingml/2006/main">
             <a:fillRect l="0" t="0" r="0" b="0"/>
           </a:stretch>
@@ -7058,7 +7103,7 @@
                 <a:ea typeface="Aptos"/>
                 <a:cs typeface="Aptos"/>
               </a:rPr>
-              <a:t>FutureMe AI · Project case study · August 2026</a:t>
+              <a:t>FutureMe AI · Release 0.2.0 · August 2026</a:t>
             </a:r>
           </a:p>
         </p:txBody>
@@ -9163,7 +9208,7 @@
                 <a:ea typeface="Aptos"/>
                 <a:cs typeface="Aptos"/>
               </a:rPr>
-              <a:t>Sources: current code + research banks; production RAG and cloud services are not implemented</a:t>
+              <a:t>Sources: current code + release registry; Python backend and production RAG are not connected</a:t>
             </a:r>
           </a:p>
         </p:txBody>
@@ -9199,7 +9244,7 @@
           <p:nvPr/>
         </p:nvPicPr>
         <p:blipFill>
-          <a:blip xmlns:r="http://schemas.openxmlformats.org/officeDocument/2006/relationships" xmlns:a="http://schemas.openxmlformats.org/drawingml/2006/main" r:embed="Re778bba3671f4321"/>
+          <a:blip xmlns:r="http://schemas.openxmlformats.org/officeDocument/2006/relationships" xmlns:a="http://schemas.openxmlformats.org/drawingml/2006/main" r:embed="R97ae35dacb1c4622"/>
           <a:stretch xmlns:a="http://schemas.openxmlformats.org/drawingml/2006/main">
             <a:fillRect l="0" t="0" r="0" b="0"/>
           </a:stretch>
@@ -9447,7 +9492,7 @@
           <p:nvPr/>
         </p:nvPicPr>
         <p:blipFill>
-          <a:blip xmlns:r="http://schemas.openxmlformats.org/officeDocument/2006/relationships" xmlns:a="http://schemas.openxmlformats.org/drawingml/2006/main" r:embed="Rb2cb558f6ac348d3"/>
+          <a:blip xmlns:r="http://schemas.openxmlformats.org/officeDocument/2006/relationships" xmlns:a="http://schemas.openxmlformats.org/drawingml/2006/main" r:embed="R756b799059d9480d"/>
           <a:stretch xmlns:a="http://schemas.openxmlformats.org/drawingml/2006/main">
             <a:fillRect l="0" t="0" r="0" b="0"/>
           </a:stretch>
@@ -9513,7 +9558,7 @@
                 <a:ea typeface="Aptos"/>
                 <a:cs typeface="Aptos"/>
               </a:rPr>
-              <a:t>FutureMe AI · Project case study · August 2026</a:t>
+              <a:t>FutureMe AI · Release 0.2.0 · August 2026</a:t>
             </a:r>
           </a:p>
         </p:txBody>
@@ -11906,7 +11951,7 @@
           <p:nvPr/>
         </p:nvPicPr>
         <p:blipFill>
-          <a:blip xmlns:r="http://schemas.openxmlformats.org/officeDocument/2006/relationships" xmlns:a="http://schemas.openxmlformats.org/drawingml/2006/main" r:embed="R2dbbc139a1e64ae9"/>
+          <a:blip xmlns:r="http://schemas.openxmlformats.org/officeDocument/2006/relationships" xmlns:a="http://schemas.openxmlformats.org/drawingml/2006/main" r:embed="R2963257439994697"/>
           <a:stretch xmlns:a="http://schemas.openxmlformats.org/drawingml/2006/main">
             <a:fillRect l="0" t="0" r="0" b="0"/>
           </a:stretch>
@@ -12154,7 +12199,7 @@
           <p:nvPr/>
         </p:nvPicPr>
         <p:blipFill>
-          <a:blip xmlns:r="http://schemas.openxmlformats.org/officeDocument/2006/relationships" xmlns:a="http://schemas.openxmlformats.org/drawingml/2006/main" r:embed="Rebb65c8338444226"/>
+          <a:blip xmlns:r="http://schemas.openxmlformats.org/officeDocument/2006/relationships" xmlns:a="http://schemas.openxmlformats.org/drawingml/2006/main" r:embed="Rbba13e470d9d4d41"/>
           <a:stretch xmlns:a="http://schemas.openxmlformats.org/drawingml/2006/main">
             <a:fillRect l="0" t="0" r="0" b="0"/>
           </a:stretch>
@@ -12220,7 +12265,7 @@
                 <a:ea typeface="Aptos"/>
                 <a:cs typeface="Aptos"/>
               </a:rPr>
-              <a:t>FutureMe AI · Project case study · August 2026</a:t>
+              <a:t>FutureMe AI · Release 0.2.0 · August 2026</a:t>
             </a:r>
           </a:p>
         </p:txBody>
@@ -12289,7 +12334,7 @@
           <p:nvPr/>
         </p:nvPicPr>
         <p:blipFill>
-          <a:blip xmlns:r="http://schemas.openxmlformats.org/officeDocument/2006/relationships" xmlns:a="http://schemas.openxmlformats.org/drawingml/2006/main" r:embed="R0655af96176a4e1c"/>
+          <a:blip xmlns:r="http://schemas.openxmlformats.org/officeDocument/2006/relationships" xmlns:a="http://schemas.openxmlformats.org/drawingml/2006/main" r:embed="R898f3aefeb3d459f"/>
           <a:srcRect xmlns:a="http://schemas.openxmlformats.org/drawingml/2006/main" l="11145" t="0" r="11145" b="0"/>
           <a:stretch xmlns:a="http://schemas.openxmlformats.org/drawingml/2006/main">
             <a:fillRect l="0" t="0" r="0" b="0"/>
@@ -12536,7 +12581,7 @@
           <p:nvPr/>
         </p:nvPicPr>
         <p:blipFill>
-          <a:blip xmlns:r="http://schemas.openxmlformats.org/officeDocument/2006/relationships" xmlns:a="http://schemas.openxmlformats.org/drawingml/2006/main" r:embed="Rf7ac22d923e24cfd"/>
+          <a:blip xmlns:r="http://schemas.openxmlformats.org/officeDocument/2006/relationships" xmlns:a="http://schemas.openxmlformats.org/drawingml/2006/main" r:embed="R64ec4bc424614a1e"/>
           <a:srcRect xmlns:a="http://schemas.openxmlformats.org/drawingml/2006/main" l="0" t="0" r="0" b="29182"/>
           <a:stretch xmlns:a="http://schemas.openxmlformats.org/drawingml/2006/main">
             <a:fillRect l="0" t="0" r="0" b="0"/>
@@ -12783,7 +12828,7 @@
           <p:nvPr/>
         </p:nvPicPr>
         <p:blipFill>
-          <a:blip xmlns:r="http://schemas.openxmlformats.org/officeDocument/2006/relationships" xmlns:a="http://schemas.openxmlformats.org/drawingml/2006/main" r:embed="Rbccda1dc30364acc"/>
+          <a:blip xmlns:r="http://schemas.openxmlformats.org/officeDocument/2006/relationships" xmlns:a="http://schemas.openxmlformats.org/drawingml/2006/main" r:embed="R3a4a71f7de824c43"/>
           <a:srcRect xmlns:a="http://schemas.openxmlformats.org/drawingml/2006/main" l="0" t="0" r="0" b="36198"/>
           <a:stretch xmlns:a="http://schemas.openxmlformats.org/drawingml/2006/main">
             <a:fillRect l="0" t="0" r="0" b="0"/>
@@ -13516,7 +13561,7 @@
                 <a:ea typeface="Aptos"/>
                 <a:cs typeface="Aptos"/>
               </a:rPr>
-              <a:t>529 TESTS</a:t>
+              <a:t>533 TESTS</a:t>
             </a:r>
           </a:p>
         </p:txBody>
@@ -13627,7 +13672,7 @@
                 <a:ea typeface="Aptos"/>
                 <a:cs typeface="Aptos"/>
               </a:rPr>
-              <a:t>94 E2E</a:t>
+              <a:t>95 E2E</a:t>
             </a:r>
           </a:p>
         </p:txBody>
@@ -13739,7 +13784,7 @@
                 <a:ea typeface="Aptos"/>
                 <a:cs typeface="Aptos"/>
               </a:rPr>
-              <a:t>Verification rerun 11 Aug 2026: 529 Vitest tests and all 94 Playwright browser journeys passed.</a:t>
+              <a:t>Verification rerun 11 Aug 2026: 533 Vitest tests and all 95 Playwright browser journeys passed.</a:t>
             </a:r>
           </a:p>
         </p:txBody>
@@ -13775,7 +13820,7 @@
           <p:nvPr/>
         </p:nvPicPr>
         <p:blipFill>
-          <a:blip xmlns:r="http://schemas.openxmlformats.org/officeDocument/2006/relationships" xmlns:a="http://schemas.openxmlformats.org/drawingml/2006/main" r:embed="Re99cbcb5ef964fac"/>
+          <a:blip xmlns:r="http://schemas.openxmlformats.org/officeDocument/2006/relationships" xmlns:a="http://schemas.openxmlformats.org/drawingml/2006/main" r:embed="R5e25f872a97d4964"/>
           <a:stretch xmlns:a="http://schemas.openxmlformats.org/drawingml/2006/main">
             <a:fillRect l="0" t="0" r="0" b="0"/>
           </a:stretch>
@@ -14023,7 +14068,7 @@
           <p:nvPr/>
         </p:nvPicPr>
         <p:blipFill>
-          <a:blip xmlns:r="http://schemas.openxmlformats.org/officeDocument/2006/relationships" xmlns:a="http://schemas.openxmlformats.org/drawingml/2006/main" r:embed="Rf7359f731b8e4952"/>
+          <a:blip xmlns:r="http://schemas.openxmlformats.org/officeDocument/2006/relationships" xmlns:a="http://schemas.openxmlformats.org/drawingml/2006/main" r:embed="R3a537c7caf5945ca"/>
           <a:stretch xmlns:a="http://schemas.openxmlformats.org/drawingml/2006/main">
             <a:fillRect l="0" t="0" r="0" b="0"/>
           </a:stretch>
@@ -14089,7 +14134,7 @@
                 <a:ea typeface="Aptos"/>
                 <a:cs typeface="Aptos"/>
               </a:rPr>
-              <a:t>FutureMe AI · Project case study · August 2026</a:t>
+              <a:t>FutureMe AI · Release 0.2.0 · August 2026</a:t>
             </a:r>
           </a:p>
         </p:txBody>
@@ -17057,7 +17102,7 @@
           <p:nvPr/>
         </p:nvPicPr>
         <p:blipFill>
-          <a:blip xmlns:r="http://schemas.openxmlformats.org/officeDocument/2006/relationships" xmlns:a="http://schemas.openxmlformats.org/drawingml/2006/main" r:embed="Rf2a9eb0e30334672"/>
+          <a:blip xmlns:r="http://schemas.openxmlformats.org/officeDocument/2006/relationships" xmlns:a="http://schemas.openxmlformats.org/drawingml/2006/main" r:embed="R456d58d9eeb942cf"/>
           <a:stretch xmlns:a="http://schemas.openxmlformats.org/drawingml/2006/main">
             <a:fillRect l="0" t="0" r="0" b="0"/>
           </a:stretch>
@@ -17305,7 +17350,7 @@
           <p:nvPr/>
         </p:nvPicPr>
         <p:blipFill>
-          <a:blip xmlns:r="http://schemas.openxmlformats.org/officeDocument/2006/relationships" xmlns:a="http://schemas.openxmlformats.org/drawingml/2006/main" r:embed="Re04257d5809d4426"/>
+          <a:blip xmlns:r="http://schemas.openxmlformats.org/officeDocument/2006/relationships" xmlns:a="http://schemas.openxmlformats.org/drawingml/2006/main" r:embed="R0336f6acbfdb4e74"/>
           <a:stretch xmlns:a="http://schemas.openxmlformats.org/drawingml/2006/main">
             <a:fillRect l="0" t="0" r="0" b="0"/>
           </a:stretch>
@@ -17371,7 +17416,7 @@
                 <a:ea typeface="Aptos"/>
                 <a:cs typeface="Aptos"/>
               </a:rPr>
-              <a:t>FutureMe AI · Project case study · August 2026</a:t>
+              <a:t>FutureMe AI · Release 0.2.0 · August 2026</a:t>
             </a:r>
           </a:p>
         </p:txBody>
@@ -19947,7 +19992,7 @@
           <p:nvPr/>
         </p:nvPicPr>
         <p:blipFill>
-          <a:blip xmlns:r="http://schemas.openxmlformats.org/officeDocument/2006/relationships" xmlns:a="http://schemas.openxmlformats.org/drawingml/2006/main" r:embed="Rafcaea5393c64aff"/>
+          <a:blip xmlns:r="http://schemas.openxmlformats.org/officeDocument/2006/relationships" xmlns:a="http://schemas.openxmlformats.org/drawingml/2006/main" r:embed="Rde26da6585144561"/>
           <a:stretch xmlns:a="http://schemas.openxmlformats.org/drawingml/2006/main">
             <a:fillRect l="0" t="0" r="0" b="0"/>
           </a:stretch>
@@ -20195,7 +20240,7 @@
           <p:nvPr/>
         </p:nvPicPr>
         <p:blipFill>
-          <a:blip xmlns:r="http://schemas.openxmlformats.org/officeDocument/2006/relationships" xmlns:a="http://schemas.openxmlformats.org/drawingml/2006/main" r:embed="R3a86223977d84601"/>
+          <a:blip xmlns:r="http://schemas.openxmlformats.org/officeDocument/2006/relationships" xmlns:a="http://schemas.openxmlformats.org/drawingml/2006/main" r:embed="Ra085d482f0274594"/>
           <a:stretch xmlns:a="http://schemas.openxmlformats.org/drawingml/2006/main">
             <a:fillRect l="0" t="0" r="0" b="0"/>
           </a:stretch>
@@ -20261,7 +20306,7 @@
                 <a:ea typeface="Aptos"/>
                 <a:cs typeface="Aptos"/>
               </a:rPr>
-              <a:t>FutureMe AI · Project case study · August 2026</a:t>
+              <a:t>FutureMe AI · Release 0.2.0 · August 2026</a:t>
             </a:r>
           </a:p>
         </p:txBody>
@@ -21466,7 +21511,7 @@
                 <a:ea typeface="Aptos"/>
                 <a:cs typeface="Aptos"/>
               </a:rPr>
-              <a:t>Phase 3: Thai adaptation · expert and student review · instrument + mission pilot · licensed route data · bias + safety audit</a:t>
+              <a:t>Phase 3: expert + student review · questionnaire + mission pilot · licensed dynamic data · bias, privacy + safety audit</a:t>
             </a:r>
           </a:p>
         </p:txBody>
@@ -21959,7 +22004,7 @@
                 <a:ea typeface="Aptos"/>
                 <a:cs typeface="Aptos"/>
               </a:rPr>
-              <a:t>Repository evidence: README files · validation plan · source audit · geography provenance</a:t>
+              <a:t>Repository evidence: release registry · source audit · data coverage · validation plan</a:t>
             </a:r>
           </a:p>
         </p:txBody>
@@ -21995,7 +22040,7 @@
           <p:nvPr/>
         </p:nvPicPr>
         <p:blipFill>
-          <a:blip xmlns:r="http://schemas.openxmlformats.org/officeDocument/2006/relationships" xmlns:a="http://schemas.openxmlformats.org/drawingml/2006/main" r:embed="R95ff095bc2154875"/>
+          <a:blip xmlns:r="http://schemas.openxmlformats.org/officeDocument/2006/relationships" xmlns:a="http://schemas.openxmlformats.org/drawingml/2006/main" r:embed="Rfe96adb62628406a"/>
           <a:stretch xmlns:a="http://schemas.openxmlformats.org/drawingml/2006/main">
             <a:fillRect l="0" t="0" r="0" b="0"/>
           </a:stretch>
@@ -22243,7 +22288,7 @@
           <p:nvPr/>
         </p:nvPicPr>
         <p:blipFill>
-          <a:blip xmlns:r="http://schemas.openxmlformats.org/officeDocument/2006/relationships" xmlns:a="http://schemas.openxmlformats.org/drawingml/2006/main" r:embed="Rd6affd6591d748e6"/>
+          <a:blip xmlns:r="http://schemas.openxmlformats.org/officeDocument/2006/relationships" xmlns:a="http://schemas.openxmlformats.org/drawingml/2006/main" r:embed="R27a95bd3dcee4b1f"/>
           <a:stretch xmlns:a="http://schemas.openxmlformats.org/drawingml/2006/main">
             <a:fillRect l="0" t="0" r="0" b="0"/>
           </a:stretch>
@@ -22309,7 +22354,7 @@
                 <a:ea typeface="Aptos"/>
                 <a:cs typeface="Aptos"/>
               </a:rPr>
-              <a:t>FutureMe AI · Project case study · August 2026</a:t>
+              <a:t>FutureMe AI · Release 0.2.0 · August 2026</a:t>
             </a:r>
           </a:p>
         </p:txBody>
@@ -23996,7 +24041,7 @@
           <p:nvPr/>
         </p:nvPicPr>
         <p:blipFill>
-          <a:blip xmlns:r="http://schemas.openxmlformats.org/officeDocument/2006/relationships" xmlns:a="http://schemas.openxmlformats.org/drawingml/2006/main" r:embed="R70037ce6ade24c8a"/>
+          <a:blip xmlns:r="http://schemas.openxmlformats.org/officeDocument/2006/relationships" xmlns:a="http://schemas.openxmlformats.org/drawingml/2006/main" r:embed="R4d656fba090f42c8"/>
           <a:stretch xmlns:a="http://schemas.openxmlformats.org/drawingml/2006/main">
             <a:fillRect l="0" t="0" r="0" b="0"/>
           </a:stretch>
@@ -24244,7 +24289,7 @@
           <p:nvPr/>
         </p:nvPicPr>
         <p:blipFill>
-          <a:blip xmlns:r="http://schemas.openxmlformats.org/officeDocument/2006/relationships" xmlns:a="http://schemas.openxmlformats.org/drawingml/2006/main" r:embed="R0e197ca1a8ca436e"/>
+          <a:blip xmlns:r="http://schemas.openxmlformats.org/officeDocument/2006/relationships" xmlns:a="http://schemas.openxmlformats.org/drawingml/2006/main" r:embed="R79f6135f67e6443e"/>
           <a:stretch xmlns:a="http://schemas.openxmlformats.org/drawingml/2006/main">
             <a:fillRect l="0" t="0" r="0" b="0"/>
           </a:stretch>
@@ -24310,7 +24355,7 @@
                 <a:ea typeface="Aptos"/>
                 <a:cs typeface="Aptos"/>
               </a:rPr>
-              <a:t>FutureMe AI · Project case study · August 2026</a:t>
+              <a:t>FutureMe AI · Release 0.2.0 · August 2026</a:t>
             </a:r>
           </a:p>
         </p:txBody>
@@ -25405,7 +25450,7 @@
           <p:nvPr/>
         </p:nvPicPr>
         <p:blipFill>
-          <a:blip xmlns:r="http://schemas.openxmlformats.org/officeDocument/2006/relationships" xmlns:a="http://schemas.openxmlformats.org/drawingml/2006/main" r:embed="R0e44b6b0efde4738"/>
+          <a:blip xmlns:r="http://schemas.openxmlformats.org/officeDocument/2006/relationships" xmlns:a="http://schemas.openxmlformats.org/drawingml/2006/main" r:embed="Rab9eefa8f37f4fe3"/>
           <a:stretch xmlns:a="http://schemas.openxmlformats.org/drawingml/2006/main">
             <a:fillRect l="0" t="0" r="0" b="0"/>
           </a:stretch>
@@ -25653,7 +25698,7 @@
           <p:nvPr/>
         </p:nvPicPr>
         <p:blipFill>
-          <a:blip xmlns:r="http://schemas.openxmlformats.org/officeDocument/2006/relationships" xmlns:a="http://schemas.openxmlformats.org/drawingml/2006/main" r:embed="Rc2c92fd4024a47a0"/>
+          <a:blip xmlns:r="http://schemas.openxmlformats.org/officeDocument/2006/relationships" xmlns:a="http://schemas.openxmlformats.org/drawingml/2006/main" r:embed="Ra44780993c5d4702"/>
           <a:stretch xmlns:a="http://schemas.openxmlformats.org/drawingml/2006/main">
             <a:fillRect l="0" t="0" r="0" b="0"/>
           </a:stretch>
@@ -25719,7 +25764,7 @@
                 <a:ea typeface="Aptos"/>
                 <a:cs typeface="Aptos"/>
               </a:rPr>
-              <a:t>FutureMe AI · Project case study · August 2026</a:t>
+              <a:t>FutureMe AI · Release 0.2.0 · August 2026</a:t>
             </a:r>
           </a:p>
         </p:txBody>
@@ -27459,7 +27504,7 @@
                 <a:ea typeface="Aptos"/>
                 <a:cs typeface="Aptos"/>
               </a:rPr>
-              <a:t>1,961 institution options across 77 provinces; 207 coordinates and 987 websites remain explicitly unknown.</a:t>
+              <a:t>1,961 options / 1,375 institutions; 140 mapped. TCAS, fees, scholarships and living costs remain unavailable.</a:t>
             </a:r>
           </a:p>
         </p:txBody>
@@ -27515,7 +27560,7 @@
                 <a:ea typeface="Aptos"/>
                 <a:cs typeface="Aptos"/>
               </a:rPr>
-              <a:t>Sources: Geography PROVENANCE + check:data; integration review 11 Aug 2026</a:t>
+              <a:t>Sources: education-data-registry v0.2.0 + MHESI/OVEC; checked 11 Aug 2026</a:t>
             </a:r>
           </a:p>
         </p:txBody>
@@ -27551,7 +27596,7 @@
           <p:nvPr/>
         </p:nvPicPr>
         <p:blipFill>
-          <a:blip xmlns:r="http://schemas.openxmlformats.org/officeDocument/2006/relationships" xmlns:a="http://schemas.openxmlformats.org/drawingml/2006/main" r:embed="R0f29ee9d7fd44ae2"/>
+          <a:blip xmlns:r="http://schemas.openxmlformats.org/officeDocument/2006/relationships" xmlns:a="http://schemas.openxmlformats.org/drawingml/2006/main" r:embed="Rc69f8ffdf5ef4780"/>
           <a:stretch xmlns:a="http://schemas.openxmlformats.org/drawingml/2006/main">
             <a:fillRect l="0" t="0" r="0" b="0"/>
           </a:stretch>
@@ -27799,7 +27844,7 @@
           <p:nvPr/>
         </p:nvPicPr>
         <p:blipFill>
-          <a:blip xmlns:r="http://schemas.openxmlformats.org/officeDocument/2006/relationships" xmlns:a="http://schemas.openxmlformats.org/drawingml/2006/main" r:embed="R02a26cded7ac4c12"/>
+          <a:blip xmlns:r="http://schemas.openxmlformats.org/officeDocument/2006/relationships" xmlns:a="http://schemas.openxmlformats.org/drawingml/2006/main" r:embed="R3d3455f4f1f74b61"/>
           <a:stretch xmlns:a="http://schemas.openxmlformats.org/drawingml/2006/main">
             <a:fillRect l="0" t="0" r="0" b="0"/>
           </a:stretch>
@@ -27865,7 +27910,7 @@
                 <a:ea typeface="Aptos"/>
                 <a:cs typeface="Aptos"/>
               </a:rPr>
-              <a:t>FutureMe AI · Project case study · August 2026</a:t>
+              <a:t>FutureMe AI · Release 0.2.0 · August 2026</a:t>
             </a:r>
           </a:p>
         </p:txBody>
@@ -29477,7 +29522,7 @@
           <p:nvPr/>
         </p:nvPicPr>
         <p:blipFill>
-          <a:blip xmlns:r="http://schemas.openxmlformats.org/officeDocument/2006/relationships" xmlns:a="http://schemas.openxmlformats.org/drawingml/2006/main" r:embed="R44d21ec7e4724530"/>
+          <a:blip xmlns:r="http://schemas.openxmlformats.org/officeDocument/2006/relationships" xmlns:a="http://schemas.openxmlformats.org/drawingml/2006/main" r:embed="R42f202a08a824946"/>
           <a:stretch xmlns:a="http://schemas.openxmlformats.org/drawingml/2006/main">
             <a:fillRect l="0" t="0" r="0" b="0"/>
           </a:stretch>
@@ -29725,7 +29770,7 @@
           <p:nvPr/>
         </p:nvPicPr>
         <p:blipFill>
-          <a:blip xmlns:r="http://schemas.openxmlformats.org/officeDocument/2006/relationships" xmlns:a="http://schemas.openxmlformats.org/drawingml/2006/main" r:embed="R1ba025fc02684670"/>
+          <a:blip xmlns:r="http://schemas.openxmlformats.org/officeDocument/2006/relationships" xmlns:a="http://schemas.openxmlformats.org/drawingml/2006/main" r:embed="Rfb3e2a5132a34f68"/>
           <a:stretch xmlns:a="http://schemas.openxmlformats.org/drawingml/2006/main">
             <a:fillRect l="0" t="0" r="0" b="0"/>
           </a:stretch>
@@ -29791,7 +29836,7 @@
                 <a:ea typeface="Aptos"/>
                 <a:cs typeface="Aptos"/>
               </a:rPr>
-              <a:t>FutureMe AI · Project case study · August 2026</a:t>
+              <a:t>FutureMe AI · Release 0.2.0 · August 2026</a:t>
             </a:r>
           </a:p>
         </p:txBody>
@@ -32044,7 +32089,7 @@
           <p:nvPr/>
         </p:nvPicPr>
         <p:blipFill>
-          <a:blip xmlns:r="http://schemas.openxmlformats.org/officeDocument/2006/relationships" xmlns:a="http://schemas.openxmlformats.org/drawingml/2006/main" r:embed="R1305fed729d04c1f"/>
+          <a:blip xmlns:r="http://schemas.openxmlformats.org/officeDocument/2006/relationships" xmlns:a="http://schemas.openxmlformats.org/drawingml/2006/main" r:embed="R8bf7cac975d74094"/>
           <a:stretch xmlns:a="http://schemas.openxmlformats.org/drawingml/2006/main">
             <a:fillRect l="0" t="0" r="0" b="0"/>
           </a:stretch>
@@ -32292,7 +32337,7 @@
           <p:nvPr/>
         </p:nvPicPr>
         <p:blipFill>
-          <a:blip xmlns:r="http://schemas.openxmlformats.org/officeDocument/2006/relationships" xmlns:a="http://schemas.openxmlformats.org/drawingml/2006/main" r:embed="R5c2e5340f0e641bf"/>
+          <a:blip xmlns:r="http://schemas.openxmlformats.org/officeDocument/2006/relationships" xmlns:a="http://schemas.openxmlformats.org/drawingml/2006/main" r:embed="R8607380789184abf"/>
           <a:stretch xmlns:a="http://schemas.openxmlformats.org/drawingml/2006/main">
             <a:fillRect l="0" t="0" r="0" b="0"/>
           </a:stretch>
@@ -32358,7 +32403,7 @@
                 <a:ea typeface="Aptos"/>
                 <a:cs typeface="Aptos"/>
               </a:rPr>
-              <a:t>FutureMe AI · Project case study · August 2026</a:t>
+              <a:t>FutureMe AI · Release 0.2.0 · August 2026</a:t>
             </a:r>
           </a:p>
         </p:txBody>
@@ -33896,7 +33941,7 @@
           <p:nvPr/>
         </p:nvPicPr>
         <p:blipFill>
-          <a:blip xmlns:r="http://schemas.openxmlformats.org/officeDocument/2006/relationships" xmlns:a="http://schemas.openxmlformats.org/drawingml/2006/main" r:embed="R82b9b79fd1104694"/>
+          <a:blip xmlns:r="http://schemas.openxmlformats.org/officeDocument/2006/relationships" xmlns:a="http://schemas.openxmlformats.org/drawingml/2006/main" r:embed="Rb6c3d7cfed114a1c"/>
           <a:stretch xmlns:a="http://schemas.openxmlformats.org/drawingml/2006/main">
             <a:fillRect l="0" t="0" r="0" b="0"/>
           </a:stretch>
@@ -34144,7 +34189,7 @@
           <p:nvPr/>
         </p:nvPicPr>
         <p:blipFill>
-          <a:blip xmlns:r="http://schemas.openxmlformats.org/officeDocument/2006/relationships" xmlns:a="http://schemas.openxmlformats.org/drawingml/2006/main" r:embed="Rbcc86cf6082a4c31"/>
+          <a:blip xmlns:r="http://schemas.openxmlformats.org/officeDocument/2006/relationships" xmlns:a="http://schemas.openxmlformats.org/drawingml/2006/main" r:embed="R31e44e94921944a6"/>
           <a:stretch xmlns:a="http://schemas.openxmlformats.org/drawingml/2006/main">
             <a:fillRect l="0" t="0" r="0" b="0"/>
           </a:stretch>
@@ -34210,7 +34255,7 @@
                 <a:ea typeface="Aptos"/>
                 <a:cs typeface="Aptos"/>
               </a:rPr>
-              <a:t>FutureMe AI · Project case study · August 2026</a:t>
+              <a:t>FutureMe AI · Release 0.2.0 · August 2026</a:t>
             </a:r>
           </a:p>
         </p:txBody>
@@ -35827,7 +35872,7 @@
           <p:nvPr/>
         </p:nvPicPr>
         <p:blipFill>
-          <a:blip xmlns:r="http://schemas.openxmlformats.org/officeDocument/2006/relationships" xmlns:a="http://schemas.openxmlformats.org/drawingml/2006/main" r:embed="Ra2dcce338e7140d8"/>
+          <a:blip xmlns:r="http://schemas.openxmlformats.org/officeDocument/2006/relationships" xmlns:a="http://schemas.openxmlformats.org/drawingml/2006/main" r:embed="R16014cd9d93c4c9a"/>
           <a:stretch xmlns:a="http://schemas.openxmlformats.org/drawingml/2006/main">
             <a:fillRect l="0" t="0" r="0" b="0"/>
           </a:stretch>
@@ -36075,7 +36120,7 @@
           <p:nvPr/>
         </p:nvPicPr>
         <p:blipFill>
-          <a:blip xmlns:r="http://schemas.openxmlformats.org/officeDocument/2006/relationships" xmlns:a="http://schemas.openxmlformats.org/drawingml/2006/main" r:embed="R5204435e7950447a"/>
+          <a:blip xmlns:r="http://schemas.openxmlformats.org/officeDocument/2006/relationships" xmlns:a="http://schemas.openxmlformats.org/drawingml/2006/main" r:embed="Rdb44bd1cffd94b89"/>
           <a:stretch xmlns:a="http://schemas.openxmlformats.org/drawingml/2006/main">
             <a:fillRect l="0" t="0" r="0" b="0"/>
           </a:stretch>
@@ -36141,7 +36186,7 @@
                 <a:ea typeface="Aptos"/>
                 <a:cs typeface="Aptos"/>
               </a:rPr>
-              <a:t>FutureMe AI · Project case study · August 2026</a:t>
+              <a:t>FutureMe AI · Release 0.2.0 · August 2026</a:t>
             </a:r>
           </a:p>
         </p:txBody>

--- a/Presentation/FutureMe_Project_Presentation.pptx
+++ b/Presentation/FutureMe_Project_Presentation.pptx
@@ -3136,7 +3136,7 @@
         <p:spPr>
           <a:xfrm>
             <a:off x="621792" y="475488"/>
-            <a:ext cx="5852160" cy="256032"/>
+            <a:ext cx="10424160" cy="256032"/>
           </a:xfrm>
           <a:prstGeom prst="rect">
             <a:avLst/>
@@ -3384,8 +3384,8 @@
         </p:nvSpPr>
         <p:spPr>
           <a:xfrm>
-            <a:off x="658368" y="3730752"/>
-            <a:ext cx="2971800" cy="292608"/>
+            <a:off x="658368" y="3712463"/>
+            <a:ext cx="3977639" cy="292608"/>
           </a:xfrm>
           <a:prstGeom prst="roundRect">
             <a:avLst/>
@@ -3429,8 +3429,8 @@
         </p:nvSpPr>
         <p:spPr>
           <a:xfrm>
-            <a:off x="704088" y="3744468"/>
-            <a:ext cx="2880360" cy="256032"/>
+            <a:off x="704088" y="3726179"/>
+            <a:ext cx="3886200" cy="256032"/>
           </a:xfrm>
           <a:prstGeom prst="rect">
             <a:avLst/>
@@ -3469,6 +3469,446 @@
       <p:sp>
         <p:nvSpPr>
           <p:cNvPr id="10" name="TextBox 9"/>
+          <p:cNvSpPr txBox="1"/>
+          <p:nvPr/>
+        </p:nvSpPr>
+        <p:spPr>
+          <a:xfrm>
+            <a:off x="658368" y="4370832"/>
+            <a:ext cx="1737360" cy="475488"/>
+          </a:xfrm>
+          <a:prstGeom prst="rect">
+            <a:avLst/>
+          </a:prstGeom>
+          <a:noFill/>
+        </p:spPr>
+        <p:txBody>
+          <a:bodyPr wrap="square" lIns="0" rIns="0" tIns="0" bIns="0" anchor="t">
+            <a:spAutoFit/>
+          </a:bodyPr>
+          <a:lstStyle/>
+          <a:p>
+            <a:pPr algn="l">
+              <a:lnSpc>
+                <a:spcPct val="100000"/>
+              </a:lnSpc>
+              <a:spcBef>
+                <a:spcPts val="0"/>
+              </a:spcBef>
+              <a:spcAft>
+                <a:spcPts val="0"/>
+              </a:spcAft>
+            </a:pPr>
+            <a:r>
+              <a:rPr sz="2600" b="1" i="0">
+                <a:solidFill>
+                  <a:srgbClr val="4FE3C1"/>
+                </a:solidFill>
+                <a:latin typeface="Aptos"/>
+              </a:rPr>
+              <a:t>23,257</a:t>
+            </a:r>
+          </a:p>
+        </p:txBody>
+      </p:sp>
+      <p:sp>
+        <p:nvSpPr>
+          <p:cNvPr id="11" name="TextBox 10"/>
+          <p:cNvSpPr txBox="1"/>
+          <p:nvPr/>
+        </p:nvSpPr>
+        <p:spPr>
+          <a:xfrm>
+            <a:off x="658368" y="4882896"/>
+            <a:ext cx="1737360" cy="237744"/>
+          </a:xfrm>
+          <a:prstGeom prst="rect">
+            <a:avLst/>
+          </a:prstGeom>
+          <a:noFill/>
+        </p:spPr>
+        <p:txBody>
+          <a:bodyPr wrap="square" lIns="0" rIns="0" tIns="0" bIns="0" anchor="t">
+            <a:spAutoFit/>
+          </a:bodyPr>
+          <a:lstStyle/>
+          <a:p>
+            <a:pPr algn="l">
+              <a:lnSpc>
+                <a:spcPct val="100000"/>
+              </a:lnSpc>
+              <a:spcBef>
+                <a:spcPts val="0"/>
+              </a:spcBef>
+              <a:spcAft>
+                <a:spcPts val="0"/>
+              </a:spcAft>
+            </a:pPr>
+            <a:r>
+              <a:rPr sz="1200" b="1" i="0">
+                <a:solidFill>
+                  <a:srgbClr val="F5F5FA"/>
+                </a:solidFill>
+                <a:latin typeface="Sukhumvit Set"/>
+              </a:rPr>
+              <a:t>หลักสูตรจริง</a:t>
+            </a:r>
+          </a:p>
+        </p:txBody>
+      </p:sp>
+      <p:sp>
+        <p:nvSpPr>
+          <p:cNvPr id="12" name="TextBox 11"/>
+          <p:cNvSpPr txBox="1"/>
+          <p:nvPr/>
+        </p:nvSpPr>
+        <p:spPr>
+          <a:xfrm>
+            <a:off x="658368" y="5138928"/>
+            <a:ext cx="1773936" cy="219456"/>
+          </a:xfrm>
+          <a:prstGeom prst="rect">
+            <a:avLst/>
+          </a:prstGeom>
+          <a:noFill/>
+        </p:spPr>
+        <p:txBody>
+          <a:bodyPr wrap="square" lIns="0" rIns="0" tIns="0" bIns="0" anchor="t">
+            <a:spAutoFit/>
+          </a:bodyPr>
+          <a:lstStyle/>
+          <a:p>
+            <a:pPr algn="l">
+              <a:lnSpc>
+                <a:spcPct val="100000"/>
+              </a:lnSpc>
+              <a:spcBef>
+                <a:spcPts val="0"/>
+              </a:spcBef>
+              <a:spcAft>
+                <a:spcPts val="0"/>
+              </a:spcAft>
+            </a:pPr>
+            <a:r>
+              <a:rPr sz="900" b="0" i="0">
+                <a:solidFill>
+                  <a:srgbClr val="77778F"/>
+                </a:solidFill>
+                <a:latin typeface="Sukhumvit Set"/>
+              </a:rPr>
+              <a:t>ปวช. · ปวส. · ปริญญาตรี</a:t>
+            </a:r>
+          </a:p>
+        </p:txBody>
+      </p:sp>
+      <p:sp>
+        <p:nvSpPr>
+          <p:cNvPr id="13" name="TextBox 12"/>
+          <p:cNvSpPr txBox="1"/>
+          <p:nvPr/>
+        </p:nvSpPr>
+        <p:spPr>
+          <a:xfrm>
+            <a:off x="2505456" y="4370832"/>
+            <a:ext cx="1737360" cy="475488"/>
+          </a:xfrm>
+          <a:prstGeom prst="rect">
+            <a:avLst/>
+          </a:prstGeom>
+          <a:noFill/>
+        </p:spPr>
+        <p:txBody>
+          <a:bodyPr wrap="square" lIns="0" rIns="0" tIns="0" bIns="0" anchor="t">
+            <a:spAutoFit/>
+          </a:bodyPr>
+          <a:lstStyle/>
+          <a:p>
+            <a:pPr algn="l">
+              <a:lnSpc>
+                <a:spcPct val="100000"/>
+              </a:lnSpc>
+              <a:spcBef>
+                <a:spcPts val="0"/>
+              </a:spcBef>
+              <a:spcAft>
+                <a:spcPts val="0"/>
+              </a:spcAft>
+            </a:pPr>
+            <a:r>
+              <a:rPr sz="2600" b="1" i="0">
+                <a:solidFill>
+                  <a:srgbClr val="4FE3C1"/>
+                </a:solidFill>
+                <a:latin typeface="Aptos"/>
+              </a:rPr>
+              <a:t>993</a:t>
+            </a:r>
+          </a:p>
+        </p:txBody>
+      </p:sp>
+      <p:sp>
+        <p:nvSpPr>
+          <p:cNvPr id="14" name="TextBox 13"/>
+          <p:cNvSpPr txBox="1"/>
+          <p:nvPr/>
+        </p:nvSpPr>
+        <p:spPr>
+          <a:xfrm>
+            <a:off x="2505456" y="4882896"/>
+            <a:ext cx="1737360" cy="237744"/>
+          </a:xfrm>
+          <a:prstGeom prst="rect">
+            <a:avLst/>
+          </a:prstGeom>
+          <a:noFill/>
+        </p:spPr>
+        <p:txBody>
+          <a:bodyPr wrap="square" lIns="0" rIns="0" tIns="0" bIns="0" anchor="t">
+            <a:spAutoFit/>
+          </a:bodyPr>
+          <a:lstStyle/>
+          <a:p>
+            <a:pPr algn="l">
+              <a:lnSpc>
+                <a:spcPct val="100000"/>
+              </a:lnSpc>
+              <a:spcBef>
+                <a:spcPts val="0"/>
+              </a:spcBef>
+              <a:spcAft>
+                <a:spcPts val="0"/>
+              </a:spcAft>
+            </a:pPr>
+            <a:r>
+              <a:rPr sz="1200" b="1" i="0">
+                <a:solidFill>
+                  <a:srgbClr val="F5F5FA"/>
+                </a:solidFill>
+                <a:latin typeface="Sukhumvit Set"/>
+              </a:rPr>
+              <a:t>สถาบัน</a:t>
+            </a:r>
+          </a:p>
+        </p:txBody>
+      </p:sp>
+      <p:sp>
+        <p:nvSpPr>
+          <p:cNvPr id="15" name="TextBox 14"/>
+          <p:cNvSpPr txBox="1"/>
+          <p:nvPr/>
+        </p:nvSpPr>
+        <p:spPr>
+          <a:xfrm>
+            <a:off x="2505456" y="5138928"/>
+            <a:ext cx="1773936" cy="219456"/>
+          </a:xfrm>
+          <a:prstGeom prst="rect">
+            <a:avLst/>
+          </a:prstGeom>
+          <a:noFill/>
+        </p:spPr>
+        <p:txBody>
+          <a:bodyPr wrap="square" lIns="0" rIns="0" tIns="0" bIns="0" anchor="t">
+            <a:spAutoFit/>
+          </a:bodyPr>
+          <a:lstStyle/>
+          <a:p>
+            <a:pPr algn="l">
+              <a:lnSpc>
+                <a:spcPct val="100000"/>
+              </a:lnSpc>
+              <a:spcBef>
+                <a:spcPts val="0"/>
+              </a:spcBef>
+              <a:spcAft>
+                <a:spcPts val="0"/>
+              </a:spcAft>
+            </a:pPr>
+            <a:r>
+              <a:rPr sz="900" b="0" i="0">
+                <a:solidFill>
+                  <a:srgbClr val="77778F"/>
+                </a:solidFill>
+                <a:latin typeface="Sukhumvit Set"/>
+              </a:rPr>
+              <a:t>ทั่วประเทศ</a:t>
+            </a:r>
+          </a:p>
+        </p:txBody>
+      </p:sp>
+      <p:sp>
+        <p:nvSpPr>
+          <p:cNvPr id="16" name="TextBox 15"/>
+          <p:cNvSpPr txBox="1"/>
+          <p:nvPr/>
+        </p:nvSpPr>
+        <p:spPr>
+          <a:xfrm>
+            <a:off x="4352544" y="4370832"/>
+            <a:ext cx="1737360" cy="475488"/>
+          </a:xfrm>
+          <a:prstGeom prst="rect">
+            <a:avLst/>
+          </a:prstGeom>
+          <a:noFill/>
+        </p:spPr>
+        <p:txBody>
+          <a:bodyPr wrap="square" lIns="0" rIns="0" tIns="0" bIns="0" anchor="t">
+            <a:spAutoFit/>
+          </a:bodyPr>
+          <a:lstStyle/>
+          <a:p>
+            <a:pPr algn="l">
+              <a:lnSpc>
+                <a:spcPct val="100000"/>
+              </a:lnSpc>
+              <a:spcBef>
+                <a:spcPts val="0"/>
+              </a:spcBef>
+              <a:spcAft>
+                <a:spcPts val="0"/>
+              </a:spcAft>
+            </a:pPr>
+            <a:r>
+              <a:rPr sz="2600" b="1" i="0">
+                <a:solidFill>
+                  <a:srgbClr val="4FE3C1"/>
+                </a:solidFill>
+                <a:latin typeface="Aptos"/>
+              </a:rPr>
+              <a:t>923</a:t>
+            </a:r>
+          </a:p>
+        </p:txBody>
+      </p:sp>
+      <p:sp>
+        <p:nvSpPr>
+          <p:cNvPr id="17" name="TextBox 16"/>
+          <p:cNvSpPr txBox="1"/>
+          <p:nvPr/>
+        </p:nvSpPr>
+        <p:spPr>
+          <a:xfrm>
+            <a:off x="4352544" y="4882896"/>
+            <a:ext cx="1737360" cy="237744"/>
+          </a:xfrm>
+          <a:prstGeom prst="rect">
+            <a:avLst/>
+          </a:prstGeom>
+          <a:noFill/>
+        </p:spPr>
+        <p:txBody>
+          <a:bodyPr wrap="square" lIns="0" rIns="0" tIns="0" bIns="0" anchor="t">
+            <a:spAutoFit/>
+          </a:bodyPr>
+          <a:lstStyle/>
+          <a:p>
+            <a:pPr algn="l">
+              <a:lnSpc>
+                <a:spcPct val="100000"/>
+              </a:lnSpc>
+              <a:spcBef>
+                <a:spcPts val="0"/>
+              </a:spcBef>
+              <a:spcAft>
+                <a:spcPts val="0"/>
+              </a:spcAft>
+            </a:pPr>
+            <a:r>
+              <a:rPr sz="1200" b="1" i="0">
+                <a:solidFill>
+                  <a:srgbClr val="F5F5FA"/>
+                </a:solidFill>
+                <a:latin typeface="Sukhumvit Set"/>
+              </a:rPr>
+              <a:t>อาชีพ</a:t>
+            </a:r>
+          </a:p>
+        </p:txBody>
+      </p:sp>
+      <p:sp>
+        <p:nvSpPr>
+          <p:cNvPr id="18" name="TextBox 17"/>
+          <p:cNvSpPr txBox="1"/>
+          <p:nvPr/>
+        </p:nvSpPr>
+        <p:spPr>
+          <a:xfrm>
+            <a:off x="4352544" y="5138928"/>
+            <a:ext cx="1773936" cy="219456"/>
+          </a:xfrm>
+          <a:prstGeom prst="rect">
+            <a:avLst/>
+          </a:prstGeom>
+          <a:noFill/>
+        </p:spPr>
+        <p:txBody>
+          <a:bodyPr wrap="square" lIns="0" rIns="0" tIns="0" bIns="0" anchor="t">
+            <a:spAutoFit/>
+          </a:bodyPr>
+          <a:lstStyle/>
+          <a:p>
+            <a:pPr algn="l">
+              <a:lnSpc>
+                <a:spcPct val="100000"/>
+              </a:lnSpc>
+              <a:spcBef>
+                <a:spcPts val="0"/>
+              </a:spcBef>
+              <a:spcAft>
+                <a:spcPts val="0"/>
+              </a:spcAft>
+            </a:pPr>
+            <a:r>
+              <a:rPr sz="900" b="0" i="0">
+                <a:solidFill>
+                  <a:srgbClr val="77778F"/>
+                </a:solidFill>
+                <a:latin typeface="Sukhumvit Set"/>
+              </a:rPr>
+              <a:t>โปรไฟล์ความสนใจที่วัดมา</a:t>
+            </a:r>
+          </a:p>
+        </p:txBody>
+      </p:sp>
+      <p:cxnSp>
+        <p:nvCxnSpPr>
+          <p:cNvPr id="19" name="Connector 18"/>
+          <p:cNvCxnSpPr/>
+          <p:nvPr/>
+        </p:nvCxnSpPr>
+        <p:spPr>
+          <a:xfrm>
+            <a:off x="676656" y="4224528"/>
+            <a:ext cx="5266944" cy="0"/>
+          </a:xfrm>
+          <a:prstGeom prst="line">
+            <a:avLst/>
+          </a:prstGeom>
+          <a:ln w="12700">
+            <a:solidFill>
+              <a:srgbClr val="34344A"/>
+            </a:solidFill>
+          </a:ln>
+        </p:spPr>
+        <p:style>
+          <a:lnRef idx="2">
+            <a:schemeClr val="accent1"/>
+          </a:lnRef>
+          <a:fillRef idx="0">
+            <a:schemeClr val="accent1"/>
+          </a:fillRef>
+          <a:effectRef idx="1">
+            <a:schemeClr val="accent1"/>
+          </a:effectRef>
+          <a:fontRef idx="minor">
+            <a:schemeClr val="tx1"/>
+          </a:fontRef>
+        </p:style>
+      </p:cxnSp>
+      <p:sp>
+        <p:nvSpPr>
+          <p:cNvPr id="20" name="TextBox 19"/>
           <p:cNvSpPr txBox="1"/>
           <p:nvPr/>
         </p:nvSpPr>
@@ -3513,7 +3953,7 @@
       </p:sp>
       <p:sp>
         <p:nvSpPr>
-          <p:cNvPr id="11" name="TextBox 10"/>
+          <p:cNvPr id="21" name="TextBox 20"/>
           <p:cNvSpPr txBox="1"/>
           <p:nvPr/>
         </p:nvSpPr>
@@ -3558,7 +3998,7 @@
       </p:sp>
       <p:sp>
         <p:nvSpPr>
-          <p:cNvPr id="12" name="Oval 11"/>
+          <p:cNvPr id="22" name="Oval 21"/>
           <p:cNvSpPr/>
           <p:nvPr/>
         </p:nvSpPr>
@@ -3601,7 +4041,7 @@
       </p:sp>
       <p:sp>
         <p:nvSpPr>
-          <p:cNvPr id="13" name="TextBox 12"/>
+          <p:cNvPr id="23" name="TextBox 22"/>
           <p:cNvSpPr txBox="1"/>
           <p:nvPr/>
         </p:nvSpPr>
@@ -3647,7 +4087,7 @@
       </p:sp>
       <p:cxnSp>
         <p:nvCxnSpPr>
-          <p:cNvPr id="14" name="Connector 13"/>
+          <p:cNvPr id="24" name="Connector 23"/>
           <p:cNvCxnSpPr/>
           <p:nvPr/>
         </p:nvCxnSpPr>
@@ -3682,7 +4122,7 @@
       </p:cxnSp>
       <p:sp>
         <p:nvSpPr>
-          <p:cNvPr id="15" name="Oval 14"/>
+          <p:cNvPr id="25" name="Oval 24"/>
           <p:cNvSpPr/>
           <p:nvPr/>
         </p:nvSpPr>
@@ -3725,7 +4165,7 @@
       </p:sp>
       <p:sp>
         <p:nvSpPr>
-          <p:cNvPr id="16" name="TextBox 15"/>
+          <p:cNvPr id="26" name="TextBox 25"/>
           <p:cNvSpPr txBox="1"/>
           <p:nvPr/>
         </p:nvSpPr>
@@ -3771,7 +4211,7 @@
       </p:sp>
       <p:cxnSp>
         <p:nvCxnSpPr>
-          <p:cNvPr id="17" name="Connector 16"/>
+          <p:cNvPr id="27" name="Connector 26"/>
           <p:cNvCxnSpPr/>
           <p:nvPr/>
         </p:nvCxnSpPr>
@@ -3806,7 +4246,7 @@
       </p:cxnSp>
       <p:sp>
         <p:nvSpPr>
-          <p:cNvPr id="18" name="Oval 17"/>
+          <p:cNvPr id="28" name="Oval 27"/>
           <p:cNvSpPr/>
           <p:nvPr/>
         </p:nvSpPr>
@@ -3849,7 +4289,7 @@
       </p:sp>
       <p:sp>
         <p:nvSpPr>
-          <p:cNvPr id="19" name="TextBox 18"/>
+          <p:cNvPr id="29" name="TextBox 28"/>
           <p:cNvSpPr txBox="1"/>
           <p:nvPr/>
         </p:nvSpPr>
@@ -3895,7 +4335,7 @@
       </p:sp>
       <p:cxnSp>
         <p:nvCxnSpPr>
-          <p:cNvPr id="20" name="Connector 19"/>
+          <p:cNvPr id="30" name="Connector 29"/>
           <p:cNvCxnSpPr/>
           <p:nvPr/>
         </p:nvCxnSpPr>
@@ -3930,7 +4370,7 @@
       </p:cxnSp>
       <p:sp>
         <p:nvSpPr>
-          <p:cNvPr id="21" name="Oval 20"/>
+          <p:cNvPr id="31" name="Oval 30"/>
           <p:cNvSpPr/>
           <p:nvPr/>
         </p:nvSpPr>
@@ -3973,7 +4413,7 @@
       </p:sp>
       <p:sp>
         <p:nvSpPr>
-          <p:cNvPr id="22" name="TextBox 21"/>
+          <p:cNvPr id="32" name="TextBox 31"/>
           <p:cNvSpPr txBox="1"/>
           <p:nvPr/>
         </p:nvSpPr>
@@ -4019,7 +4459,7 @@
       </p:sp>
       <p:cxnSp>
         <p:nvCxnSpPr>
-          <p:cNvPr id="23" name="Connector 22"/>
+          <p:cNvPr id="33" name="Connector 32"/>
           <p:cNvCxnSpPr/>
           <p:nvPr/>
         </p:nvCxnSpPr>
@@ -4054,7 +4494,7 @@
       </p:cxnSp>
       <p:sp>
         <p:nvSpPr>
-          <p:cNvPr id="24" name="Oval 23"/>
+          <p:cNvPr id="34" name="Oval 33"/>
           <p:cNvSpPr/>
           <p:nvPr/>
         </p:nvSpPr>
@@ -4097,7 +4537,7 @@
       </p:sp>
       <p:sp>
         <p:nvSpPr>
-          <p:cNvPr id="25" name="TextBox 24"/>
+          <p:cNvPr id="35" name="TextBox 34"/>
           <p:cNvSpPr txBox="1"/>
           <p:nvPr/>
         </p:nvSpPr>
@@ -4143,14 +4583,14 @@
       </p:sp>
       <p:sp>
         <p:nvSpPr>
-          <p:cNvPr id="26" name="TextBox 25"/>
-          <p:cNvSpPr txBox="1"/>
-          <p:nvPr/>
-        </p:nvSpPr>
-        <p:spPr>
-          <a:xfrm>
-            <a:off x="6812280" y="6236208"/>
-            <a:ext cx="4343400" cy="420624"/>
+          <p:cNvPr id="36" name="TextBox 35"/>
+          <p:cNvSpPr txBox="1"/>
+          <p:nvPr/>
+        </p:nvSpPr>
+        <p:spPr>
+          <a:xfrm>
+            <a:off x="6812280" y="6382512"/>
+            <a:ext cx="4480560" cy="274320"/>
           </a:xfrm>
           <a:prstGeom prst="rect">
             <a:avLst/>
@@ -4181,8 +4621,7 @@
                 </a:solidFill>
                 <a:latin typeface="Aptos"/>
               </a:rPr>
-              <a:t>Several hypotheses.
-One reversible next step.</a:t>
+              <a:t>Several hypotheses. One reversible next step.</a:t>
             </a:r>
           </a:p>
         </p:txBody>
@@ -9918,7 +10357,7 @@
         </p:nvPicPr>
         <p:blipFill>
           <a:blip r:embed="rId4"/>
-          <a:srcRect l="11145" r="11145"/>
+          <a:srcRect b="10967"/>
           <a:stretch>
             <a:fillRect/>
           </a:stretch>
@@ -10123,7 +10562,7 @@
         </p:nvPicPr>
         <p:blipFill>
           <a:blip r:embed="rId5"/>
-          <a:srcRect b="29182"/>
+          <a:srcRect b="54470"/>
           <a:stretch>
             <a:fillRect/>
           </a:stretch>
@@ -10328,7 +10767,7 @@
         </p:nvPicPr>
         <p:blipFill>
           <a:blip r:embed="rId6"/>
-          <a:srcRect b="36198"/>
+          <a:srcRect b="44819"/>
           <a:stretch>
             <a:fillRect/>
           </a:stretch>
@@ -10667,7 +11106,7 @@
         <p:spPr>
           <a:xfrm>
             <a:off x="4014216" y="5623560"/>
-            <a:ext cx="2148840" cy="292608"/>
+            <a:ext cx="1965960" cy="292608"/>
           </a:xfrm>
           <a:prstGeom prst="roundRect">
             <a:avLst/>
@@ -10712,7 +11151,7 @@
         <p:spPr>
           <a:xfrm>
             <a:off x="4059936" y="5637276"/>
-            <a:ext cx="2057400" cy="256032"/>
+            <a:ext cx="1874519" cy="256032"/>
           </a:xfrm>
           <a:prstGeom prst="rect">
             <a:avLst/>
@@ -10743,7 +11182,7 @@
                 </a:solidFill>
                 <a:latin typeface="Aptos"/>
               </a:rPr>
-              <a:t>6 ILLUSTRATIVE ROUTES</a:t>
+              <a:t>23,257 PROGRAMMES</a:t>
             </a:r>
           </a:p>
         </p:txBody>
@@ -10756,7 +11195,7 @@
         </p:nvSpPr>
         <p:spPr>
           <a:xfrm>
-            <a:off x="6327648" y="5623560"/>
+            <a:off x="6144768" y="5623560"/>
             <a:ext cx="1508760" cy="292608"/>
           </a:xfrm>
           <a:prstGeom prst="roundRect">
@@ -10801,7 +11240,7 @@
         </p:nvSpPr>
         <p:spPr>
           <a:xfrm>
-            <a:off x="6373368" y="5637276"/>
+            <a:off x="6190488" y="5637276"/>
             <a:ext cx="1417319" cy="256032"/>
           </a:xfrm>
           <a:prstGeom prst="rect">
@@ -10846,8 +11285,8 @@
         </p:nvSpPr>
         <p:spPr>
           <a:xfrm>
-            <a:off x="8001000" y="5623560"/>
-            <a:ext cx="1143000" cy="292608"/>
+            <a:off x="7818120" y="5623560"/>
+            <a:ext cx="1051560" cy="292608"/>
           </a:xfrm>
           <a:prstGeom prst="roundRect">
             <a:avLst/>
@@ -10891,8 +11330,8 @@
         </p:nvSpPr>
         <p:spPr>
           <a:xfrm>
-            <a:off x="8046720" y="5637276"/>
-            <a:ext cx="1051560" cy="256032"/>
+            <a:off x="7863840" y="5637276"/>
+            <a:ext cx="960119" cy="256032"/>
           </a:xfrm>
           <a:prstGeom prst="rect">
             <a:avLst/>
@@ -10923,7 +11362,7 @@
                 </a:solidFill>
                 <a:latin typeface="Aptos"/>
               </a:rPr>
-              <a:t>234 TESTS</a:t>
+              <a:t>559 TESTS</a:t>
             </a:r>
           </a:p>
         </p:txBody>
@@ -10936,8 +11375,8 @@
         </p:nvSpPr>
         <p:spPr>
           <a:xfrm>
-            <a:off x="9308592" y="5623560"/>
-            <a:ext cx="960120" cy="292608"/>
+            <a:off x="9034272" y="5623560"/>
+            <a:ext cx="1783080" cy="292608"/>
           </a:xfrm>
           <a:prstGeom prst="roundRect">
             <a:avLst/>
@@ -10981,8 +11420,8 @@
         </p:nvSpPr>
         <p:spPr>
           <a:xfrm>
-            <a:off x="9354312" y="5637276"/>
-            <a:ext cx="868680" cy="256032"/>
+            <a:off x="9079992" y="5637276"/>
+            <a:ext cx="1691639" cy="256032"/>
           </a:xfrm>
           <a:prstGeom prst="rect">
             <a:avLst/>
@@ -11013,7 +11452,7 @@
                 </a:solidFill>
                 <a:latin typeface="Aptos"/>
               </a:rPr>
-              <a:t>20 E2E</a:t>
+              <a:t>993 INSTITUTIONS</a:t>
             </a:r>
           </a:p>
         </p:txBody>
@@ -11058,7 +11497,7 @@
                 </a:solidFill>
                 <a:latin typeface="Aptos"/>
               </a:rPr>
-              <a:t>Route constraints and mission rubrics remain illustrative and unvalidated.</a:t>
+              <a:t>Programmes and distances come from government registers. The interest instrument itself is still unvalidated.</a:t>
             </a:r>
           </a:p>
         </p:txBody>
@@ -11103,7 +11542,7 @@
                 </a:solidFill>
                 <a:latin typeface="Aptos"/>
               </a:rPr>
-              <a:t>Verification rerun 30 Jul 2026: npm run verify + 20 Playwright journeys passed</a:t>
+              <a:t>Screenshots captured 12 Aug 2026 from the production build · 559 unit tests, lint and build passing</a:t>
             </a:r>
           </a:p>
         </p:txBody>

--- a/Presentation/FutureMe_Project_Presentation.pptx
+++ b/Presentation/FutureMe_Project_Presentation.pptx
@@ -2,27 +2,27 @@
 <file path=ppt/presentation.xml><?xml version="1.0" encoding="utf-8"?>
 <p:presentation xmlns:p="http://schemas.openxmlformats.org/presentationml/2006/main">
   <p:sldMasterIdLst>
-    <p:sldMasterId xmlns:r="http://schemas.openxmlformats.org/officeDocument/2006/relationships" id="2147483648" r:id="R2beda2e2d67540e6"/>
+    <p:sldMasterId xmlns:r="http://schemas.openxmlformats.org/officeDocument/2006/relationships" id="2147483648" r:id="R165cfdd6ed8745cd"/>
   </p:sldMasterIdLst>
   <p:notesMasterIdLst>
-    <p:notesMasterId xmlns:r="http://schemas.openxmlformats.org/officeDocument/2006/relationships" r:id="R97b91ab850f54e9c"/>
+    <p:notesMasterId xmlns:r="http://schemas.openxmlformats.org/officeDocument/2006/relationships" r:id="R65836f45d7164461"/>
   </p:notesMasterIdLst>
   <p:sldIdLst>
-    <p:sldId xmlns:r="http://schemas.openxmlformats.org/officeDocument/2006/relationships" id="256" r:id="Red065a5b95ea45b9"/>
-    <p:sldId xmlns:r="http://schemas.openxmlformats.org/officeDocument/2006/relationships" id="257" r:id="R63c67e71e44741bf"/>
-    <p:sldId xmlns:r="http://schemas.openxmlformats.org/officeDocument/2006/relationships" id="258" r:id="Rab6097b44e604512"/>
-    <p:sldId xmlns:r="http://schemas.openxmlformats.org/officeDocument/2006/relationships" id="259" r:id="R8f998eeb127b40d8"/>
-    <p:sldId xmlns:r="http://schemas.openxmlformats.org/officeDocument/2006/relationships" id="260" r:id="R49b2a7dfb7a646c2"/>
-    <p:sldId xmlns:r="http://schemas.openxmlformats.org/officeDocument/2006/relationships" id="261" r:id="R24f1eae5cd034441"/>
-    <p:sldId xmlns:r="http://schemas.openxmlformats.org/officeDocument/2006/relationships" id="262" r:id="Re9745b70a6464470"/>
-    <p:sldId xmlns:r="http://schemas.openxmlformats.org/officeDocument/2006/relationships" id="263" r:id="Rdf3287bd36984e60"/>
-    <p:sldId xmlns:r="http://schemas.openxmlformats.org/officeDocument/2006/relationships" id="264" r:id="R90e689b1fca2431f"/>
-    <p:sldId xmlns:r="http://schemas.openxmlformats.org/officeDocument/2006/relationships" id="265" r:id="R31faee0125894f7e"/>
-    <p:sldId xmlns:r="http://schemas.openxmlformats.org/officeDocument/2006/relationships" id="266" r:id="Rf9a8023a2f4f4dfd"/>
-    <p:sldId xmlns:r="http://schemas.openxmlformats.org/officeDocument/2006/relationships" id="267" r:id="R034c5a52de9845ff"/>
-    <p:sldId xmlns:r="http://schemas.openxmlformats.org/officeDocument/2006/relationships" id="268" r:id="Rbeecd9691de74aa5"/>
-    <p:sldId xmlns:r="http://schemas.openxmlformats.org/officeDocument/2006/relationships" id="269" r:id="Rfbe15e4c6e9d4ece"/>
-    <p:sldId xmlns:r="http://schemas.openxmlformats.org/officeDocument/2006/relationships" id="270" r:id="R1271a98057424998"/>
+    <p:sldId xmlns:r="http://schemas.openxmlformats.org/officeDocument/2006/relationships" id="256" r:id="R5d4d5814f7154119"/>
+    <p:sldId xmlns:r="http://schemas.openxmlformats.org/officeDocument/2006/relationships" id="257" r:id="R62187de224854672"/>
+    <p:sldId xmlns:r="http://schemas.openxmlformats.org/officeDocument/2006/relationships" id="258" r:id="Ra1711321199b42f6"/>
+    <p:sldId xmlns:r="http://schemas.openxmlformats.org/officeDocument/2006/relationships" id="259" r:id="Rf02dbf282d934e60"/>
+    <p:sldId xmlns:r="http://schemas.openxmlformats.org/officeDocument/2006/relationships" id="260" r:id="R2014d6b1cc044886"/>
+    <p:sldId xmlns:r="http://schemas.openxmlformats.org/officeDocument/2006/relationships" id="261" r:id="Ra5537d45ad5e4413"/>
+    <p:sldId xmlns:r="http://schemas.openxmlformats.org/officeDocument/2006/relationships" id="262" r:id="R603ff563b02b45fe"/>
+    <p:sldId xmlns:r="http://schemas.openxmlformats.org/officeDocument/2006/relationships" id="263" r:id="R0b16055e5ed840c3"/>
+    <p:sldId xmlns:r="http://schemas.openxmlformats.org/officeDocument/2006/relationships" id="264" r:id="Rd4e7a94fd2ff49f3"/>
+    <p:sldId xmlns:r="http://schemas.openxmlformats.org/officeDocument/2006/relationships" id="265" r:id="Ra4dd250ff6a94df6"/>
+    <p:sldId xmlns:r="http://schemas.openxmlformats.org/officeDocument/2006/relationships" id="266" r:id="Rc0aa83c24aac47bd"/>
+    <p:sldId xmlns:r="http://schemas.openxmlformats.org/officeDocument/2006/relationships" id="267" r:id="R0b29700508a54860"/>
+    <p:sldId xmlns:r="http://schemas.openxmlformats.org/officeDocument/2006/relationships" id="268" r:id="Rd3840cd35c8744d0"/>
+    <p:sldId xmlns:r="http://schemas.openxmlformats.org/officeDocument/2006/relationships" id="269" r:id="R611033bfb0ff4e0e"/>
+    <p:sldId xmlns:r="http://schemas.openxmlformats.org/officeDocument/2006/relationships" id="270" r:id="R41597c89de1147bb"/>
   </p:sldIdLst>
   <p:sldSz cx="12191695" cy="6858000"/>
   <p:notesSz cx="6858000" cy="9144000"/>
@@ -599,11 +599,6 @@
           </a:p>
           <a:p xmlns:a="http://schemas.openxmlformats.org/drawingml/2006/main">
             <a:r>
-              <a:t>- 03_WebApp/data/release.json — component versions and implementation status</a:t>
-            </a:r>
-          </a:p>
-          <a:p xmlns:a="http://schemas.openxmlformats.org/drawingml/2006/main">
-            <a:r>
               <a:t>- 03_WebApp/data/education-data-registry.json — held-out decision fields</a:t>
             </a:r>
           </a:p>
@@ -4871,17 +4866,17 @@
   </p:cSld>
   <p:clrMap bg1="lt1" tx1="dk1" bg2="lt2" tx2="dk2" accent1="accent1" accent2="accent2" accent3="accent3" accent4="accent4" accent5="accent5" accent6="accent6" hlink="hlink" folHlink="folHlink"/>
   <p:sldLayoutIdLst>
-    <p:sldLayoutId xmlns:r="http://schemas.openxmlformats.org/officeDocument/2006/relationships" id="2147483649" r:id="Rede2f437662f417d"/>
-    <p:sldLayoutId xmlns:r="http://schemas.openxmlformats.org/officeDocument/2006/relationships" id="2147483650" r:id="R496e7512c0274e03"/>
-    <p:sldLayoutId xmlns:r="http://schemas.openxmlformats.org/officeDocument/2006/relationships" id="2147483651" r:id="Rf855883def634e2c"/>
-    <p:sldLayoutId xmlns:r="http://schemas.openxmlformats.org/officeDocument/2006/relationships" id="2147483652" r:id="Re184e1d5b4a542b1"/>
-    <p:sldLayoutId xmlns:r="http://schemas.openxmlformats.org/officeDocument/2006/relationships" id="2147483653" r:id="R48fdf37dfe8943c8"/>
-    <p:sldLayoutId xmlns:r="http://schemas.openxmlformats.org/officeDocument/2006/relationships" id="2147483654" r:id="R48875c995d3c4d27"/>
-    <p:sldLayoutId xmlns:r="http://schemas.openxmlformats.org/officeDocument/2006/relationships" id="2147483655" r:id="R5f606265670c4c45"/>
-    <p:sldLayoutId xmlns:r="http://schemas.openxmlformats.org/officeDocument/2006/relationships" id="2147483656" r:id="Rd93ba9a09b6145eb"/>
-    <p:sldLayoutId xmlns:r="http://schemas.openxmlformats.org/officeDocument/2006/relationships" id="2147483657" r:id="Rb3f5b99376584f75"/>
-    <p:sldLayoutId xmlns:r="http://schemas.openxmlformats.org/officeDocument/2006/relationships" id="2147483658" r:id="R8a2ed28c6e7647d6"/>
-    <p:sldLayoutId xmlns:r="http://schemas.openxmlformats.org/officeDocument/2006/relationships" id="2147483659" r:id="R44ea5b50e9564afb"/>
+    <p:sldLayoutId xmlns:r="http://schemas.openxmlformats.org/officeDocument/2006/relationships" id="2147483649" r:id="R3a1752ec44d2498b"/>
+    <p:sldLayoutId xmlns:r="http://schemas.openxmlformats.org/officeDocument/2006/relationships" id="2147483650" r:id="R429f34ba017f4f12"/>
+    <p:sldLayoutId xmlns:r="http://schemas.openxmlformats.org/officeDocument/2006/relationships" id="2147483651" r:id="Rfd10f4e241154a56"/>
+    <p:sldLayoutId xmlns:r="http://schemas.openxmlformats.org/officeDocument/2006/relationships" id="2147483652" r:id="Ref2a31aa5e1d4fe0"/>
+    <p:sldLayoutId xmlns:r="http://schemas.openxmlformats.org/officeDocument/2006/relationships" id="2147483653" r:id="Re5606ada741e4a8a"/>
+    <p:sldLayoutId xmlns:r="http://schemas.openxmlformats.org/officeDocument/2006/relationships" id="2147483654" r:id="R5f7ab2a6d1c94aac"/>
+    <p:sldLayoutId xmlns:r="http://schemas.openxmlformats.org/officeDocument/2006/relationships" id="2147483655" r:id="Rd238413949614d4d"/>
+    <p:sldLayoutId xmlns:r="http://schemas.openxmlformats.org/officeDocument/2006/relationships" id="2147483656" r:id="R39a605d748684930"/>
+    <p:sldLayoutId xmlns:r="http://schemas.openxmlformats.org/officeDocument/2006/relationships" id="2147483657" r:id="R84555e7866d74d76"/>
+    <p:sldLayoutId xmlns:r="http://schemas.openxmlformats.org/officeDocument/2006/relationships" id="2147483658" r:id="R8398a5c37c1c4452"/>
+    <p:sldLayoutId xmlns:r="http://schemas.openxmlformats.org/officeDocument/2006/relationships" id="2147483659" r:id="R5fb7c26c43f947d5"/>
   </p:sldLayoutIdLst>
   <p:txStyles>
     <p:titleStyle>
@@ -5431,7 +5426,7 @@
           <p:nvPr/>
         </p:nvPicPr>
         <p:blipFill>
-          <a:blip xmlns:r="http://schemas.openxmlformats.org/officeDocument/2006/relationships" xmlns:a="http://schemas.openxmlformats.org/drawingml/2006/main" r:embed="R2159a86325e24e4e"/>
+          <a:blip xmlns:r="http://schemas.openxmlformats.org/officeDocument/2006/relationships" xmlns:a="http://schemas.openxmlformats.org/drawingml/2006/main" r:embed="R3e94a03e721a4965"/>
           <a:stretch xmlns:a="http://schemas.openxmlformats.org/drawingml/2006/main">
             <a:fillRect l="0" t="0" r="0" b="0"/>
           </a:stretch>
@@ -5497,7 +5492,7 @@
                 <a:ea typeface="Aptos"/>
                 <a:cs typeface="Aptos"/>
               </a:rPr>
-              <a:t>FUTUREME 0.2.0 · UPDATED PROJECT CASE STUDY</a:t>
+              <a:t>FUTUREME · UPDATED PROJECT CASE STUDY</a:t>
             </a:r>
           </a:p>
         </p:txBody>
@@ -6789,7 +6784,7 @@
           <p:nvPr/>
         </p:nvPicPr>
         <p:blipFill>
-          <a:blip xmlns:r="http://schemas.openxmlformats.org/officeDocument/2006/relationships" xmlns:a="http://schemas.openxmlformats.org/drawingml/2006/main" r:embed="Rc5cd893d6f2b4fbf"/>
+          <a:blip xmlns:r="http://schemas.openxmlformats.org/officeDocument/2006/relationships" xmlns:a="http://schemas.openxmlformats.org/drawingml/2006/main" r:embed="Rbd45abd65d1a444d"/>
           <a:stretch xmlns:a="http://schemas.openxmlformats.org/drawingml/2006/main">
             <a:fillRect l="0" t="0" r="0" b="0"/>
           </a:stretch>
@@ -7037,7 +7032,7 @@
           <p:nvPr/>
         </p:nvPicPr>
         <p:blipFill>
-          <a:blip xmlns:r="http://schemas.openxmlformats.org/officeDocument/2006/relationships" xmlns:a="http://schemas.openxmlformats.org/drawingml/2006/main" r:embed="Rbdea6614efcd4dd1"/>
+          <a:blip xmlns:r="http://schemas.openxmlformats.org/officeDocument/2006/relationships" xmlns:a="http://schemas.openxmlformats.org/drawingml/2006/main" r:embed="Rbfd20313d6514018"/>
           <a:stretch xmlns:a="http://schemas.openxmlformats.org/drawingml/2006/main">
             <a:fillRect l="0" t="0" r="0" b="0"/>
           </a:stretch>
@@ -7103,7 +7098,7 @@
                 <a:ea typeface="Aptos"/>
                 <a:cs typeface="Aptos"/>
               </a:rPr>
-              <a:t>FutureMe AI · Release 0.2.0 · August 2026</a:t>
+              <a:t>FutureMe AI · August 2026</a:t>
             </a:r>
           </a:p>
         </p:txBody>
@@ -9208,7 +9203,7 @@
                 <a:ea typeface="Aptos"/>
                 <a:cs typeface="Aptos"/>
               </a:rPr>
-              <a:t>Sources: current code + release registry; Python backend and production RAG are not connected</a:t>
+              <a:t>Sources: current code + education-data registry; Python backend and production RAG are not connected</a:t>
             </a:r>
           </a:p>
         </p:txBody>
@@ -9244,7 +9239,7 @@
           <p:nvPr/>
         </p:nvPicPr>
         <p:blipFill>
-          <a:blip xmlns:r="http://schemas.openxmlformats.org/officeDocument/2006/relationships" xmlns:a="http://schemas.openxmlformats.org/drawingml/2006/main" r:embed="R97ae35dacb1c4622"/>
+          <a:blip xmlns:r="http://schemas.openxmlformats.org/officeDocument/2006/relationships" xmlns:a="http://schemas.openxmlformats.org/drawingml/2006/main" r:embed="Rb3b93fcceb8a41e7"/>
           <a:stretch xmlns:a="http://schemas.openxmlformats.org/drawingml/2006/main">
             <a:fillRect l="0" t="0" r="0" b="0"/>
           </a:stretch>
@@ -9492,7 +9487,7 @@
           <p:nvPr/>
         </p:nvPicPr>
         <p:blipFill>
-          <a:blip xmlns:r="http://schemas.openxmlformats.org/officeDocument/2006/relationships" xmlns:a="http://schemas.openxmlformats.org/drawingml/2006/main" r:embed="R756b799059d9480d"/>
+          <a:blip xmlns:r="http://schemas.openxmlformats.org/officeDocument/2006/relationships" xmlns:a="http://schemas.openxmlformats.org/drawingml/2006/main" r:embed="Rbba585aec77b45ed"/>
           <a:stretch xmlns:a="http://schemas.openxmlformats.org/drawingml/2006/main">
             <a:fillRect l="0" t="0" r="0" b="0"/>
           </a:stretch>
@@ -9558,7 +9553,7 @@
                 <a:ea typeface="Aptos"/>
                 <a:cs typeface="Aptos"/>
               </a:rPr>
-              <a:t>FutureMe AI · Release 0.2.0 · August 2026</a:t>
+              <a:t>FutureMe AI · August 2026</a:t>
             </a:r>
           </a:p>
         </p:txBody>
@@ -11951,7 +11946,7 @@
           <p:nvPr/>
         </p:nvPicPr>
         <p:blipFill>
-          <a:blip xmlns:r="http://schemas.openxmlformats.org/officeDocument/2006/relationships" xmlns:a="http://schemas.openxmlformats.org/drawingml/2006/main" r:embed="R2963257439994697"/>
+          <a:blip xmlns:r="http://schemas.openxmlformats.org/officeDocument/2006/relationships" xmlns:a="http://schemas.openxmlformats.org/drawingml/2006/main" r:embed="Rf007178f49754c71"/>
           <a:stretch xmlns:a="http://schemas.openxmlformats.org/drawingml/2006/main">
             <a:fillRect l="0" t="0" r="0" b="0"/>
           </a:stretch>
@@ -12199,7 +12194,7 @@
           <p:nvPr/>
         </p:nvPicPr>
         <p:blipFill>
-          <a:blip xmlns:r="http://schemas.openxmlformats.org/officeDocument/2006/relationships" xmlns:a="http://schemas.openxmlformats.org/drawingml/2006/main" r:embed="Rbba13e470d9d4d41"/>
+          <a:blip xmlns:r="http://schemas.openxmlformats.org/officeDocument/2006/relationships" xmlns:a="http://schemas.openxmlformats.org/drawingml/2006/main" r:embed="R5c8b136a02f842ee"/>
           <a:stretch xmlns:a="http://schemas.openxmlformats.org/drawingml/2006/main">
             <a:fillRect l="0" t="0" r="0" b="0"/>
           </a:stretch>
@@ -12265,7 +12260,7 @@
                 <a:ea typeface="Aptos"/>
                 <a:cs typeface="Aptos"/>
               </a:rPr>
-              <a:t>FutureMe AI · Release 0.2.0 · August 2026</a:t>
+              <a:t>FutureMe AI · August 2026</a:t>
             </a:r>
           </a:p>
         </p:txBody>
@@ -12334,7 +12329,7 @@
           <p:nvPr/>
         </p:nvPicPr>
         <p:blipFill>
-          <a:blip xmlns:r="http://schemas.openxmlformats.org/officeDocument/2006/relationships" xmlns:a="http://schemas.openxmlformats.org/drawingml/2006/main" r:embed="R898f3aefeb3d459f"/>
+          <a:blip xmlns:r="http://schemas.openxmlformats.org/officeDocument/2006/relationships" xmlns:a="http://schemas.openxmlformats.org/drawingml/2006/main" r:embed="R778ebd56550441a8"/>
           <a:srcRect xmlns:a="http://schemas.openxmlformats.org/drawingml/2006/main" l="11145" t="0" r="11145" b="0"/>
           <a:stretch xmlns:a="http://schemas.openxmlformats.org/drawingml/2006/main">
             <a:fillRect l="0" t="0" r="0" b="0"/>
@@ -12581,7 +12576,7 @@
           <p:nvPr/>
         </p:nvPicPr>
         <p:blipFill>
-          <a:blip xmlns:r="http://schemas.openxmlformats.org/officeDocument/2006/relationships" xmlns:a="http://schemas.openxmlformats.org/drawingml/2006/main" r:embed="R64ec4bc424614a1e"/>
+          <a:blip xmlns:r="http://schemas.openxmlformats.org/officeDocument/2006/relationships" xmlns:a="http://schemas.openxmlformats.org/drawingml/2006/main" r:embed="R4c3c63ce8ec242b2"/>
           <a:srcRect xmlns:a="http://schemas.openxmlformats.org/drawingml/2006/main" l="0" t="0" r="0" b="29182"/>
           <a:stretch xmlns:a="http://schemas.openxmlformats.org/drawingml/2006/main">
             <a:fillRect l="0" t="0" r="0" b="0"/>
@@ -12828,7 +12823,7 @@
           <p:nvPr/>
         </p:nvPicPr>
         <p:blipFill>
-          <a:blip xmlns:r="http://schemas.openxmlformats.org/officeDocument/2006/relationships" xmlns:a="http://schemas.openxmlformats.org/drawingml/2006/main" r:embed="R3a4a71f7de824c43"/>
+          <a:blip xmlns:r="http://schemas.openxmlformats.org/officeDocument/2006/relationships" xmlns:a="http://schemas.openxmlformats.org/drawingml/2006/main" r:embed="R174aee8cd8e8460d"/>
           <a:srcRect xmlns:a="http://schemas.openxmlformats.org/drawingml/2006/main" l="0" t="0" r="0" b="36198"/>
           <a:stretch xmlns:a="http://schemas.openxmlformats.org/drawingml/2006/main">
             <a:fillRect l="0" t="0" r="0" b="0"/>
@@ -13820,7 +13815,7 @@
           <p:nvPr/>
         </p:nvPicPr>
         <p:blipFill>
-          <a:blip xmlns:r="http://schemas.openxmlformats.org/officeDocument/2006/relationships" xmlns:a="http://schemas.openxmlformats.org/drawingml/2006/main" r:embed="R5e25f872a97d4964"/>
+          <a:blip xmlns:r="http://schemas.openxmlformats.org/officeDocument/2006/relationships" xmlns:a="http://schemas.openxmlformats.org/drawingml/2006/main" r:embed="R0e4222e8bf75402e"/>
           <a:stretch xmlns:a="http://schemas.openxmlformats.org/drawingml/2006/main">
             <a:fillRect l="0" t="0" r="0" b="0"/>
           </a:stretch>
@@ -14068,7 +14063,7 @@
           <p:nvPr/>
         </p:nvPicPr>
         <p:blipFill>
-          <a:blip xmlns:r="http://schemas.openxmlformats.org/officeDocument/2006/relationships" xmlns:a="http://schemas.openxmlformats.org/drawingml/2006/main" r:embed="R3a537c7caf5945ca"/>
+          <a:blip xmlns:r="http://schemas.openxmlformats.org/officeDocument/2006/relationships" xmlns:a="http://schemas.openxmlformats.org/drawingml/2006/main" r:embed="R824ac60f794e4df3"/>
           <a:stretch xmlns:a="http://schemas.openxmlformats.org/drawingml/2006/main">
             <a:fillRect l="0" t="0" r="0" b="0"/>
           </a:stretch>
@@ -14134,7 +14129,7 @@
                 <a:ea typeface="Aptos"/>
                 <a:cs typeface="Aptos"/>
               </a:rPr>
-              <a:t>FutureMe AI · Release 0.2.0 · August 2026</a:t>
+              <a:t>FutureMe AI · August 2026</a:t>
             </a:r>
           </a:p>
         </p:txBody>
@@ -17102,7 +17097,7 @@
           <p:nvPr/>
         </p:nvPicPr>
         <p:blipFill>
-          <a:blip xmlns:r="http://schemas.openxmlformats.org/officeDocument/2006/relationships" xmlns:a="http://schemas.openxmlformats.org/drawingml/2006/main" r:embed="R456d58d9eeb942cf"/>
+          <a:blip xmlns:r="http://schemas.openxmlformats.org/officeDocument/2006/relationships" xmlns:a="http://schemas.openxmlformats.org/drawingml/2006/main" r:embed="Re4c55808318e439b"/>
           <a:stretch xmlns:a="http://schemas.openxmlformats.org/drawingml/2006/main">
             <a:fillRect l="0" t="0" r="0" b="0"/>
           </a:stretch>
@@ -17350,7 +17345,7 @@
           <p:nvPr/>
         </p:nvPicPr>
         <p:blipFill>
-          <a:blip xmlns:r="http://schemas.openxmlformats.org/officeDocument/2006/relationships" xmlns:a="http://schemas.openxmlformats.org/drawingml/2006/main" r:embed="R0336f6acbfdb4e74"/>
+          <a:blip xmlns:r="http://schemas.openxmlformats.org/officeDocument/2006/relationships" xmlns:a="http://schemas.openxmlformats.org/drawingml/2006/main" r:embed="R1df9b0bc342c4823"/>
           <a:stretch xmlns:a="http://schemas.openxmlformats.org/drawingml/2006/main">
             <a:fillRect l="0" t="0" r="0" b="0"/>
           </a:stretch>
@@ -17416,7 +17411,7 @@
                 <a:ea typeface="Aptos"/>
                 <a:cs typeface="Aptos"/>
               </a:rPr>
-              <a:t>FutureMe AI · Release 0.2.0 · August 2026</a:t>
+              <a:t>FutureMe AI · August 2026</a:t>
             </a:r>
           </a:p>
         </p:txBody>
@@ -19992,7 +19987,7 @@
           <p:nvPr/>
         </p:nvPicPr>
         <p:blipFill>
-          <a:blip xmlns:r="http://schemas.openxmlformats.org/officeDocument/2006/relationships" xmlns:a="http://schemas.openxmlformats.org/drawingml/2006/main" r:embed="Rde26da6585144561"/>
+          <a:blip xmlns:r="http://schemas.openxmlformats.org/officeDocument/2006/relationships" xmlns:a="http://schemas.openxmlformats.org/drawingml/2006/main" r:embed="R11d5ca33dc434830"/>
           <a:stretch xmlns:a="http://schemas.openxmlformats.org/drawingml/2006/main">
             <a:fillRect l="0" t="0" r="0" b="0"/>
           </a:stretch>
@@ -20240,7 +20235,7 @@
           <p:nvPr/>
         </p:nvPicPr>
         <p:blipFill>
-          <a:blip xmlns:r="http://schemas.openxmlformats.org/officeDocument/2006/relationships" xmlns:a="http://schemas.openxmlformats.org/drawingml/2006/main" r:embed="Ra085d482f0274594"/>
+          <a:blip xmlns:r="http://schemas.openxmlformats.org/officeDocument/2006/relationships" xmlns:a="http://schemas.openxmlformats.org/drawingml/2006/main" r:embed="R53f420fd02b84aea"/>
           <a:stretch xmlns:a="http://schemas.openxmlformats.org/drawingml/2006/main">
             <a:fillRect l="0" t="0" r="0" b="0"/>
           </a:stretch>
@@ -20306,7 +20301,7 @@
                 <a:ea typeface="Aptos"/>
                 <a:cs typeface="Aptos"/>
               </a:rPr>
-              <a:t>FutureMe AI · Release 0.2.0 · August 2026</a:t>
+              <a:t>FutureMe AI · August 2026</a:t>
             </a:r>
           </a:p>
         </p:txBody>
@@ -22004,7 +21999,7 @@
                 <a:ea typeface="Aptos"/>
                 <a:cs typeface="Aptos"/>
               </a:rPr>
-              <a:t>Repository evidence: release registry · source audit · data coverage · validation plan</a:t>
+              <a:t>Repository evidence: education-data registry · source audit · data coverage · validation plan</a:t>
             </a:r>
           </a:p>
         </p:txBody>
@@ -22040,7 +22035,7 @@
           <p:nvPr/>
         </p:nvPicPr>
         <p:blipFill>
-          <a:blip xmlns:r="http://schemas.openxmlformats.org/officeDocument/2006/relationships" xmlns:a="http://schemas.openxmlformats.org/drawingml/2006/main" r:embed="Rfe96adb62628406a"/>
+          <a:blip xmlns:r="http://schemas.openxmlformats.org/officeDocument/2006/relationships" xmlns:a="http://schemas.openxmlformats.org/drawingml/2006/main" r:embed="Rf20eb8080130403c"/>
           <a:stretch xmlns:a="http://schemas.openxmlformats.org/drawingml/2006/main">
             <a:fillRect l="0" t="0" r="0" b="0"/>
           </a:stretch>
@@ -22288,7 +22283,7 @@
           <p:nvPr/>
         </p:nvPicPr>
         <p:blipFill>
-          <a:blip xmlns:r="http://schemas.openxmlformats.org/officeDocument/2006/relationships" xmlns:a="http://schemas.openxmlformats.org/drawingml/2006/main" r:embed="R27a95bd3dcee4b1f"/>
+          <a:blip xmlns:r="http://schemas.openxmlformats.org/officeDocument/2006/relationships" xmlns:a="http://schemas.openxmlformats.org/drawingml/2006/main" r:embed="R4aa5744b40af4777"/>
           <a:stretch xmlns:a="http://schemas.openxmlformats.org/drawingml/2006/main">
             <a:fillRect l="0" t="0" r="0" b="0"/>
           </a:stretch>
@@ -22354,7 +22349,7 @@
                 <a:ea typeface="Aptos"/>
                 <a:cs typeface="Aptos"/>
               </a:rPr>
-              <a:t>FutureMe AI · Release 0.2.0 · August 2026</a:t>
+              <a:t>FutureMe AI · August 2026</a:t>
             </a:r>
           </a:p>
         </p:txBody>
@@ -24041,7 +24036,7 @@
           <p:nvPr/>
         </p:nvPicPr>
         <p:blipFill>
-          <a:blip xmlns:r="http://schemas.openxmlformats.org/officeDocument/2006/relationships" xmlns:a="http://schemas.openxmlformats.org/drawingml/2006/main" r:embed="R4d656fba090f42c8"/>
+          <a:blip xmlns:r="http://schemas.openxmlformats.org/officeDocument/2006/relationships" xmlns:a="http://schemas.openxmlformats.org/drawingml/2006/main" r:embed="Rfeccae614d184205"/>
           <a:stretch xmlns:a="http://schemas.openxmlformats.org/drawingml/2006/main">
             <a:fillRect l="0" t="0" r="0" b="0"/>
           </a:stretch>
@@ -24289,7 +24284,7 @@
           <p:nvPr/>
         </p:nvPicPr>
         <p:blipFill>
-          <a:blip xmlns:r="http://schemas.openxmlformats.org/officeDocument/2006/relationships" xmlns:a="http://schemas.openxmlformats.org/drawingml/2006/main" r:embed="R79f6135f67e6443e"/>
+          <a:blip xmlns:r="http://schemas.openxmlformats.org/officeDocument/2006/relationships" xmlns:a="http://schemas.openxmlformats.org/drawingml/2006/main" r:embed="R3ed6559832b24eb5"/>
           <a:stretch xmlns:a="http://schemas.openxmlformats.org/drawingml/2006/main">
             <a:fillRect l="0" t="0" r="0" b="0"/>
           </a:stretch>
@@ -24355,7 +24350,7 @@
                 <a:ea typeface="Aptos"/>
                 <a:cs typeface="Aptos"/>
               </a:rPr>
-              <a:t>FutureMe AI · Release 0.2.0 · August 2026</a:t>
+              <a:t>FutureMe AI · August 2026</a:t>
             </a:r>
           </a:p>
         </p:txBody>
@@ -25450,7 +25445,7 @@
           <p:nvPr/>
         </p:nvPicPr>
         <p:blipFill>
-          <a:blip xmlns:r="http://schemas.openxmlformats.org/officeDocument/2006/relationships" xmlns:a="http://schemas.openxmlformats.org/drawingml/2006/main" r:embed="Rab9eefa8f37f4fe3"/>
+          <a:blip xmlns:r="http://schemas.openxmlformats.org/officeDocument/2006/relationships" xmlns:a="http://schemas.openxmlformats.org/drawingml/2006/main" r:embed="R02bfde9516bf4495"/>
           <a:stretch xmlns:a="http://schemas.openxmlformats.org/drawingml/2006/main">
             <a:fillRect l="0" t="0" r="0" b="0"/>
           </a:stretch>
@@ -25698,7 +25693,7 @@
           <p:nvPr/>
         </p:nvPicPr>
         <p:blipFill>
-          <a:blip xmlns:r="http://schemas.openxmlformats.org/officeDocument/2006/relationships" xmlns:a="http://schemas.openxmlformats.org/drawingml/2006/main" r:embed="Ra44780993c5d4702"/>
+          <a:blip xmlns:r="http://schemas.openxmlformats.org/officeDocument/2006/relationships" xmlns:a="http://schemas.openxmlformats.org/drawingml/2006/main" r:embed="R3f53856623cf4abe"/>
           <a:stretch xmlns:a="http://schemas.openxmlformats.org/drawingml/2006/main">
             <a:fillRect l="0" t="0" r="0" b="0"/>
           </a:stretch>
@@ -25764,7 +25759,7 @@
                 <a:ea typeface="Aptos"/>
                 <a:cs typeface="Aptos"/>
               </a:rPr>
-              <a:t>FutureMe AI · Release 0.2.0 · August 2026</a:t>
+              <a:t>FutureMe AI · August 2026</a:t>
             </a:r>
           </a:p>
         </p:txBody>
@@ -27560,7 +27555,7 @@
                 <a:ea typeface="Aptos"/>
                 <a:cs typeface="Aptos"/>
               </a:rPr>
-              <a:t>Sources: education-data-registry v0.2.0 + MHESI/OVEC; checked 11 Aug 2026</a:t>
+              <a:t>Sources: education-data registry + MHESI/OVEC; checked 11 Aug 2026</a:t>
             </a:r>
           </a:p>
         </p:txBody>
@@ -27596,7 +27591,7 @@
           <p:nvPr/>
         </p:nvPicPr>
         <p:blipFill>
-          <a:blip xmlns:r="http://schemas.openxmlformats.org/officeDocument/2006/relationships" xmlns:a="http://schemas.openxmlformats.org/drawingml/2006/main" r:embed="Rc69f8ffdf5ef4780"/>
+          <a:blip xmlns:r="http://schemas.openxmlformats.org/officeDocument/2006/relationships" xmlns:a="http://schemas.openxmlformats.org/drawingml/2006/main" r:embed="R4ab2b85b88e14fcc"/>
           <a:stretch xmlns:a="http://schemas.openxmlformats.org/drawingml/2006/main">
             <a:fillRect l="0" t="0" r="0" b="0"/>
           </a:stretch>
@@ -27844,7 +27839,7 @@
           <p:nvPr/>
         </p:nvPicPr>
         <p:blipFill>
-          <a:blip xmlns:r="http://schemas.openxmlformats.org/officeDocument/2006/relationships" xmlns:a="http://schemas.openxmlformats.org/drawingml/2006/main" r:embed="R3d3455f4f1f74b61"/>
+          <a:blip xmlns:r="http://schemas.openxmlformats.org/officeDocument/2006/relationships" xmlns:a="http://schemas.openxmlformats.org/drawingml/2006/main" r:embed="Ra506c3dd1a8240ad"/>
           <a:stretch xmlns:a="http://schemas.openxmlformats.org/drawingml/2006/main">
             <a:fillRect l="0" t="0" r="0" b="0"/>
           </a:stretch>
@@ -27910,7 +27905,7 @@
                 <a:ea typeface="Aptos"/>
                 <a:cs typeface="Aptos"/>
               </a:rPr>
-              <a:t>FutureMe AI · Release 0.2.0 · August 2026</a:t>
+              <a:t>FutureMe AI · August 2026</a:t>
             </a:r>
           </a:p>
         </p:txBody>
@@ -29522,7 +29517,7 @@
           <p:nvPr/>
         </p:nvPicPr>
         <p:blipFill>
-          <a:blip xmlns:r="http://schemas.openxmlformats.org/officeDocument/2006/relationships" xmlns:a="http://schemas.openxmlformats.org/drawingml/2006/main" r:embed="R42f202a08a824946"/>
+          <a:blip xmlns:r="http://schemas.openxmlformats.org/officeDocument/2006/relationships" xmlns:a="http://schemas.openxmlformats.org/drawingml/2006/main" r:embed="R8faab83f2b524ff3"/>
           <a:stretch xmlns:a="http://schemas.openxmlformats.org/drawingml/2006/main">
             <a:fillRect l="0" t="0" r="0" b="0"/>
           </a:stretch>
@@ -29770,7 +29765,7 @@
           <p:nvPr/>
         </p:nvPicPr>
         <p:blipFill>
-          <a:blip xmlns:r="http://schemas.openxmlformats.org/officeDocument/2006/relationships" xmlns:a="http://schemas.openxmlformats.org/drawingml/2006/main" r:embed="Rfb3e2a5132a34f68"/>
+          <a:blip xmlns:r="http://schemas.openxmlformats.org/officeDocument/2006/relationships" xmlns:a="http://schemas.openxmlformats.org/drawingml/2006/main" r:embed="R5046bc238cd64d0a"/>
           <a:stretch xmlns:a="http://schemas.openxmlformats.org/drawingml/2006/main">
             <a:fillRect l="0" t="0" r="0" b="0"/>
           </a:stretch>
@@ -29836,7 +29831,7 @@
                 <a:ea typeface="Aptos"/>
                 <a:cs typeface="Aptos"/>
               </a:rPr>
-              <a:t>FutureMe AI · Release 0.2.0 · August 2026</a:t>
+              <a:t>FutureMe AI · August 2026</a:t>
             </a:r>
           </a:p>
         </p:txBody>
@@ -32089,7 +32084,7 @@
           <p:nvPr/>
         </p:nvPicPr>
         <p:blipFill>
-          <a:blip xmlns:r="http://schemas.openxmlformats.org/officeDocument/2006/relationships" xmlns:a="http://schemas.openxmlformats.org/drawingml/2006/main" r:embed="R8bf7cac975d74094"/>
+          <a:blip xmlns:r="http://schemas.openxmlformats.org/officeDocument/2006/relationships" xmlns:a="http://schemas.openxmlformats.org/drawingml/2006/main" r:embed="R24289b7863e24355"/>
           <a:stretch xmlns:a="http://schemas.openxmlformats.org/drawingml/2006/main">
             <a:fillRect l="0" t="0" r="0" b="0"/>
           </a:stretch>
@@ -32337,7 +32332,7 @@
           <p:nvPr/>
         </p:nvPicPr>
         <p:blipFill>
-          <a:blip xmlns:r="http://schemas.openxmlformats.org/officeDocument/2006/relationships" xmlns:a="http://schemas.openxmlformats.org/drawingml/2006/main" r:embed="R8607380789184abf"/>
+          <a:blip xmlns:r="http://schemas.openxmlformats.org/officeDocument/2006/relationships" xmlns:a="http://schemas.openxmlformats.org/drawingml/2006/main" r:embed="Rb784e054203d4bfb"/>
           <a:stretch xmlns:a="http://schemas.openxmlformats.org/drawingml/2006/main">
             <a:fillRect l="0" t="0" r="0" b="0"/>
           </a:stretch>
@@ -32403,7 +32398,7 @@
                 <a:ea typeface="Aptos"/>
                 <a:cs typeface="Aptos"/>
               </a:rPr>
-              <a:t>FutureMe AI · Release 0.2.0 · August 2026</a:t>
+              <a:t>FutureMe AI · August 2026</a:t>
             </a:r>
           </a:p>
         </p:txBody>
@@ -33941,7 +33936,7 @@
           <p:nvPr/>
         </p:nvPicPr>
         <p:blipFill>
-          <a:blip xmlns:r="http://schemas.openxmlformats.org/officeDocument/2006/relationships" xmlns:a="http://schemas.openxmlformats.org/drawingml/2006/main" r:embed="Rb6c3d7cfed114a1c"/>
+          <a:blip xmlns:r="http://schemas.openxmlformats.org/officeDocument/2006/relationships" xmlns:a="http://schemas.openxmlformats.org/drawingml/2006/main" r:embed="R80e861e327374885"/>
           <a:stretch xmlns:a="http://schemas.openxmlformats.org/drawingml/2006/main">
             <a:fillRect l="0" t="0" r="0" b="0"/>
           </a:stretch>
@@ -34189,7 +34184,7 @@
           <p:nvPr/>
         </p:nvPicPr>
         <p:blipFill>
-          <a:blip xmlns:r="http://schemas.openxmlformats.org/officeDocument/2006/relationships" xmlns:a="http://schemas.openxmlformats.org/drawingml/2006/main" r:embed="R31e44e94921944a6"/>
+          <a:blip xmlns:r="http://schemas.openxmlformats.org/officeDocument/2006/relationships" xmlns:a="http://schemas.openxmlformats.org/drawingml/2006/main" r:embed="R14c9927ab49448ce"/>
           <a:stretch xmlns:a="http://schemas.openxmlformats.org/drawingml/2006/main">
             <a:fillRect l="0" t="0" r="0" b="0"/>
           </a:stretch>
@@ -34255,7 +34250,7 @@
                 <a:ea typeface="Aptos"/>
                 <a:cs typeface="Aptos"/>
               </a:rPr>
-              <a:t>FutureMe AI · Release 0.2.0 · August 2026</a:t>
+              <a:t>FutureMe AI · August 2026</a:t>
             </a:r>
           </a:p>
         </p:txBody>
@@ -35872,7 +35867,7 @@
           <p:nvPr/>
         </p:nvPicPr>
         <p:blipFill>
-          <a:blip xmlns:r="http://schemas.openxmlformats.org/officeDocument/2006/relationships" xmlns:a="http://schemas.openxmlformats.org/drawingml/2006/main" r:embed="R16014cd9d93c4c9a"/>
+          <a:blip xmlns:r="http://schemas.openxmlformats.org/officeDocument/2006/relationships" xmlns:a="http://schemas.openxmlformats.org/drawingml/2006/main" r:embed="R830096a89e6b4c6b"/>
           <a:stretch xmlns:a="http://schemas.openxmlformats.org/drawingml/2006/main">
             <a:fillRect l="0" t="0" r="0" b="0"/>
           </a:stretch>
@@ -36120,7 +36115,7 @@
           <p:nvPr/>
         </p:nvPicPr>
         <p:blipFill>
-          <a:blip xmlns:r="http://schemas.openxmlformats.org/officeDocument/2006/relationships" xmlns:a="http://schemas.openxmlformats.org/drawingml/2006/main" r:embed="Rdb44bd1cffd94b89"/>
+          <a:blip xmlns:r="http://schemas.openxmlformats.org/officeDocument/2006/relationships" xmlns:a="http://schemas.openxmlformats.org/drawingml/2006/main" r:embed="R8b623cb5333346e5"/>
           <a:stretch xmlns:a="http://schemas.openxmlformats.org/drawingml/2006/main">
             <a:fillRect l="0" t="0" r="0" b="0"/>
           </a:stretch>
@@ -36186,7 +36181,7 @@
                 <a:ea typeface="Aptos"/>
                 <a:cs typeface="Aptos"/>
               </a:rPr>
-              <a:t>FutureMe AI · Release 0.2.0 · August 2026</a:t>
+              <a:t>FutureMe AI · August 2026</a:t>
             </a:r>
           </a:p>
         </p:txBody>
